--- a/downloads/presentations/modules/lesson-34-ai-investment-strategy-and-business-case-review.pptx
+++ b/downloads/presentations/modules/lesson-34-ai-investment-strategy-and-business-case-review.pptx
@@ -24,9 +24,11 @@
     <p:sldId id="272" r:id="rId18"/>
     <p:sldId id="273" r:id="rId19"/>
     <p:sldId id="274" r:id="rId20"/>
+    <p:sldId id="275" r:id="rId21"/>
+    <p:sldId id="276" r:id="rId22"/>
   </p:sldIdLst>
   <p:notesMasterIdLst>
-    <p:notesMasterId r:id="rId21"/>
+    <p:notesMasterId r:id="rId23"/>
   </p:notesMasterIdLst>
   <p:sldSz cx="12192000" cy="6858000"/>
   <p:notesSz cx="6858000" cy="12192000"/>
@@ -609,8 +611,10 @@
           <a:p>
             <a:r>
               <a:rPr lang="en-US" dirty="0"/>
-              <a:t>Application to AI-Supported Workflows
-Generative AI business cases should include review time, source verification, and records considerations. Predictive analytics business cases should include validation data, subgroup testing, and monitoring costs. Agentic AI business cases should include security architecture, approval workflows, rollback, logging, and incident response. Cost and value must reflect responsible use.</a:t>
+              <a:t>Technical and Governance Deep Dive
+An AI business case should begin with a problem statement. The problem should be operational and measurable, such as delayed case review, inconsistent public response drafting, high manual data cleanup burden, or inability to search internal guidance efficiently. A vague desire to 'use AI' is not a sufficient problem statement. The business case should connect the proposed AI use to a real public health need.
+The review should compare alternatives. Options may include doing nothing, improving workflow, improving data quality, using rules-based automation, procuring a vendor product, developing an internal tool, or joining a shared service. Each option should be assessed for benefit, cost, risk, time, staffing, sustainability, and governance burden. This comparison prevents AI from becoming the default answer to every operational problem.
+Success measures should be defined before funding. Measures might include reduced processing time, improved completeness, fewer manual touches, better routing accuracy, staff satisfaction, fewer errors, improved language access, or reduced backlog. Measures should also include safety and equity indicators. A tool that saves time but increases error rates, widens disparities, or erodes public trust should not be considered successful.</a:t>
             </a:r>
             <a:endParaRPr lang="en-US" dirty="0"/>
           </a:p>
@@ -698,10 +702,9 @@
           <a:p>
             <a:r>
               <a:rPr lang="en-US" dirty="0"/>
-              <a:t>Reflection Questions
-Which current or proposed AI use case in your agency raises this leadership or governance issue most clearly?
-Who currently has authority to make decisions about this issue, and is that authority documented?
-What evidence would governance or leadership need before approving the use case?</a:t>
+              <a:t>Risks, Failure Modes, and Guardrails
+One risk is hidden cost. Agencies may purchase an AI tool without funding integration, monitoring, validation, staff training, or ongoing support. A guardrail is to require total cost of ownership in every business case.
+Another risk is benefits inflation. Vendors or project champions may overstate time savings or accuracy without local evidence. A guardrail is to require pilot success criteria and benefits realization review before scaling.</a:t>
             </a:r>
             <a:endParaRPr lang="en-US" dirty="0"/>
           </a:p>
@@ -789,9 +792,8 @@
           <a:p>
             <a:r>
               <a:rPr lang="en-US" dirty="0"/>
-              <a:t>Reflection Questions
-Which staff, partners, or communities would be affected if this issue were handled poorly?
-What policy, process, or artifact should be created or updated after this module?</a:t>
+              <a:t>Application to AI-Supported Workflows
+Generative AI business cases should include review time, source verification, and records considerations. Predictive analytics business cases should include validation data, subgroup testing, and monitoring costs. Agentic AI business cases should include security architecture, approval workflows, rollback, logging, and incident response. Cost and value must reflect responsible use.</a:t>
             </a:r>
             <a:endParaRPr lang="en-US" dirty="0"/>
           </a:p>
@@ -879,8 +881,10 @@
           <a:p>
             <a:r>
               <a:rPr lang="en-US" dirty="0"/>
-              <a:t>Practical Exercise
-Complete an AI business case review worksheet for one proposed investment. Include problem, alternatives, expected benefits, total cost of ownership, risk, equity considerations, implementation needs, and success measures.</a:t>
+              <a:t>Reflection Questions
+Which current or proposed AI use case in your agency raises this leadership or governance issue most clearly?
+Who currently has authority to make decisions about this issue, and is that authority documented?
+What evidence would governance or leadership need before approving the use case?</a:t>
             </a:r>
             <a:endParaRPr lang="en-US" dirty="0"/>
           </a:p>
@@ -968,8 +972,9 @@
           <a:p>
             <a:r>
               <a:rPr lang="en-US" dirty="0"/>
-              <a:t>Before You Begin
-Choose a real or realistic public health AI use case. Document assumptions, unresolved questions, and which agency roles would need to review the artifact before it is adopted. The exercise should produce a work product that could support governance review, leadership discussion, implementation planning, or policy development.</a:t>
+              <a:t>Reflection Questions
+Which staff, partners, or communities would be affected if this issue were handled poorly?
+What policy, process, or artifact should be created or updated after this module?</a:t>
             </a:r>
             <a:endParaRPr lang="en-US" dirty="0"/>
           </a:p>
@@ -1057,8 +1062,8 @@
           <a:p>
             <a:r>
               <a:rPr lang="en-US" dirty="0"/>
-              <a:t>Expected Artifact or Evidence
-AI business case worksheet; total cost of ownership estimate; benefits realization plan; alternatives analysis.</a:t>
+              <a:t>Practical Exercise
+Complete an AI business case review worksheet for one proposed investment. Include problem, alternatives, expected benefits, total cost of ownership, risk, equity considerations, implementation needs, and success measures.</a:t>
             </a:r>
             <a:endParaRPr lang="en-US" dirty="0"/>
           </a:p>
@@ -1146,8 +1151,8 @@
           <a:p>
             <a:r>
               <a:rPr lang="en-US" dirty="0"/>
-              <a:t>Expected Assignment
-AI business case worksheet; total cost of ownership estimate; benefits realization plan; alternatives analysis.</a:t>
+              <a:t>Before You Begin
+Choose a real or realistic public health AI use case. Document assumptions, unresolved questions, and which agency roles would need to review the artifact before it is adopted. The exercise should produce a work product that could support governance review, leadership discussion, implementation planning, or policy development.</a:t>
             </a:r>
             <a:endParaRPr lang="en-US" dirty="0"/>
           </a:p>
@@ -1235,12 +1240,8 @@
           <a:p>
             <a:r>
               <a:rPr lang="en-US" dirty="0"/>
-              <a:t>Knowledge Check
-1. What is the strongest reason this module topic belongs in AI leadership and governance training?
-2. Which practice best supports accountable public health AI governance?
-3. When should an AI use case be escalated for leadership or governance review?
-4. What is weak evidence of completion for a leadership and governance module?
-5. What should leaders do when an AI use case has meaningful benefits but unresolved risks?</a:t>
+              <a:t>Expected Artifact or Evidence
+AI business case worksheet; total cost of ownership estimate; benefits realization plan; alternatives analysis.</a:t>
             </a:r>
             <a:endParaRPr lang="en-US" dirty="0"/>
           </a:p>
@@ -1328,12 +1329,8 @@
           <a:p>
             <a:r>
               <a:rPr lang="en-US" dirty="0"/>
-              <a:t>References and Resources
-NIST Artificial Intelligence Risk Management Framework (AI RMF 1.0): https://www.nist.gov/itl/ai-risk-management-framework
-NIST Generative AI Profile: https://www.nist.gov/publications/artificial-intelligence-risk-management-framework-generative-artificial-intelligence
-NIST Privacy Framework
-CDC Public Health Data Strategy and Data Modernization resources: https://www.cdc.gov/public-health-data-strategy/php/about/index.html
-WHO Ethics and Governance of Artificial Intelligence for Health: https://www.who.int/publications/i/item/9789240029200</a:t>
+              <a:t>Expected Assignment
+AI business case worksheet; total cost of ownership estimate; benefits realization plan; alternatives analysis.</a:t>
             </a:r>
             <a:endParaRPr lang="en-US" dirty="0"/>
           </a:p>
@@ -1421,9 +1418,12 @@
           <a:p>
             <a:r>
               <a:rPr lang="en-US" dirty="0"/>
-              <a:t>References and Resources
-OMB Memorandum M-24-10 on federal AI governance, risk management, and innovation, where relevant to public-sector governance models
-Agency strategic plans, procurement policies, privacy policies, cybersecurity policies, records policies, and equity plans</a:t>
+              <a:t>Knowledge Check
+1. What is the strongest reason this module topic belongs in AI leadership and governance training?
+2. Which practice best supports accountable public health AI governance?
+3. When should an AI use case be escalated for leadership or governance review?
+4. What is weak evidence of completion for a leadership and governance module?
+5. What should leaders do when an AI use case has meaningful benefits but unresolved risks?</a:t>
             </a:r>
             <a:endParaRPr lang="en-US" dirty="0"/>
           </a:p>
@@ -1557,6 +1557,189 @@
 </p:notes>
 </file>
 
+<file path=ppt/notesSlides/notesSlide20.xml><?xml version="1.0" encoding="utf-8"?>
+<p:notes xmlns:a="http://schemas.openxmlformats.org/drawingml/2006/main" xmlns:r="http://schemas.openxmlformats.org/officeDocument/2006/relationships" xmlns:p="http://schemas.openxmlformats.org/presentationml/2006/main">
+  <p:cSld>
+    <p:spTree>
+      <p:nvGrpSpPr>
+        <p:cNvPr id="1" name=""/>
+        <p:cNvGrpSpPr/>
+        <p:nvPr/>
+      </p:nvGrpSpPr>
+      <p:grpSpPr>
+        <a:xfrm>
+          <a:off x="0" y="0"/>
+          <a:ext cx="0" cy="0"/>
+          <a:chOff x="0" y="0"/>
+          <a:chExt cx="0" cy="0"/>
+        </a:xfrm>
+      </p:grpSpPr>
+      <p:sp>
+        <p:nvSpPr>
+          <p:cNvPr id="2" name="Slide Image Placeholder 1"/>
+          <p:cNvSpPr>
+            <a:spLocks noGrp="1" noRot="1" noChangeAspect="1"/>
+          </p:cNvSpPr>
+          <p:nvPr>
+            <p:ph type="sldImg"/>
+          </p:nvPr>
+        </p:nvSpPr>
+        <p:spPr/>
+      </p:sp>
+      <p:sp>
+        <p:nvSpPr>
+          <p:cNvPr id="3" name="Notes Placeholder 2"/>
+          <p:cNvSpPr>
+            <a:spLocks noGrp="1"/>
+          </p:cNvSpPr>
+          <p:nvPr>
+            <p:ph type="body" idx="1"/>
+          </p:nvPr>
+        </p:nvSpPr>
+        <p:spPr/>
+        <p:txBody>
+          <a:bodyPr/>
+          <a:lstStyle/>
+          <a:p>
+            <a:r>
+              <a:rPr lang="en-US" dirty="0"/>
+              <a:t>References and Resources
+NIST Artificial Intelligence Risk Management Framework (AI RMF 1.0): https://www.nist.gov/itl/ai-risk-management-framework
+NIST Generative AI Profile: https://www.nist.gov/publications/artificial-intelligence-risk-management-framework-generative-artificial-intelligence
+NIST Privacy Framework
+CDC Public Health Data Strategy and Data Modernization resources: https://www.cdc.gov/public-health-data-strategy/php/about/index.html
+WHO Ethics and Governance of Artificial Intelligence for Health: https://www.who.int/publications/i/item/9789240029200</a:t>
+            </a:r>
+            <a:endParaRPr lang="en-US" dirty="0"/>
+          </a:p>
+        </p:txBody>
+      </p:sp>
+      <p:sp>
+        <p:nvSpPr>
+          <p:cNvPr id="4" name="Slide Number Placeholder 3"/>
+          <p:cNvSpPr>
+            <a:spLocks noGrp="1"/>
+          </p:cNvSpPr>
+          <p:nvPr>
+            <p:ph type="sldNum" sz="quarter" idx="10"/>
+          </p:nvPr>
+        </p:nvSpPr>
+        <p:spPr/>
+        <p:txBody>
+          <a:bodyPr/>
+          <a:lstStyle/>
+          <a:p>
+            <a:fld id="{F7021451-1387-4CA6-816F-3879F97B5CBC}" type="slidenum">
+              <a:rPr lang="en-US"/>
+              <a:t>20</a:t>
+            </a:fld>
+            <a:endParaRPr lang="en-US"/>
+          </a:p>
+        </p:txBody>
+      </p:sp>
+    </p:spTree>
+    <p:extLst>
+      <p:ext uri="{BB962C8B-B14F-4D97-AF65-F5344CB8AC3E}">
+        <p14:creationId xmlns:p14="http://schemas.microsoft.com/office/powerpoint/2010/main" val="1024086991"/>
+      </p:ext>
+    </p:extLst>
+  </p:cSld>
+  <p:clrMapOvr>
+    <a:masterClrMapping/>
+  </p:clrMapOvr>
+</p:notes>
+</file>
+
+<file path=ppt/notesSlides/notesSlide21.xml><?xml version="1.0" encoding="utf-8"?>
+<p:notes xmlns:a="http://schemas.openxmlformats.org/drawingml/2006/main" xmlns:r="http://schemas.openxmlformats.org/officeDocument/2006/relationships" xmlns:p="http://schemas.openxmlformats.org/presentationml/2006/main">
+  <p:cSld>
+    <p:spTree>
+      <p:nvGrpSpPr>
+        <p:cNvPr id="1" name=""/>
+        <p:cNvGrpSpPr/>
+        <p:nvPr/>
+      </p:nvGrpSpPr>
+      <p:grpSpPr>
+        <a:xfrm>
+          <a:off x="0" y="0"/>
+          <a:ext cx="0" cy="0"/>
+          <a:chOff x="0" y="0"/>
+          <a:chExt cx="0" cy="0"/>
+        </a:xfrm>
+      </p:grpSpPr>
+      <p:sp>
+        <p:nvSpPr>
+          <p:cNvPr id="2" name="Slide Image Placeholder 1"/>
+          <p:cNvSpPr>
+            <a:spLocks noGrp="1" noRot="1" noChangeAspect="1"/>
+          </p:cNvSpPr>
+          <p:nvPr>
+            <p:ph type="sldImg"/>
+          </p:nvPr>
+        </p:nvSpPr>
+        <p:spPr/>
+      </p:sp>
+      <p:sp>
+        <p:nvSpPr>
+          <p:cNvPr id="3" name="Notes Placeholder 2"/>
+          <p:cNvSpPr>
+            <a:spLocks noGrp="1"/>
+          </p:cNvSpPr>
+          <p:nvPr>
+            <p:ph type="body" idx="1"/>
+          </p:nvPr>
+        </p:nvSpPr>
+        <p:spPr/>
+        <p:txBody>
+          <a:bodyPr/>
+          <a:lstStyle/>
+          <a:p>
+            <a:r>
+              <a:rPr lang="en-US" dirty="0"/>
+              <a:t>References and Resources
+OMB Memorandum M-24-10 on federal AI governance, risk management, and innovation, where relevant to public-sector governance models
+Agency strategic plans, procurement policies, privacy policies, cybersecurity policies, records policies, and equity plans</a:t>
+            </a:r>
+            <a:endParaRPr lang="en-US" dirty="0"/>
+          </a:p>
+        </p:txBody>
+      </p:sp>
+      <p:sp>
+        <p:nvSpPr>
+          <p:cNvPr id="4" name="Slide Number Placeholder 3"/>
+          <p:cNvSpPr>
+            <a:spLocks noGrp="1"/>
+          </p:cNvSpPr>
+          <p:nvPr>
+            <p:ph type="sldNum" sz="quarter" idx="10"/>
+          </p:nvPr>
+        </p:nvSpPr>
+        <p:spPr/>
+        <p:txBody>
+          <a:bodyPr/>
+          <a:lstStyle/>
+          <a:p>
+            <a:fld id="{F7021451-1387-4CA6-816F-3879F97B5CBC}" type="slidenum">
+              <a:rPr lang="en-US"/>
+              <a:t>21</a:t>
+            </a:fld>
+            <a:endParaRPr lang="en-US"/>
+          </a:p>
+        </p:txBody>
+      </p:sp>
+    </p:spTree>
+    <p:extLst>
+      <p:ext uri="{BB962C8B-B14F-4D97-AF65-F5344CB8AC3E}">
+        <p14:creationId xmlns:p14="http://schemas.microsoft.com/office/powerpoint/2010/main" val="1024086991"/>
+      </p:ext>
+    </p:extLst>
+  </p:cSld>
+  <p:clrMapOvr>
+    <a:masterClrMapping/>
+  </p:clrMapOvr>
+</p:notes>
+</file>
+
 <file path=ppt/notesSlides/notesSlide3.xml><?xml version="1.0" encoding="utf-8"?>
 <p:notes xmlns:a="http://schemas.openxmlformats.org/drawingml/2006/main" xmlns:r="http://schemas.openxmlformats.org/officeDocument/2006/relationships" xmlns:p="http://schemas.openxmlformats.org/presentationml/2006/main">
   <p:cSld>
@@ -1603,12 +1786,11 @@
           <a:p>
             <a:r>
               <a:rPr lang="en-US" dirty="0"/>
-              <a:t>Learning Objectives
-Identify the full cost components of AI implementation and operations.
-Evaluate expected benefits in terms of public health value, workflow improvement, equity, quality, timeliness, and staff burden.
-Distinguish between a vendor demonstration and a credible business case.
-Develop business case questions for AI procurement or internal development.
-Produce an AI business case review worksheet.</a:t>
+              <a:t>Related Playbook Plays
+Play 11: Build and Deploy AI Solutions - This lesson informs Play 11 by helping learners connect the lesson topic to build and deploy ai solutions work in the AI Playbook.
+Play 2: Readiness Assessment - This lesson informs Play 2 by helping learners connect the lesson topic to readiness assessment work in the AI Playbook sequence.
+Play 3: Establish AI Governance - This lesson informs Play 3 by helping learners connect the lesson topic to establish ai governance work in the AI Playbook sequence.
+Play 1: Vision &amp; Guardrails - This lesson informs Play 1 by helping learners connect the lesson topic to vision &amp; guardrails work in the AI Playbook sequence.</a:t>
             </a:r>
             <a:endParaRPr lang="en-US" dirty="0"/>
           </a:p>
@@ -1696,9 +1878,13 @@
           <a:p>
             <a:r>
               <a:rPr lang="en-US" dirty="0"/>
-              <a:t>Module Overview
-AI investments compete with many other public health priorities. Leaders need a disciplined way to decide when AI is worth funding, what costs must be considered, and how benefits will be measured. A business case review helps agencies avoid buying tools that are impressive in demonstrations but weak in operational value, sustainability, interoperability, or public health impact.
-This module teaches leaders to evaluate AI investments across cost, value, readiness, risk, staffing, procurement, lifecycle support, and sustainability. The business case should not focus only on software price. It should include data preparation, implementation, integration, training, governance, validation, monitoring, maintenance, vendor management, cybersecurity, accessibility, and eventual replacement or retirement.</a:t>
+              <a:t>Related Toolkit Resources
+Tool 4: AI Policy Landscape Scan (Worksheet) - Use AI Policy Landscape Scan to translate this lesson into a documented public health AI planning, governance, implementation,.
+Tool 5: AI Environmental and Resource Impact Review (Checklist) - Use this tool to complete or strengthen the practical exercise for the module using fictional, de-identified, or generalized.
+Tool 6: Human-Centered AI Decision Rule Checklist (Checklist) - Use Human-Centered AI Decision Rule Checklist to translate this lesson into a documented public health AI planning, governance,.
+Tool 8: AI Project Charter (Planning) - Use AI Project Charter to translate this lesson into a documented public health AI planning, governance, implementation, or.
+Tool 9: Data Quality Assessment Checklist (Checklist) - Use this tool to complete or strengthen the practical exercise for the module using fictional, de-identified, or generalized.
+Tool 10: Tiered Data Classification for AI Use (Worksheet) - Use Tiered Data Classification for AI Use to translate this lesson into a documented public health AI planning, governance,.</a:t>
             </a:r>
             <a:endParaRPr lang="en-US" dirty="0"/>
           </a:p>
@@ -1786,8 +1972,12 @@
           <a:p>
             <a:r>
               <a:rPr lang="en-US" dirty="0"/>
-              <a:t>Jurisdiction and Agency Policy Note
-This national-level module is intended for training and planning purposes. It does not replace legal, privacy, procurement, civil rights, records, or agency policy review. Learners should confirm applicable requirements in their own jurisdiction and organization before implementing AI-supported workflows.</a:t>
+              <a:t>Learning Objectives
+Identify the full cost components of AI implementation and operations.
+Evaluate expected benefits in terms of public health value, workflow improvement, equity, quality, timeliness, and staff burden.
+Distinguish between a vendor demonstration and a credible business case.
+Develop business case questions for AI procurement or internal development.
+Produce an AI business case review worksheet.</a:t>
             </a:r>
             <a:endParaRPr lang="en-US" dirty="0"/>
           </a:p>
@@ -1875,9 +2065,9 @@
           <a:p>
             <a:r>
               <a:rPr lang="en-US" dirty="0"/>
-              <a:t>Why This Topic Matters for Public Health AI
-Public health agencies often face short-term funding cycles and urgent operational needs. AI products may be marketed as quick solutions, but the true cost of responsible implementation is broader than subscription fees. Agencies may need to update data pipelines, configure security controls, develop validation plans, train staff, write policies, monitor performance, and manage vendor relationships.
-A strong business case also protects mission focus. AI should not be funded because it is novel. It should be funded when it addresses a meaningful public health problem, fits agency capacity, can be governed responsibly, and can produce measurable value. Business case review helps leaders compare AI investments with non-AI alternatives, such as workflow redesign, staffing changes, data quality improvements, or simpler automation.</a:t>
+              <a:t>Module Overview
+AI investments compete with many other public health priorities. Leaders need a disciplined way to decide when AI is worth funding, what costs must be considered, and how benefits will be measured. A business case review helps agencies avoid buying tools that are impressive in demonstrations but weak in operational value, sustainability, interoperability, or public health impact.
+This module teaches leaders to evaluate AI investments across cost, value, readiness, risk, staffing, procurement, lifecycle support, and sustainability. The business case should not focus only on software price. It should include data preparation, implementation, integration, training, governance, validation, monitoring, maintenance, vendor management, cybersecurity, accessibility, and eventual replacement or retirement.</a:t>
             </a:r>
             <a:endParaRPr lang="en-US" dirty="0"/>
           </a:p>
@@ -1965,9 +2155,8 @@
           <a:p>
             <a:r>
               <a:rPr lang="en-US" dirty="0"/>
-              <a:t>Public Health Example
-A vendor offers an AI tool that promises to reduce disease investigator workload by summarizing case reports. The annual license appears affordable, but the agency must also pay for integration with the surveillance system, security review, staff training, validation, legal review, vendor support, monitoring dashboards, and staff time for governance. If those costs are not considered, leadership may underestimate the investment required.
-A business case review asks whether the tool will meaningfully reduce burden, improve timeliness, maintain quality, and fit the agency's workflow. It also asks whether a simpler approach, such as better case report templates or workflow redesign, would solve the problem at lower cost and risk. The review does not assume AI is the answer; it tests whether AI is the right answer.</a:t>
+              <a:t>Jurisdiction and Agency Policy Note
+This national-level module is intended for training and planning purposes. It does not replace legal, privacy, procurement, civil rights, records, or agency policy review. Learners should confirm applicable requirements in their own jurisdiction and organization before implementing AI-supported workflows.</a:t>
             </a:r>
             <a:endParaRPr lang="en-US" dirty="0"/>
           </a:p>
@@ -2055,10 +2244,9 @@
           <a:p>
             <a:r>
               <a:rPr lang="en-US" dirty="0"/>
-              <a:t>Technical and Governance Deep Dive
-An AI business case should begin with a problem statement. The problem should be operational and measurable, such as delayed case review, inconsistent public response drafting, high manual data cleanup burden, or inability to search internal guidance efficiently. A vague desire to 'use AI' is not a sufficient problem statement. The business case should connect the proposed AI use to a real public health need.
-The review should compare alternatives. Options may include doing nothing, improving workflow, improving data quality, using rules-based automation, procuring a vendor product, developing an internal tool, or joining a shared service. Each option should be assessed for benefit, cost, risk, time, staffing, sustainability, and governance burden. This comparison prevents AI from becoming the default answer to every operational problem.
-Success measures should be defined before funding. Measures might include reduced processing time, improved completeness, fewer manual touches, better routing accuracy, staff satisfaction, fewer errors, improved language access, or reduced backlog. Measures should also include safety and equity indicators. A tool that saves time but increases error rates, widens disparities, or erodes public trust should not be considered successful.</a:t>
+              <a:t>Why This Topic Matters for Public Health AI
+Public health agencies often face short-term funding cycles and urgent operational needs. AI products may be marketed as quick solutions, but the true cost of responsible implementation is broader than subscription fees. Agencies may need to update data pipelines, configure security controls, develop validation plans, train staff, write policies, monitor performance, and manage vendor relationships.
+A strong business case also protects mission focus. AI should not be funded because it is novel. It should be funded when it addresses a meaningful public health problem, fits agency capacity, can be governed responsibly, and can produce measurable value. Business case review helps leaders compare AI investments with non-AI alternatives, such as workflow redesign, staffing changes, data quality improvements, or simpler automation.</a:t>
             </a:r>
             <a:endParaRPr lang="en-US" dirty="0"/>
           </a:p>
@@ -2146,9 +2334,9 @@
           <a:p>
             <a:r>
               <a:rPr lang="en-US" dirty="0"/>
-              <a:t>Risks, Failure Modes, and Guardrails
-One risk is hidden cost. Agencies may purchase an AI tool without funding integration, monitoring, validation, staff training, or ongoing support. A guardrail is to require total cost of ownership in every business case.
-Another risk is benefits inflation. Vendors or project champions may overstate time savings or accuracy without local evidence. A guardrail is to require pilot success criteria and benefits realization review before scaling.</a:t>
+              <a:t>Public Health Example
+A vendor offers an AI tool that promises to reduce disease investigator workload by summarizing case reports. The annual license appears affordable, but the agency must also pay for integration with the surveillance system, security review, staff training, validation, legal review, vendor support, monitoring dashboards, and staff time for governance. If those costs are not considered, leadership may underestimate the investment required.
+A business case review asks whether the tool will meaningfully reduce burden, improve timeliness, maintain quality, and fit the agency's workflow. It also asks whether a simpler approach, such as better case report templates or workflow redesign, would solve the problem at lower cost and risk. The review does not assume AI is the answer; it tests whether AI is the right answer.</a:t>
             </a:r>
             <a:endParaRPr lang="en-US" dirty="0"/>
           </a:p>
@@ -2771,7 +2959,32 @@
       </p:sp>
       <p:sp>
         <p:nvSpPr>
-          <p:cNvPr id="3" name="Text 1"/>
+          <p:cNvPr id="3" name="Shape 1"/>
+          <p:cNvSpPr/>
+          <p:nvPr/>
+        </p:nvSpPr>
+        <p:spPr>
+          <a:xfrm>
+            <a:off x="0" y="164592"/>
+            <a:ext cx="146304" cy="6693408"/>
+          </a:xfrm>
+          <a:prstGeom prst="rect">
+            <a:avLst/>
+          </a:prstGeom>
+          <a:solidFill>
+            <a:srgbClr val="2F8A28"/>
+          </a:solidFill>
+          <a:ln w="12700">
+            <a:solidFill>
+              <a:srgbClr val="2F8A28"/>
+            </a:solidFill>
+            <a:prstDash val="solid"/>
+          </a:ln>
+        </p:spPr>
+      </p:sp>
+      <p:sp>
+        <p:nvSpPr>
+          <p:cNvPr id="4" name="Text 2"/>
           <p:cNvSpPr/>
           <p:nvPr/>
         </p:nvSpPr>
@@ -2810,7 +3023,7 @@
       </p:sp>
       <p:sp>
         <p:nvSpPr>
-          <p:cNvPr id="4" name="Text 2"/>
+          <p:cNvPr id="5" name="Text 3"/>
           <p:cNvSpPr/>
           <p:nvPr/>
         </p:nvSpPr>
@@ -2849,7 +3062,7 @@
       </p:sp>
       <p:sp>
         <p:nvSpPr>
-          <p:cNvPr id="5" name="Text 3"/>
+          <p:cNvPr id="6" name="Text 4"/>
           <p:cNvSpPr/>
           <p:nvPr/>
         </p:nvSpPr>
@@ -2888,13 +3101,77 @@
       </p:sp>
       <p:sp>
         <p:nvSpPr>
-          <p:cNvPr id="6" name="Text 4"/>
+          <p:cNvPr id="7" name="Shape 5"/>
           <p:cNvSpPr/>
           <p:nvPr/>
         </p:nvSpPr>
         <p:spPr>
           <a:xfrm>
             <a:off x="640080" y="658368"/>
+            <a:ext cx="420624" cy="420624"/>
+          </a:xfrm>
+          <a:prstGeom prst="ellipse">
+            <a:avLst/>
+          </a:prstGeom>
+          <a:solidFill>
+            <a:srgbClr val="0068B7"/>
+          </a:solidFill>
+          <a:ln w="12700">
+            <a:solidFill>
+              <a:srgbClr val="0068B7"/>
+            </a:solidFill>
+            <a:prstDash val="solid"/>
+          </a:ln>
+        </p:spPr>
+      </p:sp>
+      <p:sp>
+        <p:nvSpPr>
+          <p:cNvPr id="8" name="Text 6"/>
+          <p:cNvSpPr/>
+          <p:nvPr/>
+        </p:nvSpPr>
+        <p:spPr>
+          <a:xfrm>
+            <a:off x="640080" y="731520"/>
+            <a:ext cx="420624" cy="164592"/>
+          </a:xfrm>
+          <a:prstGeom prst="rect">
+            <a:avLst/>
+          </a:prstGeom>
+          <a:noFill/>
+          <a:ln/>
+        </p:spPr>
+        <p:txBody>
+          <a:bodyPr wrap="square" lIns="0" tIns="0" rIns="0" bIns="0" rtlCol="0" anchor="ctr"/>
+          <a:lstStyle/>
+          <a:p>
+            <a:pPr algn="ctr" indent="0" marL="0">
+              <a:buNone/>
+            </a:pPr>
+            <a:r>
+              <a:rPr lang="en-US" sz="1100" b="1" dirty="0">
+                <a:solidFill>
+                  <a:srgbClr val="FFFFFF"/>
+                </a:solidFill>
+                <a:latin typeface="Aptos" pitchFamily="34" charset="0"/>
+                <a:ea typeface="Aptos" pitchFamily="34" charset="-122"/>
+                <a:cs typeface="Aptos" pitchFamily="34" charset="-120"/>
+              </a:rPr>
+              <a:t>6</a:t>
+            </a:r>
+            <a:endParaRPr lang="en-US" sz="1100" dirty="0"/>
+          </a:p>
+        </p:txBody>
+      </p:sp>
+      <p:sp>
+        <p:nvSpPr>
+          <p:cNvPr id="9" name="Text 7"/>
+          <p:cNvSpPr/>
+          <p:nvPr/>
+        </p:nvSpPr>
+        <p:spPr>
+          <a:xfrm>
+            <a:off x="640080" y="621792"/>
             <a:ext cx="10881360" cy="566928"/>
           </a:xfrm>
           <a:prstGeom prst="rect">
@@ -2921,7 +3198,7 @@
                 <a:ea typeface="Aptos Display" pitchFamily="34" charset="-122"/>
                 <a:cs typeface="Aptos Display" pitchFamily="34" charset="-120"/>
               </a:rPr>
-              <a:t>Application to AI-Supported Workflows</a:t>
+              <a:t>Technical and Governance Deep Dive</a:t>
             </a:r>
             <a:endParaRPr lang="en-US" sz="2700" dirty="0"/>
           </a:p>
@@ -2929,32 +3206,178 @@
       </p:sp>
       <p:sp>
         <p:nvSpPr>
-          <p:cNvPr id="7" name="Text 5"/>
-          <p:cNvSpPr/>
-          <p:nvPr/>
-        </p:nvSpPr>
-        <p:spPr>
-          <a:xfrm>
-            <a:off x="822960" y="1325880"/>
-            <a:ext cx="10378440" cy="4800600"/>
-          </a:xfrm>
-          <a:prstGeom prst="rect">
-            <a:avLst/>
-          </a:prstGeom>
-          <a:noFill/>
-          <a:ln/>
-        </p:spPr>
-        <p:txBody>
-          <a:bodyPr wrap="square" lIns="1016" tIns="1016" rIns="1016" bIns="1016" rtlCol="0" anchor="t">
+          <p:cNvPr id="10" name="Text 8"/>
+          <p:cNvSpPr/>
+          <p:nvPr/>
+        </p:nvSpPr>
+        <p:spPr>
+          <a:xfrm>
+            <a:off x="868680" y="1417320"/>
+            <a:ext cx="6675120" cy="4434840"/>
+          </a:xfrm>
+          <a:prstGeom prst="rect">
+            <a:avLst/>
+          </a:prstGeom>
+          <a:noFill/>
+          <a:ln/>
+        </p:spPr>
+        <p:txBody>
+          <a:bodyPr wrap="square" lIns="635" tIns="635" rIns="635" bIns="635" rtlCol="0" anchor="t">
             <a:normAutofit/>
           </a:bodyPr>
           <a:lstStyle/>
           <a:p>
+            <a:r>
+              <a:rPr lang="en-US" sz="1700" dirty="0">
+                <a:solidFill>
+                  <a:srgbClr val="17364A"/>
+                </a:solidFill>
+                <a:latin typeface="Aptos" pitchFamily="34" charset="0"/>
+                <a:ea typeface="Aptos" pitchFamily="34" charset="-122"/>
+                <a:cs typeface="Aptos" pitchFamily="34" charset="-120"/>
+              </a:rPr>
+              <a:t>An AI business case should begin with a problem statement.</a:t>
+            </a:r>
+            <a:endParaRPr lang="en-US" sz="1700" dirty="0"/>
+          </a:p>
+          <a:p>
+            <a:r>
+              <a:rPr lang="en-US" sz="1700" dirty="0">
+                <a:solidFill>
+                  <a:srgbClr val="17364A"/>
+                </a:solidFill>
+                <a:latin typeface="Aptos" pitchFamily="34" charset="0"/>
+                <a:ea typeface="Aptos" pitchFamily="34" charset="-122"/>
+                <a:cs typeface="Aptos" pitchFamily="34" charset="-120"/>
+              </a:rPr>
+              <a:t>The problem should be operational and measurable, such as delayed case review, inconsistent public response drafting, high.</a:t>
+            </a:r>
+            <a:endParaRPr lang="en-US" sz="1700" dirty="0"/>
+          </a:p>
+          <a:p>
+            <a:r>
+              <a:rPr lang="en-US" sz="1700" dirty="0">
+                <a:solidFill>
+                  <a:srgbClr val="17364A"/>
+                </a:solidFill>
+                <a:latin typeface="Aptos" pitchFamily="34" charset="0"/>
+                <a:ea typeface="Aptos" pitchFamily="34" charset="-122"/>
+                <a:cs typeface="Aptos" pitchFamily="34" charset="-120"/>
+              </a:rPr>
+              <a:t>A vague desire to 'use AI' is not a sufficient problem statement.</a:t>
+            </a:r>
+            <a:endParaRPr lang="en-US" sz="1700" dirty="0"/>
+          </a:p>
+          <a:p>
+            <a:r>
+              <a:rPr lang="en-US" sz="1700" dirty="0">
+                <a:solidFill>
+                  <a:srgbClr val="17364A"/>
+                </a:solidFill>
+                <a:latin typeface="Aptos" pitchFamily="34" charset="0"/>
+                <a:ea typeface="Aptos" pitchFamily="34" charset="-122"/>
+                <a:cs typeface="Aptos" pitchFamily="34" charset="-120"/>
+              </a:rPr>
+              <a:t>The business case should connect the proposed AI use to a real public health need.</a:t>
+            </a:r>
+            <a:endParaRPr lang="en-US" sz="1700" dirty="0"/>
+          </a:p>
+        </p:txBody>
+      </p:sp>
+      <p:sp>
+        <p:nvSpPr>
+          <p:cNvPr id="11" name="Shape 9"/>
+          <p:cNvSpPr/>
+          <p:nvPr/>
+        </p:nvSpPr>
+        <p:spPr>
+          <a:xfrm>
+            <a:off x="7909560" y="1417320"/>
+            <a:ext cx="3154680" cy="1828800"/>
+          </a:xfrm>
+          <a:prstGeom prst="roundRect">
+            <a:avLst>
+              <a:gd name="adj" fmla="val 6000"/>
+            </a:avLst>
+          </a:prstGeom>
+          <a:solidFill>
+            <a:srgbClr val="EEF8ED"/>
+          </a:solidFill>
+          <a:ln w="12700">
+            <a:solidFill>
+              <a:srgbClr val="B9D7E6"/>
+            </a:solidFill>
+            <a:prstDash val="solid"/>
+          </a:ln>
+        </p:spPr>
+      </p:sp>
+      <p:sp>
+        <p:nvSpPr>
+          <p:cNvPr id="12" name="Text 10"/>
+          <p:cNvSpPr/>
+          <p:nvPr/>
+        </p:nvSpPr>
+        <p:spPr>
+          <a:xfrm>
+            <a:off x="8074152" y="1563624"/>
+            <a:ext cx="2825496" cy="201168"/>
+          </a:xfrm>
+          <a:prstGeom prst="rect">
+            <a:avLst/>
+          </a:prstGeom>
+          <a:noFill/>
+          <a:ln/>
+        </p:spPr>
+        <p:txBody>
+          <a:bodyPr wrap="square" lIns="0" tIns="0" rIns="0" bIns="0" rtlCol="0" anchor="ctr"/>
+          <a:lstStyle/>
+          <a:p>
             <a:pPr indent="0" marL="0">
               <a:buNone/>
             </a:pPr>
             <a:r>
-              <a:rPr lang="en-US" sz="1420" dirty="0">
+              <a:rPr lang="en-US" sz="950" b="1" dirty="0">
+                <a:solidFill>
+                  <a:srgbClr val="0068B7"/>
+                </a:solidFill>
+                <a:latin typeface="Aptos" pitchFamily="34" charset="0"/>
+                <a:ea typeface="Aptos" pitchFamily="34" charset="-122"/>
+                <a:cs typeface="Aptos" pitchFamily="34" charset="-120"/>
+              </a:rPr>
+              <a:t>Key idea</a:t>
+            </a:r>
+            <a:endParaRPr lang="en-US" sz="950" dirty="0"/>
+          </a:p>
+        </p:txBody>
+      </p:sp>
+      <p:sp>
+        <p:nvSpPr>
+          <p:cNvPr id="13" name="Text 11"/>
+          <p:cNvSpPr/>
+          <p:nvPr/>
+        </p:nvSpPr>
+        <p:spPr>
+          <a:xfrm>
+            <a:off x="8074152" y="1856232"/>
+            <a:ext cx="2825496" cy="1261872"/>
+          </a:xfrm>
+          <a:prstGeom prst="rect">
+            <a:avLst/>
+          </a:prstGeom>
+          <a:noFill/>
+          <a:ln/>
+        </p:spPr>
+        <p:txBody>
+          <a:bodyPr wrap="square" lIns="0" tIns="0" rIns="0" bIns="0" rtlCol="0" anchor="t">
+            <a:normAutofit/>
+          </a:bodyPr>
+          <a:lstStyle/>
+          <a:p>
+            <a:pPr indent="0" marL="0">
+              <a:buNone/>
+            </a:pPr>
+            <a:r>
+              <a:rPr lang="en-US" sz="1250" dirty="0">
                 <a:solidFill>
                   <a:srgbClr val="17364A"/>
                 </a:solidFill>
@@ -2962,9 +3385,116 @@
                 <a:ea typeface="Aptos" pitchFamily="34" charset="-122"/>
                 <a:cs typeface="Aptos" pitchFamily="34" charset="-120"/>
               </a:rPr>
-              <a:t>Generative AI business cases should include review time, source verification, and records considerations. Predictive analytics business cases should include validation data, subgroup testing, and monitoring costs. Agentic AI business cases should include security architecture, approval workflows, rollback, logging, and incident response. Cost and value must reflect responsible use.</a:t>
-            </a:r>
-            <a:endParaRPr lang="en-US" sz="1420" dirty="0"/>
+              <a:t>An AI business case should begin with a problem statement.</a:t>
+            </a:r>
+            <a:endParaRPr lang="en-US" sz="1250" dirty="0"/>
+          </a:p>
+        </p:txBody>
+      </p:sp>
+      <p:sp>
+        <p:nvSpPr>
+          <p:cNvPr id="14" name="Shape 12"/>
+          <p:cNvSpPr/>
+          <p:nvPr/>
+        </p:nvSpPr>
+        <p:spPr>
+          <a:xfrm>
+            <a:off x="7909560" y="3520440"/>
+            <a:ext cx="3154680" cy="1737360"/>
+          </a:xfrm>
+          <a:prstGeom prst="roundRect">
+            <a:avLst>
+              <a:gd name="adj" fmla="val 6316"/>
+            </a:avLst>
+          </a:prstGeom>
+          <a:solidFill>
+            <a:srgbClr val="EAF6F8"/>
+          </a:solidFill>
+          <a:ln w="12700">
+            <a:solidFill>
+              <a:srgbClr val="B9D7E6"/>
+            </a:solidFill>
+            <a:prstDash val="solid"/>
+          </a:ln>
+        </p:spPr>
+      </p:sp>
+      <p:sp>
+        <p:nvSpPr>
+          <p:cNvPr id="15" name="Text 13"/>
+          <p:cNvSpPr/>
+          <p:nvPr/>
+        </p:nvSpPr>
+        <p:spPr>
+          <a:xfrm>
+            <a:off x="8074152" y="3666744"/>
+            <a:ext cx="2825496" cy="201168"/>
+          </a:xfrm>
+          <a:prstGeom prst="rect">
+            <a:avLst/>
+          </a:prstGeom>
+          <a:noFill/>
+          <a:ln/>
+        </p:spPr>
+        <p:txBody>
+          <a:bodyPr wrap="square" lIns="0" tIns="0" rIns="0" bIns="0" rtlCol="0" anchor="ctr"/>
+          <a:lstStyle/>
+          <a:p>
+            <a:pPr indent="0" marL="0">
+              <a:buNone/>
+            </a:pPr>
+            <a:r>
+              <a:rPr lang="en-US" sz="950" b="1" dirty="0">
+                <a:solidFill>
+                  <a:srgbClr val="0068B7"/>
+                </a:solidFill>
+                <a:latin typeface="Aptos" pitchFamily="34" charset="0"/>
+                <a:ea typeface="Aptos" pitchFamily="34" charset="-122"/>
+                <a:cs typeface="Aptos" pitchFamily="34" charset="-120"/>
+              </a:rPr>
+              <a:t>Use this for</a:t>
+            </a:r>
+            <a:endParaRPr lang="en-US" sz="950" dirty="0"/>
+          </a:p>
+        </p:txBody>
+      </p:sp>
+      <p:sp>
+        <p:nvSpPr>
+          <p:cNvPr id="16" name="Text 14"/>
+          <p:cNvSpPr/>
+          <p:nvPr/>
+        </p:nvSpPr>
+        <p:spPr>
+          <a:xfrm>
+            <a:off x="8074152" y="3959352"/>
+            <a:ext cx="2825496" cy="1170432"/>
+          </a:xfrm>
+          <a:prstGeom prst="rect">
+            <a:avLst/>
+          </a:prstGeom>
+          <a:noFill/>
+          <a:ln/>
+        </p:spPr>
+        <p:txBody>
+          <a:bodyPr wrap="square" lIns="0" tIns="0" rIns="0" bIns="0" rtlCol="0" anchor="t">
+            <a:normAutofit/>
+          </a:bodyPr>
+          <a:lstStyle/>
+          <a:p>
+            <a:pPr indent="0" marL="0">
+              <a:buNone/>
+            </a:pPr>
+            <a:r>
+              <a:rPr lang="en-US" sz="1250" dirty="0">
+                <a:solidFill>
+                  <a:srgbClr val="17364A"/>
+                </a:solidFill>
+                <a:latin typeface="Aptos" pitchFamily="34" charset="0"/>
+                <a:ea typeface="Aptos" pitchFamily="34" charset="-122"/>
+                <a:cs typeface="Aptos" pitchFamily="34" charset="-120"/>
+              </a:rPr>
+              <a:t>Connect the concept to public health decisions, safeguards, documentation, or implementation work.</a:t>
+            </a:r>
+            <a:endParaRPr lang="en-US" sz="1250" dirty="0"/>
           </a:p>
         </p:txBody>
       </p:sp>
@@ -3027,7 +3557,32 @@
       </p:sp>
       <p:sp>
         <p:nvSpPr>
-          <p:cNvPr id="3" name="Text 1"/>
+          <p:cNvPr id="3" name="Shape 1"/>
+          <p:cNvSpPr/>
+          <p:nvPr/>
+        </p:nvSpPr>
+        <p:spPr>
+          <a:xfrm>
+            <a:off x="0" y="164592"/>
+            <a:ext cx="146304" cy="6693408"/>
+          </a:xfrm>
+          <a:prstGeom prst="rect">
+            <a:avLst/>
+          </a:prstGeom>
+          <a:solidFill>
+            <a:srgbClr val="2F8A28"/>
+          </a:solidFill>
+          <a:ln w="12700">
+            <a:solidFill>
+              <a:srgbClr val="2F8A28"/>
+            </a:solidFill>
+            <a:prstDash val="solid"/>
+          </a:ln>
+        </p:spPr>
+      </p:sp>
+      <p:sp>
+        <p:nvSpPr>
+          <p:cNvPr id="4" name="Text 2"/>
           <p:cNvSpPr/>
           <p:nvPr/>
         </p:nvSpPr>
@@ -3066,7 +3621,7 @@
       </p:sp>
       <p:sp>
         <p:nvSpPr>
-          <p:cNvPr id="4" name="Text 2"/>
+          <p:cNvPr id="5" name="Text 3"/>
           <p:cNvSpPr/>
           <p:nvPr/>
         </p:nvSpPr>
@@ -3105,7 +3660,7 @@
       </p:sp>
       <p:sp>
         <p:nvSpPr>
-          <p:cNvPr id="5" name="Text 3"/>
+          <p:cNvPr id="6" name="Text 4"/>
           <p:cNvSpPr/>
           <p:nvPr/>
         </p:nvSpPr>
@@ -3144,13 +3699,77 @@
       </p:sp>
       <p:sp>
         <p:nvSpPr>
-          <p:cNvPr id="6" name="Text 4"/>
+          <p:cNvPr id="7" name="Shape 5"/>
           <p:cNvSpPr/>
           <p:nvPr/>
         </p:nvSpPr>
         <p:spPr>
           <a:xfrm>
             <a:off x="640080" y="658368"/>
+            <a:ext cx="420624" cy="420624"/>
+          </a:xfrm>
+          <a:prstGeom prst="ellipse">
+            <a:avLst/>
+          </a:prstGeom>
+          <a:solidFill>
+            <a:srgbClr val="0068B7"/>
+          </a:solidFill>
+          <a:ln w="12700">
+            <a:solidFill>
+              <a:srgbClr val="0068B7"/>
+            </a:solidFill>
+            <a:prstDash val="solid"/>
+          </a:ln>
+        </p:spPr>
+      </p:sp>
+      <p:sp>
+        <p:nvSpPr>
+          <p:cNvPr id="8" name="Text 6"/>
+          <p:cNvSpPr/>
+          <p:nvPr/>
+        </p:nvSpPr>
+        <p:spPr>
+          <a:xfrm>
+            <a:off x="640080" y="731520"/>
+            <a:ext cx="420624" cy="164592"/>
+          </a:xfrm>
+          <a:prstGeom prst="rect">
+            <a:avLst/>
+          </a:prstGeom>
+          <a:noFill/>
+          <a:ln/>
+        </p:spPr>
+        <p:txBody>
+          <a:bodyPr wrap="square" lIns="0" tIns="0" rIns="0" bIns="0" rtlCol="0" anchor="ctr"/>
+          <a:lstStyle/>
+          <a:p>
+            <a:pPr algn="ctr" indent="0" marL="0">
+              <a:buNone/>
+            </a:pPr>
+            <a:r>
+              <a:rPr lang="en-US" sz="1100" b="1" dirty="0">
+                <a:solidFill>
+                  <a:srgbClr val="FFFFFF"/>
+                </a:solidFill>
+                <a:latin typeface="Aptos" pitchFamily="34" charset="0"/>
+                <a:ea typeface="Aptos" pitchFamily="34" charset="-122"/>
+                <a:cs typeface="Aptos" pitchFamily="34" charset="-120"/>
+              </a:rPr>
+              <a:t>7</a:t>
+            </a:r>
+            <a:endParaRPr lang="en-US" sz="1100" dirty="0"/>
+          </a:p>
+        </p:txBody>
+      </p:sp>
+      <p:sp>
+        <p:nvSpPr>
+          <p:cNvPr id="9" name="Text 7"/>
+          <p:cNvSpPr/>
+          <p:nvPr/>
+        </p:nvSpPr>
+        <p:spPr>
+          <a:xfrm>
+            <a:off x="640080" y="621792"/>
             <a:ext cx="10881360" cy="566928"/>
           </a:xfrm>
           <a:prstGeom prst="rect">
@@ -3177,7 +3796,7 @@
                 <a:ea typeface="Aptos Display" pitchFamily="34" charset="-122"/>
                 <a:cs typeface="Aptos Display" pitchFamily="34" charset="-120"/>
               </a:rPr>
-              <a:t>Reflection Questions</a:t>
+              <a:t>Risks, Failure Modes, and Guardrails</a:t>
             </a:r>
             <a:endParaRPr lang="en-US" sz="2700" dirty="0"/>
           </a:p>
@@ -3185,32 +3804,178 @@
       </p:sp>
       <p:sp>
         <p:nvSpPr>
-          <p:cNvPr id="7" name="Text 5"/>
-          <p:cNvSpPr/>
-          <p:nvPr/>
-        </p:nvSpPr>
-        <p:spPr>
-          <a:xfrm>
-            <a:off x="822960" y="1325880"/>
-            <a:ext cx="10378440" cy="4800600"/>
-          </a:xfrm>
-          <a:prstGeom prst="rect">
-            <a:avLst/>
-          </a:prstGeom>
-          <a:noFill/>
-          <a:ln/>
-        </p:spPr>
-        <p:txBody>
-          <a:bodyPr wrap="square" lIns="1016" tIns="1016" rIns="1016" bIns="1016" rtlCol="0" anchor="t">
+          <p:cNvPr id="10" name="Text 8"/>
+          <p:cNvSpPr/>
+          <p:nvPr/>
+        </p:nvSpPr>
+        <p:spPr>
+          <a:xfrm>
+            <a:off x="868680" y="1417320"/>
+            <a:ext cx="6675120" cy="4434840"/>
+          </a:xfrm>
+          <a:prstGeom prst="rect">
+            <a:avLst/>
+          </a:prstGeom>
+          <a:noFill/>
+          <a:ln/>
+        </p:spPr>
+        <p:txBody>
+          <a:bodyPr wrap="square" lIns="635" tIns="635" rIns="635" bIns="635" rtlCol="0" anchor="t">
             <a:normAutofit/>
           </a:bodyPr>
           <a:lstStyle/>
           <a:p>
+            <a:r>
+              <a:rPr lang="en-US" sz="1700" dirty="0">
+                <a:solidFill>
+                  <a:srgbClr val="17364A"/>
+                </a:solidFill>
+                <a:latin typeface="Aptos" pitchFamily="34" charset="0"/>
+                <a:ea typeface="Aptos" pitchFamily="34" charset="-122"/>
+                <a:cs typeface="Aptos" pitchFamily="34" charset="-120"/>
+              </a:rPr>
+              <a:t>One risk is hidden cost.</a:t>
+            </a:r>
+            <a:endParaRPr lang="en-US" sz="1700" dirty="0"/>
+          </a:p>
+          <a:p>
+            <a:r>
+              <a:rPr lang="en-US" sz="1700" dirty="0">
+                <a:solidFill>
+                  <a:srgbClr val="17364A"/>
+                </a:solidFill>
+                <a:latin typeface="Aptos" pitchFamily="34" charset="0"/>
+                <a:ea typeface="Aptos" pitchFamily="34" charset="-122"/>
+                <a:cs typeface="Aptos" pitchFamily="34" charset="-120"/>
+              </a:rPr>
+              <a:t>Agencies may purchase an AI tool without funding integration, monitoring, validation, staff training, or ongoing support.</a:t>
+            </a:r>
+            <a:endParaRPr lang="en-US" sz="1700" dirty="0"/>
+          </a:p>
+          <a:p>
+            <a:r>
+              <a:rPr lang="en-US" sz="1700" dirty="0">
+                <a:solidFill>
+                  <a:srgbClr val="17364A"/>
+                </a:solidFill>
+                <a:latin typeface="Aptos" pitchFamily="34" charset="0"/>
+                <a:ea typeface="Aptos" pitchFamily="34" charset="-122"/>
+                <a:cs typeface="Aptos" pitchFamily="34" charset="-120"/>
+              </a:rPr>
+              <a:t>A guardrail is to require total cost of ownership in every business case.</a:t>
+            </a:r>
+            <a:endParaRPr lang="en-US" sz="1700" dirty="0"/>
+          </a:p>
+          <a:p>
+            <a:r>
+              <a:rPr lang="en-US" sz="1700" dirty="0">
+                <a:solidFill>
+                  <a:srgbClr val="17364A"/>
+                </a:solidFill>
+                <a:latin typeface="Aptos" pitchFamily="34" charset="0"/>
+                <a:ea typeface="Aptos" pitchFamily="34" charset="-122"/>
+                <a:cs typeface="Aptos" pitchFamily="34" charset="-120"/>
+              </a:rPr>
+              <a:t>Another risk is benefits inflation.</a:t>
+            </a:r>
+            <a:endParaRPr lang="en-US" sz="1700" dirty="0"/>
+          </a:p>
+        </p:txBody>
+      </p:sp>
+      <p:sp>
+        <p:nvSpPr>
+          <p:cNvPr id="11" name="Shape 9"/>
+          <p:cNvSpPr/>
+          <p:nvPr/>
+        </p:nvSpPr>
+        <p:spPr>
+          <a:xfrm>
+            <a:off x="7909560" y="1417320"/>
+            <a:ext cx="3154680" cy="1828800"/>
+          </a:xfrm>
+          <a:prstGeom prst="roundRect">
+            <a:avLst>
+              <a:gd name="adj" fmla="val 6000"/>
+            </a:avLst>
+          </a:prstGeom>
+          <a:solidFill>
+            <a:srgbClr val="EEF8ED"/>
+          </a:solidFill>
+          <a:ln w="12700">
+            <a:solidFill>
+              <a:srgbClr val="B9D7E6"/>
+            </a:solidFill>
+            <a:prstDash val="solid"/>
+          </a:ln>
+        </p:spPr>
+      </p:sp>
+      <p:sp>
+        <p:nvSpPr>
+          <p:cNvPr id="12" name="Text 10"/>
+          <p:cNvSpPr/>
+          <p:nvPr/>
+        </p:nvSpPr>
+        <p:spPr>
+          <a:xfrm>
+            <a:off x="8074152" y="1563624"/>
+            <a:ext cx="2825496" cy="201168"/>
+          </a:xfrm>
+          <a:prstGeom prst="rect">
+            <a:avLst/>
+          </a:prstGeom>
+          <a:noFill/>
+          <a:ln/>
+        </p:spPr>
+        <p:txBody>
+          <a:bodyPr wrap="square" lIns="0" tIns="0" rIns="0" bIns="0" rtlCol="0" anchor="ctr"/>
+          <a:lstStyle/>
+          <a:p>
             <a:pPr indent="0" marL="0">
               <a:buNone/>
             </a:pPr>
             <a:r>
-              <a:rPr lang="en-US" sz="1420" dirty="0">
+              <a:rPr lang="en-US" sz="950" b="1" dirty="0">
+                <a:solidFill>
+                  <a:srgbClr val="0068B7"/>
+                </a:solidFill>
+                <a:latin typeface="Aptos" pitchFamily="34" charset="0"/>
+                <a:ea typeface="Aptos" pitchFamily="34" charset="-122"/>
+                <a:cs typeface="Aptos" pitchFamily="34" charset="-120"/>
+              </a:rPr>
+              <a:t>Key idea</a:t>
+            </a:r>
+            <a:endParaRPr lang="en-US" sz="950" dirty="0"/>
+          </a:p>
+        </p:txBody>
+      </p:sp>
+      <p:sp>
+        <p:nvSpPr>
+          <p:cNvPr id="13" name="Text 11"/>
+          <p:cNvSpPr/>
+          <p:nvPr/>
+        </p:nvSpPr>
+        <p:spPr>
+          <a:xfrm>
+            <a:off x="8074152" y="1856232"/>
+            <a:ext cx="2825496" cy="1261872"/>
+          </a:xfrm>
+          <a:prstGeom prst="rect">
+            <a:avLst/>
+          </a:prstGeom>
+          <a:noFill/>
+          <a:ln/>
+        </p:spPr>
+        <p:txBody>
+          <a:bodyPr wrap="square" lIns="0" tIns="0" rIns="0" bIns="0" rtlCol="0" anchor="t">
+            <a:normAutofit/>
+          </a:bodyPr>
+          <a:lstStyle/>
+          <a:p>
+            <a:pPr indent="0" marL="0">
+              <a:buNone/>
+            </a:pPr>
+            <a:r>
+              <a:rPr lang="en-US" sz="1250" dirty="0">
                 <a:solidFill>
                   <a:srgbClr val="17364A"/>
                 </a:solidFill>
@@ -3218,9 +3983,116 @@
                 <a:ea typeface="Aptos" pitchFamily="34" charset="-122"/>
                 <a:cs typeface="Aptos" pitchFamily="34" charset="-120"/>
               </a:rPr>
-              <a:t>Which current or proposed AI use case in your agency raises this leadership or governance issue most clearly? Who currently has authority to make decisions about this issue, and is that authority documented? What evidence would governance or leadership need before approving the use case?</a:t>
-            </a:r>
-            <a:endParaRPr lang="en-US" sz="1420" dirty="0"/>
+              <a:t>One risk is hidden cost.</a:t>
+            </a:r>
+            <a:endParaRPr lang="en-US" sz="1250" dirty="0"/>
+          </a:p>
+        </p:txBody>
+      </p:sp>
+      <p:sp>
+        <p:nvSpPr>
+          <p:cNvPr id="14" name="Shape 12"/>
+          <p:cNvSpPr/>
+          <p:nvPr/>
+        </p:nvSpPr>
+        <p:spPr>
+          <a:xfrm>
+            <a:off x="7909560" y="3520440"/>
+            <a:ext cx="3154680" cy="1737360"/>
+          </a:xfrm>
+          <a:prstGeom prst="roundRect">
+            <a:avLst>
+              <a:gd name="adj" fmla="val 6316"/>
+            </a:avLst>
+          </a:prstGeom>
+          <a:solidFill>
+            <a:srgbClr val="EAF6F8"/>
+          </a:solidFill>
+          <a:ln w="12700">
+            <a:solidFill>
+              <a:srgbClr val="B9D7E6"/>
+            </a:solidFill>
+            <a:prstDash val="solid"/>
+          </a:ln>
+        </p:spPr>
+      </p:sp>
+      <p:sp>
+        <p:nvSpPr>
+          <p:cNvPr id="15" name="Text 13"/>
+          <p:cNvSpPr/>
+          <p:nvPr/>
+        </p:nvSpPr>
+        <p:spPr>
+          <a:xfrm>
+            <a:off x="8074152" y="3666744"/>
+            <a:ext cx="2825496" cy="201168"/>
+          </a:xfrm>
+          <a:prstGeom prst="rect">
+            <a:avLst/>
+          </a:prstGeom>
+          <a:noFill/>
+          <a:ln/>
+        </p:spPr>
+        <p:txBody>
+          <a:bodyPr wrap="square" lIns="0" tIns="0" rIns="0" bIns="0" rtlCol="0" anchor="ctr"/>
+          <a:lstStyle/>
+          <a:p>
+            <a:pPr indent="0" marL="0">
+              <a:buNone/>
+            </a:pPr>
+            <a:r>
+              <a:rPr lang="en-US" sz="950" b="1" dirty="0">
+                <a:solidFill>
+                  <a:srgbClr val="0068B7"/>
+                </a:solidFill>
+                <a:latin typeface="Aptos" pitchFamily="34" charset="0"/>
+                <a:ea typeface="Aptos" pitchFamily="34" charset="-122"/>
+                <a:cs typeface="Aptos" pitchFamily="34" charset="-120"/>
+              </a:rPr>
+              <a:t>Use this for</a:t>
+            </a:r>
+            <a:endParaRPr lang="en-US" sz="950" dirty="0"/>
+          </a:p>
+        </p:txBody>
+      </p:sp>
+      <p:sp>
+        <p:nvSpPr>
+          <p:cNvPr id="16" name="Text 14"/>
+          <p:cNvSpPr/>
+          <p:nvPr/>
+        </p:nvSpPr>
+        <p:spPr>
+          <a:xfrm>
+            <a:off x="8074152" y="3959352"/>
+            <a:ext cx="2825496" cy="1170432"/>
+          </a:xfrm>
+          <a:prstGeom prst="rect">
+            <a:avLst/>
+          </a:prstGeom>
+          <a:noFill/>
+          <a:ln/>
+        </p:spPr>
+        <p:txBody>
+          <a:bodyPr wrap="square" lIns="0" tIns="0" rIns="0" bIns="0" rtlCol="0" anchor="t">
+            <a:normAutofit/>
+          </a:bodyPr>
+          <a:lstStyle/>
+          <a:p>
+            <a:pPr indent="0" marL="0">
+              <a:buNone/>
+            </a:pPr>
+            <a:r>
+              <a:rPr lang="en-US" sz="1250" dirty="0">
+                <a:solidFill>
+                  <a:srgbClr val="17364A"/>
+                </a:solidFill>
+                <a:latin typeface="Aptos" pitchFamily="34" charset="0"/>
+                <a:ea typeface="Aptos" pitchFamily="34" charset="-122"/>
+                <a:cs typeface="Aptos" pitchFamily="34" charset="-120"/>
+              </a:rPr>
+              <a:t>Connect the concept to public health decisions, safeguards, documentation, or implementation work.</a:t>
+            </a:r>
+            <a:endParaRPr lang="en-US" sz="1250" dirty="0"/>
           </a:p>
         </p:txBody>
       </p:sp>
@@ -3283,7 +4155,32 @@
       </p:sp>
       <p:sp>
         <p:nvSpPr>
-          <p:cNvPr id="3" name="Text 1"/>
+          <p:cNvPr id="3" name="Shape 1"/>
+          <p:cNvSpPr/>
+          <p:nvPr/>
+        </p:nvSpPr>
+        <p:spPr>
+          <a:xfrm>
+            <a:off x="0" y="164592"/>
+            <a:ext cx="146304" cy="6693408"/>
+          </a:xfrm>
+          <a:prstGeom prst="rect">
+            <a:avLst/>
+          </a:prstGeom>
+          <a:solidFill>
+            <a:srgbClr val="2F8A28"/>
+          </a:solidFill>
+          <a:ln w="12700">
+            <a:solidFill>
+              <a:srgbClr val="2F8A28"/>
+            </a:solidFill>
+            <a:prstDash val="solid"/>
+          </a:ln>
+        </p:spPr>
+      </p:sp>
+      <p:sp>
+        <p:nvSpPr>
+          <p:cNvPr id="4" name="Text 2"/>
           <p:cNvSpPr/>
           <p:nvPr/>
         </p:nvSpPr>
@@ -3322,7 +4219,7 @@
       </p:sp>
       <p:sp>
         <p:nvSpPr>
-          <p:cNvPr id="4" name="Text 2"/>
+          <p:cNvPr id="5" name="Text 3"/>
           <p:cNvSpPr/>
           <p:nvPr/>
         </p:nvSpPr>
@@ -3361,7 +4258,7 @@
       </p:sp>
       <p:sp>
         <p:nvSpPr>
-          <p:cNvPr id="5" name="Text 3"/>
+          <p:cNvPr id="6" name="Text 4"/>
           <p:cNvSpPr/>
           <p:nvPr/>
         </p:nvSpPr>
@@ -3400,13 +4297,77 @@
       </p:sp>
       <p:sp>
         <p:nvSpPr>
-          <p:cNvPr id="6" name="Text 4"/>
+          <p:cNvPr id="7" name="Shape 5"/>
           <p:cNvSpPr/>
           <p:nvPr/>
         </p:nvSpPr>
         <p:spPr>
           <a:xfrm>
             <a:off x="640080" y="658368"/>
+            <a:ext cx="420624" cy="420624"/>
+          </a:xfrm>
+          <a:prstGeom prst="ellipse">
+            <a:avLst/>
+          </a:prstGeom>
+          <a:solidFill>
+            <a:srgbClr val="0068B7"/>
+          </a:solidFill>
+          <a:ln w="12700">
+            <a:solidFill>
+              <a:srgbClr val="0068B7"/>
+            </a:solidFill>
+            <a:prstDash val="solid"/>
+          </a:ln>
+        </p:spPr>
+      </p:sp>
+      <p:sp>
+        <p:nvSpPr>
+          <p:cNvPr id="8" name="Text 6"/>
+          <p:cNvSpPr/>
+          <p:nvPr/>
+        </p:nvSpPr>
+        <p:spPr>
+          <a:xfrm>
+            <a:off x="640080" y="731520"/>
+            <a:ext cx="420624" cy="164592"/>
+          </a:xfrm>
+          <a:prstGeom prst="rect">
+            <a:avLst/>
+          </a:prstGeom>
+          <a:noFill/>
+          <a:ln/>
+        </p:spPr>
+        <p:txBody>
+          <a:bodyPr wrap="square" lIns="0" tIns="0" rIns="0" bIns="0" rtlCol="0" anchor="ctr"/>
+          <a:lstStyle/>
+          <a:p>
+            <a:pPr algn="ctr" indent="0" marL="0">
+              <a:buNone/>
+            </a:pPr>
+            <a:r>
+              <a:rPr lang="en-US" sz="1100" b="1" dirty="0">
+                <a:solidFill>
+                  <a:srgbClr val="FFFFFF"/>
+                </a:solidFill>
+                <a:latin typeface="Aptos" pitchFamily="34" charset="0"/>
+                <a:ea typeface="Aptos" pitchFamily="34" charset="-122"/>
+                <a:cs typeface="Aptos" pitchFamily="34" charset="-120"/>
+              </a:rPr>
+              <a:t>8</a:t>
+            </a:r>
+            <a:endParaRPr lang="en-US" sz="1100" dirty="0"/>
+          </a:p>
+        </p:txBody>
+      </p:sp>
+      <p:sp>
+        <p:nvSpPr>
+          <p:cNvPr id="9" name="Text 7"/>
+          <p:cNvSpPr/>
+          <p:nvPr/>
+        </p:nvSpPr>
+        <p:spPr>
+          <a:xfrm>
+            <a:off x="640080" y="621792"/>
             <a:ext cx="10881360" cy="566928"/>
           </a:xfrm>
           <a:prstGeom prst="rect">
@@ -3433,7 +4394,7 @@
                 <a:ea typeface="Aptos Display" pitchFamily="34" charset="-122"/>
                 <a:cs typeface="Aptos Display" pitchFamily="34" charset="-120"/>
               </a:rPr>
-              <a:t>Reflection Questions Continued</a:t>
+              <a:t>Application to AI-Supported Workflows</a:t>
             </a:r>
             <a:endParaRPr lang="en-US" sz="2700" dirty="0"/>
           </a:p>
@@ -3441,32 +4402,178 @@
       </p:sp>
       <p:sp>
         <p:nvSpPr>
-          <p:cNvPr id="7" name="Text 5"/>
-          <p:cNvSpPr/>
-          <p:nvPr/>
-        </p:nvSpPr>
-        <p:spPr>
-          <a:xfrm>
-            <a:off x="822960" y="1325880"/>
-            <a:ext cx="10378440" cy="4800600"/>
-          </a:xfrm>
-          <a:prstGeom prst="rect">
-            <a:avLst/>
-          </a:prstGeom>
-          <a:noFill/>
-          <a:ln/>
-        </p:spPr>
-        <p:txBody>
-          <a:bodyPr wrap="square" lIns="1016" tIns="1016" rIns="1016" bIns="1016" rtlCol="0" anchor="t">
+          <p:cNvPr id="10" name="Text 8"/>
+          <p:cNvSpPr/>
+          <p:nvPr/>
+        </p:nvSpPr>
+        <p:spPr>
+          <a:xfrm>
+            <a:off x="868680" y="1417320"/>
+            <a:ext cx="6675120" cy="4434840"/>
+          </a:xfrm>
+          <a:prstGeom prst="rect">
+            <a:avLst/>
+          </a:prstGeom>
+          <a:noFill/>
+          <a:ln/>
+        </p:spPr>
+        <p:txBody>
+          <a:bodyPr wrap="square" lIns="635" tIns="635" rIns="635" bIns="635" rtlCol="0" anchor="t">
             <a:normAutofit/>
           </a:bodyPr>
           <a:lstStyle/>
           <a:p>
+            <a:r>
+              <a:rPr lang="en-US" sz="1700" dirty="0">
+                <a:solidFill>
+                  <a:srgbClr val="17364A"/>
+                </a:solidFill>
+                <a:latin typeface="Aptos" pitchFamily="34" charset="0"/>
+                <a:ea typeface="Aptos" pitchFamily="34" charset="-122"/>
+                <a:cs typeface="Aptos" pitchFamily="34" charset="-120"/>
+              </a:rPr>
+              <a:t>Generative AI business cases should include review time, source verification, and records considerations.</a:t>
+            </a:r>
+            <a:endParaRPr lang="en-US" sz="1700" dirty="0"/>
+          </a:p>
+          <a:p>
+            <a:r>
+              <a:rPr lang="en-US" sz="1700" dirty="0">
+                <a:solidFill>
+                  <a:srgbClr val="17364A"/>
+                </a:solidFill>
+                <a:latin typeface="Aptos" pitchFamily="34" charset="0"/>
+                <a:ea typeface="Aptos" pitchFamily="34" charset="-122"/>
+                <a:cs typeface="Aptos" pitchFamily="34" charset="-120"/>
+              </a:rPr>
+              <a:t>Predictive analytics business cases should include validation data, subgroup testing, and monitoring costs.</a:t>
+            </a:r>
+            <a:endParaRPr lang="en-US" sz="1700" dirty="0"/>
+          </a:p>
+          <a:p>
+            <a:r>
+              <a:rPr lang="en-US" sz="1700" dirty="0">
+                <a:solidFill>
+                  <a:srgbClr val="17364A"/>
+                </a:solidFill>
+                <a:latin typeface="Aptos" pitchFamily="34" charset="0"/>
+                <a:ea typeface="Aptos" pitchFamily="34" charset="-122"/>
+                <a:cs typeface="Aptos" pitchFamily="34" charset="-120"/>
+              </a:rPr>
+              <a:t>Agentic AI business cases should include security architecture, approval workflows, rollback, logging, and incident response.</a:t>
+            </a:r>
+            <a:endParaRPr lang="en-US" sz="1700" dirty="0"/>
+          </a:p>
+          <a:p>
+            <a:r>
+              <a:rPr lang="en-US" sz="1700" dirty="0">
+                <a:solidFill>
+                  <a:srgbClr val="17364A"/>
+                </a:solidFill>
+                <a:latin typeface="Aptos" pitchFamily="34" charset="0"/>
+                <a:ea typeface="Aptos" pitchFamily="34" charset="-122"/>
+                <a:cs typeface="Aptos" pitchFamily="34" charset="-120"/>
+              </a:rPr>
+              <a:t>Cost and value must reflect responsible use.</a:t>
+            </a:r>
+            <a:endParaRPr lang="en-US" sz="1700" dirty="0"/>
+          </a:p>
+        </p:txBody>
+      </p:sp>
+      <p:sp>
+        <p:nvSpPr>
+          <p:cNvPr id="11" name="Shape 9"/>
+          <p:cNvSpPr/>
+          <p:nvPr/>
+        </p:nvSpPr>
+        <p:spPr>
+          <a:xfrm>
+            <a:off x="7909560" y="1417320"/>
+            <a:ext cx="3154680" cy="1828800"/>
+          </a:xfrm>
+          <a:prstGeom prst="roundRect">
+            <a:avLst>
+              <a:gd name="adj" fmla="val 6000"/>
+            </a:avLst>
+          </a:prstGeom>
+          <a:solidFill>
+            <a:srgbClr val="EEF8ED"/>
+          </a:solidFill>
+          <a:ln w="12700">
+            <a:solidFill>
+              <a:srgbClr val="B9D7E6"/>
+            </a:solidFill>
+            <a:prstDash val="solid"/>
+          </a:ln>
+        </p:spPr>
+      </p:sp>
+      <p:sp>
+        <p:nvSpPr>
+          <p:cNvPr id="12" name="Text 10"/>
+          <p:cNvSpPr/>
+          <p:nvPr/>
+        </p:nvSpPr>
+        <p:spPr>
+          <a:xfrm>
+            <a:off x="8074152" y="1563624"/>
+            <a:ext cx="2825496" cy="201168"/>
+          </a:xfrm>
+          <a:prstGeom prst="rect">
+            <a:avLst/>
+          </a:prstGeom>
+          <a:noFill/>
+          <a:ln/>
+        </p:spPr>
+        <p:txBody>
+          <a:bodyPr wrap="square" lIns="0" tIns="0" rIns="0" bIns="0" rtlCol="0" anchor="ctr"/>
+          <a:lstStyle/>
+          <a:p>
             <a:pPr indent="0" marL="0">
               <a:buNone/>
             </a:pPr>
             <a:r>
-              <a:rPr lang="en-US" sz="1420" dirty="0">
+              <a:rPr lang="en-US" sz="950" b="1" dirty="0">
+                <a:solidFill>
+                  <a:srgbClr val="0068B7"/>
+                </a:solidFill>
+                <a:latin typeface="Aptos" pitchFamily="34" charset="0"/>
+                <a:ea typeface="Aptos" pitchFamily="34" charset="-122"/>
+                <a:cs typeface="Aptos" pitchFamily="34" charset="-120"/>
+              </a:rPr>
+              <a:t>Key idea</a:t>
+            </a:r>
+            <a:endParaRPr lang="en-US" sz="950" dirty="0"/>
+          </a:p>
+        </p:txBody>
+      </p:sp>
+      <p:sp>
+        <p:nvSpPr>
+          <p:cNvPr id="13" name="Text 11"/>
+          <p:cNvSpPr/>
+          <p:nvPr/>
+        </p:nvSpPr>
+        <p:spPr>
+          <a:xfrm>
+            <a:off x="8074152" y="1856232"/>
+            <a:ext cx="2825496" cy="1261872"/>
+          </a:xfrm>
+          <a:prstGeom prst="rect">
+            <a:avLst/>
+          </a:prstGeom>
+          <a:noFill/>
+          <a:ln/>
+        </p:spPr>
+        <p:txBody>
+          <a:bodyPr wrap="square" lIns="0" tIns="0" rIns="0" bIns="0" rtlCol="0" anchor="t">
+            <a:normAutofit/>
+          </a:bodyPr>
+          <a:lstStyle/>
+          <a:p>
+            <a:pPr indent="0" marL="0">
+              <a:buNone/>
+            </a:pPr>
+            <a:r>
+              <a:rPr lang="en-US" sz="1250" dirty="0">
                 <a:solidFill>
                   <a:srgbClr val="17364A"/>
                 </a:solidFill>
@@ -3474,9 +4581,116 @@
                 <a:ea typeface="Aptos" pitchFamily="34" charset="-122"/>
                 <a:cs typeface="Aptos" pitchFamily="34" charset="-120"/>
               </a:rPr>
-              <a:t>Which staff, partners, or communities would be affected if this issue were handled poorly? What policy, process, or artifact should be created or updated after this module?</a:t>
-            </a:r>
-            <a:endParaRPr lang="en-US" sz="1420" dirty="0"/>
+              <a:t>Generative AI business cases should include review time, source verification, and records considerations.</a:t>
+            </a:r>
+            <a:endParaRPr lang="en-US" sz="1250" dirty="0"/>
+          </a:p>
+        </p:txBody>
+      </p:sp>
+      <p:sp>
+        <p:nvSpPr>
+          <p:cNvPr id="14" name="Shape 12"/>
+          <p:cNvSpPr/>
+          <p:nvPr/>
+        </p:nvSpPr>
+        <p:spPr>
+          <a:xfrm>
+            <a:off x="7909560" y="3520440"/>
+            <a:ext cx="3154680" cy="1737360"/>
+          </a:xfrm>
+          <a:prstGeom prst="roundRect">
+            <a:avLst>
+              <a:gd name="adj" fmla="val 6316"/>
+            </a:avLst>
+          </a:prstGeom>
+          <a:solidFill>
+            <a:srgbClr val="EAF6F8"/>
+          </a:solidFill>
+          <a:ln w="12700">
+            <a:solidFill>
+              <a:srgbClr val="B9D7E6"/>
+            </a:solidFill>
+            <a:prstDash val="solid"/>
+          </a:ln>
+        </p:spPr>
+      </p:sp>
+      <p:sp>
+        <p:nvSpPr>
+          <p:cNvPr id="15" name="Text 13"/>
+          <p:cNvSpPr/>
+          <p:nvPr/>
+        </p:nvSpPr>
+        <p:spPr>
+          <a:xfrm>
+            <a:off x="8074152" y="3666744"/>
+            <a:ext cx="2825496" cy="201168"/>
+          </a:xfrm>
+          <a:prstGeom prst="rect">
+            <a:avLst/>
+          </a:prstGeom>
+          <a:noFill/>
+          <a:ln/>
+        </p:spPr>
+        <p:txBody>
+          <a:bodyPr wrap="square" lIns="0" tIns="0" rIns="0" bIns="0" rtlCol="0" anchor="ctr"/>
+          <a:lstStyle/>
+          <a:p>
+            <a:pPr indent="0" marL="0">
+              <a:buNone/>
+            </a:pPr>
+            <a:r>
+              <a:rPr lang="en-US" sz="950" b="1" dirty="0">
+                <a:solidFill>
+                  <a:srgbClr val="0068B7"/>
+                </a:solidFill>
+                <a:latin typeface="Aptos" pitchFamily="34" charset="0"/>
+                <a:ea typeface="Aptos" pitchFamily="34" charset="-122"/>
+                <a:cs typeface="Aptos" pitchFamily="34" charset="-120"/>
+              </a:rPr>
+              <a:t>Use this for</a:t>
+            </a:r>
+            <a:endParaRPr lang="en-US" sz="950" dirty="0"/>
+          </a:p>
+        </p:txBody>
+      </p:sp>
+      <p:sp>
+        <p:nvSpPr>
+          <p:cNvPr id="16" name="Text 14"/>
+          <p:cNvSpPr/>
+          <p:nvPr/>
+        </p:nvSpPr>
+        <p:spPr>
+          <a:xfrm>
+            <a:off x="8074152" y="3959352"/>
+            <a:ext cx="2825496" cy="1170432"/>
+          </a:xfrm>
+          <a:prstGeom prst="rect">
+            <a:avLst/>
+          </a:prstGeom>
+          <a:noFill/>
+          <a:ln/>
+        </p:spPr>
+        <p:txBody>
+          <a:bodyPr wrap="square" lIns="0" tIns="0" rIns="0" bIns="0" rtlCol="0" anchor="t">
+            <a:normAutofit/>
+          </a:bodyPr>
+          <a:lstStyle/>
+          <a:p>
+            <a:pPr indent="0" marL="0">
+              <a:buNone/>
+            </a:pPr>
+            <a:r>
+              <a:rPr lang="en-US" sz="1250" dirty="0">
+                <a:solidFill>
+                  <a:srgbClr val="17364A"/>
+                </a:solidFill>
+                <a:latin typeface="Aptos" pitchFamily="34" charset="0"/>
+                <a:ea typeface="Aptos" pitchFamily="34" charset="-122"/>
+                <a:cs typeface="Aptos" pitchFamily="34" charset="-120"/>
+              </a:rPr>
+              <a:t>Connect the concept to public health decisions, safeguards, documentation, or implementation work.</a:t>
+            </a:r>
+            <a:endParaRPr lang="en-US" sz="1250" dirty="0"/>
           </a:p>
         </p:txBody>
       </p:sp>
@@ -3539,7 +4753,32 @@
       </p:sp>
       <p:sp>
         <p:nvSpPr>
-          <p:cNvPr id="3" name="Text 1"/>
+          <p:cNvPr id="3" name="Shape 1"/>
+          <p:cNvSpPr/>
+          <p:nvPr/>
+        </p:nvSpPr>
+        <p:spPr>
+          <a:xfrm>
+            <a:off x="0" y="164592"/>
+            <a:ext cx="146304" cy="6693408"/>
+          </a:xfrm>
+          <a:prstGeom prst="rect">
+            <a:avLst/>
+          </a:prstGeom>
+          <a:solidFill>
+            <a:srgbClr val="2F8A28"/>
+          </a:solidFill>
+          <a:ln w="12700">
+            <a:solidFill>
+              <a:srgbClr val="2F8A28"/>
+            </a:solidFill>
+            <a:prstDash val="solid"/>
+          </a:ln>
+        </p:spPr>
+      </p:sp>
+      <p:sp>
+        <p:nvSpPr>
+          <p:cNvPr id="4" name="Text 2"/>
           <p:cNvSpPr/>
           <p:nvPr/>
         </p:nvSpPr>
@@ -3578,7 +4817,7 @@
       </p:sp>
       <p:sp>
         <p:nvSpPr>
-          <p:cNvPr id="4" name="Text 2"/>
+          <p:cNvPr id="5" name="Text 3"/>
           <p:cNvSpPr/>
           <p:nvPr/>
         </p:nvSpPr>
@@ -3617,7 +4856,7 @@
       </p:sp>
       <p:sp>
         <p:nvSpPr>
-          <p:cNvPr id="5" name="Text 3"/>
+          <p:cNvPr id="6" name="Text 4"/>
           <p:cNvSpPr/>
           <p:nvPr/>
         </p:nvSpPr>
@@ -3656,13 +4895,77 @@
       </p:sp>
       <p:sp>
         <p:nvSpPr>
-          <p:cNvPr id="6" name="Text 4"/>
+          <p:cNvPr id="7" name="Shape 5"/>
           <p:cNvSpPr/>
           <p:nvPr/>
         </p:nvSpPr>
         <p:spPr>
           <a:xfrm>
             <a:off x="640080" y="658368"/>
+            <a:ext cx="420624" cy="420624"/>
+          </a:xfrm>
+          <a:prstGeom prst="ellipse">
+            <a:avLst/>
+          </a:prstGeom>
+          <a:solidFill>
+            <a:srgbClr val="0068B7"/>
+          </a:solidFill>
+          <a:ln w="12700">
+            <a:solidFill>
+              <a:srgbClr val="0068B7"/>
+            </a:solidFill>
+            <a:prstDash val="solid"/>
+          </a:ln>
+        </p:spPr>
+      </p:sp>
+      <p:sp>
+        <p:nvSpPr>
+          <p:cNvPr id="8" name="Text 6"/>
+          <p:cNvSpPr/>
+          <p:nvPr/>
+        </p:nvSpPr>
+        <p:spPr>
+          <a:xfrm>
+            <a:off x="640080" y="731520"/>
+            <a:ext cx="420624" cy="164592"/>
+          </a:xfrm>
+          <a:prstGeom prst="rect">
+            <a:avLst/>
+          </a:prstGeom>
+          <a:noFill/>
+          <a:ln/>
+        </p:spPr>
+        <p:txBody>
+          <a:bodyPr wrap="square" lIns="0" tIns="0" rIns="0" bIns="0" rtlCol="0" anchor="ctr"/>
+          <a:lstStyle/>
+          <a:p>
+            <a:pPr algn="ctr" indent="0" marL="0">
+              <a:buNone/>
+            </a:pPr>
+            <a:r>
+              <a:rPr lang="en-US" sz="1100" b="1" dirty="0">
+                <a:solidFill>
+                  <a:srgbClr val="FFFFFF"/>
+                </a:solidFill>
+                <a:latin typeface="Aptos" pitchFamily="34" charset="0"/>
+                <a:ea typeface="Aptos" pitchFamily="34" charset="-122"/>
+                <a:cs typeface="Aptos" pitchFamily="34" charset="-120"/>
+              </a:rPr>
+              <a:t>9</a:t>
+            </a:r>
+            <a:endParaRPr lang="en-US" sz="1100" dirty="0"/>
+          </a:p>
+        </p:txBody>
+      </p:sp>
+      <p:sp>
+        <p:nvSpPr>
+          <p:cNvPr id="9" name="Text 7"/>
+          <p:cNvSpPr/>
+          <p:nvPr/>
+        </p:nvSpPr>
+        <p:spPr>
+          <a:xfrm>
+            <a:off x="640080" y="621792"/>
             <a:ext cx="10881360" cy="566928"/>
           </a:xfrm>
           <a:prstGeom prst="rect">
@@ -3689,7 +4992,7 @@
                 <a:ea typeface="Aptos Display" pitchFamily="34" charset="-122"/>
                 <a:cs typeface="Aptos Display" pitchFamily="34" charset="-120"/>
               </a:rPr>
-              <a:t>Practical Exercise</a:t>
+              <a:t>Reflection Questions</a:t>
             </a:r>
             <a:endParaRPr lang="en-US" sz="2700" dirty="0"/>
           </a:p>
@@ -3697,32 +5000,164 @@
       </p:sp>
       <p:sp>
         <p:nvSpPr>
-          <p:cNvPr id="7" name="Text 5"/>
-          <p:cNvSpPr/>
-          <p:nvPr/>
-        </p:nvSpPr>
-        <p:spPr>
-          <a:xfrm>
-            <a:off x="822960" y="1325880"/>
-            <a:ext cx="10378440" cy="4800600"/>
-          </a:xfrm>
-          <a:prstGeom prst="rect">
-            <a:avLst/>
-          </a:prstGeom>
-          <a:noFill/>
-          <a:ln/>
-        </p:spPr>
-        <p:txBody>
-          <a:bodyPr wrap="square" lIns="1016" tIns="1016" rIns="1016" bIns="1016" rtlCol="0" anchor="t">
+          <p:cNvPr id="10" name="Text 8"/>
+          <p:cNvSpPr/>
+          <p:nvPr/>
+        </p:nvSpPr>
+        <p:spPr>
+          <a:xfrm>
+            <a:off x="868680" y="1417320"/>
+            <a:ext cx="6675120" cy="4434840"/>
+          </a:xfrm>
+          <a:prstGeom prst="rect">
+            <a:avLst/>
+          </a:prstGeom>
+          <a:noFill/>
+          <a:ln/>
+        </p:spPr>
+        <p:txBody>
+          <a:bodyPr wrap="square" lIns="635" tIns="635" rIns="635" bIns="635" rtlCol="0" anchor="t">
             <a:normAutofit/>
           </a:bodyPr>
           <a:lstStyle/>
           <a:p>
+            <a:r>
+              <a:rPr lang="en-US" sz="1700" dirty="0">
+                <a:solidFill>
+                  <a:srgbClr val="17364A"/>
+                </a:solidFill>
+                <a:latin typeface="Aptos" pitchFamily="34" charset="0"/>
+                <a:ea typeface="Aptos" pitchFamily="34" charset="-122"/>
+                <a:cs typeface="Aptos" pitchFamily="34" charset="-120"/>
+              </a:rPr>
+              <a:t>Which current or proposed AI use case in your agency raises this leadership or governance issue most clearly?</a:t>
+            </a:r>
+            <a:endParaRPr lang="en-US" sz="1700" dirty="0"/>
+          </a:p>
+          <a:p>
+            <a:r>
+              <a:rPr lang="en-US" sz="1700" dirty="0">
+                <a:solidFill>
+                  <a:srgbClr val="17364A"/>
+                </a:solidFill>
+                <a:latin typeface="Aptos" pitchFamily="34" charset="0"/>
+                <a:ea typeface="Aptos" pitchFamily="34" charset="-122"/>
+                <a:cs typeface="Aptos" pitchFamily="34" charset="-120"/>
+              </a:rPr>
+              <a:t>Who currently has authority to make decisions about this issue, and is that authority documented?</a:t>
+            </a:r>
+            <a:endParaRPr lang="en-US" sz="1700" dirty="0"/>
+          </a:p>
+          <a:p>
+            <a:r>
+              <a:rPr lang="en-US" sz="1700" dirty="0">
+                <a:solidFill>
+                  <a:srgbClr val="17364A"/>
+                </a:solidFill>
+                <a:latin typeface="Aptos" pitchFamily="34" charset="0"/>
+                <a:ea typeface="Aptos" pitchFamily="34" charset="-122"/>
+                <a:cs typeface="Aptos" pitchFamily="34" charset="-120"/>
+              </a:rPr>
+              <a:t>What evidence would governance or leadership need before approving the use case?</a:t>
+            </a:r>
+            <a:endParaRPr lang="en-US" sz="1700" dirty="0"/>
+          </a:p>
+        </p:txBody>
+      </p:sp>
+      <p:sp>
+        <p:nvSpPr>
+          <p:cNvPr id="11" name="Shape 9"/>
+          <p:cNvSpPr/>
+          <p:nvPr/>
+        </p:nvSpPr>
+        <p:spPr>
+          <a:xfrm>
+            <a:off x="7909560" y="1417320"/>
+            <a:ext cx="3154680" cy="1828800"/>
+          </a:xfrm>
+          <a:prstGeom prst="roundRect">
+            <a:avLst>
+              <a:gd name="adj" fmla="val 6000"/>
+            </a:avLst>
+          </a:prstGeom>
+          <a:solidFill>
+            <a:srgbClr val="EEF8ED"/>
+          </a:solidFill>
+          <a:ln w="12700">
+            <a:solidFill>
+              <a:srgbClr val="B9D7E6"/>
+            </a:solidFill>
+            <a:prstDash val="solid"/>
+          </a:ln>
+        </p:spPr>
+      </p:sp>
+      <p:sp>
+        <p:nvSpPr>
+          <p:cNvPr id="12" name="Text 10"/>
+          <p:cNvSpPr/>
+          <p:nvPr/>
+        </p:nvSpPr>
+        <p:spPr>
+          <a:xfrm>
+            <a:off x="8074152" y="1563624"/>
+            <a:ext cx="2825496" cy="201168"/>
+          </a:xfrm>
+          <a:prstGeom prst="rect">
+            <a:avLst/>
+          </a:prstGeom>
+          <a:noFill/>
+          <a:ln/>
+        </p:spPr>
+        <p:txBody>
+          <a:bodyPr wrap="square" lIns="0" tIns="0" rIns="0" bIns="0" rtlCol="0" anchor="ctr"/>
+          <a:lstStyle/>
+          <a:p>
             <a:pPr indent="0" marL="0">
               <a:buNone/>
             </a:pPr>
             <a:r>
-              <a:rPr lang="en-US" sz="1420" dirty="0">
+              <a:rPr lang="en-US" sz="950" b="1" dirty="0">
+                <a:solidFill>
+                  <a:srgbClr val="0068B7"/>
+                </a:solidFill>
+                <a:latin typeface="Aptos" pitchFamily="34" charset="0"/>
+                <a:ea typeface="Aptos" pitchFamily="34" charset="-122"/>
+                <a:cs typeface="Aptos" pitchFamily="34" charset="-120"/>
+              </a:rPr>
+              <a:t>Key idea</a:t>
+            </a:r>
+            <a:endParaRPr lang="en-US" sz="950" dirty="0"/>
+          </a:p>
+        </p:txBody>
+      </p:sp>
+      <p:sp>
+        <p:nvSpPr>
+          <p:cNvPr id="13" name="Text 11"/>
+          <p:cNvSpPr/>
+          <p:nvPr/>
+        </p:nvSpPr>
+        <p:spPr>
+          <a:xfrm>
+            <a:off x="8074152" y="1856232"/>
+            <a:ext cx="2825496" cy="1261872"/>
+          </a:xfrm>
+          <a:prstGeom prst="rect">
+            <a:avLst/>
+          </a:prstGeom>
+          <a:noFill/>
+          <a:ln/>
+        </p:spPr>
+        <p:txBody>
+          <a:bodyPr wrap="square" lIns="0" tIns="0" rIns="0" bIns="0" rtlCol="0" anchor="t">
+            <a:normAutofit/>
+          </a:bodyPr>
+          <a:lstStyle/>
+          <a:p>
+            <a:pPr indent="0" marL="0">
+              <a:buNone/>
+            </a:pPr>
+            <a:r>
+              <a:rPr lang="en-US" sz="1250" dirty="0">
                 <a:solidFill>
                   <a:srgbClr val="17364A"/>
                 </a:solidFill>
@@ -3730,9 +5165,116 @@
                 <a:ea typeface="Aptos" pitchFamily="34" charset="-122"/>
                 <a:cs typeface="Aptos" pitchFamily="34" charset="-120"/>
               </a:rPr>
-              <a:t>Complete an AI business case review worksheet for one proposed investment. Include problem, alternatives, expected benefits, total cost of ownership, risk, equity considerations, implementation needs, and success measures.</a:t>
-            </a:r>
-            <a:endParaRPr lang="en-US" sz="1420" dirty="0"/>
+              <a:t>Which current or proposed AI use case in your agency raises this leadership or governance issue most clearly?</a:t>
+            </a:r>
+            <a:endParaRPr lang="en-US" sz="1250" dirty="0"/>
+          </a:p>
+        </p:txBody>
+      </p:sp>
+      <p:sp>
+        <p:nvSpPr>
+          <p:cNvPr id="14" name="Shape 12"/>
+          <p:cNvSpPr/>
+          <p:nvPr/>
+        </p:nvSpPr>
+        <p:spPr>
+          <a:xfrm>
+            <a:off x="7909560" y="3520440"/>
+            <a:ext cx="3154680" cy="1737360"/>
+          </a:xfrm>
+          <a:prstGeom prst="roundRect">
+            <a:avLst>
+              <a:gd name="adj" fmla="val 6316"/>
+            </a:avLst>
+          </a:prstGeom>
+          <a:solidFill>
+            <a:srgbClr val="EAF6F8"/>
+          </a:solidFill>
+          <a:ln w="12700">
+            <a:solidFill>
+              <a:srgbClr val="B9D7E6"/>
+            </a:solidFill>
+            <a:prstDash val="solid"/>
+          </a:ln>
+        </p:spPr>
+      </p:sp>
+      <p:sp>
+        <p:nvSpPr>
+          <p:cNvPr id="15" name="Text 13"/>
+          <p:cNvSpPr/>
+          <p:nvPr/>
+        </p:nvSpPr>
+        <p:spPr>
+          <a:xfrm>
+            <a:off x="8074152" y="3666744"/>
+            <a:ext cx="2825496" cy="201168"/>
+          </a:xfrm>
+          <a:prstGeom prst="rect">
+            <a:avLst/>
+          </a:prstGeom>
+          <a:noFill/>
+          <a:ln/>
+        </p:spPr>
+        <p:txBody>
+          <a:bodyPr wrap="square" lIns="0" tIns="0" rIns="0" bIns="0" rtlCol="0" anchor="ctr"/>
+          <a:lstStyle/>
+          <a:p>
+            <a:pPr indent="0" marL="0">
+              <a:buNone/>
+            </a:pPr>
+            <a:r>
+              <a:rPr lang="en-US" sz="950" b="1" dirty="0">
+                <a:solidFill>
+                  <a:srgbClr val="0068B7"/>
+                </a:solidFill>
+                <a:latin typeface="Aptos" pitchFamily="34" charset="0"/>
+                <a:ea typeface="Aptos" pitchFamily="34" charset="-122"/>
+                <a:cs typeface="Aptos" pitchFamily="34" charset="-120"/>
+              </a:rPr>
+              <a:t>Use this for</a:t>
+            </a:r>
+            <a:endParaRPr lang="en-US" sz="950" dirty="0"/>
+          </a:p>
+        </p:txBody>
+      </p:sp>
+      <p:sp>
+        <p:nvSpPr>
+          <p:cNvPr id="16" name="Text 14"/>
+          <p:cNvSpPr/>
+          <p:nvPr/>
+        </p:nvSpPr>
+        <p:spPr>
+          <a:xfrm>
+            <a:off x="8074152" y="3959352"/>
+            <a:ext cx="2825496" cy="1170432"/>
+          </a:xfrm>
+          <a:prstGeom prst="rect">
+            <a:avLst/>
+          </a:prstGeom>
+          <a:noFill/>
+          <a:ln/>
+        </p:spPr>
+        <p:txBody>
+          <a:bodyPr wrap="square" lIns="0" tIns="0" rIns="0" bIns="0" rtlCol="0" anchor="t">
+            <a:normAutofit/>
+          </a:bodyPr>
+          <a:lstStyle/>
+          <a:p>
+            <a:pPr indent="0" marL="0">
+              <a:buNone/>
+            </a:pPr>
+            <a:r>
+              <a:rPr lang="en-US" sz="1250" dirty="0">
+                <a:solidFill>
+                  <a:srgbClr val="17364A"/>
+                </a:solidFill>
+                <a:latin typeface="Aptos" pitchFamily="34" charset="0"/>
+                <a:ea typeface="Aptos" pitchFamily="34" charset="-122"/>
+                <a:cs typeface="Aptos" pitchFamily="34" charset="-120"/>
+              </a:rPr>
+              <a:t>Connect the concept to public health decisions, safeguards, documentation, or implementation work.</a:t>
+            </a:r>
+            <a:endParaRPr lang="en-US" sz="1250" dirty="0"/>
           </a:p>
         </p:txBody>
       </p:sp>
@@ -3795,7 +5337,32 @@
       </p:sp>
       <p:sp>
         <p:nvSpPr>
-          <p:cNvPr id="3" name="Text 1"/>
+          <p:cNvPr id="3" name="Shape 1"/>
+          <p:cNvSpPr/>
+          <p:nvPr/>
+        </p:nvSpPr>
+        <p:spPr>
+          <a:xfrm>
+            <a:off x="0" y="164592"/>
+            <a:ext cx="146304" cy="6693408"/>
+          </a:xfrm>
+          <a:prstGeom prst="rect">
+            <a:avLst/>
+          </a:prstGeom>
+          <a:solidFill>
+            <a:srgbClr val="2F8A28"/>
+          </a:solidFill>
+          <a:ln w="12700">
+            <a:solidFill>
+              <a:srgbClr val="2F8A28"/>
+            </a:solidFill>
+            <a:prstDash val="solid"/>
+          </a:ln>
+        </p:spPr>
+      </p:sp>
+      <p:sp>
+        <p:nvSpPr>
+          <p:cNvPr id="4" name="Text 2"/>
           <p:cNvSpPr/>
           <p:nvPr/>
         </p:nvSpPr>
@@ -3834,7 +5401,7 @@
       </p:sp>
       <p:sp>
         <p:nvSpPr>
-          <p:cNvPr id="4" name="Text 2"/>
+          <p:cNvPr id="5" name="Text 3"/>
           <p:cNvSpPr/>
           <p:nvPr/>
         </p:nvSpPr>
@@ -3873,7 +5440,7 @@
       </p:sp>
       <p:sp>
         <p:nvSpPr>
-          <p:cNvPr id="5" name="Text 3"/>
+          <p:cNvPr id="6" name="Text 4"/>
           <p:cNvSpPr/>
           <p:nvPr/>
         </p:nvSpPr>
@@ -3912,7 +5479,7 @@
       </p:sp>
       <p:sp>
         <p:nvSpPr>
-          <p:cNvPr id="6" name="Text 4"/>
+          <p:cNvPr id="7" name="Text 5"/>
           <p:cNvSpPr/>
           <p:nvPr/>
         </p:nvSpPr>
@@ -3945,7 +5512,7 @@
                 <a:ea typeface="Aptos Display" pitchFamily="34" charset="-122"/>
                 <a:cs typeface="Aptos Display" pitchFamily="34" charset="-120"/>
               </a:rPr>
-              <a:t>Before You Begin</a:t>
+              <a:t>Reflection Questions Continued</a:t>
             </a:r>
             <a:endParaRPr lang="en-US" sz="2700" dirty="0"/>
           </a:p>
@@ -3953,32 +5520,150 @@
       </p:sp>
       <p:sp>
         <p:nvSpPr>
-          <p:cNvPr id="7" name="Text 5"/>
-          <p:cNvSpPr/>
-          <p:nvPr/>
-        </p:nvSpPr>
-        <p:spPr>
-          <a:xfrm>
-            <a:off x="822960" y="1325880"/>
-            <a:ext cx="10378440" cy="4800600"/>
-          </a:xfrm>
-          <a:prstGeom prst="rect">
-            <a:avLst/>
-          </a:prstGeom>
-          <a:noFill/>
-          <a:ln/>
-        </p:spPr>
-        <p:txBody>
-          <a:bodyPr wrap="square" lIns="1016" tIns="1016" rIns="1016" bIns="1016" rtlCol="0" anchor="t">
+          <p:cNvPr id="8" name="Text 6"/>
+          <p:cNvSpPr/>
+          <p:nvPr/>
+        </p:nvSpPr>
+        <p:spPr>
+          <a:xfrm>
+            <a:off x="868680" y="1417320"/>
+            <a:ext cx="6675120" cy="4434840"/>
+          </a:xfrm>
+          <a:prstGeom prst="rect">
+            <a:avLst/>
+          </a:prstGeom>
+          <a:noFill/>
+          <a:ln/>
+        </p:spPr>
+        <p:txBody>
+          <a:bodyPr wrap="square" lIns="635" tIns="635" rIns="635" bIns="635" rtlCol="0" anchor="t">
             <a:normAutofit/>
           </a:bodyPr>
           <a:lstStyle/>
           <a:p>
+            <a:r>
+              <a:rPr lang="en-US" sz="1700" dirty="0">
+                <a:solidFill>
+                  <a:srgbClr val="17364A"/>
+                </a:solidFill>
+                <a:latin typeface="Aptos" pitchFamily="34" charset="0"/>
+                <a:ea typeface="Aptos" pitchFamily="34" charset="-122"/>
+                <a:cs typeface="Aptos" pitchFamily="34" charset="-120"/>
+              </a:rPr>
+              <a:t>Which staff, partners, or communities would be affected if this issue were handled poorly?</a:t>
+            </a:r>
+            <a:endParaRPr lang="en-US" sz="1700" dirty="0"/>
+          </a:p>
+          <a:p>
+            <a:r>
+              <a:rPr lang="en-US" sz="1700" dirty="0">
+                <a:solidFill>
+                  <a:srgbClr val="17364A"/>
+                </a:solidFill>
+                <a:latin typeface="Aptos" pitchFamily="34" charset="0"/>
+                <a:ea typeface="Aptos" pitchFamily="34" charset="-122"/>
+                <a:cs typeface="Aptos" pitchFamily="34" charset="-120"/>
+              </a:rPr>
+              <a:t>What policy, process, or artifact should be created or updated after this module?</a:t>
+            </a:r>
+            <a:endParaRPr lang="en-US" sz="1700" dirty="0"/>
+          </a:p>
+        </p:txBody>
+      </p:sp>
+      <p:sp>
+        <p:nvSpPr>
+          <p:cNvPr id="9" name="Shape 7"/>
+          <p:cNvSpPr/>
+          <p:nvPr/>
+        </p:nvSpPr>
+        <p:spPr>
+          <a:xfrm>
+            <a:off x="7909560" y="1417320"/>
+            <a:ext cx="3154680" cy="1828800"/>
+          </a:xfrm>
+          <a:prstGeom prst="roundRect">
+            <a:avLst>
+              <a:gd name="adj" fmla="val 6000"/>
+            </a:avLst>
+          </a:prstGeom>
+          <a:solidFill>
+            <a:srgbClr val="EEF8ED"/>
+          </a:solidFill>
+          <a:ln w="12700">
+            <a:solidFill>
+              <a:srgbClr val="B9D7E6"/>
+            </a:solidFill>
+            <a:prstDash val="solid"/>
+          </a:ln>
+        </p:spPr>
+      </p:sp>
+      <p:sp>
+        <p:nvSpPr>
+          <p:cNvPr id="10" name="Text 8"/>
+          <p:cNvSpPr/>
+          <p:nvPr/>
+        </p:nvSpPr>
+        <p:spPr>
+          <a:xfrm>
+            <a:off x="8074152" y="1563624"/>
+            <a:ext cx="2825496" cy="201168"/>
+          </a:xfrm>
+          <a:prstGeom prst="rect">
+            <a:avLst/>
+          </a:prstGeom>
+          <a:noFill/>
+          <a:ln/>
+        </p:spPr>
+        <p:txBody>
+          <a:bodyPr wrap="square" lIns="0" tIns="0" rIns="0" bIns="0" rtlCol="0" anchor="ctr"/>
+          <a:lstStyle/>
+          <a:p>
             <a:pPr indent="0" marL="0">
               <a:buNone/>
             </a:pPr>
             <a:r>
-              <a:rPr lang="en-US" sz="1420" dirty="0">
+              <a:rPr lang="en-US" sz="950" b="1" dirty="0">
+                <a:solidFill>
+                  <a:srgbClr val="0068B7"/>
+                </a:solidFill>
+                <a:latin typeface="Aptos" pitchFamily="34" charset="0"/>
+                <a:ea typeface="Aptos" pitchFamily="34" charset="-122"/>
+                <a:cs typeface="Aptos" pitchFamily="34" charset="-120"/>
+              </a:rPr>
+              <a:t>Key idea</a:t>
+            </a:r>
+            <a:endParaRPr lang="en-US" sz="950" dirty="0"/>
+          </a:p>
+        </p:txBody>
+      </p:sp>
+      <p:sp>
+        <p:nvSpPr>
+          <p:cNvPr id="11" name="Text 9"/>
+          <p:cNvSpPr/>
+          <p:nvPr/>
+        </p:nvSpPr>
+        <p:spPr>
+          <a:xfrm>
+            <a:off x="8074152" y="1856232"/>
+            <a:ext cx="2825496" cy="1261872"/>
+          </a:xfrm>
+          <a:prstGeom prst="rect">
+            <a:avLst/>
+          </a:prstGeom>
+          <a:noFill/>
+          <a:ln/>
+        </p:spPr>
+        <p:txBody>
+          <a:bodyPr wrap="square" lIns="0" tIns="0" rIns="0" bIns="0" rtlCol="0" anchor="t">
+            <a:normAutofit/>
+          </a:bodyPr>
+          <a:lstStyle/>
+          <a:p>
+            <a:pPr indent="0" marL="0">
+              <a:buNone/>
+            </a:pPr>
+            <a:r>
+              <a:rPr lang="en-US" sz="1250" dirty="0">
                 <a:solidFill>
                   <a:srgbClr val="17364A"/>
                 </a:solidFill>
@@ -3986,9 +5671,116 @@
                 <a:ea typeface="Aptos" pitchFamily="34" charset="-122"/>
                 <a:cs typeface="Aptos" pitchFamily="34" charset="-120"/>
               </a:rPr>
-              <a:t>Choose a real or realistic public health AI use case. Document assumptions, unresolved questions, and which agency roles would need to review the artifact before it is adopted. The exercise should produce a work product that could support governance review, leadership discussion, implementation planning, or policy development.</a:t>
-            </a:r>
-            <a:endParaRPr lang="en-US" sz="1420" dirty="0"/>
+              <a:t>Which staff, partners, or communities would be affected if this issue were handled poorly?</a:t>
+            </a:r>
+            <a:endParaRPr lang="en-US" sz="1250" dirty="0"/>
+          </a:p>
+        </p:txBody>
+      </p:sp>
+      <p:sp>
+        <p:nvSpPr>
+          <p:cNvPr id="12" name="Shape 10"/>
+          <p:cNvSpPr/>
+          <p:nvPr/>
+        </p:nvSpPr>
+        <p:spPr>
+          <a:xfrm>
+            <a:off x="7909560" y="3520440"/>
+            <a:ext cx="3154680" cy="1737360"/>
+          </a:xfrm>
+          <a:prstGeom prst="roundRect">
+            <a:avLst>
+              <a:gd name="adj" fmla="val 6316"/>
+            </a:avLst>
+          </a:prstGeom>
+          <a:solidFill>
+            <a:srgbClr val="EAF6F8"/>
+          </a:solidFill>
+          <a:ln w="12700">
+            <a:solidFill>
+              <a:srgbClr val="B9D7E6"/>
+            </a:solidFill>
+            <a:prstDash val="solid"/>
+          </a:ln>
+        </p:spPr>
+      </p:sp>
+      <p:sp>
+        <p:nvSpPr>
+          <p:cNvPr id="13" name="Text 11"/>
+          <p:cNvSpPr/>
+          <p:nvPr/>
+        </p:nvSpPr>
+        <p:spPr>
+          <a:xfrm>
+            <a:off x="8074152" y="3666744"/>
+            <a:ext cx="2825496" cy="201168"/>
+          </a:xfrm>
+          <a:prstGeom prst="rect">
+            <a:avLst/>
+          </a:prstGeom>
+          <a:noFill/>
+          <a:ln/>
+        </p:spPr>
+        <p:txBody>
+          <a:bodyPr wrap="square" lIns="0" tIns="0" rIns="0" bIns="0" rtlCol="0" anchor="ctr"/>
+          <a:lstStyle/>
+          <a:p>
+            <a:pPr indent="0" marL="0">
+              <a:buNone/>
+            </a:pPr>
+            <a:r>
+              <a:rPr lang="en-US" sz="950" b="1" dirty="0">
+                <a:solidFill>
+                  <a:srgbClr val="0068B7"/>
+                </a:solidFill>
+                <a:latin typeface="Aptos" pitchFamily="34" charset="0"/>
+                <a:ea typeface="Aptos" pitchFamily="34" charset="-122"/>
+                <a:cs typeface="Aptos" pitchFamily="34" charset="-120"/>
+              </a:rPr>
+              <a:t>Use this for</a:t>
+            </a:r>
+            <a:endParaRPr lang="en-US" sz="950" dirty="0"/>
+          </a:p>
+        </p:txBody>
+      </p:sp>
+      <p:sp>
+        <p:nvSpPr>
+          <p:cNvPr id="14" name="Text 12"/>
+          <p:cNvSpPr/>
+          <p:nvPr/>
+        </p:nvSpPr>
+        <p:spPr>
+          <a:xfrm>
+            <a:off x="8074152" y="3959352"/>
+            <a:ext cx="2825496" cy="1170432"/>
+          </a:xfrm>
+          <a:prstGeom prst="rect">
+            <a:avLst/>
+          </a:prstGeom>
+          <a:noFill/>
+          <a:ln/>
+        </p:spPr>
+        <p:txBody>
+          <a:bodyPr wrap="square" lIns="0" tIns="0" rIns="0" bIns="0" rtlCol="0" anchor="t">
+            <a:normAutofit/>
+          </a:bodyPr>
+          <a:lstStyle/>
+          <a:p>
+            <a:pPr indent="0" marL="0">
+              <a:buNone/>
+            </a:pPr>
+            <a:r>
+              <a:rPr lang="en-US" sz="1250" dirty="0">
+                <a:solidFill>
+                  <a:srgbClr val="17364A"/>
+                </a:solidFill>
+                <a:latin typeface="Aptos" pitchFamily="34" charset="0"/>
+                <a:ea typeface="Aptos" pitchFamily="34" charset="-122"/>
+                <a:cs typeface="Aptos" pitchFamily="34" charset="-120"/>
+              </a:rPr>
+              <a:t>Connect the concept to public health decisions, safeguards, documentation, or implementation work.</a:t>
+            </a:r>
+            <a:endParaRPr lang="en-US" sz="1250" dirty="0"/>
           </a:p>
         </p:txBody>
       </p:sp>
@@ -4051,7 +5843,32 @@
       </p:sp>
       <p:sp>
         <p:nvSpPr>
-          <p:cNvPr id="3" name="Text 1"/>
+          <p:cNvPr id="3" name="Shape 1"/>
+          <p:cNvSpPr/>
+          <p:nvPr/>
+        </p:nvSpPr>
+        <p:spPr>
+          <a:xfrm>
+            <a:off x="0" y="164592"/>
+            <a:ext cx="146304" cy="6693408"/>
+          </a:xfrm>
+          <a:prstGeom prst="rect">
+            <a:avLst/>
+          </a:prstGeom>
+          <a:solidFill>
+            <a:srgbClr val="2F8A28"/>
+          </a:solidFill>
+          <a:ln w="12700">
+            <a:solidFill>
+              <a:srgbClr val="2F8A28"/>
+            </a:solidFill>
+            <a:prstDash val="solid"/>
+          </a:ln>
+        </p:spPr>
+      </p:sp>
+      <p:sp>
+        <p:nvSpPr>
+          <p:cNvPr id="4" name="Text 2"/>
           <p:cNvSpPr/>
           <p:nvPr/>
         </p:nvSpPr>
@@ -4090,7 +5907,7 @@
       </p:sp>
       <p:sp>
         <p:nvSpPr>
-          <p:cNvPr id="4" name="Text 2"/>
+          <p:cNvPr id="5" name="Text 3"/>
           <p:cNvSpPr/>
           <p:nvPr/>
         </p:nvSpPr>
@@ -4129,7 +5946,7 @@
       </p:sp>
       <p:sp>
         <p:nvSpPr>
-          <p:cNvPr id="5" name="Text 3"/>
+          <p:cNvPr id="6" name="Text 4"/>
           <p:cNvSpPr/>
           <p:nvPr/>
         </p:nvSpPr>
@@ -4168,13 +5985,77 @@
       </p:sp>
       <p:sp>
         <p:nvSpPr>
-          <p:cNvPr id="6" name="Text 4"/>
+          <p:cNvPr id="7" name="Shape 5"/>
           <p:cNvSpPr/>
           <p:nvPr/>
         </p:nvSpPr>
         <p:spPr>
           <a:xfrm>
             <a:off x="640080" y="658368"/>
+            <a:ext cx="420624" cy="420624"/>
+          </a:xfrm>
+          <a:prstGeom prst="ellipse">
+            <a:avLst/>
+          </a:prstGeom>
+          <a:solidFill>
+            <a:srgbClr val="0068B7"/>
+          </a:solidFill>
+          <a:ln w="12700">
+            <a:solidFill>
+              <a:srgbClr val="0068B7"/>
+            </a:solidFill>
+            <a:prstDash val="solid"/>
+          </a:ln>
+        </p:spPr>
+      </p:sp>
+      <p:sp>
+        <p:nvSpPr>
+          <p:cNvPr id="8" name="Text 6"/>
+          <p:cNvSpPr/>
+          <p:nvPr/>
+        </p:nvSpPr>
+        <p:spPr>
+          <a:xfrm>
+            <a:off x="640080" y="731520"/>
+            <a:ext cx="420624" cy="164592"/>
+          </a:xfrm>
+          <a:prstGeom prst="rect">
+            <a:avLst/>
+          </a:prstGeom>
+          <a:noFill/>
+          <a:ln/>
+        </p:spPr>
+        <p:txBody>
+          <a:bodyPr wrap="square" lIns="0" tIns="0" rIns="0" bIns="0" rtlCol="0" anchor="ctr"/>
+          <a:lstStyle/>
+          <a:p>
+            <a:pPr algn="ctr" indent="0" marL="0">
+              <a:buNone/>
+            </a:pPr>
+            <a:r>
+              <a:rPr lang="en-US" sz="1100" b="1" dirty="0">
+                <a:solidFill>
+                  <a:srgbClr val="FFFFFF"/>
+                </a:solidFill>
+                <a:latin typeface="Aptos" pitchFamily="34" charset="0"/>
+                <a:ea typeface="Aptos" pitchFamily="34" charset="-122"/>
+                <a:cs typeface="Aptos" pitchFamily="34" charset="-120"/>
+              </a:rPr>
+              <a:t>10</a:t>
+            </a:r>
+            <a:endParaRPr lang="en-US" sz="1100" dirty="0"/>
+          </a:p>
+        </p:txBody>
+      </p:sp>
+      <p:sp>
+        <p:nvSpPr>
+          <p:cNvPr id="9" name="Text 7"/>
+          <p:cNvSpPr/>
+          <p:nvPr/>
+        </p:nvSpPr>
+        <p:spPr>
+          <a:xfrm>
+            <a:off x="640080" y="621792"/>
             <a:ext cx="10881360" cy="566928"/>
           </a:xfrm>
           <a:prstGeom prst="rect">
@@ -4201,7 +6082,7 @@
                 <a:ea typeface="Aptos Display" pitchFamily="34" charset="-122"/>
                 <a:cs typeface="Aptos Display" pitchFamily="34" charset="-120"/>
               </a:rPr>
-              <a:t>Expected Artifact or Evidence</a:t>
+              <a:t>Practical Exercise</a:t>
             </a:r>
             <a:endParaRPr lang="en-US" sz="2700" dirty="0"/>
           </a:p>
@@ -4209,32 +6090,150 @@
       </p:sp>
       <p:sp>
         <p:nvSpPr>
-          <p:cNvPr id="7" name="Text 5"/>
-          <p:cNvSpPr/>
-          <p:nvPr/>
-        </p:nvSpPr>
-        <p:spPr>
-          <a:xfrm>
-            <a:off x="822960" y="1325880"/>
-            <a:ext cx="10378440" cy="4800600"/>
-          </a:xfrm>
-          <a:prstGeom prst="rect">
-            <a:avLst/>
-          </a:prstGeom>
-          <a:noFill/>
-          <a:ln/>
-        </p:spPr>
-        <p:txBody>
-          <a:bodyPr wrap="square" lIns="1016" tIns="1016" rIns="1016" bIns="1016" rtlCol="0" anchor="t">
+          <p:cNvPr id="10" name="Text 8"/>
+          <p:cNvSpPr/>
+          <p:nvPr/>
+        </p:nvSpPr>
+        <p:spPr>
+          <a:xfrm>
+            <a:off x="868680" y="1417320"/>
+            <a:ext cx="6675120" cy="4434840"/>
+          </a:xfrm>
+          <a:prstGeom prst="rect">
+            <a:avLst/>
+          </a:prstGeom>
+          <a:noFill/>
+          <a:ln/>
+        </p:spPr>
+        <p:txBody>
+          <a:bodyPr wrap="square" lIns="635" tIns="635" rIns="635" bIns="635" rtlCol="0" anchor="t">
             <a:normAutofit/>
           </a:bodyPr>
           <a:lstStyle/>
           <a:p>
+            <a:r>
+              <a:rPr lang="en-US" sz="1700" dirty="0">
+                <a:solidFill>
+                  <a:srgbClr val="17364A"/>
+                </a:solidFill>
+                <a:latin typeface="Aptos" pitchFamily="34" charset="0"/>
+                <a:ea typeface="Aptos" pitchFamily="34" charset="-122"/>
+                <a:cs typeface="Aptos" pitchFamily="34" charset="-120"/>
+              </a:rPr>
+              <a:t>Complete an AI business case review worksheet for one proposed investment.</a:t>
+            </a:r>
+            <a:endParaRPr lang="en-US" sz="1700" dirty="0"/>
+          </a:p>
+          <a:p>
+            <a:r>
+              <a:rPr lang="en-US" sz="1700" dirty="0">
+                <a:solidFill>
+                  <a:srgbClr val="17364A"/>
+                </a:solidFill>
+                <a:latin typeface="Aptos" pitchFamily="34" charset="0"/>
+                <a:ea typeface="Aptos" pitchFamily="34" charset="-122"/>
+                <a:cs typeface="Aptos" pitchFamily="34" charset="-120"/>
+              </a:rPr>
+              <a:t>Include problem, alternatives, expected benefits, total cost of ownership, risk, equity considerations, implementation.</a:t>
+            </a:r>
+            <a:endParaRPr lang="en-US" sz="1700" dirty="0"/>
+          </a:p>
+        </p:txBody>
+      </p:sp>
+      <p:sp>
+        <p:nvSpPr>
+          <p:cNvPr id="11" name="Shape 9"/>
+          <p:cNvSpPr/>
+          <p:nvPr/>
+        </p:nvSpPr>
+        <p:spPr>
+          <a:xfrm>
+            <a:off x="7909560" y="1417320"/>
+            <a:ext cx="3154680" cy="1828800"/>
+          </a:xfrm>
+          <a:prstGeom prst="roundRect">
+            <a:avLst>
+              <a:gd name="adj" fmla="val 6000"/>
+            </a:avLst>
+          </a:prstGeom>
+          <a:solidFill>
+            <a:srgbClr val="EEF8ED"/>
+          </a:solidFill>
+          <a:ln w="12700">
+            <a:solidFill>
+              <a:srgbClr val="B9D7E6"/>
+            </a:solidFill>
+            <a:prstDash val="solid"/>
+          </a:ln>
+        </p:spPr>
+      </p:sp>
+      <p:sp>
+        <p:nvSpPr>
+          <p:cNvPr id="12" name="Text 10"/>
+          <p:cNvSpPr/>
+          <p:nvPr/>
+        </p:nvSpPr>
+        <p:spPr>
+          <a:xfrm>
+            <a:off x="8074152" y="1563624"/>
+            <a:ext cx="2825496" cy="201168"/>
+          </a:xfrm>
+          <a:prstGeom prst="rect">
+            <a:avLst/>
+          </a:prstGeom>
+          <a:noFill/>
+          <a:ln/>
+        </p:spPr>
+        <p:txBody>
+          <a:bodyPr wrap="square" lIns="0" tIns="0" rIns="0" bIns="0" rtlCol="0" anchor="ctr"/>
+          <a:lstStyle/>
+          <a:p>
             <a:pPr indent="0" marL="0">
               <a:buNone/>
             </a:pPr>
             <a:r>
-              <a:rPr lang="en-US" sz="1420" dirty="0">
+              <a:rPr lang="en-US" sz="950" b="1" dirty="0">
+                <a:solidFill>
+                  <a:srgbClr val="0068B7"/>
+                </a:solidFill>
+                <a:latin typeface="Aptos" pitchFamily="34" charset="0"/>
+                <a:ea typeface="Aptos" pitchFamily="34" charset="-122"/>
+                <a:cs typeface="Aptos" pitchFamily="34" charset="-120"/>
+              </a:rPr>
+              <a:t>Key idea</a:t>
+            </a:r>
+            <a:endParaRPr lang="en-US" sz="950" dirty="0"/>
+          </a:p>
+        </p:txBody>
+      </p:sp>
+      <p:sp>
+        <p:nvSpPr>
+          <p:cNvPr id="13" name="Text 11"/>
+          <p:cNvSpPr/>
+          <p:nvPr/>
+        </p:nvSpPr>
+        <p:spPr>
+          <a:xfrm>
+            <a:off x="8074152" y="1856232"/>
+            <a:ext cx="2825496" cy="1261872"/>
+          </a:xfrm>
+          <a:prstGeom prst="rect">
+            <a:avLst/>
+          </a:prstGeom>
+          <a:noFill/>
+          <a:ln/>
+        </p:spPr>
+        <p:txBody>
+          <a:bodyPr wrap="square" lIns="0" tIns="0" rIns="0" bIns="0" rtlCol="0" anchor="t">
+            <a:normAutofit/>
+          </a:bodyPr>
+          <a:lstStyle/>
+          <a:p>
+            <a:pPr indent="0" marL="0">
+              <a:buNone/>
+            </a:pPr>
+            <a:r>
+              <a:rPr lang="en-US" sz="1250" dirty="0">
                 <a:solidFill>
                   <a:srgbClr val="17364A"/>
                 </a:solidFill>
@@ -4242,9 +6241,116 @@
                 <a:ea typeface="Aptos" pitchFamily="34" charset="-122"/>
                 <a:cs typeface="Aptos" pitchFamily="34" charset="-120"/>
               </a:rPr>
-              <a:t>AI business case worksheet; total cost of ownership estimate; benefits realization plan; alternatives analysis.</a:t>
-            </a:r>
-            <a:endParaRPr lang="en-US" sz="1420" dirty="0"/>
+              <a:t>Complete an AI business case review worksheet for one proposed investment.</a:t>
+            </a:r>
+            <a:endParaRPr lang="en-US" sz="1250" dirty="0"/>
+          </a:p>
+        </p:txBody>
+      </p:sp>
+      <p:sp>
+        <p:nvSpPr>
+          <p:cNvPr id="14" name="Shape 12"/>
+          <p:cNvSpPr/>
+          <p:nvPr/>
+        </p:nvSpPr>
+        <p:spPr>
+          <a:xfrm>
+            <a:off x="7909560" y="3520440"/>
+            <a:ext cx="3154680" cy="1737360"/>
+          </a:xfrm>
+          <a:prstGeom prst="roundRect">
+            <a:avLst>
+              <a:gd name="adj" fmla="val 6316"/>
+            </a:avLst>
+          </a:prstGeom>
+          <a:solidFill>
+            <a:srgbClr val="EAF6F8"/>
+          </a:solidFill>
+          <a:ln w="12700">
+            <a:solidFill>
+              <a:srgbClr val="B9D7E6"/>
+            </a:solidFill>
+            <a:prstDash val="solid"/>
+          </a:ln>
+        </p:spPr>
+      </p:sp>
+      <p:sp>
+        <p:nvSpPr>
+          <p:cNvPr id="15" name="Text 13"/>
+          <p:cNvSpPr/>
+          <p:nvPr/>
+        </p:nvSpPr>
+        <p:spPr>
+          <a:xfrm>
+            <a:off x="8074152" y="3666744"/>
+            <a:ext cx="2825496" cy="201168"/>
+          </a:xfrm>
+          <a:prstGeom prst="rect">
+            <a:avLst/>
+          </a:prstGeom>
+          <a:noFill/>
+          <a:ln/>
+        </p:spPr>
+        <p:txBody>
+          <a:bodyPr wrap="square" lIns="0" tIns="0" rIns="0" bIns="0" rtlCol="0" anchor="ctr"/>
+          <a:lstStyle/>
+          <a:p>
+            <a:pPr indent="0" marL="0">
+              <a:buNone/>
+            </a:pPr>
+            <a:r>
+              <a:rPr lang="en-US" sz="950" b="1" dirty="0">
+                <a:solidFill>
+                  <a:srgbClr val="0068B7"/>
+                </a:solidFill>
+                <a:latin typeface="Aptos" pitchFamily="34" charset="0"/>
+                <a:ea typeface="Aptos" pitchFamily="34" charset="-122"/>
+                <a:cs typeface="Aptos" pitchFamily="34" charset="-120"/>
+              </a:rPr>
+              <a:t>Use this for</a:t>
+            </a:r>
+            <a:endParaRPr lang="en-US" sz="950" dirty="0"/>
+          </a:p>
+        </p:txBody>
+      </p:sp>
+      <p:sp>
+        <p:nvSpPr>
+          <p:cNvPr id="16" name="Text 14"/>
+          <p:cNvSpPr/>
+          <p:nvPr/>
+        </p:nvSpPr>
+        <p:spPr>
+          <a:xfrm>
+            <a:off x="8074152" y="3959352"/>
+            <a:ext cx="2825496" cy="1170432"/>
+          </a:xfrm>
+          <a:prstGeom prst="rect">
+            <a:avLst/>
+          </a:prstGeom>
+          <a:noFill/>
+          <a:ln/>
+        </p:spPr>
+        <p:txBody>
+          <a:bodyPr wrap="square" lIns="0" tIns="0" rIns="0" bIns="0" rtlCol="0" anchor="t">
+            <a:normAutofit/>
+          </a:bodyPr>
+          <a:lstStyle/>
+          <a:p>
+            <a:pPr indent="0" marL="0">
+              <a:buNone/>
+            </a:pPr>
+            <a:r>
+              <a:rPr lang="en-US" sz="1250" dirty="0">
+                <a:solidFill>
+                  <a:srgbClr val="17364A"/>
+                </a:solidFill>
+                <a:latin typeface="Aptos" pitchFamily="34" charset="0"/>
+                <a:ea typeface="Aptos" pitchFamily="34" charset="-122"/>
+                <a:cs typeface="Aptos" pitchFamily="34" charset="-120"/>
+              </a:rPr>
+              <a:t>Connect the concept to public health decisions, safeguards, documentation, or implementation work.</a:t>
+            </a:r>
+            <a:endParaRPr lang="en-US" sz="1250" dirty="0"/>
           </a:p>
         </p:txBody>
       </p:sp>
@@ -4307,7 +6413,32 @@
       </p:sp>
       <p:sp>
         <p:nvSpPr>
-          <p:cNvPr id="3" name="Text 1"/>
+          <p:cNvPr id="3" name="Shape 1"/>
+          <p:cNvSpPr/>
+          <p:nvPr/>
+        </p:nvSpPr>
+        <p:spPr>
+          <a:xfrm>
+            <a:off x="0" y="164592"/>
+            <a:ext cx="146304" cy="6693408"/>
+          </a:xfrm>
+          <a:prstGeom prst="rect">
+            <a:avLst/>
+          </a:prstGeom>
+          <a:solidFill>
+            <a:srgbClr val="2F8A28"/>
+          </a:solidFill>
+          <a:ln w="12700">
+            <a:solidFill>
+              <a:srgbClr val="2F8A28"/>
+            </a:solidFill>
+            <a:prstDash val="solid"/>
+          </a:ln>
+        </p:spPr>
+      </p:sp>
+      <p:sp>
+        <p:nvSpPr>
+          <p:cNvPr id="4" name="Text 2"/>
           <p:cNvSpPr/>
           <p:nvPr/>
         </p:nvSpPr>
@@ -4346,7 +6477,7 @@
       </p:sp>
       <p:sp>
         <p:nvSpPr>
-          <p:cNvPr id="4" name="Text 2"/>
+          <p:cNvPr id="5" name="Text 3"/>
           <p:cNvSpPr/>
           <p:nvPr/>
         </p:nvSpPr>
@@ -4385,7 +6516,7 @@
       </p:sp>
       <p:sp>
         <p:nvSpPr>
-          <p:cNvPr id="5" name="Text 3"/>
+          <p:cNvPr id="6" name="Text 4"/>
           <p:cNvSpPr/>
           <p:nvPr/>
         </p:nvSpPr>
@@ -4424,13 +6555,77 @@
       </p:sp>
       <p:sp>
         <p:nvSpPr>
-          <p:cNvPr id="6" name="Text 4"/>
+          <p:cNvPr id="7" name="Shape 5"/>
           <p:cNvSpPr/>
           <p:nvPr/>
         </p:nvSpPr>
         <p:spPr>
           <a:xfrm>
             <a:off x="640080" y="658368"/>
+            <a:ext cx="420624" cy="420624"/>
+          </a:xfrm>
+          <a:prstGeom prst="ellipse">
+            <a:avLst/>
+          </a:prstGeom>
+          <a:solidFill>
+            <a:srgbClr val="0068B7"/>
+          </a:solidFill>
+          <a:ln w="12700">
+            <a:solidFill>
+              <a:srgbClr val="0068B7"/>
+            </a:solidFill>
+            <a:prstDash val="solid"/>
+          </a:ln>
+        </p:spPr>
+      </p:sp>
+      <p:sp>
+        <p:nvSpPr>
+          <p:cNvPr id="8" name="Text 6"/>
+          <p:cNvSpPr/>
+          <p:nvPr/>
+        </p:nvSpPr>
+        <p:spPr>
+          <a:xfrm>
+            <a:off x="640080" y="731520"/>
+            <a:ext cx="420624" cy="164592"/>
+          </a:xfrm>
+          <a:prstGeom prst="rect">
+            <a:avLst/>
+          </a:prstGeom>
+          <a:noFill/>
+          <a:ln/>
+        </p:spPr>
+        <p:txBody>
+          <a:bodyPr wrap="square" lIns="0" tIns="0" rIns="0" bIns="0" rtlCol="0" anchor="ctr"/>
+          <a:lstStyle/>
+          <a:p>
+            <a:pPr algn="ctr" indent="0" marL="0">
+              <a:buNone/>
+            </a:pPr>
+            <a:r>
+              <a:rPr lang="en-US" sz="1100" b="1" dirty="0">
+                <a:solidFill>
+                  <a:srgbClr val="FFFFFF"/>
+                </a:solidFill>
+                <a:latin typeface="Aptos" pitchFamily="34" charset="0"/>
+                <a:ea typeface="Aptos" pitchFamily="34" charset="-122"/>
+                <a:cs typeface="Aptos" pitchFamily="34" charset="-120"/>
+              </a:rPr>
+              <a:t>11</a:t>
+            </a:r>
+            <a:endParaRPr lang="en-US" sz="1100" dirty="0"/>
+          </a:p>
+        </p:txBody>
+      </p:sp>
+      <p:sp>
+        <p:nvSpPr>
+          <p:cNvPr id="9" name="Text 7"/>
+          <p:cNvSpPr/>
+          <p:nvPr/>
+        </p:nvSpPr>
+        <p:spPr>
+          <a:xfrm>
+            <a:off x="640080" y="621792"/>
             <a:ext cx="10881360" cy="566928"/>
           </a:xfrm>
           <a:prstGeom prst="rect">
@@ -4457,7 +6652,7 @@
                 <a:ea typeface="Aptos Display" pitchFamily="34" charset="-122"/>
                 <a:cs typeface="Aptos Display" pitchFamily="34" charset="-120"/>
               </a:rPr>
-              <a:t>Expected Assignment</a:t>
+              <a:t>Before You Begin</a:t>
             </a:r>
             <a:endParaRPr lang="en-US" sz="2700" dirty="0"/>
           </a:p>
@@ -4465,14 +6660,14 @@
       </p:sp>
       <p:sp>
         <p:nvSpPr>
-          <p:cNvPr id="7" name="Text 5"/>
-          <p:cNvSpPr/>
-          <p:nvPr/>
-        </p:nvSpPr>
-        <p:spPr>
-          <a:xfrm>
-            <a:off x="822960" y="1325880"/>
-            <a:ext cx="10378440" cy="4800600"/>
+          <p:cNvPr id="10" name="Text 8"/>
+          <p:cNvSpPr/>
+          <p:nvPr/>
+        </p:nvSpPr>
+        <p:spPr>
+          <a:xfrm>
+            <a:off x="868680" y="1417320"/>
+            <a:ext cx="6675120" cy="4434840"/>
           </a:xfrm>
           <a:prstGeom prst="rect">
             <a:avLst/>
@@ -4487,7 +6682,7 @@
           <a:lstStyle/>
           <a:p>
             <a:r>
-              <a:rPr lang="en-US" sz="1450" dirty="0">
+              <a:rPr lang="en-US" sz="1700" dirty="0">
                 <a:solidFill>
                   <a:srgbClr val="17364A"/>
                 </a:solidFill>
@@ -4495,9 +6690,251 @@
                 <a:ea typeface="Aptos" pitchFamily="34" charset="-122"/>
                 <a:cs typeface="Aptos" pitchFamily="34" charset="-120"/>
               </a:rPr>
-              <a:t>AI business case worksheet; total cost of ownership estimate; benefits realization plan; alternatives analysis.</a:t>
-            </a:r>
-            <a:endParaRPr lang="en-US" sz="1450" dirty="0"/>
+              <a:t>Choose a real or realistic public health AI use case.</a:t>
+            </a:r>
+            <a:endParaRPr lang="en-US" sz="1700" dirty="0"/>
+          </a:p>
+          <a:p>
+            <a:r>
+              <a:rPr lang="en-US" sz="1700" dirty="0">
+                <a:solidFill>
+                  <a:srgbClr val="17364A"/>
+                </a:solidFill>
+                <a:latin typeface="Aptos" pitchFamily="34" charset="0"/>
+                <a:ea typeface="Aptos" pitchFamily="34" charset="-122"/>
+                <a:cs typeface="Aptos" pitchFamily="34" charset="-120"/>
+              </a:rPr>
+              <a:t>Document assumptions, unresolved questions, and which agency roles would need to review the artifact before it is adopted.</a:t>
+            </a:r>
+            <a:endParaRPr lang="en-US" sz="1700" dirty="0"/>
+          </a:p>
+          <a:p>
+            <a:r>
+              <a:rPr lang="en-US" sz="1700" dirty="0">
+                <a:solidFill>
+                  <a:srgbClr val="17364A"/>
+                </a:solidFill>
+                <a:latin typeface="Aptos" pitchFamily="34" charset="0"/>
+                <a:ea typeface="Aptos" pitchFamily="34" charset="-122"/>
+                <a:cs typeface="Aptos" pitchFamily="34" charset="-120"/>
+              </a:rPr>
+              <a:t>The exercise should produce a work product that could support governance review, leadership discussion, implementation.</a:t>
+            </a:r>
+            <a:endParaRPr lang="en-US" sz="1700" dirty="0"/>
+          </a:p>
+        </p:txBody>
+      </p:sp>
+      <p:sp>
+        <p:nvSpPr>
+          <p:cNvPr id="11" name="Shape 9"/>
+          <p:cNvSpPr/>
+          <p:nvPr/>
+        </p:nvSpPr>
+        <p:spPr>
+          <a:xfrm>
+            <a:off x="7909560" y="1417320"/>
+            <a:ext cx="3154680" cy="1828800"/>
+          </a:xfrm>
+          <a:prstGeom prst="roundRect">
+            <a:avLst>
+              <a:gd name="adj" fmla="val 6000"/>
+            </a:avLst>
+          </a:prstGeom>
+          <a:solidFill>
+            <a:srgbClr val="EEF8ED"/>
+          </a:solidFill>
+          <a:ln w="12700">
+            <a:solidFill>
+              <a:srgbClr val="B9D7E6"/>
+            </a:solidFill>
+            <a:prstDash val="solid"/>
+          </a:ln>
+        </p:spPr>
+      </p:sp>
+      <p:sp>
+        <p:nvSpPr>
+          <p:cNvPr id="12" name="Text 10"/>
+          <p:cNvSpPr/>
+          <p:nvPr/>
+        </p:nvSpPr>
+        <p:spPr>
+          <a:xfrm>
+            <a:off x="8074152" y="1563624"/>
+            <a:ext cx="2825496" cy="201168"/>
+          </a:xfrm>
+          <a:prstGeom prst="rect">
+            <a:avLst/>
+          </a:prstGeom>
+          <a:noFill/>
+          <a:ln/>
+        </p:spPr>
+        <p:txBody>
+          <a:bodyPr wrap="square" lIns="0" tIns="0" rIns="0" bIns="0" rtlCol="0" anchor="ctr"/>
+          <a:lstStyle/>
+          <a:p>
+            <a:pPr indent="0" marL="0">
+              <a:buNone/>
+            </a:pPr>
+            <a:r>
+              <a:rPr lang="en-US" sz="950" b="1" dirty="0">
+                <a:solidFill>
+                  <a:srgbClr val="0068B7"/>
+                </a:solidFill>
+                <a:latin typeface="Aptos" pitchFamily="34" charset="0"/>
+                <a:ea typeface="Aptos" pitchFamily="34" charset="-122"/>
+                <a:cs typeface="Aptos" pitchFamily="34" charset="-120"/>
+              </a:rPr>
+              <a:t>Key idea</a:t>
+            </a:r>
+            <a:endParaRPr lang="en-US" sz="950" dirty="0"/>
+          </a:p>
+        </p:txBody>
+      </p:sp>
+      <p:sp>
+        <p:nvSpPr>
+          <p:cNvPr id="13" name="Text 11"/>
+          <p:cNvSpPr/>
+          <p:nvPr/>
+        </p:nvSpPr>
+        <p:spPr>
+          <a:xfrm>
+            <a:off x="8074152" y="1856232"/>
+            <a:ext cx="2825496" cy="1261872"/>
+          </a:xfrm>
+          <a:prstGeom prst="rect">
+            <a:avLst/>
+          </a:prstGeom>
+          <a:noFill/>
+          <a:ln/>
+        </p:spPr>
+        <p:txBody>
+          <a:bodyPr wrap="square" lIns="0" tIns="0" rIns="0" bIns="0" rtlCol="0" anchor="t">
+            <a:normAutofit/>
+          </a:bodyPr>
+          <a:lstStyle/>
+          <a:p>
+            <a:pPr indent="0" marL="0">
+              <a:buNone/>
+            </a:pPr>
+            <a:r>
+              <a:rPr lang="en-US" sz="1250" dirty="0">
+                <a:solidFill>
+                  <a:srgbClr val="17364A"/>
+                </a:solidFill>
+                <a:latin typeface="Aptos" pitchFamily="34" charset="0"/>
+                <a:ea typeface="Aptos" pitchFamily="34" charset="-122"/>
+                <a:cs typeface="Aptos" pitchFamily="34" charset="-120"/>
+              </a:rPr>
+              <a:t>Choose a real or realistic public health AI use case.</a:t>
+            </a:r>
+            <a:endParaRPr lang="en-US" sz="1250" dirty="0"/>
+          </a:p>
+        </p:txBody>
+      </p:sp>
+      <p:sp>
+        <p:nvSpPr>
+          <p:cNvPr id="14" name="Shape 12"/>
+          <p:cNvSpPr/>
+          <p:nvPr/>
+        </p:nvSpPr>
+        <p:spPr>
+          <a:xfrm>
+            <a:off x="7909560" y="3520440"/>
+            <a:ext cx="3154680" cy="1737360"/>
+          </a:xfrm>
+          <a:prstGeom prst="roundRect">
+            <a:avLst>
+              <a:gd name="adj" fmla="val 6316"/>
+            </a:avLst>
+          </a:prstGeom>
+          <a:solidFill>
+            <a:srgbClr val="EAF6F8"/>
+          </a:solidFill>
+          <a:ln w="12700">
+            <a:solidFill>
+              <a:srgbClr val="B9D7E6"/>
+            </a:solidFill>
+            <a:prstDash val="solid"/>
+          </a:ln>
+        </p:spPr>
+      </p:sp>
+      <p:sp>
+        <p:nvSpPr>
+          <p:cNvPr id="15" name="Text 13"/>
+          <p:cNvSpPr/>
+          <p:nvPr/>
+        </p:nvSpPr>
+        <p:spPr>
+          <a:xfrm>
+            <a:off x="8074152" y="3666744"/>
+            <a:ext cx="2825496" cy="201168"/>
+          </a:xfrm>
+          <a:prstGeom prst="rect">
+            <a:avLst/>
+          </a:prstGeom>
+          <a:noFill/>
+          <a:ln/>
+        </p:spPr>
+        <p:txBody>
+          <a:bodyPr wrap="square" lIns="0" tIns="0" rIns="0" bIns="0" rtlCol="0" anchor="ctr"/>
+          <a:lstStyle/>
+          <a:p>
+            <a:pPr indent="0" marL="0">
+              <a:buNone/>
+            </a:pPr>
+            <a:r>
+              <a:rPr lang="en-US" sz="950" b="1" dirty="0">
+                <a:solidFill>
+                  <a:srgbClr val="0068B7"/>
+                </a:solidFill>
+                <a:latin typeface="Aptos" pitchFamily="34" charset="0"/>
+                <a:ea typeface="Aptos" pitchFamily="34" charset="-122"/>
+                <a:cs typeface="Aptos" pitchFamily="34" charset="-120"/>
+              </a:rPr>
+              <a:t>Use this for</a:t>
+            </a:r>
+            <a:endParaRPr lang="en-US" sz="950" dirty="0"/>
+          </a:p>
+        </p:txBody>
+      </p:sp>
+      <p:sp>
+        <p:nvSpPr>
+          <p:cNvPr id="16" name="Text 14"/>
+          <p:cNvSpPr/>
+          <p:nvPr/>
+        </p:nvSpPr>
+        <p:spPr>
+          <a:xfrm>
+            <a:off x="8074152" y="3959352"/>
+            <a:ext cx="2825496" cy="1170432"/>
+          </a:xfrm>
+          <a:prstGeom prst="rect">
+            <a:avLst/>
+          </a:prstGeom>
+          <a:noFill/>
+          <a:ln/>
+        </p:spPr>
+        <p:txBody>
+          <a:bodyPr wrap="square" lIns="0" tIns="0" rIns="0" bIns="0" rtlCol="0" anchor="t">
+            <a:normAutofit/>
+          </a:bodyPr>
+          <a:lstStyle/>
+          <a:p>
+            <a:pPr indent="0" marL="0">
+              <a:buNone/>
+            </a:pPr>
+            <a:r>
+              <a:rPr lang="en-US" sz="1250" dirty="0">
+                <a:solidFill>
+                  <a:srgbClr val="17364A"/>
+                </a:solidFill>
+                <a:latin typeface="Aptos" pitchFamily="34" charset="0"/>
+                <a:ea typeface="Aptos" pitchFamily="34" charset="-122"/>
+                <a:cs typeface="Aptos" pitchFamily="34" charset="-120"/>
+              </a:rPr>
+              <a:t>Connect the concept to public health decisions, safeguards, documentation, or implementation work.</a:t>
+            </a:r>
+            <a:endParaRPr lang="en-US" sz="1250" dirty="0"/>
           </a:p>
         </p:txBody>
       </p:sp>
@@ -4560,7 +6997,32 @@
       </p:sp>
       <p:sp>
         <p:nvSpPr>
-          <p:cNvPr id="3" name="Text 1"/>
+          <p:cNvPr id="3" name="Shape 1"/>
+          <p:cNvSpPr/>
+          <p:nvPr/>
+        </p:nvSpPr>
+        <p:spPr>
+          <a:xfrm>
+            <a:off x="0" y="164592"/>
+            <a:ext cx="146304" cy="6693408"/>
+          </a:xfrm>
+          <a:prstGeom prst="rect">
+            <a:avLst/>
+          </a:prstGeom>
+          <a:solidFill>
+            <a:srgbClr val="2F8A28"/>
+          </a:solidFill>
+          <a:ln w="12700">
+            <a:solidFill>
+              <a:srgbClr val="2F8A28"/>
+            </a:solidFill>
+            <a:prstDash val="solid"/>
+          </a:ln>
+        </p:spPr>
+      </p:sp>
+      <p:sp>
+        <p:nvSpPr>
+          <p:cNvPr id="4" name="Text 2"/>
           <p:cNvSpPr/>
           <p:nvPr/>
         </p:nvSpPr>
@@ -4599,7 +7061,7 @@
       </p:sp>
       <p:sp>
         <p:nvSpPr>
-          <p:cNvPr id="4" name="Text 2"/>
+          <p:cNvPr id="5" name="Text 3"/>
           <p:cNvSpPr/>
           <p:nvPr/>
         </p:nvSpPr>
@@ -4638,7 +7100,7 @@
       </p:sp>
       <p:sp>
         <p:nvSpPr>
-          <p:cNvPr id="5" name="Text 3"/>
+          <p:cNvPr id="6" name="Text 4"/>
           <p:cNvSpPr/>
           <p:nvPr/>
         </p:nvSpPr>
@@ -4677,13 +7139,77 @@
       </p:sp>
       <p:sp>
         <p:nvSpPr>
-          <p:cNvPr id="6" name="Text 4"/>
+          <p:cNvPr id="7" name="Shape 5"/>
           <p:cNvSpPr/>
           <p:nvPr/>
         </p:nvSpPr>
         <p:spPr>
           <a:xfrm>
             <a:off x="640080" y="658368"/>
+            <a:ext cx="420624" cy="420624"/>
+          </a:xfrm>
+          <a:prstGeom prst="ellipse">
+            <a:avLst/>
+          </a:prstGeom>
+          <a:solidFill>
+            <a:srgbClr val="0068B7"/>
+          </a:solidFill>
+          <a:ln w="12700">
+            <a:solidFill>
+              <a:srgbClr val="0068B7"/>
+            </a:solidFill>
+            <a:prstDash val="solid"/>
+          </a:ln>
+        </p:spPr>
+      </p:sp>
+      <p:sp>
+        <p:nvSpPr>
+          <p:cNvPr id="8" name="Text 6"/>
+          <p:cNvSpPr/>
+          <p:nvPr/>
+        </p:nvSpPr>
+        <p:spPr>
+          <a:xfrm>
+            <a:off x="640080" y="731520"/>
+            <a:ext cx="420624" cy="164592"/>
+          </a:xfrm>
+          <a:prstGeom prst="rect">
+            <a:avLst/>
+          </a:prstGeom>
+          <a:noFill/>
+          <a:ln/>
+        </p:spPr>
+        <p:txBody>
+          <a:bodyPr wrap="square" lIns="0" tIns="0" rIns="0" bIns="0" rtlCol="0" anchor="ctr"/>
+          <a:lstStyle/>
+          <a:p>
+            <a:pPr algn="ctr" indent="0" marL="0">
+              <a:buNone/>
+            </a:pPr>
+            <a:r>
+              <a:rPr lang="en-US" sz="1100" b="1" dirty="0">
+                <a:solidFill>
+                  <a:srgbClr val="FFFFFF"/>
+                </a:solidFill>
+                <a:latin typeface="Aptos" pitchFamily="34" charset="0"/>
+                <a:ea typeface="Aptos" pitchFamily="34" charset="-122"/>
+                <a:cs typeface="Aptos" pitchFamily="34" charset="-120"/>
+              </a:rPr>
+              <a:t>12</a:t>
+            </a:r>
+            <a:endParaRPr lang="en-US" sz="1100" dirty="0"/>
+          </a:p>
+        </p:txBody>
+      </p:sp>
+      <p:sp>
+        <p:nvSpPr>
+          <p:cNvPr id="9" name="Text 7"/>
+          <p:cNvSpPr/>
+          <p:nvPr/>
+        </p:nvSpPr>
+        <p:spPr>
+          <a:xfrm>
+            <a:off x="640080" y="621792"/>
             <a:ext cx="10881360" cy="566928"/>
           </a:xfrm>
           <a:prstGeom prst="rect">
@@ -4710,7 +7236,7 @@
                 <a:ea typeface="Aptos Display" pitchFamily="34" charset="-122"/>
                 <a:cs typeface="Aptos Display" pitchFamily="34" charset="-120"/>
               </a:rPr>
-              <a:t>Knowledge Check</a:t>
+              <a:t>Expected Artifact or Evidence</a:t>
             </a:r>
             <a:endParaRPr lang="en-US" sz="2700" dirty="0"/>
           </a:p>
@@ -4718,14 +7244,14 @@
       </p:sp>
       <p:sp>
         <p:nvSpPr>
-          <p:cNvPr id="7" name="Text 5"/>
-          <p:cNvSpPr/>
-          <p:nvPr/>
-        </p:nvSpPr>
-        <p:spPr>
-          <a:xfrm>
-            <a:off x="822960" y="1325880"/>
-            <a:ext cx="10378440" cy="4800600"/>
+          <p:cNvPr id="10" name="Text 8"/>
+          <p:cNvSpPr/>
+          <p:nvPr/>
+        </p:nvSpPr>
+        <p:spPr>
+          <a:xfrm>
+            <a:off x="868680" y="1417320"/>
+            <a:ext cx="6675120" cy="4434840"/>
           </a:xfrm>
           <a:prstGeom prst="rect">
             <a:avLst/>
@@ -4740,7 +7266,7 @@
           <a:lstStyle/>
           <a:p>
             <a:r>
-              <a:rPr lang="en-US" sz="1450" dirty="0">
+              <a:rPr lang="en-US" sz="1700" dirty="0">
                 <a:solidFill>
                   <a:srgbClr val="17364A"/>
                 </a:solidFill>
@@ -4748,13 +7274,106 @@
                 <a:ea typeface="Aptos" pitchFamily="34" charset="-122"/>
                 <a:cs typeface="Aptos" pitchFamily="34" charset="-120"/>
               </a:rPr>
-              <a:t>1. What is the strongest reason this module topic belongs in AI leadership and governance training?</a:t>
-            </a:r>
-            <a:endParaRPr lang="en-US" sz="1450" dirty="0"/>
-          </a:p>
-          <a:p>
-            <a:r>
-              <a:rPr lang="en-US" sz="1450" dirty="0">
+              <a:t>AI business case worksheet; total cost of ownership estimate; benefits realization plan; alternatives analysis.</a:t>
+            </a:r>
+            <a:endParaRPr lang="en-US" sz="1700" dirty="0"/>
+          </a:p>
+        </p:txBody>
+      </p:sp>
+      <p:sp>
+        <p:nvSpPr>
+          <p:cNvPr id="11" name="Shape 9"/>
+          <p:cNvSpPr/>
+          <p:nvPr/>
+        </p:nvSpPr>
+        <p:spPr>
+          <a:xfrm>
+            <a:off x="7909560" y="1417320"/>
+            <a:ext cx="3154680" cy="1828800"/>
+          </a:xfrm>
+          <a:prstGeom prst="roundRect">
+            <a:avLst>
+              <a:gd name="adj" fmla="val 6000"/>
+            </a:avLst>
+          </a:prstGeom>
+          <a:solidFill>
+            <a:srgbClr val="EEF8ED"/>
+          </a:solidFill>
+          <a:ln w="12700">
+            <a:solidFill>
+              <a:srgbClr val="B9D7E6"/>
+            </a:solidFill>
+            <a:prstDash val="solid"/>
+          </a:ln>
+        </p:spPr>
+      </p:sp>
+      <p:sp>
+        <p:nvSpPr>
+          <p:cNvPr id="12" name="Text 10"/>
+          <p:cNvSpPr/>
+          <p:nvPr/>
+        </p:nvSpPr>
+        <p:spPr>
+          <a:xfrm>
+            <a:off x="8074152" y="1563624"/>
+            <a:ext cx="2825496" cy="201168"/>
+          </a:xfrm>
+          <a:prstGeom prst="rect">
+            <a:avLst/>
+          </a:prstGeom>
+          <a:noFill/>
+          <a:ln/>
+        </p:spPr>
+        <p:txBody>
+          <a:bodyPr wrap="square" lIns="0" tIns="0" rIns="0" bIns="0" rtlCol="0" anchor="ctr"/>
+          <a:lstStyle/>
+          <a:p>
+            <a:pPr indent="0" marL="0">
+              <a:buNone/>
+            </a:pPr>
+            <a:r>
+              <a:rPr lang="en-US" sz="950" b="1" dirty="0">
+                <a:solidFill>
+                  <a:srgbClr val="0068B7"/>
+                </a:solidFill>
+                <a:latin typeface="Aptos" pitchFamily="34" charset="0"/>
+                <a:ea typeface="Aptos" pitchFamily="34" charset="-122"/>
+                <a:cs typeface="Aptos" pitchFamily="34" charset="-120"/>
+              </a:rPr>
+              <a:t>Key idea</a:t>
+            </a:r>
+            <a:endParaRPr lang="en-US" sz="950" dirty="0"/>
+          </a:p>
+        </p:txBody>
+      </p:sp>
+      <p:sp>
+        <p:nvSpPr>
+          <p:cNvPr id="13" name="Text 11"/>
+          <p:cNvSpPr/>
+          <p:nvPr/>
+        </p:nvSpPr>
+        <p:spPr>
+          <a:xfrm>
+            <a:off x="8074152" y="1856232"/>
+            <a:ext cx="2825496" cy="1261872"/>
+          </a:xfrm>
+          <a:prstGeom prst="rect">
+            <a:avLst/>
+          </a:prstGeom>
+          <a:noFill/>
+          <a:ln/>
+        </p:spPr>
+        <p:txBody>
+          <a:bodyPr wrap="square" lIns="0" tIns="0" rIns="0" bIns="0" rtlCol="0" anchor="t">
+            <a:normAutofit/>
+          </a:bodyPr>
+          <a:lstStyle/>
+          <a:p>
+            <a:pPr indent="0" marL="0">
+              <a:buNone/>
+            </a:pPr>
+            <a:r>
+              <a:rPr lang="en-US" sz="1250" dirty="0">
                 <a:solidFill>
                   <a:srgbClr val="17364A"/>
                 </a:solidFill>
@@ -4762,13 +7381,106 @@
                 <a:ea typeface="Aptos" pitchFamily="34" charset="-122"/>
                 <a:cs typeface="Aptos" pitchFamily="34" charset="-120"/>
               </a:rPr>
-              <a:t>2. Which practice best supports accountable public health AI governance?</a:t>
-            </a:r>
-            <a:endParaRPr lang="en-US" sz="1450" dirty="0"/>
-          </a:p>
-          <a:p>
-            <a:r>
-              <a:rPr lang="en-US" sz="1450" dirty="0">
+              <a:t>AI business case worksheet; total cost of ownership estimate; benefits realization plan; alternatives analysis.</a:t>
+            </a:r>
+            <a:endParaRPr lang="en-US" sz="1250" dirty="0"/>
+          </a:p>
+        </p:txBody>
+      </p:sp>
+      <p:sp>
+        <p:nvSpPr>
+          <p:cNvPr id="14" name="Shape 12"/>
+          <p:cNvSpPr/>
+          <p:nvPr/>
+        </p:nvSpPr>
+        <p:spPr>
+          <a:xfrm>
+            <a:off x="7909560" y="3520440"/>
+            <a:ext cx="3154680" cy="1737360"/>
+          </a:xfrm>
+          <a:prstGeom prst="roundRect">
+            <a:avLst>
+              <a:gd name="adj" fmla="val 6316"/>
+            </a:avLst>
+          </a:prstGeom>
+          <a:solidFill>
+            <a:srgbClr val="EAF6F8"/>
+          </a:solidFill>
+          <a:ln w="12700">
+            <a:solidFill>
+              <a:srgbClr val="B9D7E6"/>
+            </a:solidFill>
+            <a:prstDash val="solid"/>
+          </a:ln>
+        </p:spPr>
+      </p:sp>
+      <p:sp>
+        <p:nvSpPr>
+          <p:cNvPr id="15" name="Text 13"/>
+          <p:cNvSpPr/>
+          <p:nvPr/>
+        </p:nvSpPr>
+        <p:spPr>
+          <a:xfrm>
+            <a:off x="8074152" y="3666744"/>
+            <a:ext cx="2825496" cy="201168"/>
+          </a:xfrm>
+          <a:prstGeom prst="rect">
+            <a:avLst/>
+          </a:prstGeom>
+          <a:noFill/>
+          <a:ln/>
+        </p:spPr>
+        <p:txBody>
+          <a:bodyPr wrap="square" lIns="0" tIns="0" rIns="0" bIns="0" rtlCol="0" anchor="ctr"/>
+          <a:lstStyle/>
+          <a:p>
+            <a:pPr indent="0" marL="0">
+              <a:buNone/>
+            </a:pPr>
+            <a:r>
+              <a:rPr lang="en-US" sz="950" b="1" dirty="0">
+                <a:solidFill>
+                  <a:srgbClr val="0068B7"/>
+                </a:solidFill>
+                <a:latin typeface="Aptos" pitchFamily="34" charset="0"/>
+                <a:ea typeface="Aptos" pitchFamily="34" charset="-122"/>
+                <a:cs typeface="Aptos" pitchFamily="34" charset="-120"/>
+              </a:rPr>
+              <a:t>Use this for</a:t>
+            </a:r>
+            <a:endParaRPr lang="en-US" sz="950" dirty="0"/>
+          </a:p>
+        </p:txBody>
+      </p:sp>
+      <p:sp>
+        <p:nvSpPr>
+          <p:cNvPr id="16" name="Text 14"/>
+          <p:cNvSpPr/>
+          <p:nvPr/>
+        </p:nvSpPr>
+        <p:spPr>
+          <a:xfrm>
+            <a:off x="8074152" y="3959352"/>
+            <a:ext cx="2825496" cy="1170432"/>
+          </a:xfrm>
+          <a:prstGeom prst="rect">
+            <a:avLst/>
+          </a:prstGeom>
+          <a:noFill/>
+          <a:ln/>
+        </p:spPr>
+        <p:txBody>
+          <a:bodyPr wrap="square" lIns="0" tIns="0" rIns="0" bIns="0" rtlCol="0" anchor="t">
+            <a:normAutofit/>
+          </a:bodyPr>
+          <a:lstStyle/>
+          <a:p>
+            <a:pPr indent="0" marL="0">
+              <a:buNone/>
+            </a:pPr>
+            <a:r>
+              <a:rPr lang="en-US" sz="1250" dirty="0">
                 <a:solidFill>
                   <a:srgbClr val="17364A"/>
                 </a:solidFill>
@@ -4776,37 +7488,9 @@
                 <a:ea typeface="Aptos" pitchFamily="34" charset="-122"/>
                 <a:cs typeface="Aptos" pitchFamily="34" charset="-120"/>
               </a:rPr>
-              <a:t>3. When should an AI use case be escalated for leadership or governance review?</a:t>
-            </a:r>
-            <a:endParaRPr lang="en-US" sz="1450" dirty="0"/>
-          </a:p>
-          <a:p>
-            <a:r>
-              <a:rPr lang="en-US" sz="1450" dirty="0">
-                <a:solidFill>
-                  <a:srgbClr val="17364A"/>
-                </a:solidFill>
-                <a:latin typeface="Aptos" pitchFamily="34" charset="0"/>
-                <a:ea typeface="Aptos" pitchFamily="34" charset="-122"/>
-                <a:cs typeface="Aptos" pitchFamily="34" charset="-120"/>
-              </a:rPr>
-              <a:t>4. What is weak evidence of completion for a leadership and governance module?</a:t>
-            </a:r>
-            <a:endParaRPr lang="en-US" sz="1450" dirty="0"/>
-          </a:p>
-          <a:p>
-            <a:r>
-              <a:rPr lang="en-US" sz="1450" dirty="0">
-                <a:solidFill>
-                  <a:srgbClr val="17364A"/>
-                </a:solidFill>
-                <a:latin typeface="Aptos" pitchFamily="34" charset="0"/>
-                <a:ea typeface="Aptos" pitchFamily="34" charset="-122"/>
-                <a:cs typeface="Aptos" pitchFamily="34" charset="-120"/>
-              </a:rPr>
-              <a:t>5. What should leaders do when an AI use case has meaningful benefits but unresolved risks?</a:t>
-            </a:r>
-            <a:endParaRPr lang="en-US" sz="1450" dirty="0"/>
+              <a:t>Connect the concept to public health decisions, safeguards, documentation, or implementation work.</a:t>
+            </a:r>
+            <a:endParaRPr lang="en-US" sz="1250" dirty="0"/>
           </a:p>
         </p:txBody>
       </p:sp>
@@ -4869,7 +7553,32 @@
       </p:sp>
       <p:sp>
         <p:nvSpPr>
-          <p:cNvPr id="3" name="Text 1"/>
+          <p:cNvPr id="3" name="Shape 1"/>
+          <p:cNvSpPr/>
+          <p:nvPr/>
+        </p:nvSpPr>
+        <p:spPr>
+          <a:xfrm>
+            <a:off x="0" y="164592"/>
+            <a:ext cx="146304" cy="6693408"/>
+          </a:xfrm>
+          <a:prstGeom prst="rect">
+            <a:avLst/>
+          </a:prstGeom>
+          <a:solidFill>
+            <a:srgbClr val="2F8A28"/>
+          </a:solidFill>
+          <a:ln w="12700">
+            <a:solidFill>
+              <a:srgbClr val="2F8A28"/>
+            </a:solidFill>
+            <a:prstDash val="solid"/>
+          </a:ln>
+        </p:spPr>
+      </p:sp>
+      <p:sp>
+        <p:nvSpPr>
+          <p:cNvPr id="4" name="Text 2"/>
           <p:cNvSpPr/>
           <p:nvPr/>
         </p:nvSpPr>
@@ -4908,7 +7617,7 @@
       </p:sp>
       <p:sp>
         <p:nvSpPr>
-          <p:cNvPr id="4" name="Text 2"/>
+          <p:cNvPr id="5" name="Text 3"/>
           <p:cNvSpPr/>
           <p:nvPr/>
         </p:nvSpPr>
@@ -4947,7 +7656,7 @@
       </p:sp>
       <p:sp>
         <p:nvSpPr>
-          <p:cNvPr id="5" name="Text 3"/>
+          <p:cNvPr id="6" name="Text 4"/>
           <p:cNvSpPr/>
           <p:nvPr/>
         </p:nvSpPr>
@@ -4986,13 +7695,77 @@
       </p:sp>
       <p:sp>
         <p:nvSpPr>
-          <p:cNvPr id="6" name="Text 4"/>
+          <p:cNvPr id="7" name="Shape 5"/>
           <p:cNvSpPr/>
           <p:nvPr/>
         </p:nvSpPr>
         <p:spPr>
           <a:xfrm>
             <a:off x="640080" y="658368"/>
+            <a:ext cx="420624" cy="420624"/>
+          </a:xfrm>
+          <a:prstGeom prst="ellipse">
+            <a:avLst/>
+          </a:prstGeom>
+          <a:solidFill>
+            <a:srgbClr val="0068B7"/>
+          </a:solidFill>
+          <a:ln w="12700">
+            <a:solidFill>
+              <a:srgbClr val="0068B7"/>
+            </a:solidFill>
+            <a:prstDash val="solid"/>
+          </a:ln>
+        </p:spPr>
+      </p:sp>
+      <p:sp>
+        <p:nvSpPr>
+          <p:cNvPr id="8" name="Text 6"/>
+          <p:cNvSpPr/>
+          <p:nvPr/>
+        </p:nvSpPr>
+        <p:spPr>
+          <a:xfrm>
+            <a:off x="640080" y="731520"/>
+            <a:ext cx="420624" cy="164592"/>
+          </a:xfrm>
+          <a:prstGeom prst="rect">
+            <a:avLst/>
+          </a:prstGeom>
+          <a:noFill/>
+          <a:ln/>
+        </p:spPr>
+        <p:txBody>
+          <a:bodyPr wrap="square" lIns="0" tIns="0" rIns="0" bIns="0" rtlCol="0" anchor="ctr"/>
+          <a:lstStyle/>
+          <a:p>
+            <a:pPr algn="ctr" indent="0" marL="0">
+              <a:buNone/>
+            </a:pPr>
+            <a:r>
+              <a:rPr lang="en-US" sz="1100" b="1" dirty="0">
+                <a:solidFill>
+                  <a:srgbClr val="FFFFFF"/>
+                </a:solidFill>
+                <a:latin typeface="Aptos" pitchFamily="34" charset="0"/>
+                <a:ea typeface="Aptos" pitchFamily="34" charset="-122"/>
+                <a:cs typeface="Aptos" pitchFamily="34" charset="-120"/>
+              </a:rPr>
+              <a:t>13</a:t>
+            </a:r>
+            <a:endParaRPr lang="en-US" sz="1100" dirty="0"/>
+          </a:p>
+        </p:txBody>
+      </p:sp>
+      <p:sp>
+        <p:nvSpPr>
+          <p:cNvPr id="9" name="Text 7"/>
+          <p:cNvSpPr/>
+          <p:nvPr/>
+        </p:nvSpPr>
+        <p:spPr>
+          <a:xfrm>
+            <a:off x="640080" y="621792"/>
             <a:ext cx="10881360" cy="566928"/>
           </a:xfrm>
           <a:prstGeom prst="rect">
@@ -5019,7 +7792,7 @@
                 <a:ea typeface="Aptos Display" pitchFamily="34" charset="-122"/>
                 <a:cs typeface="Aptos Display" pitchFamily="34" charset="-120"/>
               </a:rPr>
-              <a:t>References and Resources</a:t>
+              <a:t>Expected Assignment</a:t>
             </a:r>
             <a:endParaRPr lang="en-US" sz="2700" dirty="0"/>
           </a:p>
@@ -5027,14 +7800,14 @@
       </p:sp>
       <p:sp>
         <p:nvSpPr>
-          <p:cNvPr id="7" name="Text 5"/>
-          <p:cNvSpPr/>
-          <p:nvPr/>
-        </p:nvSpPr>
-        <p:spPr>
-          <a:xfrm>
-            <a:off x="822960" y="1325880"/>
-            <a:ext cx="10378440" cy="4800600"/>
+          <p:cNvPr id="10" name="Text 8"/>
+          <p:cNvSpPr/>
+          <p:nvPr/>
+        </p:nvSpPr>
+        <p:spPr>
+          <a:xfrm>
+            <a:off x="868680" y="1417320"/>
+            <a:ext cx="6675120" cy="4434840"/>
           </a:xfrm>
           <a:prstGeom prst="rect">
             <a:avLst/>
@@ -5049,7 +7822,7 @@
           <a:lstStyle/>
           <a:p>
             <a:r>
-              <a:rPr lang="en-US" sz="1450" dirty="0">
+              <a:rPr lang="en-US" sz="1700" dirty="0">
                 <a:solidFill>
                   <a:srgbClr val="17364A"/>
                 </a:solidFill>
@@ -5057,13 +7830,106 @@
                 <a:ea typeface="Aptos" pitchFamily="34" charset="-122"/>
                 <a:cs typeface="Aptos" pitchFamily="34" charset="-120"/>
               </a:rPr>
-              <a:t>NIST Artificial Intelligence Risk Management Framework (AI RMF 1.0): https://www.nist.gov/itl/ai-risk-management-framework</a:t>
-            </a:r>
-            <a:endParaRPr lang="en-US" sz="1450" dirty="0"/>
-          </a:p>
-          <a:p>
-            <a:r>
-              <a:rPr lang="en-US" sz="1450" dirty="0">
+              <a:t>AI business case worksheet; total cost of ownership estimate; benefits realization plan; alternatives analysis.</a:t>
+            </a:r>
+            <a:endParaRPr lang="en-US" sz="1700" dirty="0"/>
+          </a:p>
+        </p:txBody>
+      </p:sp>
+      <p:sp>
+        <p:nvSpPr>
+          <p:cNvPr id="11" name="Shape 9"/>
+          <p:cNvSpPr/>
+          <p:nvPr/>
+        </p:nvSpPr>
+        <p:spPr>
+          <a:xfrm>
+            <a:off x="7909560" y="1417320"/>
+            <a:ext cx="3154680" cy="1828800"/>
+          </a:xfrm>
+          <a:prstGeom prst="roundRect">
+            <a:avLst>
+              <a:gd name="adj" fmla="val 6000"/>
+            </a:avLst>
+          </a:prstGeom>
+          <a:solidFill>
+            <a:srgbClr val="EEF8ED"/>
+          </a:solidFill>
+          <a:ln w="12700">
+            <a:solidFill>
+              <a:srgbClr val="B9D7E6"/>
+            </a:solidFill>
+            <a:prstDash val="solid"/>
+          </a:ln>
+        </p:spPr>
+      </p:sp>
+      <p:sp>
+        <p:nvSpPr>
+          <p:cNvPr id="12" name="Text 10"/>
+          <p:cNvSpPr/>
+          <p:nvPr/>
+        </p:nvSpPr>
+        <p:spPr>
+          <a:xfrm>
+            <a:off x="8074152" y="1563624"/>
+            <a:ext cx="2825496" cy="201168"/>
+          </a:xfrm>
+          <a:prstGeom prst="rect">
+            <a:avLst/>
+          </a:prstGeom>
+          <a:noFill/>
+          <a:ln/>
+        </p:spPr>
+        <p:txBody>
+          <a:bodyPr wrap="square" lIns="0" tIns="0" rIns="0" bIns="0" rtlCol="0" anchor="ctr"/>
+          <a:lstStyle/>
+          <a:p>
+            <a:pPr indent="0" marL="0">
+              <a:buNone/>
+            </a:pPr>
+            <a:r>
+              <a:rPr lang="en-US" sz="950" b="1" dirty="0">
+                <a:solidFill>
+                  <a:srgbClr val="0068B7"/>
+                </a:solidFill>
+                <a:latin typeface="Aptos" pitchFamily="34" charset="0"/>
+                <a:ea typeface="Aptos" pitchFamily="34" charset="-122"/>
+                <a:cs typeface="Aptos" pitchFamily="34" charset="-120"/>
+              </a:rPr>
+              <a:t>Key idea</a:t>
+            </a:r>
+            <a:endParaRPr lang="en-US" sz="950" dirty="0"/>
+          </a:p>
+        </p:txBody>
+      </p:sp>
+      <p:sp>
+        <p:nvSpPr>
+          <p:cNvPr id="13" name="Text 11"/>
+          <p:cNvSpPr/>
+          <p:nvPr/>
+        </p:nvSpPr>
+        <p:spPr>
+          <a:xfrm>
+            <a:off x="8074152" y="1856232"/>
+            <a:ext cx="2825496" cy="1261872"/>
+          </a:xfrm>
+          <a:prstGeom prst="rect">
+            <a:avLst/>
+          </a:prstGeom>
+          <a:noFill/>
+          <a:ln/>
+        </p:spPr>
+        <p:txBody>
+          <a:bodyPr wrap="square" lIns="0" tIns="0" rIns="0" bIns="0" rtlCol="0" anchor="t">
+            <a:normAutofit/>
+          </a:bodyPr>
+          <a:lstStyle/>
+          <a:p>
+            <a:pPr indent="0" marL="0">
+              <a:buNone/>
+            </a:pPr>
+            <a:r>
+              <a:rPr lang="en-US" sz="1250" dirty="0">
                 <a:solidFill>
                   <a:srgbClr val="17364A"/>
                 </a:solidFill>
@@ -5071,13 +7937,106 @@
                 <a:ea typeface="Aptos" pitchFamily="34" charset="-122"/>
                 <a:cs typeface="Aptos" pitchFamily="34" charset="-120"/>
               </a:rPr>
-              <a:t>NIST Generative AI Profile: https://www.nist.gov/publications/artificial-intelligence-risk-management-framework-generative-artificial-intelligence</a:t>
-            </a:r>
-            <a:endParaRPr lang="en-US" sz="1450" dirty="0"/>
-          </a:p>
-          <a:p>
-            <a:r>
-              <a:rPr lang="en-US" sz="1450" dirty="0">
+              <a:t>AI business case worksheet; total cost of ownership estimate; benefits realization plan; alternatives analysis.</a:t>
+            </a:r>
+            <a:endParaRPr lang="en-US" sz="1250" dirty="0"/>
+          </a:p>
+        </p:txBody>
+      </p:sp>
+      <p:sp>
+        <p:nvSpPr>
+          <p:cNvPr id="14" name="Shape 12"/>
+          <p:cNvSpPr/>
+          <p:nvPr/>
+        </p:nvSpPr>
+        <p:spPr>
+          <a:xfrm>
+            <a:off x="7909560" y="3520440"/>
+            <a:ext cx="3154680" cy="1737360"/>
+          </a:xfrm>
+          <a:prstGeom prst="roundRect">
+            <a:avLst>
+              <a:gd name="adj" fmla="val 6316"/>
+            </a:avLst>
+          </a:prstGeom>
+          <a:solidFill>
+            <a:srgbClr val="EAF6F8"/>
+          </a:solidFill>
+          <a:ln w="12700">
+            <a:solidFill>
+              <a:srgbClr val="B9D7E6"/>
+            </a:solidFill>
+            <a:prstDash val="solid"/>
+          </a:ln>
+        </p:spPr>
+      </p:sp>
+      <p:sp>
+        <p:nvSpPr>
+          <p:cNvPr id="15" name="Text 13"/>
+          <p:cNvSpPr/>
+          <p:nvPr/>
+        </p:nvSpPr>
+        <p:spPr>
+          <a:xfrm>
+            <a:off x="8074152" y="3666744"/>
+            <a:ext cx="2825496" cy="201168"/>
+          </a:xfrm>
+          <a:prstGeom prst="rect">
+            <a:avLst/>
+          </a:prstGeom>
+          <a:noFill/>
+          <a:ln/>
+        </p:spPr>
+        <p:txBody>
+          <a:bodyPr wrap="square" lIns="0" tIns="0" rIns="0" bIns="0" rtlCol="0" anchor="ctr"/>
+          <a:lstStyle/>
+          <a:p>
+            <a:pPr indent="0" marL="0">
+              <a:buNone/>
+            </a:pPr>
+            <a:r>
+              <a:rPr lang="en-US" sz="950" b="1" dirty="0">
+                <a:solidFill>
+                  <a:srgbClr val="0068B7"/>
+                </a:solidFill>
+                <a:latin typeface="Aptos" pitchFamily="34" charset="0"/>
+                <a:ea typeface="Aptos" pitchFamily="34" charset="-122"/>
+                <a:cs typeface="Aptos" pitchFamily="34" charset="-120"/>
+              </a:rPr>
+              <a:t>Use this for</a:t>
+            </a:r>
+            <a:endParaRPr lang="en-US" sz="950" dirty="0"/>
+          </a:p>
+        </p:txBody>
+      </p:sp>
+      <p:sp>
+        <p:nvSpPr>
+          <p:cNvPr id="16" name="Text 14"/>
+          <p:cNvSpPr/>
+          <p:nvPr/>
+        </p:nvSpPr>
+        <p:spPr>
+          <a:xfrm>
+            <a:off x="8074152" y="3959352"/>
+            <a:ext cx="2825496" cy="1170432"/>
+          </a:xfrm>
+          <a:prstGeom prst="rect">
+            <a:avLst/>
+          </a:prstGeom>
+          <a:noFill/>
+          <a:ln/>
+        </p:spPr>
+        <p:txBody>
+          <a:bodyPr wrap="square" lIns="0" tIns="0" rIns="0" bIns="0" rtlCol="0" anchor="t">
+            <a:normAutofit/>
+          </a:bodyPr>
+          <a:lstStyle/>
+          <a:p>
+            <a:pPr indent="0" marL="0">
+              <a:buNone/>
+            </a:pPr>
+            <a:r>
+              <a:rPr lang="en-US" sz="1250" dirty="0">
                 <a:solidFill>
                   <a:srgbClr val="17364A"/>
                 </a:solidFill>
@@ -5085,37 +8044,9 @@
                 <a:ea typeface="Aptos" pitchFamily="34" charset="-122"/>
                 <a:cs typeface="Aptos" pitchFamily="34" charset="-120"/>
               </a:rPr>
-              <a:t>NIST Privacy Framework</a:t>
-            </a:r>
-            <a:endParaRPr lang="en-US" sz="1450" dirty="0"/>
-          </a:p>
-          <a:p>
-            <a:r>
-              <a:rPr lang="en-US" sz="1450" dirty="0">
-                <a:solidFill>
-                  <a:srgbClr val="17364A"/>
-                </a:solidFill>
-                <a:latin typeface="Aptos" pitchFamily="34" charset="0"/>
-                <a:ea typeface="Aptos" pitchFamily="34" charset="-122"/>
-                <a:cs typeface="Aptos" pitchFamily="34" charset="-120"/>
-              </a:rPr>
-              <a:t>CDC Public Health Data Strategy and Data Modernization resources: https://www.cdc.gov/public-health-data-strategy/php/about/index.html</a:t>
-            </a:r>
-            <a:endParaRPr lang="en-US" sz="1450" dirty="0"/>
-          </a:p>
-          <a:p>
-            <a:r>
-              <a:rPr lang="en-US" sz="1450" dirty="0">
-                <a:solidFill>
-                  <a:srgbClr val="17364A"/>
-                </a:solidFill>
-                <a:latin typeface="Aptos" pitchFamily="34" charset="0"/>
-                <a:ea typeface="Aptos" pitchFamily="34" charset="-122"/>
-                <a:cs typeface="Aptos" pitchFamily="34" charset="-120"/>
-              </a:rPr>
-              <a:t>WHO Ethics and Governance of Artificial Intelligence for Health: https://www.who.int/publications/i/item/9789240029200</a:t>
-            </a:r>
-            <a:endParaRPr lang="en-US" sz="1450" dirty="0"/>
+              <a:t>Connect the concept to public health decisions, safeguards, documentation, or implementation work.</a:t>
+            </a:r>
+            <a:endParaRPr lang="en-US" sz="1250" dirty="0"/>
           </a:p>
         </p:txBody>
       </p:sp>
@@ -5178,7 +8109,32 @@
       </p:sp>
       <p:sp>
         <p:nvSpPr>
-          <p:cNvPr id="3" name="Text 1"/>
+          <p:cNvPr id="3" name="Shape 1"/>
+          <p:cNvSpPr/>
+          <p:nvPr/>
+        </p:nvSpPr>
+        <p:spPr>
+          <a:xfrm>
+            <a:off x="0" y="164592"/>
+            <a:ext cx="146304" cy="6693408"/>
+          </a:xfrm>
+          <a:prstGeom prst="rect">
+            <a:avLst/>
+          </a:prstGeom>
+          <a:solidFill>
+            <a:srgbClr val="2F8A28"/>
+          </a:solidFill>
+          <a:ln w="12700">
+            <a:solidFill>
+              <a:srgbClr val="2F8A28"/>
+            </a:solidFill>
+            <a:prstDash val="solid"/>
+          </a:ln>
+        </p:spPr>
+      </p:sp>
+      <p:sp>
+        <p:nvSpPr>
+          <p:cNvPr id="4" name="Text 2"/>
           <p:cNvSpPr/>
           <p:nvPr/>
         </p:nvSpPr>
@@ -5217,7 +8173,7 @@
       </p:sp>
       <p:sp>
         <p:nvSpPr>
-          <p:cNvPr id="4" name="Text 2"/>
+          <p:cNvPr id="5" name="Text 3"/>
           <p:cNvSpPr/>
           <p:nvPr/>
         </p:nvSpPr>
@@ -5256,7 +8212,7 @@
       </p:sp>
       <p:sp>
         <p:nvSpPr>
-          <p:cNvPr id="5" name="Text 3"/>
+          <p:cNvPr id="6" name="Text 4"/>
           <p:cNvSpPr/>
           <p:nvPr/>
         </p:nvSpPr>
@@ -5295,13 +8251,77 @@
       </p:sp>
       <p:sp>
         <p:nvSpPr>
-          <p:cNvPr id="6" name="Text 4"/>
+          <p:cNvPr id="7" name="Shape 5"/>
           <p:cNvSpPr/>
           <p:nvPr/>
         </p:nvSpPr>
         <p:spPr>
           <a:xfrm>
             <a:off x="640080" y="658368"/>
+            <a:ext cx="420624" cy="420624"/>
+          </a:xfrm>
+          <a:prstGeom prst="ellipse">
+            <a:avLst/>
+          </a:prstGeom>
+          <a:solidFill>
+            <a:srgbClr val="0068B7"/>
+          </a:solidFill>
+          <a:ln w="12700">
+            <a:solidFill>
+              <a:srgbClr val="0068B7"/>
+            </a:solidFill>
+            <a:prstDash val="solid"/>
+          </a:ln>
+        </p:spPr>
+      </p:sp>
+      <p:sp>
+        <p:nvSpPr>
+          <p:cNvPr id="8" name="Text 6"/>
+          <p:cNvSpPr/>
+          <p:nvPr/>
+        </p:nvSpPr>
+        <p:spPr>
+          <a:xfrm>
+            <a:off x="640080" y="731520"/>
+            <a:ext cx="420624" cy="164592"/>
+          </a:xfrm>
+          <a:prstGeom prst="rect">
+            <a:avLst/>
+          </a:prstGeom>
+          <a:noFill/>
+          <a:ln/>
+        </p:spPr>
+        <p:txBody>
+          <a:bodyPr wrap="square" lIns="0" tIns="0" rIns="0" bIns="0" rtlCol="0" anchor="ctr"/>
+          <a:lstStyle/>
+          <a:p>
+            <a:pPr algn="ctr" indent="0" marL="0">
+              <a:buNone/>
+            </a:pPr>
+            <a:r>
+              <a:rPr lang="en-US" sz="1100" b="1" dirty="0">
+                <a:solidFill>
+                  <a:srgbClr val="FFFFFF"/>
+                </a:solidFill>
+                <a:latin typeface="Aptos" pitchFamily="34" charset="0"/>
+                <a:ea typeface="Aptos" pitchFamily="34" charset="-122"/>
+                <a:cs typeface="Aptos" pitchFamily="34" charset="-120"/>
+              </a:rPr>
+              <a:t>14</a:t>
+            </a:r>
+            <a:endParaRPr lang="en-US" sz="1100" dirty="0"/>
+          </a:p>
+        </p:txBody>
+      </p:sp>
+      <p:sp>
+        <p:nvSpPr>
+          <p:cNvPr id="9" name="Text 7"/>
+          <p:cNvSpPr/>
+          <p:nvPr/>
+        </p:nvSpPr>
+        <p:spPr>
+          <a:xfrm>
+            <a:off x="640080" y="621792"/>
             <a:ext cx="10881360" cy="566928"/>
           </a:xfrm>
           <a:prstGeom prst="rect">
@@ -5328,7 +8348,7 @@
                 <a:ea typeface="Aptos Display" pitchFamily="34" charset="-122"/>
                 <a:cs typeface="Aptos Display" pitchFamily="34" charset="-120"/>
               </a:rPr>
-              <a:t>References and Resources Continued</a:t>
+              <a:t>Knowledge Check</a:t>
             </a:r>
             <a:endParaRPr lang="en-US" sz="2700" dirty="0"/>
           </a:p>
@@ -5336,14 +8356,14 @@
       </p:sp>
       <p:sp>
         <p:nvSpPr>
-          <p:cNvPr id="7" name="Text 5"/>
-          <p:cNvSpPr/>
-          <p:nvPr/>
-        </p:nvSpPr>
-        <p:spPr>
-          <a:xfrm>
-            <a:off x="822960" y="1325880"/>
-            <a:ext cx="10378440" cy="4800600"/>
+          <p:cNvPr id="10" name="Text 8"/>
+          <p:cNvSpPr/>
+          <p:nvPr/>
+        </p:nvSpPr>
+        <p:spPr>
+          <a:xfrm>
+            <a:off x="868680" y="1417320"/>
+            <a:ext cx="6675120" cy="4434840"/>
           </a:xfrm>
           <a:prstGeom prst="rect">
             <a:avLst/>
@@ -5358,7 +8378,7 @@
           <a:lstStyle/>
           <a:p>
             <a:r>
-              <a:rPr lang="en-US" sz="1450" dirty="0">
+              <a:rPr lang="en-US" sz="1700" dirty="0">
                 <a:solidFill>
                   <a:srgbClr val="17364A"/>
                 </a:solidFill>
@@ -5366,13 +8386,13 @@
                 <a:ea typeface="Aptos" pitchFamily="34" charset="-122"/>
                 <a:cs typeface="Aptos" pitchFamily="34" charset="-120"/>
               </a:rPr>
-              <a:t>OMB Memorandum M-24-10 on federal AI governance, risk management, and innovation, where relevant to public-sector governance models</a:t>
-            </a:r>
-            <a:endParaRPr lang="en-US" sz="1450" dirty="0"/>
-          </a:p>
-          <a:p>
-            <a:r>
-              <a:rPr lang="en-US" sz="1450" dirty="0">
+              <a:t>1. What is the strongest reason this module topic belongs in AI leadership and governance training?</a:t>
+            </a:r>
+            <a:endParaRPr lang="en-US" sz="1700" dirty="0"/>
+          </a:p>
+          <a:p>
+            <a:r>
+              <a:rPr lang="en-US" sz="1700" dirty="0">
                 <a:solidFill>
                   <a:srgbClr val="17364A"/>
                 </a:solidFill>
@@ -5380,9 +8400,251 @@
                 <a:ea typeface="Aptos" pitchFamily="34" charset="-122"/>
                 <a:cs typeface="Aptos" pitchFamily="34" charset="-120"/>
               </a:rPr>
-              <a:t>Agency strategic plans, procurement policies, privacy policies, cybersecurity policies, records policies, and equity plans</a:t>
-            </a:r>
-            <a:endParaRPr lang="en-US" sz="1450" dirty="0"/>
+              <a:t>2. Which practice best supports accountable public health AI governance?</a:t>
+            </a:r>
+            <a:endParaRPr lang="en-US" sz="1700" dirty="0"/>
+          </a:p>
+          <a:p>
+            <a:r>
+              <a:rPr lang="en-US" sz="1700" dirty="0">
+                <a:solidFill>
+                  <a:srgbClr val="17364A"/>
+                </a:solidFill>
+                <a:latin typeface="Aptos" pitchFamily="34" charset="0"/>
+                <a:ea typeface="Aptos" pitchFamily="34" charset="-122"/>
+                <a:cs typeface="Aptos" pitchFamily="34" charset="-120"/>
+              </a:rPr>
+              <a:t>3. When should an AI use case be escalated for leadership or governance review?</a:t>
+            </a:r>
+            <a:endParaRPr lang="en-US" sz="1700" dirty="0"/>
+          </a:p>
+          <a:p>
+            <a:r>
+              <a:rPr lang="en-US" sz="1700" dirty="0">
+                <a:solidFill>
+                  <a:srgbClr val="17364A"/>
+                </a:solidFill>
+                <a:latin typeface="Aptos" pitchFamily="34" charset="0"/>
+                <a:ea typeface="Aptos" pitchFamily="34" charset="-122"/>
+                <a:cs typeface="Aptos" pitchFamily="34" charset="-120"/>
+              </a:rPr>
+              <a:t>4. What is weak evidence of completion for a leadership and governance module?</a:t>
+            </a:r>
+            <a:endParaRPr lang="en-US" sz="1700" dirty="0"/>
+          </a:p>
+        </p:txBody>
+      </p:sp>
+      <p:sp>
+        <p:nvSpPr>
+          <p:cNvPr id="11" name="Shape 9"/>
+          <p:cNvSpPr/>
+          <p:nvPr/>
+        </p:nvSpPr>
+        <p:spPr>
+          <a:xfrm>
+            <a:off x="7909560" y="1417320"/>
+            <a:ext cx="3154680" cy="1828800"/>
+          </a:xfrm>
+          <a:prstGeom prst="roundRect">
+            <a:avLst>
+              <a:gd name="adj" fmla="val 6000"/>
+            </a:avLst>
+          </a:prstGeom>
+          <a:solidFill>
+            <a:srgbClr val="EEF8ED"/>
+          </a:solidFill>
+          <a:ln w="12700">
+            <a:solidFill>
+              <a:srgbClr val="B9D7E6"/>
+            </a:solidFill>
+            <a:prstDash val="solid"/>
+          </a:ln>
+        </p:spPr>
+      </p:sp>
+      <p:sp>
+        <p:nvSpPr>
+          <p:cNvPr id="12" name="Text 10"/>
+          <p:cNvSpPr/>
+          <p:nvPr/>
+        </p:nvSpPr>
+        <p:spPr>
+          <a:xfrm>
+            <a:off x="8074152" y="1563624"/>
+            <a:ext cx="2825496" cy="201168"/>
+          </a:xfrm>
+          <a:prstGeom prst="rect">
+            <a:avLst/>
+          </a:prstGeom>
+          <a:noFill/>
+          <a:ln/>
+        </p:spPr>
+        <p:txBody>
+          <a:bodyPr wrap="square" lIns="0" tIns="0" rIns="0" bIns="0" rtlCol="0" anchor="ctr"/>
+          <a:lstStyle/>
+          <a:p>
+            <a:pPr indent="0" marL="0">
+              <a:buNone/>
+            </a:pPr>
+            <a:r>
+              <a:rPr lang="en-US" sz="950" b="1" dirty="0">
+                <a:solidFill>
+                  <a:srgbClr val="0068B7"/>
+                </a:solidFill>
+                <a:latin typeface="Aptos" pitchFamily="34" charset="0"/>
+                <a:ea typeface="Aptos" pitchFamily="34" charset="-122"/>
+                <a:cs typeface="Aptos" pitchFamily="34" charset="-120"/>
+              </a:rPr>
+              <a:t>Key idea</a:t>
+            </a:r>
+            <a:endParaRPr lang="en-US" sz="950" dirty="0"/>
+          </a:p>
+        </p:txBody>
+      </p:sp>
+      <p:sp>
+        <p:nvSpPr>
+          <p:cNvPr id="13" name="Text 11"/>
+          <p:cNvSpPr/>
+          <p:nvPr/>
+        </p:nvSpPr>
+        <p:spPr>
+          <a:xfrm>
+            <a:off x="8074152" y="1856232"/>
+            <a:ext cx="2825496" cy="1261872"/>
+          </a:xfrm>
+          <a:prstGeom prst="rect">
+            <a:avLst/>
+          </a:prstGeom>
+          <a:noFill/>
+          <a:ln/>
+        </p:spPr>
+        <p:txBody>
+          <a:bodyPr wrap="square" lIns="0" tIns="0" rIns="0" bIns="0" rtlCol="0" anchor="t">
+            <a:normAutofit/>
+          </a:bodyPr>
+          <a:lstStyle/>
+          <a:p>
+            <a:pPr indent="0" marL="0">
+              <a:buNone/>
+            </a:pPr>
+            <a:r>
+              <a:rPr lang="en-US" sz="1250" dirty="0">
+                <a:solidFill>
+                  <a:srgbClr val="17364A"/>
+                </a:solidFill>
+                <a:latin typeface="Aptos" pitchFamily="34" charset="0"/>
+                <a:ea typeface="Aptos" pitchFamily="34" charset="-122"/>
+                <a:cs typeface="Aptos" pitchFamily="34" charset="-120"/>
+              </a:rPr>
+              <a:t>1. What is the strongest reason this module topic belongs in AI leadership and governance training?</a:t>
+            </a:r>
+            <a:endParaRPr lang="en-US" sz="1250" dirty="0"/>
+          </a:p>
+        </p:txBody>
+      </p:sp>
+      <p:sp>
+        <p:nvSpPr>
+          <p:cNvPr id="14" name="Shape 12"/>
+          <p:cNvSpPr/>
+          <p:nvPr/>
+        </p:nvSpPr>
+        <p:spPr>
+          <a:xfrm>
+            <a:off x="7909560" y="3520440"/>
+            <a:ext cx="3154680" cy="1737360"/>
+          </a:xfrm>
+          <a:prstGeom prst="roundRect">
+            <a:avLst>
+              <a:gd name="adj" fmla="val 6316"/>
+            </a:avLst>
+          </a:prstGeom>
+          <a:solidFill>
+            <a:srgbClr val="EAF6F8"/>
+          </a:solidFill>
+          <a:ln w="12700">
+            <a:solidFill>
+              <a:srgbClr val="B9D7E6"/>
+            </a:solidFill>
+            <a:prstDash val="solid"/>
+          </a:ln>
+        </p:spPr>
+      </p:sp>
+      <p:sp>
+        <p:nvSpPr>
+          <p:cNvPr id="15" name="Text 13"/>
+          <p:cNvSpPr/>
+          <p:nvPr/>
+        </p:nvSpPr>
+        <p:spPr>
+          <a:xfrm>
+            <a:off x="8074152" y="3666744"/>
+            <a:ext cx="2825496" cy="201168"/>
+          </a:xfrm>
+          <a:prstGeom prst="rect">
+            <a:avLst/>
+          </a:prstGeom>
+          <a:noFill/>
+          <a:ln/>
+        </p:spPr>
+        <p:txBody>
+          <a:bodyPr wrap="square" lIns="0" tIns="0" rIns="0" bIns="0" rtlCol="0" anchor="ctr"/>
+          <a:lstStyle/>
+          <a:p>
+            <a:pPr indent="0" marL="0">
+              <a:buNone/>
+            </a:pPr>
+            <a:r>
+              <a:rPr lang="en-US" sz="950" b="1" dirty="0">
+                <a:solidFill>
+                  <a:srgbClr val="0068B7"/>
+                </a:solidFill>
+                <a:latin typeface="Aptos" pitchFamily="34" charset="0"/>
+                <a:ea typeface="Aptos" pitchFamily="34" charset="-122"/>
+                <a:cs typeface="Aptos" pitchFamily="34" charset="-120"/>
+              </a:rPr>
+              <a:t>Use this for</a:t>
+            </a:r>
+            <a:endParaRPr lang="en-US" sz="950" dirty="0"/>
+          </a:p>
+        </p:txBody>
+      </p:sp>
+      <p:sp>
+        <p:nvSpPr>
+          <p:cNvPr id="16" name="Text 14"/>
+          <p:cNvSpPr/>
+          <p:nvPr/>
+        </p:nvSpPr>
+        <p:spPr>
+          <a:xfrm>
+            <a:off x="8074152" y="3959352"/>
+            <a:ext cx="2825496" cy="1170432"/>
+          </a:xfrm>
+          <a:prstGeom prst="rect">
+            <a:avLst/>
+          </a:prstGeom>
+          <a:noFill/>
+          <a:ln/>
+        </p:spPr>
+        <p:txBody>
+          <a:bodyPr wrap="square" lIns="0" tIns="0" rIns="0" bIns="0" rtlCol="0" anchor="t">
+            <a:normAutofit/>
+          </a:bodyPr>
+          <a:lstStyle/>
+          <a:p>
+            <a:pPr indent="0" marL="0">
+              <a:buNone/>
+            </a:pPr>
+            <a:r>
+              <a:rPr lang="en-US" sz="1250" dirty="0">
+                <a:solidFill>
+                  <a:srgbClr val="17364A"/>
+                </a:solidFill>
+                <a:latin typeface="Aptos" pitchFamily="34" charset="0"/>
+                <a:ea typeface="Aptos" pitchFamily="34" charset="-122"/>
+                <a:cs typeface="Aptos" pitchFamily="34" charset="-120"/>
+              </a:rPr>
+              <a:t>Connect the concept to public health decisions, safeguards, documentation, or implementation work.</a:t>
+            </a:r>
+            <a:endParaRPr lang="en-US" sz="1250" dirty="0"/>
           </a:p>
         </p:txBody>
       </p:sp>
@@ -5445,7 +8707,32 @@
       </p:sp>
       <p:sp>
         <p:nvSpPr>
-          <p:cNvPr id="3" name="Text 1"/>
+          <p:cNvPr id="3" name="Shape 1"/>
+          <p:cNvSpPr/>
+          <p:nvPr/>
+        </p:nvSpPr>
+        <p:spPr>
+          <a:xfrm>
+            <a:off x="0" y="164592"/>
+            <a:ext cx="146304" cy="6693408"/>
+          </a:xfrm>
+          <a:prstGeom prst="rect">
+            <a:avLst/>
+          </a:prstGeom>
+          <a:solidFill>
+            <a:srgbClr val="2F8A28"/>
+          </a:solidFill>
+          <a:ln w="12700">
+            <a:solidFill>
+              <a:srgbClr val="2F8A28"/>
+            </a:solidFill>
+            <a:prstDash val="solid"/>
+          </a:ln>
+        </p:spPr>
+      </p:sp>
+      <p:sp>
+        <p:nvSpPr>
+          <p:cNvPr id="4" name="Text 2"/>
           <p:cNvSpPr/>
           <p:nvPr/>
         </p:nvSpPr>
@@ -5484,7 +8771,7 @@
       </p:sp>
       <p:sp>
         <p:nvSpPr>
-          <p:cNvPr id="4" name="Text 2"/>
+          <p:cNvPr id="5" name="Text 3"/>
           <p:cNvSpPr/>
           <p:nvPr/>
         </p:nvSpPr>
@@ -5523,7 +8810,7 @@
       </p:sp>
       <p:sp>
         <p:nvSpPr>
-          <p:cNvPr id="5" name="Text 3"/>
+          <p:cNvPr id="6" name="Text 4"/>
           <p:cNvSpPr/>
           <p:nvPr/>
         </p:nvSpPr>
@@ -5562,7 +8849,7 @@
       </p:sp>
       <p:sp>
         <p:nvSpPr>
-          <p:cNvPr id="6" name="Text 4"/>
+          <p:cNvPr id="7" name="Text 5"/>
           <p:cNvSpPr/>
           <p:nvPr/>
         </p:nvSpPr>
@@ -5595,7 +8882,7 @@
                 <a:ea typeface="Aptos Display" pitchFamily="34" charset="-122"/>
                 <a:cs typeface="Aptos Display" pitchFamily="34" charset="-120"/>
               </a:rPr>
-              <a:t>Module Context</a:t>
+              <a:t>What this module helps you do</a:t>
             </a:r>
             <a:endParaRPr lang="en-US" sz="2700" dirty="0"/>
           </a:p>
@@ -5603,14 +8890,14 @@
       </p:sp>
       <p:sp>
         <p:nvSpPr>
-          <p:cNvPr id="7" name="Text 5"/>
-          <p:cNvSpPr/>
-          <p:nvPr/>
-        </p:nvSpPr>
-        <p:spPr>
-          <a:xfrm>
-            <a:off x="822960" y="1325880"/>
-            <a:ext cx="10378440" cy="1371600"/>
+          <p:cNvPr id="8" name="Text 6"/>
+          <p:cNvSpPr/>
+          <p:nvPr/>
+        </p:nvSpPr>
+        <p:spPr>
+          <a:xfrm>
+            <a:off x="868680" y="1417320"/>
+            <a:ext cx="6675120" cy="3291840"/>
           </a:xfrm>
           <a:prstGeom prst="rect">
             <a:avLst/>
@@ -5625,7 +8912,7 @@
           <a:lstStyle/>
           <a:p>
             <a:r>
-              <a:rPr lang="en-US" sz="1600" dirty="0">
+              <a:rPr lang="en-US" sz="1700" dirty="0">
                 <a:solidFill>
                   <a:srgbClr val="17364A"/>
                 </a:solidFill>
@@ -5633,13 +8920,13 @@
                 <a:ea typeface="Aptos" pitchFamily="34" charset="-122"/>
                 <a:cs typeface="Aptos" pitchFamily="34" charset="-120"/>
               </a:rPr>
-              <a:t>Level: advanced/leadership</a:t>
-            </a:r>
-            <a:endParaRPr lang="en-US" sz="1600" dirty="0"/>
-          </a:p>
-          <a:p>
-            <a:r>
-              <a:rPr lang="en-US" sz="1600" dirty="0">
+              <a:t>AI investments compete with many other public health priorities.</a:t>
+            </a:r>
+            <a:endParaRPr lang="en-US" sz="1700" dirty="0"/>
+          </a:p>
+          <a:p>
+            <a:r>
+              <a:rPr lang="en-US" sz="1700" dirty="0">
                 <a:solidFill>
                   <a:srgbClr val="17364A"/>
                 </a:solidFill>
@@ -5647,13 +8934,13 @@
                 <a:ea typeface="Aptos" pitchFamily="34" charset="-122"/>
                 <a:cs typeface="Aptos" pitchFamily="34" charset="-120"/>
               </a:rPr>
-              <a:t>Primary track: Public Health Executive Leadership Track</a:t>
-            </a:r>
-            <a:endParaRPr lang="en-US" sz="1600" dirty="0"/>
-          </a:p>
-          <a:p>
-            <a:r>
-              <a:rPr lang="en-US" sz="1600" dirty="0">
+              <a:t>Leaders need a disciplined way to decide when AI is worth funding, what costs must be considered, and how benefits will be measured.</a:t>
+            </a:r>
+            <a:endParaRPr lang="en-US" sz="1700" dirty="0"/>
+          </a:p>
+          <a:p>
+            <a:r>
+              <a:rPr lang="en-US" sz="1700" dirty="0">
                 <a:solidFill>
                   <a:srgbClr val="17364A"/>
                 </a:solidFill>
@@ -5661,31 +8948,111 @@
                 <a:ea typeface="Aptos" pitchFamily="34" charset="-122"/>
                 <a:cs typeface="Aptos" pitchFamily="34" charset="-120"/>
               </a:rPr>
-              <a:t>Appears in tracks: governance-security</a:t>
-            </a:r>
-            <a:endParaRPr lang="en-US" sz="1600" dirty="0"/>
-          </a:p>
-        </p:txBody>
-      </p:sp>
-      <p:sp>
-        <p:nvSpPr>
-          <p:cNvPr id="8" name="Text 6"/>
-          <p:cNvSpPr/>
-          <p:nvPr/>
-        </p:nvSpPr>
-        <p:spPr>
-          <a:xfrm>
-            <a:off x="822960" y="2743200"/>
-            <a:ext cx="10378440" cy="2834640"/>
-          </a:xfrm>
-          <a:prstGeom prst="rect">
-            <a:avLst/>
-          </a:prstGeom>
-          <a:noFill/>
-          <a:ln/>
-        </p:spPr>
-        <p:txBody>
-          <a:bodyPr wrap="square" lIns="1016" tIns="1016" rIns="1016" bIns="1016" rtlCol="0" anchor="t">
+              <a:t>A business case review helps agencies avoid buying tools that are impressive in demonstrations but weak in operational value, sustainability,.</a:t>
+            </a:r>
+            <a:endParaRPr lang="en-US" sz="1700" dirty="0"/>
+          </a:p>
+          <a:p>
+            <a:r>
+              <a:rPr lang="en-US" sz="1700" dirty="0">
+                <a:solidFill>
+                  <a:srgbClr val="17364A"/>
+                </a:solidFill>
+                <a:latin typeface="Aptos" pitchFamily="34" charset="0"/>
+                <a:ea typeface="Aptos" pitchFamily="34" charset="-122"/>
+                <a:cs typeface="Aptos" pitchFamily="34" charset="-120"/>
+              </a:rPr>
+              <a:t>This module teaches leaders to evaluate AI investments across cost, value, readiness, risk, staffing, procurement, lifecycle support, and.</a:t>
+            </a:r>
+            <a:endParaRPr lang="en-US" sz="1700" dirty="0"/>
+          </a:p>
+        </p:txBody>
+      </p:sp>
+      <p:sp>
+        <p:nvSpPr>
+          <p:cNvPr id="9" name="Shape 7"/>
+          <p:cNvSpPr/>
+          <p:nvPr/>
+        </p:nvSpPr>
+        <p:spPr>
+          <a:xfrm>
+            <a:off x="7909560" y="1417320"/>
+            <a:ext cx="3154680" cy="1920240"/>
+          </a:xfrm>
+          <a:prstGeom prst="roundRect">
+            <a:avLst>
+              <a:gd name="adj" fmla="val 5714"/>
+            </a:avLst>
+          </a:prstGeom>
+          <a:solidFill>
+            <a:srgbClr val="EAF6F8"/>
+          </a:solidFill>
+          <a:ln w="12700">
+            <a:solidFill>
+              <a:srgbClr val="B9D7E6"/>
+            </a:solidFill>
+            <a:prstDash val="solid"/>
+          </a:ln>
+        </p:spPr>
+      </p:sp>
+      <p:sp>
+        <p:nvSpPr>
+          <p:cNvPr id="10" name="Text 8"/>
+          <p:cNvSpPr/>
+          <p:nvPr/>
+        </p:nvSpPr>
+        <p:spPr>
+          <a:xfrm>
+            <a:off x="8074152" y="1563624"/>
+            <a:ext cx="2825496" cy="201168"/>
+          </a:xfrm>
+          <a:prstGeom prst="rect">
+            <a:avLst/>
+          </a:prstGeom>
+          <a:noFill/>
+          <a:ln/>
+        </p:spPr>
+        <p:txBody>
+          <a:bodyPr wrap="square" lIns="0" tIns="0" rIns="0" bIns="0" rtlCol="0" anchor="ctr"/>
+          <a:lstStyle/>
+          <a:p>
+            <a:pPr indent="0" marL="0">
+              <a:buNone/>
+            </a:pPr>
+            <a:r>
+              <a:rPr lang="en-US" sz="950" b="1" dirty="0">
+                <a:solidFill>
+                  <a:srgbClr val="0068B7"/>
+                </a:solidFill>
+                <a:latin typeface="Aptos" pitchFamily="34" charset="0"/>
+                <a:ea typeface="Aptos" pitchFamily="34" charset="-122"/>
+                <a:cs typeface="Aptos" pitchFamily="34" charset="-120"/>
+              </a:rPr>
+              <a:t>Module details</a:t>
+            </a:r>
+            <a:endParaRPr lang="en-US" sz="950" dirty="0"/>
+          </a:p>
+        </p:txBody>
+      </p:sp>
+      <p:sp>
+        <p:nvSpPr>
+          <p:cNvPr id="11" name="Text 9"/>
+          <p:cNvSpPr/>
+          <p:nvPr/>
+        </p:nvSpPr>
+        <p:spPr>
+          <a:xfrm>
+            <a:off x="8074152" y="1856232"/>
+            <a:ext cx="2825496" cy="1353312"/>
+          </a:xfrm>
+          <a:prstGeom prst="rect">
+            <a:avLst/>
+          </a:prstGeom>
+          <a:noFill/>
+          <a:ln/>
+        </p:spPr>
+        <p:txBody>
+          <a:bodyPr wrap="square" lIns="0" tIns="0" rIns="0" bIns="0" rtlCol="0" anchor="t">
             <a:normAutofit/>
           </a:bodyPr>
           <a:lstStyle/>
@@ -5694,7 +9061,7 @@
               <a:buNone/>
             </a:pPr>
             <a:r>
-              <a:rPr lang="en-US" sz="1400" dirty="0">
+              <a:rPr lang="en-US" sz="1250" dirty="0">
                 <a:solidFill>
                   <a:srgbClr val="17364A"/>
                 </a:solidFill>
@@ -5702,9 +9069,1254 @@
                 <a:ea typeface="Aptos" pitchFamily="34" charset="-122"/>
                 <a:cs typeface="Aptos" pitchFamily="34" charset="-120"/>
               </a:rPr>
-              <a:t>AI investments compete with many other public health priorities. Leaders need a disciplined way to decide when AI is worth funding, what costs must be considered, and how benefits will be measured. A business case review helps agencies avoid buying tools that are impressive in demonstrations but weak in operational value, sustainability, interoperability, or public health impact. This module teaches leaders to evaluate AI investments across cost, value, readiness, risk, staffing, procurement, lifecycle support, and sustainability. The business case should not focus only on software price. It should include data preparation, implementation, integration, training, governance, validation, monitoring, maintenance, vendor management, cybersecurity, accessibility, and eventual replacement or retirement.</a:t>
-            </a:r>
-            <a:endParaRPr lang="en-US" sz="1400" dirty="0"/>
+              <a:t>Level: advanced/leadership</a:t>
+            </a:r>
+            <a:endParaRPr lang="en-US" sz="1250" dirty="0"/>
+          </a:p>
+          <a:p>
+            <a:pPr indent="0" marL="0">
+              <a:buNone/>
+            </a:pPr>
+            <a:r>
+              <a:rPr lang="en-US" sz="1250" dirty="0">
+                <a:solidFill>
+                  <a:srgbClr val="17364A"/>
+                </a:solidFill>
+                <a:latin typeface="Aptos" pitchFamily="34" charset="0"/>
+                <a:ea typeface="Aptos" pitchFamily="34" charset="-122"/>
+                <a:cs typeface="Aptos" pitchFamily="34" charset="-120"/>
+              </a:rPr>
+              <a:t>Primary track: Public Health Executive Leadership Track</a:t>
+            </a:r>
+            <a:endParaRPr lang="en-US" sz="1250" dirty="0"/>
+          </a:p>
+          <a:p>
+            <a:pPr indent="0" marL="0">
+              <a:buNone/>
+            </a:pPr>
+            <a:r>
+              <a:rPr lang="en-US" sz="1250" dirty="0">
+                <a:solidFill>
+                  <a:srgbClr val="17364A"/>
+                </a:solidFill>
+                <a:latin typeface="Aptos" pitchFamily="34" charset="0"/>
+                <a:ea typeface="Aptos" pitchFamily="34" charset="-122"/>
+                <a:cs typeface="Aptos" pitchFamily="34" charset="-120"/>
+              </a:rPr>
+              <a:t>Appears in tracks: governance-security</a:t>
+            </a:r>
+            <a:endParaRPr lang="en-US" sz="1250" dirty="0"/>
+          </a:p>
+        </p:txBody>
+      </p:sp>
+      <p:sp>
+        <p:nvSpPr>
+          <p:cNvPr id="12" name="Shape 10"/>
+          <p:cNvSpPr/>
+          <p:nvPr/>
+        </p:nvSpPr>
+        <p:spPr>
+          <a:xfrm>
+            <a:off x="7909560" y="3611880"/>
+            <a:ext cx="3154680" cy="1783080"/>
+          </a:xfrm>
+          <a:prstGeom prst="roundRect">
+            <a:avLst>
+              <a:gd name="adj" fmla="val 6154"/>
+            </a:avLst>
+          </a:prstGeom>
+          <a:solidFill>
+            <a:srgbClr val="EEF8ED"/>
+          </a:solidFill>
+          <a:ln w="12700">
+            <a:solidFill>
+              <a:srgbClr val="B9D7E6"/>
+            </a:solidFill>
+            <a:prstDash val="solid"/>
+          </a:ln>
+        </p:spPr>
+      </p:sp>
+      <p:sp>
+        <p:nvSpPr>
+          <p:cNvPr id="13" name="Text 11"/>
+          <p:cNvSpPr/>
+          <p:nvPr/>
+        </p:nvSpPr>
+        <p:spPr>
+          <a:xfrm>
+            <a:off x="8074152" y="3758184"/>
+            <a:ext cx="2825496" cy="201168"/>
+          </a:xfrm>
+          <a:prstGeom prst="rect">
+            <a:avLst/>
+          </a:prstGeom>
+          <a:noFill/>
+          <a:ln/>
+        </p:spPr>
+        <p:txBody>
+          <a:bodyPr wrap="square" lIns="0" tIns="0" rIns="0" bIns="0" rtlCol="0" anchor="ctr"/>
+          <a:lstStyle/>
+          <a:p>
+            <a:pPr indent="0" marL="0">
+              <a:buNone/>
+            </a:pPr>
+            <a:r>
+              <a:rPr lang="en-US" sz="950" b="1" dirty="0">
+                <a:solidFill>
+                  <a:srgbClr val="0068B7"/>
+                </a:solidFill>
+                <a:latin typeface="Aptos" pitchFamily="34" charset="0"/>
+                <a:ea typeface="Aptos" pitchFamily="34" charset="-122"/>
+                <a:cs typeface="Aptos" pitchFamily="34" charset="-120"/>
+              </a:rPr>
+              <a:t>Learning approach</a:t>
+            </a:r>
+            <a:endParaRPr lang="en-US" sz="950" dirty="0"/>
+          </a:p>
+        </p:txBody>
+      </p:sp>
+      <p:sp>
+        <p:nvSpPr>
+          <p:cNvPr id="14" name="Text 12"/>
+          <p:cNvSpPr/>
+          <p:nvPr/>
+        </p:nvSpPr>
+        <p:spPr>
+          <a:xfrm>
+            <a:off x="8074152" y="4050792"/>
+            <a:ext cx="2825496" cy="1216152"/>
+          </a:xfrm>
+          <a:prstGeom prst="rect">
+            <a:avLst/>
+          </a:prstGeom>
+          <a:noFill/>
+          <a:ln/>
+        </p:spPr>
+        <p:txBody>
+          <a:bodyPr wrap="square" lIns="0" tIns="0" rIns="0" bIns="0" rtlCol="0" anchor="t">
+            <a:normAutofit/>
+          </a:bodyPr>
+          <a:lstStyle/>
+          <a:p>
+            <a:pPr indent="0" marL="0">
+              <a:buNone/>
+            </a:pPr>
+            <a:r>
+              <a:rPr lang="en-US" sz="1250" dirty="0">
+                <a:solidFill>
+                  <a:srgbClr val="17364A"/>
+                </a:solidFill>
+                <a:latin typeface="Aptos" pitchFamily="34" charset="0"/>
+                <a:ea typeface="Aptos" pitchFamily="34" charset="-122"/>
+                <a:cs typeface="Aptos" pitchFamily="34" charset="-120"/>
+              </a:rPr>
+              <a:t>Review the core ideas, complete the practical exercise, check your understanding, and use the related plays and tools to apply the lesson.</a:t>
+            </a:r>
+            <a:endParaRPr lang="en-US" sz="1250" dirty="0"/>
+          </a:p>
+        </p:txBody>
+      </p:sp>
+    </p:spTree>
+  </p:cSld>
+  <p:clrMapOvr>
+    <a:masterClrMapping/>
+  </p:clrMapOvr>
+</p:sld>
+</file>
+
+<file path=ppt/slides/slide20.xml><?xml version="1.0" encoding="utf-8"?>
+<p:sld xmlns:a="http://schemas.openxmlformats.org/drawingml/2006/main" xmlns:r="http://schemas.openxmlformats.org/officeDocument/2006/relationships" xmlns:p="http://schemas.openxmlformats.org/presentationml/2006/main">
+  <p:cSld name="Slide 20">
+    <p:bg>
+      <p:bgPr>
+        <a:solidFill>
+          <a:srgbClr val="F7FBFD"/>
+        </a:solidFill>
+      </p:bgPr>
+    </p:bg>
+    <p:spTree>
+      <p:nvGrpSpPr>
+        <p:cNvPr id="1" name=""/>
+        <p:cNvGrpSpPr/>
+        <p:nvPr/>
+      </p:nvGrpSpPr>
+      <p:grpSpPr>
+        <a:xfrm>
+          <a:off x="0" y="0"/>
+          <a:ext cx="0" cy="0"/>
+          <a:chOff x="0" y="0"/>
+          <a:chExt cx="0" cy="0"/>
+        </a:xfrm>
+      </p:grpSpPr>
+      <p:sp>
+        <p:nvSpPr>
+          <p:cNvPr id="2" name="Shape 0"/>
+          <p:cNvSpPr/>
+          <p:nvPr/>
+        </p:nvSpPr>
+        <p:spPr>
+          <a:xfrm>
+            <a:off x="0" y="0"/>
+            <a:ext cx="12191695" cy="164592"/>
+          </a:xfrm>
+          <a:prstGeom prst="rect">
+            <a:avLst/>
+          </a:prstGeom>
+          <a:solidFill>
+            <a:srgbClr val="0068B7"/>
+          </a:solidFill>
+          <a:ln w="12700">
+            <a:solidFill>
+              <a:srgbClr val="0068B7"/>
+            </a:solidFill>
+            <a:prstDash val="solid"/>
+          </a:ln>
+        </p:spPr>
+      </p:sp>
+      <p:sp>
+        <p:nvSpPr>
+          <p:cNvPr id="3" name="Shape 1"/>
+          <p:cNvSpPr/>
+          <p:nvPr/>
+        </p:nvSpPr>
+        <p:spPr>
+          <a:xfrm>
+            <a:off x="0" y="164592"/>
+            <a:ext cx="146304" cy="6693408"/>
+          </a:xfrm>
+          <a:prstGeom prst="rect">
+            <a:avLst/>
+          </a:prstGeom>
+          <a:solidFill>
+            <a:srgbClr val="2F8A28"/>
+          </a:solidFill>
+          <a:ln w="12700">
+            <a:solidFill>
+              <a:srgbClr val="2F8A28"/>
+            </a:solidFill>
+            <a:prstDash val="solid"/>
+          </a:ln>
+        </p:spPr>
+      </p:sp>
+      <p:sp>
+        <p:nvSpPr>
+          <p:cNvPr id="4" name="Text 2"/>
+          <p:cNvSpPr/>
+          <p:nvPr/>
+        </p:nvSpPr>
+        <p:spPr>
+          <a:xfrm>
+            <a:off x="502920" y="292608"/>
+            <a:ext cx="10149840" cy="256032"/>
+          </a:xfrm>
+          <a:prstGeom prst="rect">
+            <a:avLst/>
+          </a:prstGeom>
+          <a:noFill/>
+          <a:ln/>
+        </p:spPr>
+        <p:txBody>
+          <a:bodyPr wrap="square" lIns="0" tIns="0" rIns="0" bIns="0" rtlCol="0" anchor="ctr"/>
+          <a:lstStyle/>
+          <a:p>
+            <a:pPr indent="0" marL="0">
+              <a:buNone/>
+            </a:pPr>
+            <a:r>
+              <a:rPr lang="en-US" sz="900" b="1" dirty="0">
+                <a:solidFill>
+                  <a:srgbClr val="5F7181"/>
+                </a:solidFill>
+                <a:latin typeface="Aptos" pitchFamily="34" charset="0"/>
+                <a:ea typeface="Aptos" pitchFamily="34" charset="-122"/>
+                <a:cs typeface="Aptos" pitchFamily="34" charset="-120"/>
+              </a:rPr>
+              <a:t>AI Investment Strategy and Business Case Review</a:t>
+            </a:r>
+            <a:endParaRPr lang="en-US" sz="900" dirty="0"/>
+          </a:p>
+        </p:txBody>
+      </p:sp>
+      <p:sp>
+        <p:nvSpPr>
+          <p:cNvPr id="5" name="Text 3"/>
+          <p:cNvSpPr/>
+          <p:nvPr/>
+        </p:nvSpPr>
+        <p:spPr>
+          <a:xfrm>
+            <a:off x="502920" y="6537960"/>
+            <a:ext cx="7772400" cy="201168"/>
+          </a:xfrm>
+          <a:prstGeom prst="rect">
+            <a:avLst/>
+          </a:prstGeom>
+          <a:noFill/>
+          <a:ln/>
+        </p:spPr>
+        <p:txBody>
+          <a:bodyPr wrap="square" lIns="0" tIns="0" rIns="0" bIns="0" rtlCol="0" anchor="ctr"/>
+          <a:lstStyle/>
+          <a:p>
+            <a:pPr indent="0" marL="0">
+              <a:buNone/>
+            </a:pPr>
+            <a:r>
+              <a:rPr lang="en-US" sz="800" dirty="0">
+                <a:solidFill>
+                  <a:srgbClr val="5F7181"/>
+                </a:solidFill>
+                <a:latin typeface="Aptos" pitchFamily="34" charset="0"/>
+                <a:ea typeface="Aptos" pitchFamily="34" charset="-122"/>
+                <a:cs typeface="Aptos" pitchFamily="34" charset="-120"/>
+              </a:rPr>
+              <a:t>AI Playbook and Toolkit for Public Health Departments</a:t>
+            </a:r>
+            <a:endParaRPr lang="en-US" sz="800" dirty="0"/>
+          </a:p>
+        </p:txBody>
+      </p:sp>
+      <p:sp>
+        <p:nvSpPr>
+          <p:cNvPr id="6" name="Text 4"/>
+          <p:cNvSpPr/>
+          <p:nvPr/>
+        </p:nvSpPr>
+        <p:spPr>
+          <a:xfrm>
+            <a:off x="9966960" y="6537960"/>
+            <a:ext cx="1645920" cy="201168"/>
+          </a:xfrm>
+          <a:prstGeom prst="rect">
+            <a:avLst/>
+          </a:prstGeom>
+          <a:noFill/>
+          <a:ln/>
+        </p:spPr>
+        <p:txBody>
+          <a:bodyPr wrap="square" lIns="0" tIns="0" rIns="0" bIns="0" rtlCol="0" anchor="ctr"/>
+          <a:lstStyle/>
+          <a:p>
+            <a:pPr algn="r" indent="0" marL="0">
+              <a:buNone/>
+            </a:pPr>
+            <a:r>
+              <a:rPr lang="en-US" sz="800" dirty="0">
+                <a:solidFill>
+                  <a:srgbClr val="5F7181"/>
+                </a:solidFill>
+                <a:latin typeface="Aptos" pitchFamily="34" charset="0"/>
+                <a:ea typeface="Aptos" pitchFamily="34" charset="-122"/>
+                <a:cs typeface="Aptos" pitchFamily="34" charset="-120"/>
+              </a:rPr>
+              <a:t>© Paula Soper</a:t>
+            </a:r>
+            <a:endParaRPr lang="en-US" sz="800" dirty="0"/>
+          </a:p>
+        </p:txBody>
+      </p:sp>
+      <p:sp>
+        <p:nvSpPr>
+          <p:cNvPr id="7" name="Shape 5"/>
+          <p:cNvSpPr/>
+          <p:nvPr/>
+        </p:nvSpPr>
+        <p:spPr>
+          <a:xfrm>
+            <a:off x="640080" y="658368"/>
+            <a:ext cx="420624" cy="420624"/>
+          </a:xfrm>
+          <a:prstGeom prst="ellipse">
+            <a:avLst/>
+          </a:prstGeom>
+          <a:solidFill>
+            <a:srgbClr val="0068B7"/>
+          </a:solidFill>
+          <a:ln w="12700">
+            <a:solidFill>
+              <a:srgbClr val="0068B7"/>
+            </a:solidFill>
+            <a:prstDash val="solid"/>
+          </a:ln>
+        </p:spPr>
+      </p:sp>
+      <p:sp>
+        <p:nvSpPr>
+          <p:cNvPr id="8" name="Text 6"/>
+          <p:cNvSpPr/>
+          <p:nvPr/>
+        </p:nvSpPr>
+        <p:spPr>
+          <a:xfrm>
+            <a:off x="640080" y="731520"/>
+            <a:ext cx="420624" cy="164592"/>
+          </a:xfrm>
+          <a:prstGeom prst="rect">
+            <a:avLst/>
+          </a:prstGeom>
+          <a:noFill/>
+          <a:ln/>
+        </p:spPr>
+        <p:txBody>
+          <a:bodyPr wrap="square" lIns="0" tIns="0" rIns="0" bIns="0" rtlCol="0" anchor="ctr"/>
+          <a:lstStyle/>
+          <a:p>
+            <a:pPr algn="ctr" indent="0" marL="0">
+              <a:buNone/>
+            </a:pPr>
+            <a:r>
+              <a:rPr lang="en-US" sz="1100" b="1" dirty="0">
+                <a:solidFill>
+                  <a:srgbClr val="FFFFFF"/>
+                </a:solidFill>
+                <a:latin typeface="Aptos" pitchFamily="34" charset="0"/>
+                <a:ea typeface="Aptos" pitchFamily="34" charset="-122"/>
+                <a:cs typeface="Aptos" pitchFamily="34" charset="-120"/>
+              </a:rPr>
+              <a:t>15</a:t>
+            </a:r>
+            <a:endParaRPr lang="en-US" sz="1100" dirty="0"/>
+          </a:p>
+        </p:txBody>
+      </p:sp>
+      <p:sp>
+        <p:nvSpPr>
+          <p:cNvPr id="9" name="Text 7"/>
+          <p:cNvSpPr/>
+          <p:nvPr/>
+        </p:nvSpPr>
+        <p:spPr>
+          <a:xfrm>
+            <a:off x="640080" y="621792"/>
+            <a:ext cx="10881360" cy="566928"/>
+          </a:xfrm>
+          <a:prstGeom prst="rect">
+            <a:avLst/>
+          </a:prstGeom>
+          <a:noFill/>
+          <a:ln/>
+        </p:spPr>
+        <p:txBody>
+          <a:bodyPr wrap="square" lIns="0" tIns="0" rIns="0" bIns="0" rtlCol="0" anchor="ctr">
+            <a:normAutofit/>
+          </a:bodyPr>
+          <a:lstStyle/>
+          <a:p>
+            <a:pPr indent="0" marL="0">
+              <a:buNone/>
+            </a:pPr>
+            <a:r>
+              <a:rPr lang="en-US" sz="2700" b="1" dirty="0">
+                <a:solidFill>
+                  <a:srgbClr val="003A63"/>
+                </a:solidFill>
+                <a:latin typeface="Aptos Display" pitchFamily="34" charset="0"/>
+                <a:ea typeface="Aptos Display" pitchFamily="34" charset="-122"/>
+                <a:cs typeface="Aptos Display" pitchFamily="34" charset="-120"/>
+              </a:rPr>
+              <a:t>References and Resources</a:t>
+            </a:r>
+            <a:endParaRPr lang="en-US" sz="2700" dirty="0"/>
+          </a:p>
+        </p:txBody>
+      </p:sp>
+      <p:sp>
+        <p:nvSpPr>
+          <p:cNvPr id="10" name="Text 8"/>
+          <p:cNvSpPr/>
+          <p:nvPr/>
+        </p:nvSpPr>
+        <p:spPr>
+          <a:xfrm>
+            <a:off x="868680" y="1417320"/>
+            <a:ext cx="6675120" cy="4434840"/>
+          </a:xfrm>
+          <a:prstGeom prst="rect">
+            <a:avLst/>
+          </a:prstGeom>
+          <a:noFill/>
+          <a:ln/>
+        </p:spPr>
+        <p:txBody>
+          <a:bodyPr wrap="square" lIns="635" tIns="635" rIns="635" bIns="635" rtlCol="0" anchor="t">
+            <a:normAutofit/>
+          </a:bodyPr>
+          <a:lstStyle/>
+          <a:p>
+            <a:r>
+              <a:rPr lang="en-US" sz="1700" dirty="0">
+                <a:solidFill>
+                  <a:srgbClr val="17364A"/>
+                </a:solidFill>
+                <a:latin typeface="Aptos" pitchFamily="34" charset="0"/>
+                <a:ea typeface="Aptos" pitchFamily="34" charset="-122"/>
+                <a:cs typeface="Aptos" pitchFamily="34" charset="-120"/>
+              </a:rPr>
+              <a:t>NIST Artificial Intelligence Risk Management Framework (AI RMF 1.0): https://www.nist.gov/itl/ai-risk-management-framework</a:t>
+            </a:r>
+            <a:endParaRPr lang="en-US" sz="1700" dirty="0"/>
+          </a:p>
+          <a:p>
+            <a:r>
+              <a:rPr lang="en-US" sz="1700" dirty="0">
+                <a:solidFill>
+                  <a:srgbClr val="17364A"/>
+                </a:solidFill>
+                <a:latin typeface="Aptos" pitchFamily="34" charset="0"/>
+                <a:ea typeface="Aptos" pitchFamily="34" charset="-122"/>
+                <a:cs typeface="Aptos" pitchFamily="34" charset="-120"/>
+              </a:rPr>
+              <a:t>NIST Generative AI Profile:.</a:t>
+            </a:r>
+            <a:endParaRPr lang="en-US" sz="1700" dirty="0"/>
+          </a:p>
+          <a:p>
+            <a:r>
+              <a:rPr lang="en-US" sz="1700" dirty="0">
+                <a:solidFill>
+                  <a:srgbClr val="17364A"/>
+                </a:solidFill>
+                <a:latin typeface="Aptos" pitchFamily="34" charset="0"/>
+                <a:ea typeface="Aptos" pitchFamily="34" charset="-122"/>
+                <a:cs typeface="Aptos" pitchFamily="34" charset="-120"/>
+              </a:rPr>
+              <a:t>NIST Privacy Framework</a:t>
+            </a:r>
+            <a:endParaRPr lang="en-US" sz="1700" dirty="0"/>
+          </a:p>
+          <a:p>
+            <a:r>
+              <a:rPr lang="en-US" sz="1700" dirty="0">
+                <a:solidFill>
+                  <a:srgbClr val="17364A"/>
+                </a:solidFill>
+                <a:latin typeface="Aptos" pitchFamily="34" charset="0"/>
+                <a:ea typeface="Aptos" pitchFamily="34" charset="-122"/>
+                <a:cs typeface="Aptos" pitchFamily="34" charset="-120"/>
+              </a:rPr>
+              <a:t>CDC Public Health Data Strategy and Data Modernization resources:.</a:t>
+            </a:r>
+            <a:endParaRPr lang="en-US" sz="1700" dirty="0"/>
+          </a:p>
+        </p:txBody>
+      </p:sp>
+      <p:sp>
+        <p:nvSpPr>
+          <p:cNvPr id="11" name="Shape 9"/>
+          <p:cNvSpPr/>
+          <p:nvPr/>
+        </p:nvSpPr>
+        <p:spPr>
+          <a:xfrm>
+            <a:off x="7909560" y="1417320"/>
+            <a:ext cx="3154680" cy="1828800"/>
+          </a:xfrm>
+          <a:prstGeom prst="roundRect">
+            <a:avLst>
+              <a:gd name="adj" fmla="val 6000"/>
+            </a:avLst>
+          </a:prstGeom>
+          <a:solidFill>
+            <a:srgbClr val="EEF8ED"/>
+          </a:solidFill>
+          <a:ln w="12700">
+            <a:solidFill>
+              <a:srgbClr val="B9D7E6"/>
+            </a:solidFill>
+            <a:prstDash val="solid"/>
+          </a:ln>
+        </p:spPr>
+      </p:sp>
+      <p:sp>
+        <p:nvSpPr>
+          <p:cNvPr id="12" name="Text 10"/>
+          <p:cNvSpPr/>
+          <p:nvPr/>
+        </p:nvSpPr>
+        <p:spPr>
+          <a:xfrm>
+            <a:off x="8074152" y="1563624"/>
+            <a:ext cx="2825496" cy="201168"/>
+          </a:xfrm>
+          <a:prstGeom prst="rect">
+            <a:avLst/>
+          </a:prstGeom>
+          <a:noFill/>
+          <a:ln/>
+        </p:spPr>
+        <p:txBody>
+          <a:bodyPr wrap="square" lIns="0" tIns="0" rIns="0" bIns="0" rtlCol="0" anchor="ctr"/>
+          <a:lstStyle/>
+          <a:p>
+            <a:pPr indent="0" marL="0">
+              <a:buNone/>
+            </a:pPr>
+            <a:r>
+              <a:rPr lang="en-US" sz="950" b="1" dirty="0">
+                <a:solidFill>
+                  <a:srgbClr val="0068B7"/>
+                </a:solidFill>
+                <a:latin typeface="Aptos" pitchFamily="34" charset="0"/>
+                <a:ea typeface="Aptos" pitchFamily="34" charset="-122"/>
+                <a:cs typeface="Aptos" pitchFamily="34" charset="-120"/>
+              </a:rPr>
+              <a:t>Key idea</a:t>
+            </a:r>
+            <a:endParaRPr lang="en-US" sz="950" dirty="0"/>
+          </a:p>
+        </p:txBody>
+      </p:sp>
+      <p:sp>
+        <p:nvSpPr>
+          <p:cNvPr id="13" name="Text 11"/>
+          <p:cNvSpPr/>
+          <p:nvPr/>
+        </p:nvSpPr>
+        <p:spPr>
+          <a:xfrm>
+            <a:off x="8074152" y="1856232"/>
+            <a:ext cx="2825496" cy="1261872"/>
+          </a:xfrm>
+          <a:prstGeom prst="rect">
+            <a:avLst/>
+          </a:prstGeom>
+          <a:noFill/>
+          <a:ln/>
+        </p:spPr>
+        <p:txBody>
+          <a:bodyPr wrap="square" lIns="0" tIns="0" rIns="0" bIns="0" rtlCol="0" anchor="t">
+            <a:normAutofit/>
+          </a:bodyPr>
+          <a:lstStyle/>
+          <a:p>
+            <a:pPr indent="0" marL="0">
+              <a:buNone/>
+            </a:pPr>
+            <a:r>
+              <a:rPr lang="en-US" sz="1250" dirty="0">
+                <a:solidFill>
+                  <a:srgbClr val="17364A"/>
+                </a:solidFill>
+                <a:latin typeface="Aptos" pitchFamily="34" charset="0"/>
+                <a:ea typeface="Aptos" pitchFamily="34" charset="-122"/>
+                <a:cs typeface="Aptos" pitchFamily="34" charset="-120"/>
+              </a:rPr>
+              <a:t>NIST Artificial Intelligence Risk Management Framework (AI RMF 1.0): https://www.nist.gov/itl/ai-risk-management-framework</a:t>
+            </a:r>
+            <a:endParaRPr lang="en-US" sz="1250" dirty="0"/>
+          </a:p>
+        </p:txBody>
+      </p:sp>
+      <p:sp>
+        <p:nvSpPr>
+          <p:cNvPr id="14" name="Shape 12"/>
+          <p:cNvSpPr/>
+          <p:nvPr/>
+        </p:nvSpPr>
+        <p:spPr>
+          <a:xfrm>
+            <a:off x="7909560" y="3520440"/>
+            <a:ext cx="3154680" cy="1737360"/>
+          </a:xfrm>
+          <a:prstGeom prst="roundRect">
+            <a:avLst>
+              <a:gd name="adj" fmla="val 6316"/>
+            </a:avLst>
+          </a:prstGeom>
+          <a:solidFill>
+            <a:srgbClr val="EAF6F8"/>
+          </a:solidFill>
+          <a:ln w="12700">
+            <a:solidFill>
+              <a:srgbClr val="B9D7E6"/>
+            </a:solidFill>
+            <a:prstDash val="solid"/>
+          </a:ln>
+        </p:spPr>
+      </p:sp>
+      <p:sp>
+        <p:nvSpPr>
+          <p:cNvPr id="15" name="Text 13"/>
+          <p:cNvSpPr/>
+          <p:nvPr/>
+        </p:nvSpPr>
+        <p:spPr>
+          <a:xfrm>
+            <a:off x="8074152" y="3666744"/>
+            <a:ext cx="2825496" cy="201168"/>
+          </a:xfrm>
+          <a:prstGeom prst="rect">
+            <a:avLst/>
+          </a:prstGeom>
+          <a:noFill/>
+          <a:ln/>
+        </p:spPr>
+        <p:txBody>
+          <a:bodyPr wrap="square" lIns="0" tIns="0" rIns="0" bIns="0" rtlCol="0" anchor="ctr"/>
+          <a:lstStyle/>
+          <a:p>
+            <a:pPr indent="0" marL="0">
+              <a:buNone/>
+            </a:pPr>
+            <a:r>
+              <a:rPr lang="en-US" sz="950" b="1" dirty="0">
+                <a:solidFill>
+                  <a:srgbClr val="0068B7"/>
+                </a:solidFill>
+                <a:latin typeface="Aptos" pitchFamily="34" charset="0"/>
+                <a:ea typeface="Aptos" pitchFamily="34" charset="-122"/>
+                <a:cs typeface="Aptos" pitchFamily="34" charset="-120"/>
+              </a:rPr>
+              <a:t>Use this for</a:t>
+            </a:r>
+            <a:endParaRPr lang="en-US" sz="950" dirty="0"/>
+          </a:p>
+        </p:txBody>
+      </p:sp>
+      <p:sp>
+        <p:nvSpPr>
+          <p:cNvPr id="16" name="Text 14"/>
+          <p:cNvSpPr/>
+          <p:nvPr/>
+        </p:nvSpPr>
+        <p:spPr>
+          <a:xfrm>
+            <a:off x="8074152" y="3959352"/>
+            <a:ext cx="2825496" cy="1170432"/>
+          </a:xfrm>
+          <a:prstGeom prst="rect">
+            <a:avLst/>
+          </a:prstGeom>
+          <a:noFill/>
+          <a:ln/>
+        </p:spPr>
+        <p:txBody>
+          <a:bodyPr wrap="square" lIns="0" tIns="0" rIns="0" bIns="0" rtlCol="0" anchor="t">
+            <a:normAutofit/>
+          </a:bodyPr>
+          <a:lstStyle/>
+          <a:p>
+            <a:pPr indent="0" marL="0">
+              <a:buNone/>
+            </a:pPr>
+            <a:r>
+              <a:rPr lang="en-US" sz="1250" dirty="0">
+                <a:solidFill>
+                  <a:srgbClr val="17364A"/>
+                </a:solidFill>
+                <a:latin typeface="Aptos" pitchFamily="34" charset="0"/>
+                <a:ea typeface="Aptos" pitchFamily="34" charset="-122"/>
+                <a:cs typeface="Aptos" pitchFamily="34" charset="-120"/>
+              </a:rPr>
+              <a:t>Connect the concept to public health decisions, safeguards, documentation, or implementation work.</a:t>
+            </a:r>
+            <a:endParaRPr lang="en-US" sz="1250" dirty="0"/>
+          </a:p>
+        </p:txBody>
+      </p:sp>
+    </p:spTree>
+  </p:cSld>
+  <p:clrMapOvr>
+    <a:masterClrMapping/>
+  </p:clrMapOvr>
+</p:sld>
+</file>
+
+<file path=ppt/slides/slide21.xml><?xml version="1.0" encoding="utf-8"?>
+<p:sld xmlns:a="http://schemas.openxmlformats.org/drawingml/2006/main" xmlns:r="http://schemas.openxmlformats.org/officeDocument/2006/relationships" xmlns:p="http://schemas.openxmlformats.org/presentationml/2006/main">
+  <p:cSld name="Slide 21">
+    <p:bg>
+      <p:bgPr>
+        <a:solidFill>
+          <a:srgbClr val="F7FBFD"/>
+        </a:solidFill>
+      </p:bgPr>
+    </p:bg>
+    <p:spTree>
+      <p:nvGrpSpPr>
+        <p:cNvPr id="1" name=""/>
+        <p:cNvGrpSpPr/>
+        <p:nvPr/>
+      </p:nvGrpSpPr>
+      <p:grpSpPr>
+        <a:xfrm>
+          <a:off x="0" y="0"/>
+          <a:ext cx="0" cy="0"/>
+          <a:chOff x="0" y="0"/>
+          <a:chExt cx="0" cy="0"/>
+        </a:xfrm>
+      </p:grpSpPr>
+      <p:sp>
+        <p:nvSpPr>
+          <p:cNvPr id="2" name="Shape 0"/>
+          <p:cNvSpPr/>
+          <p:nvPr/>
+        </p:nvSpPr>
+        <p:spPr>
+          <a:xfrm>
+            <a:off x="0" y="0"/>
+            <a:ext cx="12191695" cy="164592"/>
+          </a:xfrm>
+          <a:prstGeom prst="rect">
+            <a:avLst/>
+          </a:prstGeom>
+          <a:solidFill>
+            <a:srgbClr val="0068B7"/>
+          </a:solidFill>
+          <a:ln w="12700">
+            <a:solidFill>
+              <a:srgbClr val="0068B7"/>
+            </a:solidFill>
+            <a:prstDash val="solid"/>
+          </a:ln>
+        </p:spPr>
+      </p:sp>
+      <p:sp>
+        <p:nvSpPr>
+          <p:cNvPr id="3" name="Shape 1"/>
+          <p:cNvSpPr/>
+          <p:nvPr/>
+        </p:nvSpPr>
+        <p:spPr>
+          <a:xfrm>
+            <a:off x="0" y="164592"/>
+            <a:ext cx="146304" cy="6693408"/>
+          </a:xfrm>
+          <a:prstGeom prst="rect">
+            <a:avLst/>
+          </a:prstGeom>
+          <a:solidFill>
+            <a:srgbClr val="2F8A28"/>
+          </a:solidFill>
+          <a:ln w="12700">
+            <a:solidFill>
+              <a:srgbClr val="2F8A28"/>
+            </a:solidFill>
+            <a:prstDash val="solid"/>
+          </a:ln>
+        </p:spPr>
+      </p:sp>
+      <p:sp>
+        <p:nvSpPr>
+          <p:cNvPr id="4" name="Text 2"/>
+          <p:cNvSpPr/>
+          <p:nvPr/>
+        </p:nvSpPr>
+        <p:spPr>
+          <a:xfrm>
+            <a:off x="502920" y="292608"/>
+            <a:ext cx="10149840" cy="256032"/>
+          </a:xfrm>
+          <a:prstGeom prst="rect">
+            <a:avLst/>
+          </a:prstGeom>
+          <a:noFill/>
+          <a:ln/>
+        </p:spPr>
+        <p:txBody>
+          <a:bodyPr wrap="square" lIns="0" tIns="0" rIns="0" bIns="0" rtlCol="0" anchor="ctr"/>
+          <a:lstStyle/>
+          <a:p>
+            <a:pPr indent="0" marL="0">
+              <a:buNone/>
+            </a:pPr>
+            <a:r>
+              <a:rPr lang="en-US" sz="900" b="1" dirty="0">
+                <a:solidFill>
+                  <a:srgbClr val="5F7181"/>
+                </a:solidFill>
+                <a:latin typeface="Aptos" pitchFamily="34" charset="0"/>
+                <a:ea typeface="Aptos" pitchFamily="34" charset="-122"/>
+                <a:cs typeface="Aptos" pitchFamily="34" charset="-120"/>
+              </a:rPr>
+              <a:t>AI Investment Strategy and Business Case Review</a:t>
+            </a:r>
+            <a:endParaRPr lang="en-US" sz="900" dirty="0"/>
+          </a:p>
+        </p:txBody>
+      </p:sp>
+      <p:sp>
+        <p:nvSpPr>
+          <p:cNvPr id="5" name="Text 3"/>
+          <p:cNvSpPr/>
+          <p:nvPr/>
+        </p:nvSpPr>
+        <p:spPr>
+          <a:xfrm>
+            <a:off x="502920" y="6537960"/>
+            <a:ext cx="7772400" cy="201168"/>
+          </a:xfrm>
+          <a:prstGeom prst="rect">
+            <a:avLst/>
+          </a:prstGeom>
+          <a:noFill/>
+          <a:ln/>
+        </p:spPr>
+        <p:txBody>
+          <a:bodyPr wrap="square" lIns="0" tIns="0" rIns="0" bIns="0" rtlCol="0" anchor="ctr"/>
+          <a:lstStyle/>
+          <a:p>
+            <a:pPr indent="0" marL="0">
+              <a:buNone/>
+            </a:pPr>
+            <a:r>
+              <a:rPr lang="en-US" sz="800" dirty="0">
+                <a:solidFill>
+                  <a:srgbClr val="5F7181"/>
+                </a:solidFill>
+                <a:latin typeface="Aptos" pitchFamily="34" charset="0"/>
+                <a:ea typeface="Aptos" pitchFamily="34" charset="-122"/>
+                <a:cs typeface="Aptos" pitchFamily="34" charset="-120"/>
+              </a:rPr>
+              <a:t>AI Playbook and Toolkit for Public Health Departments</a:t>
+            </a:r>
+            <a:endParaRPr lang="en-US" sz="800" dirty="0"/>
+          </a:p>
+        </p:txBody>
+      </p:sp>
+      <p:sp>
+        <p:nvSpPr>
+          <p:cNvPr id="6" name="Text 4"/>
+          <p:cNvSpPr/>
+          <p:nvPr/>
+        </p:nvSpPr>
+        <p:spPr>
+          <a:xfrm>
+            <a:off x="9966960" y="6537960"/>
+            <a:ext cx="1645920" cy="201168"/>
+          </a:xfrm>
+          <a:prstGeom prst="rect">
+            <a:avLst/>
+          </a:prstGeom>
+          <a:noFill/>
+          <a:ln/>
+        </p:spPr>
+        <p:txBody>
+          <a:bodyPr wrap="square" lIns="0" tIns="0" rIns="0" bIns="0" rtlCol="0" anchor="ctr"/>
+          <a:lstStyle/>
+          <a:p>
+            <a:pPr algn="r" indent="0" marL="0">
+              <a:buNone/>
+            </a:pPr>
+            <a:r>
+              <a:rPr lang="en-US" sz="800" dirty="0">
+                <a:solidFill>
+                  <a:srgbClr val="5F7181"/>
+                </a:solidFill>
+                <a:latin typeface="Aptos" pitchFamily="34" charset="0"/>
+                <a:ea typeface="Aptos" pitchFamily="34" charset="-122"/>
+                <a:cs typeface="Aptos" pitchFamily="34" charset="-120"/>
+              </a:rPr>
+              <a:t>© Paula Soper</a:t>
+            </a:r>
+            <a:endParaRPr lang="en-US" sz="800" dirty="0"/>
+          </a:p>
+        </p:txBody>
+      </p:sp>
+      <p:sp>
+        <p:nvSpPr>
+          <p:cNvPr id="7" name="Text 5"/>
+          <p:cNvSpPr/>
+          <p:nvPr/>
+        </p:nvSpPr>
+        <p:spPr>
+          <a:xfrm>
+            <a:off x="640080" y="658368"/>
+            <a:ext cx="10881360" cy="566928"/>
+          </a:xfrm>
+          <a:prstGeom prst="rect">
+            <a:avLst/>
+          </a:prstGeom>
+          <a:noFill/>
+          <a:ln/>
+        </p:spPr>
+        <p:txBody>
+          <a:bodyPr wrap="square" lIns="0" tIns="0" rIns="0" bIns="0" rtlCol="0" anchor="ctr">
+            <a:normAutofit/>
+          </a:bodyPr>
+          <a:lstStyle/>
+          <a:p>
+            <a:pPr indent="0" marL="0">
+              <a:buNone/>
+            </a:pPr>
+            <a:r>
+              <a:rPr lang="en-US" sz="2700" b="1" dirty="0">
+                <a:solidFill>
+                  <a:srgbClr val="003A63"/>
+                </a:solidFill>
+                <a:latin typeface="Aptos Display" pitchFamily="34" charset="0"/>
+                <a:ea typeface="Aptos Display" pitchFamily="34" charset="-122"/>
+                <a:cs typeface="Aptos Display" pitchFamily="34" charset="-120"/>
+              </a:rPr>
+              <a:t>References and Resources Continued</a:t>
+            </a:r>
+            <a:endParaRPr lang="en-US" sz="2700" dirty="0"/>
+          </a:p>
+        </p:txBody>
+      </p:sp>
+      <p:sp>
+        <p:nvSpPr>
+          <p:cNvPr id="8" name="Text 6"/>
+          <p:cNvSpPr/>
+          <p:nvPr/>
+        </p:nvSpPr>
+        <p:spPr>
+          <a:xfrm>
+            <a:off x="868680" y="1417320"/>
+            <a:ext cx="6675120" cy="4434840"/>
+          </a:xfrm>
+          <a:prstGeom prst="rect">
+            <a:avLst/>
+          </a:prstGeom>
+          <a:noFill/>
+          <a:ln/>
+        </p:spPr>
+        <p:txBody>
+          <a:bodyPr wrap="square" lIns="635" tIns="635" rIns="635" bIns="635" rtlCol="0" anchor="t">
+            <a:normAutofit/>
+          </a:bodyPr>
+          <a:lstStyle/>
+          <a:p>
+            <a:r>
+              <a:rPr lang="en-US" sz="1700" dirty="0">
+                <a:solidFill>
+                  <a:srgbClr val="17364A"/>
+                </a:solidFill>
+                <a:latin typeface="Aptos" pitchFamily="34" charset="0"/>
+                <a:ea typeface="Aptos" pitchFamily="34" charset="-122"/>
+                <a:cs typeface="Aptos" pitchFamily="34" charset="-120"/>
+              </a:rPr>
+              <a:t>OMB Memorandum M-24-10 on federal AI governance, risk management, and innovation, where relevant to public-sector governance.</a:t>
+            </a:r>
+            <a:endParaRPr lang="en-US" sz="1700" dirty="0"/>
+          </a:p>
+          <a:p>
+            <a:r>
+              <a:rPr lang="en-US" sz="1700" dirty="0">
+                <a:solidFill>
+                  <a:srgbClr val="17364A"/>
+                </a:solidFill>
+                <a:latin typeface="Aptos" pitchFamily="34" charset="0"/>
+                <a:ea typeface="Aptos" pitchFamily="34" charset="-122"/>
+                <a:cs typeface="Aptos" pitchFamily="34" charset="-120"/>
+              </a:rPr>
+              <a:t>Agency strategic plans, procurement policies, privacy policies, cybersecurity policies, records policies, and equity plans</a:t>
+            </a:r>
+            <a:endParaRPr lang="en-US" sz="1700" dirty="0"/>
+          </a:p>
+        </p:txBody>
+      </p:sp>
+      <p:sp>
+        <p:nvSpPr>
+          <p:cNvPr id="9" name="Shape 7"/>
+          <p:cNvSpPr/>
+          <p:nvPr/>
+        </p:nvSpPr>
+        <p:spPr>
+          <a:xfrm>
+            <a:off x="7909560" y="1417320"/>
+            <a:ext cx="3154680" cy="1828800"/>
+          </a:xfrm>
+          <a:prstGeom prst="roundRect">
+            <a:avLst>
+              <a:gd name="adj" fmla="val 6000"/>
+            </a:avLst>
+          </a:prstGeom>
+          <a:solidFill>
+            <a:srgbClr val="EEF8ED"/>
+          </a:solidFill>
+          <a:ln w="12700">
+            <a:solidFill>
+              <a:srgbClr val="B9D7E6"/>
+            </a:solidFill>
+            <a:prstDash val="solid"/>
+          </a:ln>
+        </p:spPr>
+      </p:sp>
+      <p:sp>
+        <p:nvSpPr>
+          <p:cNvPr id="10" name="Text 8"/>
+          <p:cNvSpPr/>
+          <p:nvPr/>
+        </p:nvSpPr>
+        <p:spPr>
+          <a:xfrm>
+            <a:off x="8074152" y="1563624"/>
+            <a:ext cx="2825496" cy="201168"/>
+          </a:xfrm>
+          <a:prstGeom prst="rect">
+            <a:avLst/>
+          </a:prstGeom>
+          <a:noFill/>
+          <a:ln/>
+        </p:spPr>
+        <p:txBody>
+          <a:bodyPr wrap="square" lIns="0" tIns="0" rIns="0" bIns="0" rtlCol="0" anchor="ctr"/>
+          <a:lstStyle/>
+          <a:p>
+            <a:pPr indent="0" marL="0">
+              <a:buNone/>
+            </a:pPr>
+            <a:r>
+              <a:rPr lang="en-US" sz="950" b="1" dirty="0">
+                <a:solidFill>
+                  <a:srgbClr val="0068B7"/>
+                </a:solidFill>
+                <a:latin typeface="Aptos" pitchFamily="34" charset="0"/>
+                <a:ea typeface="Aptos" pitchFamily="34" charset="-122"/>
+                <a:cs typeface="Aptos" pitchFamily="34" charset="-120"/>
+              </a:rPr>
+              <a:t>Key idea</a:t>
+            </a:r>
+            <a:endParaRPr lang="en-US" sz="950" dirty="0"/>
+          </a:p>
+        </p:txBody>
+      </p:sp>
+      <p:sp>
+        <p:nvSpPr>
+          <p:cNvPr id="11" name="Text 9"/>
+          <p:cNvSpPr/>
+          <p:nvPr/>
+        </p:nvSpPr>
+        <p:spPr>
+          <a:xfrm>
+            <a:off x="8074152" y="1856232"/>
+            <a:ext cx="2825496" cy="1261872"/>
+          </a:xfrm>
+          <a:prstGeom prst="rect">
+            <a:avLst/>
+          </a:prstGeom>
+          <a:noFill/>
+          <a:ln/>
+        </p:spPr>
+        <p:txBody>
+          <a:bodyPr wrap="square" lIns="0" tIns="0" rIns="0" bIns="0" rtlCol="0" anchor="t">
+            <a:normAutofit/>
+          </a:bodyPr>
+          <a:lstStyle/>
+          <a:p>
+            <a:pPr indent="0" marL="0">
+              <a:buNone/>
+            </a:pPr>
+            <a:r>
+              <a:rPr lang="en-US" sz="1250" dirty="0">
+                <a:solidFill>
+                  <a:srgbClr val="17364A"/>
+                </a:solidFill>
+                <a:latin typeface="Aptos" pitchFamily="34" charset="0"/>
+                <a:ea typeface="Aptos" pitchFamily="34" charset="-122"/>
+                <a:cs typeface="Aptos" pitchFamily="34" charset="-120"/>
+              </a:rPr>
+              <a:t>OMB Memorandum M-24-10 on federal AI governance, risk management, and innovation, where relevant to public-sector governance.</a:t>
+            </a:r>
+            <a:endParaRPr lang="en-US" sz="1250" dirty="0"/>
+          </a:p>
+        </p:txBody>
+      </p:sp>
+      <p:sp>
+        <p:nvSpPr>
+          <p:cNvPr id="12" name="Shape 10"/>
+          <p:cNvSpPr/>
+          <p:nvPr/>
+        </p:nvSpPr>
+        <p:spPr>
+          <a:xfrm>
+            <a:off x="7909560" y="3520440"/>
+            <a:ext cx="3154680" cy="1737360"/>
+          </a:xfrm>
+          <a:prstGeom prst="roundRect">
+            <a:avLst>
+              <a:gd name="adj" fmla="val 6316"/>
+            </a:avLst>
+          </a:prstGeom>
+          <a:solidFill>
+            <a:srgbClr val="EAF6F8"/>
+          </a:solidFill>
+          <a:ln w="12700">
+            <a:solidFill>
+              <a:srgbClr val="B9D7E6"/>
+            </a:solidFill>
+            <a:prstDash val="solid"/>
+          </a:ln>
+        </p:spPr>
+      </p:sp>
+      <p:sp>
+        <p:nvSpPr>
+          <p:cNvPr id="13" name="Text 11"/>
+          <p:cNvSpPr/>
+          <p:nvPr/>
+        </p:nvSpPr>
+        <p:spPr>
+          <a:xfrm>
+            <a:off x="8074152" y="3666744"/>
+            <a:ext cx="2825496" cy="201168"/>
+          </a:xfrm>
+          <a:prstGeom prst="rect">
+            <a:avLst/>
+          </a:prstGeom>
+          <a:noFill/>
+          <a:ln/>
+        </p:spPr>
+        <p:txBody>
+          <a:bodyPr wrap="square" lIns="0" tIns="0" rIns="0" bIns="0" rtlCol="0" anchor="ctr"/>
+          <a:lstStyle/>
+          <a:p>
+            <a:pPr indent="0" marL="0">
+              <a:buNone/>
+            </a:pPr>
+            <a:r>
+              <a:rPr lang="en-US" sz="950" b="1" dirty="0">
+                <a:solidFill>
+                  <a:srgbClr val="0068B7"/>
+                </a:solidFill>
+                <a:latin typeface="Aptos" pitchFamily="34" charset="0"/>
+                <a:ea typeface="Aptos" pitchFamily="34" charset="-122"/>
+                <a:cs typeface="Aptos" pitchFamily="34" charset="-120"/>
+              </a:rPr>
+              <a:t>Use this for</a:t>
+            </a:r>
+            <a:endParaRPr lang="en-US" sz="950" dirty="0"/>
+          </a:p>
+        </p:txBody>
+      </p:sp>
+      <p:sp>
+        <p:nvSpPr>
+          <p:cNvPr id="14" name="Text 12"/>
+          <p:cNvSpPr/>
+          <p:nvPr/>
+        </p:nvSpPr>
+        <p:spPr>
+          <a:xfrm>
+            <a:off x="8074152" y="3959352"/>
+            <a:ext cx="2825496" cy="1170432"/>
+          </a:xfrm>
+          <a:prstGeom prst="rect">
+            <a:avLst/>
+          </a:prstGeom>
+          <a:noFill/>
+          <a:ln/>
+        </p:spPr>
+        <p:txBody>
+          <a:bodyPr wrap="square" lIns="0" tIns="0" rIns="0" bIns="0" rtlCol="0" anchor="t">
+            <a:normAutofit/>
+          </a:bodyPr>
+          <a:lstStyle/>
+          <a:p>
+            <a:pPr indent="0" marL="0">
+              <a:buNone/>
+            </a:pPr>
+            <a:r>
+              <a:rPr lang="en-US" sz="1250" dirty="0">
+                <a:solidFill>
+                  <a:srgbClr val="17364A"/>
+                </a:solidFill>
+                <a:latin typeface="Aptos" pitchFamily="34" charset="0"/>
+                <a:ea typeface="Aptos" pitchFamily="34" charset="-122"/>
+                <a:cs typeface="Aptos" pitchFamily="34" charset="-120"/>
+              </a:rPr>
+              <a:t>Connect the concept to public health decisions, safeguards, documentation, or implementation work.</a:t>
+            </a:r>
+            <a:endParaRPr lang="en-US" sz="1250" dirty="0"/>
           </a:p>
         </p:txBody>
       </p:sp>
@@ -5767,7 +10379,32 @@
       </p:sp>
       <p:sp>
         <p:nvSpPr>
-          <p:cNvPr id="3" name="Text 1"/>
+          <p:cNvPr id="3" name="Shape 1"/>
+          <p:cNvSpPr/>
+          <p:nvPr/>
+        </p:nvSpPr>
+        <p:spPr>
+          <a:xfrm>
+            <a:off x="0" y="164592"/>
+            <a:ext cx="146304" cy="6693408"/>
+          </a:xfrm>
+          <a:prstGeom prst="rect">
+            <a:avLst/>
+          </a:prstGeom>
+          <a:solidFill>
+            <a:srgbClr val="2F8A28"/>
+          </a:solidFill>
+          <a:ln w="12700">
+            <a:solidFill>
+              <a:srgbClr val="2F8A28"/>
+            </a:solidFill>
+            <a:prstDash val="solid"/>
+          </a:ln>
+        </p:spPr>
+      </p:sp>
+      <p:sp>
+        <p:nvSpPr>
+          <p:cNvPr id="4" name="Text 2"/>
           <p:cNvSpPr/>
           <p:nvPr/>
         </p:nvSpPr>
@@ -5806,7 +10443,7 @@
       </p:sp>
       <p:sp>
         <p:nvSpPr>
-          <p:cNvPr id="4" name="Text 2"/>
+          <p:cNvPr id="5" name="Text 3"/>
           <p:cNvSpPr/>
           <p:nvPr/>
         </p:nvSpPr>
@@ -5845,7 +10482,7 @@
       </p:sp>
       <p:sp>
         <p:nvSpPr>
-          <p:cNvPr id="5" name="Text 3"/>
+          <p:cNvPr id="6" name="Text 4"/>
           <p:cNvSpPr/>
           <p:nvPr/>
         </p:nvSpPr>
@@ -5884,7 +10521,7 @@
       </p:sp>
       <p:sp>
         <p:nvSpPr>
-          <p:cNvPr id="6" name="Text 4"/>
+          <p:cNvPr id="7" name="Text 5"/>
           <p:cNvSpPr/>
           <p:nvPr/>
         </p:nvSpPr>
@@ -5917,7 +10554,7 @@
                 <a:ea typeface="Aptos Display" pitchFamily="34" charset="-122"/>
                 <a:cs typeface="Aptos Display" pitchFamily="34" charset="-120"/>
               </a:rPr>
-              <a:t>Learning Objectives</a:t>
+              <a:t>How this module connects to the playbook</a:t>
             </a:r>
             <a:endParaRPr lang="en-US" sz="2700" dirty="0"/>
           </a:p>
@@ -5925,14 +10562,14 @@
       </p:sp>
       <p:sp>
         <p:nvSpPr>
-          <p:cNvPr id="7" name="Text 5"/>
-          <p:cNvSpPr/>
-          <p:nvPr/>
-        </p:nvSpPr>
-        <p:spPr>
-          <a:xfrm>
-            <a:off x="822960" y="1325880"/>
-            <a:ext cx="10378440" cy="4800600"/>
+          <p:cNvPr id="8" name="Text 6"/>
+          <p:cNvSpPr/>
+          <p:nvPr/>
+        </p:nvSpPr>
+        <p:spPr>
+          <a:xfrm>
+            <a:off x="868680" y="1417320"/>
+            <a:ext cx="6903720" cy="4480560"/>
           </a:xfrm>
           <a:prstGeom prst="rect">
             <a:avLst/>
@@ -5947,7 +10584,7 @@
           <a:lstStyle/>
           <a:p>
             <a:r>
-              <a:rPr lang="en-US" sz="1450" dirty="0">
+              <a:rPr lang="en-US" sz="1540" dirty="0">
                 <a:solidFill>
                   <a:srgbClr val="17364A"/>
                 </a:solidFill>
@@ -5955,13 +10592,13 @@
                 <a:ea typeface="Aptos" pitchFamily="34" charset="-122"/>
                 <a:cs typeface="Aptos" pitchFamily="34" charset="-120"/>
               </a:rPr>
-              <a:t>Identify the full cost components of AI implementation and operations.</a:t>
-            </a:r>
-            <a:endParaRPr lang="en-US" sz="1450" dirty="0"/>
-          </a:p>
-          <a:p>
-            <a:r>
-              <a:rPr lang="en-US" sz="1450" dirty="0">
+              <a:t>Play 11: Build and Deploy AI Solutions - This lesson informs Play 11 by helping learners connect the lesson topic to build and deploy.</a:t>
+            </a:r>
+            <a:endParaRPr lang="en-US" sz="1540" dirty="0"/>
+          </a:p>
+          <a:p>
+            <a:r>
+              <a:rPr lang="en-US" sz="1540" dirty="0">
                 <a:solidFill>
                   <a:srgbClr val="17364A"/>
                 </a:solidFill>
@@ -5969,13 +10606,13 @@
                 <a:ea typeface="Aptos" pitchFamily="34" charset="-122"/>
                 <a:cs typeface="Aptos" pitchFamily="34" charset="-120"/>
               </a:rPr>
-              <a:t>Evaluate expected benefits in terms of public health value, workflow improvement, equity, quality, timeliness, and staff burden.</a:t>
-            </a:r>
-            <a:endParaRPr lang="en-US" sz="1450" dirty="0"/>
-          </a:p>
-          <a:p>
-            <a:r>
-              <a:rPr lang="en-US" sz="1450" dirty="0">
+              <a:t>Play 2: Readiness Assessment - This lesson informs Play 2 by helping learners connect the lesson topic to readiness assessment work.</a:t>
+            </a:r>
+            <a:endParaRPr lang="en-US" sz="1540" dirty="0"/>
+          </a:p>
+          <a:p>
+            <a:r>
+              <a:rPr lang="en-US" sz="1540" dirty="0">
                 <a:solidFill>
                   <a:srgbClr val="17364A"/>
                 </a:solidFill>
@@ -5983,13 +10620,13 @@
                 <a:ea typeface="Aptos" pitchFamily="34" charset="-122"/>
                 <a:cs typeface="Aptos" pitchFamily="34" charset="-120"/>
               </a:rPr>
-              <a:t>Distinguish between a vendor demonstration and a credible business case.</a:t>
-            </a:r>
-            <a:endParaRPr lang="en-US" sz="1450" dirty="0"/>
-          </a:p>
-          <a:p>
-            <a:r>
-              <a:rPr lang="en-US" sz="1450" dirty="0">
+              <a:t>Play 3: Establish AI Governance - This lesson informs Play 3 by helping learners connect the lesson topic to establish ai governance.</a:t>
+            </a:r>
+            <a:endParaRPr lang="en-US" sz="1540" dirty="0"/>
+          </a:p>
+          <a:p>
+            <a:r>
+              <a:rPr lang="en-US" sz="1540" dirty="0">
                 <a:solidFill>
                   <a:srgbClr val="17364A"/>
                 </a:solidFill>
@@ -5997,13 +10634,106 @@
                 <a:ea typeface="Aptos" pitchFamily="34" charset="-122"/>
                 <a:cs typeface="Aptos" pitchFamily="34" charset="-120"/>
               </a:rPr>
-              <a:t>Develop business case questions for AI procurement or internal development.</a:t>
-            </a:r>
-            <a:endParaRPr lang="en-US" sz="1450" dirty="0"/>
-          </a:p>
-          <a:p>
-            <a:r>
-              <a:rPr lang="en-US" sz="1450" dirty="0">
+              <a:t>Play 1: Vision &amp; Guardrails - This lesson informs Play 1 by helping learners connect the lesson topic to vision &amp; guardrails work in.</a:t>
+            </a:r>
+            <a:endParaRPr lang="en-US" sz="1540" dirty="0"/>
+          </a:p>
+        </p:txBody>
+      </p:sp>
+      <p:sp>
+        <p:nvSpPr>
+          <p:cNvPr id="9" name="Shape 7"/>
+          <p:cNvSpPr/>
+          <p:nvPr/>
+        </p:nvSpPr>
+        <p:spPr>
+          <a:xfrm>
+            <a:off x="8046720" y="1417320"/>
+            <a:ext cx="3063240" cy="2103120"/>
+          </a:xfrm>
+          <a:prstGeom prst="roundRect">
+            <a:avLst>
+              <a:gd name="adj" fmla="val 5217"/>
+            </a:avLst>
+          </a:prstGeom>
+          <a:solidFill>
+            <a:srgbClr val="EEF8ED"/>
+          </a:solidFill>
+          <a:ln w="12700">
+            <a:solidFill>
+              <a:srgbClr val="B9D7E6"/>
+            </a:solidFill>
+            <a:prstDash val="solid"/>
+          </a:ln>
+        </p:spPr>
+      </p:sp>
+      <p:sp>
+        <p:nvSpPr>
+          <p:cNvPr id="10" name="Text 8"/>
+          <p:cNvSpPr/>
+          <p:nvPr/>
+        </p:nvSpPr>
+        <p:spPr>
+          <a:xfrm>
+            <a:off x="8211312" y="1563624"/>
+            <a:ext cx="2734056" cy="201168"/>
+          </a:xfrm>
+          <a:prstGeom prst="rect">
+            <a:avLst/>
+          </a:prstGeom>
+          <a:noFill/>
+          <a:ln/>
+        </p:spPr>
+        <p:txBody>
+          <a:bodyPr wrap="square" lIns="0" tIns="0" rIns="0" bIns="0" rtlCol="0" anchor="ctr"/>
+          <a:lstStyle/>
+          <a:p>
+            <a:pPr indent="0" marL="0">
+              <a:buNone/>
+            </a:pPr>
+            <a:r>
+              <a:rPr lang="en-US" sz="950" b="1" dirty="0">
+                <a:solidFill>
+                  <a:srgbClr val="0068B7"/>
+                </a:solidFill>
+                <a:latin typeface="Aptos" pitchFamily="34" charset="0"/>
+                <a:ea typeface="Aptos" pitchFamily="34" charset="-122"/>
+                <a:cs typeface="Aptos" pitchFamily="34" charset="-120"/>
+              </a:rPr>
+              <a:t>Apply the lesson</a:t>
+            </a:r>
+            <a:endParaRPr lang="en-US" sz="950" dirty="0"/>
+          </a:p>
+        </p:txBody>
+      </p:sp>
+      <p:sp>
+        <p:nvSpPr>
+          <p:cNvPr id="11" name="Text 9"/>
+          <p:cNvSpPr/>
+          <p:nvPr/>
+        </p:nvSpPr>
+        <p:spPr>
+          <a:xfrm>
+            <a:off x="8211312" y="1856232"/>
+            <a:ext cx="2734056" cy="1536192"/>
+          </a:xfrm>
+          <a:prstGeom prst="rect">
+            <a:avLst/>
+          </a:prstGeom>
+          <a:noFill/>
+          <a:ln/>
+        </p:spPr>
+        <p:txBody>
+          <a:bodyPr wrap="square" lIns="0" tIns="0" rIns="0" bIns="0" rtlCol="0" anchor="t">
+            <a:normAutofit/>
+          </a:bodyPr>
+          <a:lstStyle/>
+          <a:p>
+            <a:pPr indent="0" marL="0">
+              <a:buNone/>
+            </a:pPr>
+            <a:r>
+              <a:rPr lang="en-US" sz="1250" dirty="0">
                 <a:solidFill>
                   <a:srgbClr val="17364A"/>
                 </a:solidFill>
@@ -6011,9 +10741,116 @@
                 <a:ea typeface="Aptos" pitchFamily="34" charset="-122"/>
                 <a:cs typeface="Aptos" pitchFamily="34" charset="-120"/>
               </a:rPr>
-              <a:t>Produce an AI business case review worksheet.</a:t>
-            </a:r>
-            <a:endParaRPr lang="en-US" sz="1450" dirty="0"/>
+              <a:t>Use the related plays to identify decisions, participants, timing, approvals, and documentation needed for responsible implementation.</a:t>
+            </a:r>
+            <a:endParaRPr lang="en-US" sz="1250" dirty="0"/>
+          </a:p>
+        </p:txBody>
+      </p:sp>
+      <p:sp>
+        <p:nvSpPr>
+          <p:cNvPr id="12" name="Shape 10"/>
+          <p:cNvSpPr/>
+          <p:nvPr/>
+        </p:nvSpPr>
+        <p:spPr>
+          <a:xfrm>
+            <a:off x="8046720" y="3794760"/>
+            <a:ext cx="3063240" cy="1508760"/>
+          </a:xfrm>
+          <a:prstGeom prst="roundRect">
+            <a:avLst>
+              <a:gd name="adj" fmla="val 7273"/>
+            </a:avLst>
+          </a:prstGeom>
+          <a:solidFill>
+            <a:srgbClr val="FFF4D9"/>
+          </a:solidFill>
+          <a:ln w="12700">
+            <a:solidFill>
+              <a:srgbClr val="B9D7E6"/>
+            </a:solidFill>
+            <a:prstDash val="solid"/>
+          </a:ln>
+        </p:spPr>
+      </p:sp>
+      <p:sp>
+        <p:nvSpPr>
+          <p:cNvPr id="13" name="Text 11"/>
+          <p:cNvSpPr/>
+          <p:nvPr/>
+        </p:nvSpPr>
+        <p:spPr>
+          <a:xfrm>
+            <a:off x="8211312" y="3941064"/>
+            <a:ext cx="2734056" cy="201168"/>
+          </a:xfrm>
+          <a:prstGeom prst="rect">
+            <a:avLst/>
+          </a:prstGeom>
+          <a:noFill/>
+          <a:ln/>
+        </p:spPr>
+        <p:txBody>
+          <a:bodyPr wrap="square" lIns="0" tIns="0" rIns="0" bIns="0" rtlCol="0" anchor="ctr"/>
+          <a:lstStyle/>
+          <a:p>
+            <a:pPr indent="0" marL="0">
+              <a:buNone/>
+            </a:pPr>
+            <a:r>
+              <a:rPr lang="en-US" sz="950" b="1" dirty="0">
+                <a:solidFill>
+                  <a:srgbClr val="0068B7"/>
+                </a:solidFill>
+                <a:latin typeface="Aptos" pitchFamily="34" charset="0"/>
+                <a:ea typeface="Aptos" pitchFamily="34" charset="-122"/>
+                <a:cs typeface="Aptos" pitchFamily="34" charset="-120"/>
+              </a:rPr>
+              <a:t>Keep in mind</a:t>
+            </a:r>
+            <a:endParaRPr lang="en-US" sz="950" dirty="0"/>
+          </a:p>
+        </p:txBody>
+      </p:sp>
+      <p:sp>
+        <p:nvSpPr>
+          <p:cNvPr id="14" name="Text 12"/>
+          <p:cNvSpPr/>
+          <p:nvPr/>
+        </p:nvSpPr>
+        <p:spPr>
+          <a:xfrm>
+            <a:off x="8211312" y="4233672"/>
+            <a:ext cx="2734056" cy="941832"/>
+          </a:xfrm>
+          <a:prstGeom prst="rect">
+            <a:avLst/>
+          </a:prstGeom>
+          <a:noFill/>
+          <a:ln/>
+        </p:spPr>
+        <p:txBody>
+          <a:bodyPr wrap="square" lIns="0" tIns="0" rIns="0" bIns="0" rtlCol="0" anchor="t">
+            <a:normAutofit/>
+          </a:bodyPr>
+          <a:lstStyle/>
+          <a:p>
+            <a:pPr indent="0" marL="0">
+              <a:buNone/>
+            </a:pPr>
+            <a:r>
+              <a:rPr lang="en-US" sz="1250" dirty="0">
+                <a:solidFill>
+                  <a:srgbClr val="17364A"/>
+                </a:solidFill>
+                <a:latin typeface="Aptos" pitchFamily="34" charset="0"/>
+                <a:ea typeface="Aptos" pitchFamily="34" charset="-122"/>
+                <a:cs typeface="Aptos" pitchFamily="34" charset="-120"/>
+              </a:rPr>
+              <a:t>The playbook connection helps turn training into agency work, not just individual knowledge.</a:t>
+            </a:r>
+            <a:endParaRPr lang="en-US" sz="1250" dirty="0"/>
           </a:p>
         </p:txBody>
       </p:sp>
@@ -6076,7 +10913,32 @@
       </p:sp>
       <p:sp>
         <p:nvSpPr>
-          <p:cNvPr id="3" name="Text 1"/>
+          <p:cNvPr id="3" name="Shape 1"/>
+          <p:cNvSpPr/>
+          <p:nvPr/>
+        </p:nvSpPr>
+        <p:spPr>
+          <a:xfrm>
+            <a:off x="0" y="164592"/>
+            <a:ext cx="146304" cy="6693408"/>
+          </a:xfrm>
+          <a:prstGeom prst="rect">
+            <a:avLst/>
+          </a:prstGeom>
+          <a:solidFill>
+            <a:srgbClr val="2F8A28"/>
+          </a:solidFill>
+          <a:ln w="12700">
+            <a:solidFill>
+              <a:srgbClr val="2F8A28"/>
+            </a:solidFill>
+            <a:prstDash val="solid"/>
+          </a:ln>
+        </p:spPr>
+      </p:sp>
+      <p:sp>
+        <p:nvSpPr>
+          <p:cNvPr id="4" name="Text 2"/>
           <p:cNvSpPr/>
           <p:nvPr/>
         </p:nvSpPr>
@@ -6115,7 +10977,7 @@
       </p:sp>
       <p:sp>
         <p:nvSpPr>
-          <p:cNvPr id="4" name="Text 2"/>
+          <p:cNvPr id="5" name="Text 3"/>
           <p:cNvSpPr/>
           <p:nvPr/>
         </p:nvSpPr>
@@ -6154,7 +11016,7 @@
       </p:sp>
       <p:sp>
         <p:nvSpPr>
-          <p:cNvPr id="5" name="Text 3"/>
+          <p:cNvPr id="6" name="Text 4"/>
           <p:cNvSpPr/>
           <p:nvPr/>
         </p:nvSpPr>
@@ -6193,7 +11055,7 @@
       </p:sp>
       <p:sp>
         <p:nvSpPr>
-          <p:cNvPr id="6" name="Text 4"/>
+          <p:cNvPr id="7" name="Text 5"/>
           <p:cNvSpPr/>
           <p:nvPr/>
         </p:nvSpPr>
@@ -6226,7 +11088,7 @@
                 <a:ea typeface="Aptos Display" pitchFamily="34" charset="-122"/>
                 <a:cs typeface="Aptos Display" pitchFamily="34" charset="-120"/>
               </a:rPr>
-              <a:t>Module Overview</a:t>
+              <a:t>Related toolkit resources</a:t>
             </a:r>
             <a:endParaRPr lang="en-US" sz="2700" dirty="0"/>
           </a:p>
@@ -6234,32 +11096,192 @@
       </p:sp>
       <p:sp>
         <p:nvSpPr>
-          <p:cNvPr id="7" name="Text 5"/>
-          <p:cNvSpPr/>
-          <p:nvPr/>
-        </p:nvSpPr>
-        <p:spPr>
-          <a:xfrm>
-            <a:off x="822960" y="1325880"/>
-            <a:ext cx="10378440" cy="4800600"/>
-          </a:xfrm>
-          <a:prstGeom prst="rect">
-            <a:avLst/>
-          </a:prstGeom>
-          <a:noFill/>
-          <a:ln/>
-        </p:spPr>
-        <p:txBody>
-          <a:bodyPr wrap="square" lIns="1016" tIns="1016" rIns="1016" bIns="1016" rtlCol="0" anchor="t">
+          <p:cNvPr id="8" name="Text 6"/>
+          <p:cNvSpPr/>
+          <p:nvPr/>
+        </p:nvSpPr>
+        <p:spPr>
+          <a:xfrm>
+            <a:off x="868680" y="1417320"/>
+            <a:ext cx="6903720" cy="4480560"/>
+          </a:xfrm>
+          <a:prstGeom prst="rect">
+            <a:avLst/>
+          </a:prstGeom>
+          <a:noFill/>
+          <a:ln/>
+        </p:spPr>
+        <p:txBody>
+          <a:bodyPr wrap="square" lIns="635" tIns="635" rIns="635" bIns="635" rtlCol="0" anchor="t">
             <a:normAutofit/>
           </a:bodyPr>
           <a:lstStyle/>
           <a:p>
+            <a:r>
+              <a:rPr lang="en-US" sz="1460" dirty="0">
+                <a:solidFill>
+                  <a:srgbClr val="17364A"/>
+                </a:solidFill>
+                <a:latin typeface="Aptos" pitchFamily="34" charset="0"/>
+                <a:ea typeface="Aptos" pitchFamily="34" charset="-122"/>
+                <a:cs typeface="Aptos" pitchFamily="34" charset="-120"/>
+              </a:rPr>
+              <a:t>Tool 4: AI Policy Landscape Scan (Worksheet) - Use AI Policy Landscape Scan to translate this lesson into a documented public health.</a:t>
+            </a:r>
+            <a:endParaRPr lang="en-US" sz="1460" dirty="0"/>
+          </a:p>
+          <a:p>
+            <a:r>
+              <a:rPr lang="en-US" sz="1460" dirty="0">
+                <a:solidFill>
+                  <a:srgbClr val="17364A"/>
+                </a:solidFill>
+                <a:latin typeface="Aptos" pitchFamily="34" charset="0"/>
+                <a:ea typeface="Aptos" pitchFamily="34" charset="-122"/>
+                <a:cs typeface="Aptos" pitchFamily="34" charset="-120"/>
+              </a:rPr>
+              <a:t>Tool 5: AI Environmental and Resource Impact Review (Checklist) - Use this tool to complete or strengthen the practical exercise for.</a:t>
+            </a:r>
+            <a:endParaRPr lang="en-US" sz="1460" dirty="0"/>
+          </a:p>
+          <a:p>
+            <a:r>
+              <a:rPr lang="en-US" sz="1460" dirty="0">
+                <a:solidFill>
+                  <a:srgbClr val="17364A"/>
+                </a:solidFill>
+                <a:latin typeface="Aptos" pitchFamily="34" charset="0"/>
+                <a:ea typeface="Aptos" pitchFamily="34" charset="-122"/>
+                <a:cs typeface="Aptos" pitchFamily="34" charset="-120"/>
+              </a:rPr>
+              <a:t>Tool 6: Human-Centered AI Decision Rule Checklist (Checklist) - Use Human-Centered AI Decision Rule Checklist to translate this.</a:t>
+            </a:r>
+            <a:endParaRPr lang="en-US" sz="1460" dirty="0"/>
+          </a:p>
+          <a:p>
+            <a:r>
+              <a:rPr lang="en-US" sz="1460" dirty="0">
+                <a:solidFill>
+                  <a:srgbClr val="17364A"/>
+                </a:solidFill>
+                <a:latin typeface="Aptos" pitchFamily="34" charset="0"/>
+                <a:ea typeface="Aptos" pitchFamily="34" charset="-122"/>
+                <a:cs typeface="Aptos" pitchFamily="34" charset="-120"/>
+              </a:rPr>
+              <a:t>Tool 8: AI Project Charter (Planning) - Use AI Project Charter to translate this lesson into a documented public health AI planning,.</a:t>
+            </a:r>
+            <a:endParaRPr lang="en-US" sz="1460" dirty="0"/>
+          </a:p>
+          <a:p>
+            <a:r>
+              <a:rPr lang="en-US" sz="1460" dirty="0">
+                <a:solidFill>
+                  <a:srgbClr val="17364A"/>
+                </a:solidFill>
+                <a:latin typeface="Aptos" pitchFamily="34" charset="0"/>
+                <a:ea typeface="Aptos" pitchFamily="34" charset="-122"/>
+                <a:cs typeface="Aptos" pitchFamily="34" charset="-120"/>
+              </a:rPr>
+              <a:t>Tool 9: Data Quality Assessment Checklist (Checklist) - Use this tool to complete or strengthen the practical exercise for the module.</a:t>
+            </a:r>
+            <a:endParaRPr lang="en-US" sz="1460" dirty="0"/>
+          </a:p>
+        </p:txBody>
+      </p:sp>
+      <p:sp>
+        <p:nvSpPr>
+          <p:cNvPr id="9" name="Shape 7"/>
+          <p:cNvSpPr/>
+          <p:nvPr/>
+        </p:nvSpPr>
+        <p:spPr>
+          <a:xfrm>
+            <a:off x="8046720" y="1417320"/>
+            <a:ext cx="3063240" cy="2103120"/>
+          </a:xfrm>
+          <a:prstGeom prst="roundRect">
+            <a:avLst>
+              <a:gd name="adj" fmla="val 5217"/>
+            </a:avLst>
+          </a:prstGeom>
+          <a:solidFill>
+            <a:srgbClr val="EAF6F8"/>
+          </a:solidFill>
+          <a:ln w="12700">
+            <a:solidFill>
+              <a:srgbClr val="B9D7E6"/>
+            </a:solidFill>
+            <a:prstDash val="solid"/>
+          </a:ln>
+        </p:spPr>
+      </p:sp>
+      <p:sp>
+        <p:nvSpPr>
+          <p:cNvPr id="10" name="Text 8"/>
+          <p:cNvSpPr/>
+          <p:nvPr/>
+        </p:nvSpPr>
+        <p:spPr>
+          <a:xfrm>
+            <a:off x="8211312" y="1563624"/>
+            <a:ext cx="2734056" cy="201168"/>
+          </a:xfrm>
+          <a:prstGeom prst="rect">
+            <a:avLst/>
+          </a:prstGeom>
+          <a:noFill/>
+          <a:ln/>
+        </p:spPr>
+        <p:txBody>
+          <a:bodyPr wrap="square" lIns="0" tIns="0" rIns="0" bIns="0" rtlCol="0" anchor="ctr"/>
+          <a:lstStyle/>
+          <a:p>
             <a:pPr indent="0" marL="0">
               <a:buNone/>
             </a:pPr>
             <a:r>
-              <a:rPr lang="en-US" sz="1420" dirty="0">
+              <a:rPr lang="en-US" sz="950" b="1" dirty="0">
+                <a:solidFill>
+                  <a:srgbClr val="0068B7"/>
+                </a:solidFill>
+                <a:latin typeface="Aptos" pitchFamily="34" charset="0"/>
+                <a:ea typeface="Aptos" pitchFamily="34" charset="-122"/>
+                <a:cs typeface="Aptos" pitchFamily="34" charset="-120"/>
+              </a:rPr>
+              <a:t>Use the tools</a:t>
+            </a:r>
+            <a:endParaRPr lang="en-US" sz="950" dirty="0"/>
+          </a:p>
+        </p:txBody>
+      </p:sp>
+      <p:sp>
+        <p:nvSpPr>
+          <p:cNvPr id="11" name="Text 9"/>
+          <p:cNvSpPr/>
+          <p:nvPr/>
+        </p:nvSpPr>
+        <p:spPr>
+          <a:xfrm>
+            <a:off x="8211312" y="1856232"/>
+            <a:ext cx="2734056" cy="1536192"/>
+          </a:xfrm>
+          <a:prstGeom prst="rect">
+            <a:avLst/>
+          </a:prstGeom>
+          <a:noFill/>
+          <a:ln/>
+        </p:spPr>
+        <p:txBody>
+          <a:bodyPr wrap="square" lIns="0" tIns="0" rIns="0" bIns="0" rtlCol="0" anchor="t">
+            <a:normAutofit/>
+          </a:bodyPr>
+          <a:lstStyle/>
+          <a:p>
+            <a:pPr indent="0" marL="0">
+              <a:buNone/>
+            </a:pPr>
+            <a:r>
+              <a:rPr lang="en-US" sz="1250" dirty="0">
                 <a:solidFill>
                   <a:srgbClr val="17364A"/>
                 </a:solidFill>
@@ -6267,9 +11289,116 @@
                 <a:ea typeface="Aptos" pitchFamily="34" charset="-122"/>
                 <a:cs typeface="Aptos" pitchFamily="34" charset="-120"/>
               </a:rPr>
-              <a:t>AI investments compete with many other public health priorities. Leaders need a disciplined way to decide when AI is worth funding, what costs must be considered, and how benefits will be measured. A business case review helps agencies avoid buying tools that are impressive in demonstrations but weak in operational value, sustainability, interoperability, or public health impact. This module teaches leaders to evaluate AI investments across cost, value, readiness, risk, staffing, procurement, lifecycle support, and sustainability. The business case should not focus only on software price. It should include data preparation, implementation, integration, training, governance, validation, monitoring, maintenance, vendor management, cybersecurity, accessibility, and eventual replacement or retirement.</a:t>
-            </a:r>
-            <a:endParaRPr lang="en-US" sz="1420" dirty="0"/>
+              <a:t>Use linked tools when your department needs a structured worksheet, template, checklist, review process, or documentation artifact.</a:t>
+            </a:r>
+            <a:endParaRPr lang="en-US" sz="1250" dirty="0"/>
+          </a:p>
+        </p:txBody>
+      </p:sp>
+      <p:sp>
+        <p:nvSpPr>
+          <p:cNvPr id="12" name="Shape 10"/>
+          <p:cNvSpPr/>
+          <p:nvPr/>
+        </p:nvSpPr>
+        <p:spPr>
+          <a:xfrm>
+            <a:off x="8046720" y="3794760"/>
+            <a:ext cx="3063240" cy="1508760"/>
+          </a:xfrm>
+          <a:prstGeom prst="roundRect">
+            <a:avLst>
+              <a:gd name="adj" fmla="val 7273"/>
+            </a:avLst>
+          </a:prstGeom>
+          <a:solidFill>
+            <a:srgbClr val="EEF8ED"/>
+          </a:solidFill>
+          <a:ln w="12700">
+            <a:solidFill>
+              <a:srgbClr val="B9D7E6"/>
+            </a:solidFill>
+            <a:prstDash val="solid"/>
+          </a:ln>
+        </p:spPr>
+      </p:sp>
+      <p:sp>
+        <p:nvSpPr>
+          <p:cNvPr id="13" name="Text 11"/>
+          <p:cNvSpPr/>
+          <p:nvPr/>
+        </p:nvSpPr>
+        <p:spPr>
+          <a:xfrm>
+            <a:off x="8211312" y="3941064"/>
+            <a:ext cx="2734056" cy="201168"/>
+          </a:xfrm>
+          <a:prstGeom prst="rect">
+            <a:avLst/>
+          </a:prstGeom>
+          <a:noFill/>
+          <a:ln/>
+        </p:spPr>
+        <p:txBody>
+          <a:bodyPr wrap="square" lIns="0" tIns="0" rIns="0" bIns="0" rtlCol="0" anchor="ctr"/>
+          <a:lstStyle/>
+          <a:p>
+            <a:pPr indent="0" marL="0">
+              <a:buNone/>
+            </a:pPr>
+            <a:r>
+              <a:rPr lang="en-US" sz="950" b="1" dirty="0">
+                <a:solidFill>
+                  <a:srgbClr val="0068B7"/>
+                </a:solidFill>
+                <a:latin typeface="Aptos" pitchFamily="34" charset="0"/>
+                <a:ea typeface="Aptos" pitchFamily="34" charset="-122"/>
+                <a:cs typeface="Aptos" pitchFamily="34" charset="-120"/>
+              </a:rPr>
+              <a:t>Avoid duplication</a:t>
+            </a:r>
+            <a:endParaRPr lang="en-US" sz="950" dirty="0"/>
+          </a:p>
+        </p:txBody>
+      </p:sp>
+      <p:sp>
+        <p:nvSpPr>
+          <p:cNvPr id="14" name="Text 12"/>
+          <p:cNvSpPr/>
+          <p:nvPr/>
+        </p:nvSpPr>
+        <p:spPr>
+          <a:xfrm>
+            <a:off x="8211312" y="4233672"/>
+            <a:ext cx="2734056" cy="941832"/>
+          </a:xfrm>
+          <a:prstGeom prst="rect">
+            <a:avLst/>
+          </a:prstGeom>
+          <a:noFill/>
+          <a:ln/>
+        </p:spPr>
+        <p:txBody>
+          <a:bodyPr wrap="square" lIns="0" tIns="0" rIns="0" bIns="0" rtlCol="0" anchor="t">
+            <a:normAutofit/>
+          </a:bodyPr>
+          <a:lstStyle/>
+          <a:p>
+            <a:pPr indent="0" marL="0">
+              <a:buNone/>
+            </a:pPr>
+            <a:r>
+              <a:rPr lang="en-US" sz="1250" dirty="0">
+                <a:solidFill>
+                  <a:srgbClr val="17364A"/>
+                </a:solidFill>
+                <a:latin typeface="Aptos" pitchFamily="34" charset="0"/>
+                <a:ea typeface="Aptos" pitchFamily="34" charset="-122"/>
+                <a:cs typeface="Aptos" pitchFamily="34" charset="-120"/>
+              </a:rPr>
+              <a:t>If your department already has a strong equivalent tool, adapt or use the existing process instead of recreating it.</a:t>
+            </a:r>
+            <a:endParaRPr lang="en-US" sz="1250" dirty="0"/>
           </a:p>
         </p:txBody>
       </p:sp>
@@ -6332,7 +11461,32 @@
       </p:sp>
       <p:sp>
         <p:nvSpPr>
-          <p:cNvPr id="3" name="Text 1"/>
+          <p:cNvPr id="3" name="Shape 1"/>
+          <p:cNvSpPr/>
+          <p:nvPr/>
+        </p:nvSpPr>
+        <p:spPr>
+          <a:xfrm>
+            <a:off x="0" y="164592"/>
+            <a:ext cx="146304" cy="6693408"/>
+          </a:xfrm>
+          <a:prstGeom prst="rect">
+            <a:avLst/>
+          </a:prstGeom>
+          <a:solidFill>
+            <a:srgbClr val="2F8A28"/>
+          </a:solidFill>
+          <a:ln w="12700">
+            <a:solidFill>
+              <a:srgbClr val="2F8A28"/>
+            </a:solidFill>
+            <a:prstDash val="solid"/>
+          </a:ln>
+        </p:spPr>
+      </p:sp>
+      <p:sp>
+        <p:nvSpPr>
+          <p:cNvPr id="4" name="Text 2"/>
           <p:cNvSpPr/>
           <p:nvPr/>
         </p:nvSpPr>
@@ -6371,7 +11525,7 @@
       </p:sp>
       <p:sp>
         <p:nvSpPr>
-          <p:cNvPr id="4" name="Text 2"/>
+          <p:cNvPr id="5" name="Text 3"/>
           <p:cNvSpPr/>
           <p:nvPr/>
         </p:nvSpPr>
@@ -6410,7 +11564,7 @@
       </p:sp>
       <p:sp>
         <p:nvSpPr>
-          <p:cNvPr id="5" name="Text 3"/>
+          <p:cNvPr id="6" name="Text 4"/>
           <p:cNvSpPr/>
           <p:nvPr/>
         </p:nvSpPr>
@@ -6449,13 +11603,77 @@
       </p:sp>
       <p:sp>
         <p:nvSpPr>
-          <p:cNvPr id="6" name="Text 4"/>
+          <p:cNvPr id="7" name="Shape 5"/>
           <p:cNvSpPr/>
           <p:nvPr/>
         </p:nvSpPr>
         <p:spPr>
           <a:xfrm>
             <a:off x="640080" y="658368"/>
+            <a:ext cx="420624" cy="420624"/>
+          </a:xfrm>
+          <a:prstGeom prst="ellipse">
+            <a:avLst/>
+          </a:prstGeom>
+          <a:solidFill>
+            <a:srgbClr val="0068B7"/>
+          </a:solidFill>
+          <a:ln w="12700">
+            <a:solidFill>
+              <a:srgbClr val="0068B7"/>
+            </a:solidFill>
+            <a:prstDash val="solid"/>
+          </a:ln>
+        </p:spPr>
+      </p:sp>
+      <p:sp>
+        <p:nvSpPr>
+          <p:cNvPr id="8" name="Text 6"/>
+          <p:cNvSpPr/>
+          <p:nvPr/>
+        </p:nvSpPr>
+        <p:spPr>
+          <a:xfrm>
+            <a:off x="640080" y="731520"/>
+            <a:ext cx="420624" cy="164592"/>
+          </a:xfrm>
+          <a:prstGeom prst="rect">
+            <a:avLst/>
+          </a:prstGeom>
+          <a:noFill/>
+          <a:ln/>
+        </p:spPr>
+        <p:txBody>
+          <a:bodyPr wrap="square" lIns="0" tIns="0" rIns="0" bIns="0" rtlCol="0" anchor="ctr"/>
+          <a:lstStyle/>
+          <a:p>
+            <a:pPr algn="ctr" indent="0" marL="0">
+              <a:buNone/>
+            </a:pPr>
+            <a:r>
+              <a:rPr lang="en-US" sz="1100" b="1" dirty="0">
+                <a:solidFill>
+                  <a:srgbClr val="FFFFFF"/>
+                </a:solidFill>
+                <a:latin typeface="Aptos" pitchFamily="34" charset="0"/>
+                <a:ea typeface="Aptos" pitchFamily="34" charset="-122"/>
+                <a:cs typeface="Aptos" pitchFamily="34" charset="-120"/>
+              </a:rPr>
+              <a:t>1</a:t>
+            </a:r>
+            <a:endParaRPr lang="en-US" sz="1100" dirty="0"/>
+          </a:p>
+        </p:txBody>
+      </p:sp>
+      <p:sp>
+        <p:nvSpPr>
+          <p:cNvPr id="9" name="Text 7"/>
+          <p:cNvSpPr/>
+          <p:nvPr/>
+        </p:nvSpPr>
+        <p:spPr>
+          <a:xfrm>
+            <a:off x="640080" y="621792"/>
             <a:ext cx="10881360" cy="566928"/>
           </a:xfrm>
           <a:prstGeom prst="rect">
@@ -6482,7 +11700,7 @@
                 <a:ea typeface="Aptos Display" pitchFamily="34" charset="-122"/>
                 <a:cs typeface="Aptos Display" pitchFamily="34" charset="-120"/>
               </a:rPr>
-              <a:t>Jurisdiction and Agency Policy Note</a:t>
+              <a:t>Learning Objectives</a:t>
             </a:r>
             <a:endParaRPr lang="en-US" sz="2700" dirty="0"/>
           </a:p>
@@ -6490,32 +11708,178 @@
       </p:sp>
       <p:sp>
         <p:nvSpPr>
-          <p:cNvPr id="7" name="Text 5"/>
-          <p:cNvSpPr/>
-          <p:nvPr/>
-        </p:nvSpPr>
-        <p:spPr>
-          <a:xfrm>
-            <a:off x="822960" y="1325880"/>
-            <a:ext cx="10378440" cy="4800600"/>
-          </a:xfrm>
-          <a:prstGeom prst="rect">
-            <a:avLst/>
-          </a:prstGeom>
-          <a:noFill/>
-          <a:ln/>
-        </p:spPr>
-        <p:txBody>
-          <a:bodyPr wrap="square" lIns="1016" tIns="1016" rIns="1016" bIns="1016" rtlCol="0" anchor="t">
+          <p:cNvPr id="10" name="Text 8"/>
+          <p:cNvSpPr/>
+          <p:nvPr/>
+        </p:nvSpPr>
+        <p:spPr>
+          <a:xfrm>
+            <a:off x="868680" y="1417320"/>
+            <a:ext cx="6675120" cy="4434840"/>
+          </a:xfrm>
+          <a:prstGeom prst="rect">
+            <a:avLst/>
+          </a:prstGeom>
+          <a:noFill/>
+          <a:ln/>
+        </p:spPr>
+        <p:txBody>
+          <a:bodyPr wrap="square" lIns="635" tIns="635" rIns="635" bIns="635" rtlCol="0" anchor="t">
             <a:normAutofit/>
           </a:bodyPr>
           <a:lstStyle/>
           <a:p>
+            <a:r>
+              <a:rPr lang="en-US" sz="1700" dirty="0">
+                <a:solidFill>
+                  <a:srgbClr val="17364A"/>
+                </a:solidFill>
+                <a:latin typeface="Aptos" pitchFamily="34" charset="0"/>
+                <a:ea typeface="Aptos" pitchFamily="34" charset="-122"/>
+                <a:cs typeface="Aptos" pitchFamily="34" charset="-120"/>
+              </a:rPr>
+              <a:t>Identify the full cost components of AI implementation and operations.</a:t>
+            </a:r>
+            <a:endParaRPr lang="en-US" sz="1700" dirty="0"/>
+          </a:p>
+          <a:p>
+            <a:r>
+              <a:rPr lang="en-US" sz="1700" dirty="0">
+                <a:solidFill>
+                  <a:srgbClr val="17364A"/>
+                </a:solidFill>
+                <a:latin typeface="Aptos" pitchFamily="34" charset="0"/>
+                <a:ea typeface="Aptos" pitchFamily="34" charset="-122"/>
+                <a:cs typeface="Aptos" pitchFamily="34" charset="-120"/>
+              </a:rPr>
+              <a:t>Evaluate expected benefits in terms of public health value, workflow improvement, equity, quality, timeliness, and staff burden.</a:t>
+            </a:r>
+            <a:endParaRPr lang="en-US" sz="1700" dirty="0"/>
+          </a:p>
+          <a:p>
+            <a:r>
+              <a:rPr lang="en-US" sz="1700" dirty="0">
+                <a:solidFill>
+                  <a:srgbClr val="17364A"/>
+                </a:solidFill>
+                <a:latin typeface="Aptos" pitchFamily="34" charset="0"/>
+                <a:ea typeface="Aptos" pitchFamily="34" charset="-122"/>
+                <a:cs typeface="Aptos" pitchFamily="34" charset="-120"/>
+              </a:rPr>
+              <a:t>Distinguish between a vendor demonstration and a credible business case.</a:t>
+            </a:r>
+            <a:endParaRPr lang="en-US" sz="1700" dirty="0"/>
+          </a:p>
+          <a:p>
+            <a:r>
+              <a:rPr lang="en-US" sz="1700" dirty="0">
+                <a:solidFill>
+                  <a:srgbClr val="17364A"/>
+                </a:solidFill>
+                <a:latin typeface="Aptos" pitchFamily="34" charset="0"/>
+                <a:ea typeface="Aptos" pitchFamily="34" charset="-122"/>
+                <a:cs typeface="Aptos" pitchFamily="34" charset="-120"/>
+              </a:rPr>
+              <a:t>Develop business case questions for AI procurement or internal development.</a:t>
+            </a:r>
+            <a:endParaRPr lang="en-US" sz="1700" dirty="0"/>
+          </a:p>
+        </p:txBody>
+      </p:sp>
+      <p:sp>
+        <p:nvSpPr>
+          <p:cNvPr id="11" name="Shape 9"/>
+          <p:cNvSpPr/>
+          <p:nvPr/>
+        </p:nvSpPr>
+        <p:spPr>
+          <a:xfrm>
+            <a:off x="7909560" y="1417320"/>
+            <a:ext cx="3154680" cy="1828800"/>
+          </a:xfrm>
+          <a:prstGeom prst="roundRect">
+            <a:avLst>
+              <a:gd name="adj" fmla="val 6000"/>
+            </a:avLst>
+          </a:prstGeom>
+          <a:solidFill>
+            <a:srgbClr val="EEF8ED"/>
+          </a:solidFill>
+          <a:ln w="12700">
+            <a:solidFill>
+              <a:srgbClr val="B9D7E6"/>
+            </a:solidFill>
+            <a:prstDash val="solid"/>
+          </a:ln>
+        </p:spPr>
+      </p:sp>
+      <p:sp>
+        <p:nvSpPr>
+          <p:cNvPr id="12" name="Text 10"/>
+          <p:cNvSpPr/>
+          <p:nvPr/>
+        </p:nvSpPr>
+        <p:spPr>
+          <a:xfrm>
+            <a:off x="8074152" y="1563624"/>
+            <a:ext cx="2825496" cy="201168"/>
+          </a:xfrm>
+          <a:prstGeom prst="rect">
+            <a:avLst/>
+          </a:prstGeom>
+          <a:noFill/>
+          <a:ln/>
+        </p:spPr>
+        <p:txBody>
+          <a:bodyPr wrap="square" lIns="0" tIns="0" rIns="0" bIns="0" rtlCol="0" anchor="ctr"/>
+          <a:lstStyle/>
+          <a:p>
             <a:pPr indent="0" marL="0">
               <a:buNone/>
             </a:pPr>
             <a:r>
-              <a:rPr lang="en-US" sz="1420" dirty="0">
+              <a:rPr lang="en-US" sz="950" b="1" dirty="0">
+                <a:solidFill>
+                  <a:srgbClr val="0068B7"/>
+                </a:solidFill>
+                <a:latin typeface="Aptos" pitchFamily="34" charset="0"/>
+                <a:ea typeface="Aptos" pitchFamily="34" charset="-122"/>
+                <a:cs typeface="Aptos" pitchFamily="34" charset="-120"/>
+              </a:rPr>
+              <a:t>Key idea</a:t>
+            </a:r>
+            <a:endParaRPr lang="en-US" sz="950" dirty="0"/>
+          </a:p>
+        </p:txBody>
+      </p:sp>
+      <p:sp>
+        <p:nvSpPr>
+          <p:cNvPr id="13" name="Text 11"/>
+          <p:cNvSpPr/>
+          <p:nvPr/>
+        </p:nvSpPr>
+        <p:spPr>
+          <a:xfrm>
+            <a:off x="8074152" y="1856232"/>
+            <a:ext cx="2825496" cy="1261872"/>
+          </a:xfrm>
+          <a:prstGeom prst="rect">
+            <a:avLst/>
+          </a:prstGeom>
+          <a:noFill/>
+          <a:ln/>
+        </p:spPr>
+        <p:txBody>
+          <a:bodyPr wrap="square" lIns="0" tIns="0" rIns="0" bIns="0" rtlCol="0" anchor="t">
+            <a:normAutofit/>
+          </a:bodyPr>
+          <a:lstStyle/>
+          <a:p>
+            <a:pPr indent="0" marL="0">
+              <a:buNone/>
+            </a:pPr>
+            <a:r>
+              <a:rPr lang="en-US" sz="1250" dirty="0">
                 <a:solidFill>
                   <a:srgbClr val="17364A"/>
                 </a:solidFill>
@@ -6523,9 +11887,116 @@
                 <a:ea typeface="Aptos" pitchFamily="34" charset="-122"/>
                 <a:cs typeface="Aptos" pitchFamily="34" charset="-120"/>
               </a:rPr>
-              <a:t>This national-level module is intended for training and planning purposes. It does not replace legal, privacy, procurement, civil rights, records, or agency policy review. Learners should confirm applicable requirements in their own jurisdiction and organization before implementing AI-supported workflows.</a:t>
-            </a:r>
-            <a:endParaRPr lang="en-US" sz="1420" dirty="0"/>
+              <a:t>Identify the full cost components of AI implementation and operations.</a:t>
+            </a:r>
+            <a:endParaRPr lang="en-US" sz="1250" dirty="0"/>
+          </a:p>
+        </p:txBody>
+      </p:sp>
+      <p:sp>
+        <p:nvSpPr>
+          <p:cNvPr id="14" name="Shape 12"/>
+          <p:cNvSpPr/>
+          <p:nvPr/>
+        </p:nvSpPr>
+        <p:spPr>
+          <a:xfrm>
+            <a:off x="7909560" y="3520440"/>
+            <a:ext cx="3154680" cy="1737360"/>
+          </a:xfrm>
+          <a:prstGeom prst="roundRect">
+            <a:avLst>
+              <a:gd name="adj" fmla="val 6316"/>
+            </a:avLst>
+          </a:prstGeom>
+          <a:solidFill>
+            <a:srgbClr val="EAF6F8"/>
+          </a:solidFill>
+          <a:ln w="12700">
+            <a:solidFill>
+              <a:srgbClr val="B9D7E6"/>
+            </a:solidFill>
+            <a:prstDash val="solid"/>
+          </a:ln>
+        </p:spPr>
+      </p:sp>
+      <p:sp>
+        <p:nvSpPr>
+          <p:cNvPr id="15" name="Text 13"/>
+          <p:cNvSpPr/>
+          <p:nvPr/>
+        </p:nvSpPr>
+        <p:spPr>
+          <a:xfrm>
+            <a:off x="8074152" y="3666744"/>
+            <a:ext cx="2825496" cy="201168"/>
+          </a:xfrm>
+          <a:prstGeom prst="rect">
+            <a:avLst/>
+          </a:prstGeom>
+          <a:noFill/>
+          <a:ln/>
+        </p:spPr>
+        <p:txBody>
+          <a:bodyPr wrap="square" lIns="0" tIns="0" rIns="0" bIns="0" rtlCol="0" anchor="ctr"/>
+          <a:lstStyle/>
+          <a:p>
+            <a:pPr indent="0" marL="0">
+              <a:buNone/>
+            </a:pPr>
+            <a:r>
+              <a:rPr lang="en-US" sz="950" b="1" dirty="0">
+                <a:solidFill>
+                  <a:srgbClr val="0068B7"/>
+                </a:solidFill>
+                <a:latin typeface="Aptos" pitchFamily="34" charset="0"/>
+                <a:ea typeface="Aptos" pitchFamily="34" charset="-122"/>
+                <a:cs typeface="Aptos" pitchFamily="34" charset="-120"/>
+              </a:rPr>
+              <a:t>Use this for</a:t>
+            </a:r>
+            <a:endParaRPr lang="en-US" sz="950" dirty="0"/>
+          </a:p>
+        </p:txBody>
+      </p:sp>
+      <p:sp>
+        <p:nvSpPr>
+          <p:cNvPr id="16" name="Text 14"/>
+          <p:cNvSpPr/>
+          <p:nvPr/>
+        </p:nvSpPr>
+        <p:spPr>
+          <a:xfrm>
+            <a:off x="8074152" y="3959352"/>
+            <a:ext cx="2825496" cy="1170432"/>
+          </a:xfrm>
+          <a:prstGeom prst="rect">
+            <a:avLst/>
+          </a:prstGeom>
+          <a:noFill/>
+          <a:ln/>
+        </p:spPr>
+        <p:txBody>
+          <a:bodyPr wrap="square" lIns="0" tIns="0" rIns="0" bIns="0" rtlCol="0" anchor="t">
+            <a:normAutofit/>
+          </a:bodyPr>
+          <a:lstStyle/>
+          <a:p>
+            <a:pPr indent="0" marL="0">
+              <a:buNone/>
+            </a:pPr>
+            <a:r>
+              <a:rPr lang="en-US" sz="1250" dirty="0">
+                <a:solidFill>
+                  <a:srgbClr val="17364A"/>
+                </a:solidFill>
+                <a:latin typeface="Aptos" pitchFamily="34" charset="0"/>
+                <a:ea typeface="Aptos" pitchFamily="34" charset="-122"/>
+                <a:cs typeface="Aptos" pitchFamily="34" charset="-120"/>
+              </a:rPr>
+              <a:t>Connect the concept to public health decisions, safeguards, documentation, or implementation work.</a:t>
+            </a:r>
+            <a:endParaRPr lang="en-US" sz="1250" dirty="0"/>
           </a:p>
         </p:txBody>
       </p:sp>
@@ -6588,7 +12059,32 @@
       </p:sp>
       <p:sp>
         <p:nvSpPr>
-          <p:cNvPr id="3" name="Text 1"/>
+          <p:cNvPr id="3" name="Shape 1"/>
+          <p:cNvSpPr/>
+          <p:nvPr/>
+        </p:nvSpPr>
+        <p:spPr>
+          <a:xfrm>
+            <a:off x="0" y="164592"/>
+            <a:ext cx="146304" cy="6693408"/>
+          </a:xfrm>
+          <a:prstGeom prst="rect">
+            <a:avLst/>
+          </a:prstGeom>
+          <a:solidFill>
+            <a:srgbClr val="2F8A28"/>
+          </a:solidFill>
+          <a:ln w="12700">
+            <a:solidFill>
+              <a:srgbClr val="2F8A28"/>
+            </a:solidFill>
+            <a:prstDash val="solid"/>
+          </a:ln>
+        </p:spPr>
+      </p:sp>
+      <p:sp>
+        <p:nvSpPr>
+          <p:cNvPr id="4" name="Text 2"/>
           <p:cNvSpPr/>
           <p:nvPr/>
         </p:nvSpPr>
@@ -6627,7 +12123,7 @@
       </p:sp>
       <p:sp>
         <p:nvSpPr>
-          <p:cNvPr id="4" name="Text 2"/>
+          <p:cNvPr id="5" name="Text 3"/>
           <p:cNvSpPr/>
           <p:nvPr/>
         </p:nvSpPr>
@@ -6666,7 +12162,7 @@
       </p:sp>
       <p:sp>
         <p:nvSpPr>
-          <p:cNvPr id="5" name="Text 3"/>
+          <p:cNvPr id="6" name="Text 4"/>
           <p:cNvSpPr/>
           <p:nvPr/>
         </p:nvSpPr>
@@ -6705,13 +12201,77 @@
       </p:sp>
       <p:sp>
         <p:nvSpPr>
-          <p:cNvPr id="6" name="Text 4"/>
+          <p:cNvPr id="7" name="Shape 5"/>
           <p:cNvSpPr/>
           <p:nvPr/>
         </p:nvSpPr>
         <p:spPr>
           <a:xfrm>
             <a:off x="640080" y="658368"/>
+            <a:ext cx="420624" cy="420624"/>
+          </a:xfrm>
+          <a:prstGeom prst="ellipse">
+            <a:avLst/>
+          </a:prstGeom>
+          <a:solidFill>
+            <a:srgbClr val="0068B7"/>
+          </a:solidFill>
+          <a:ln w="12700">
+            <a:solidFill>
+              <a:srgbClr val="0068B7"/>
+            </a:solidFill>
+            <a:prstDash val="solid"/>
+          </a:ln>
+        </p:spPr>
+      </p:sp>
+      <p:sp>
+        <p:nvSpPr>
+          <p:cNvPr id="8" name="Text 6"/>
+          <p:cNvSpPr/>
+          <p:nvPr/>
+        </p:nvSpPr>
+        <p:spPr>
+          <a:xfrm>
+            <a:off x="640080" y="731520"/>
+            <a:ext cx="420624" cy="164592"/>
+          </a:xfrm>
+          <a:prstGeom prst="rect">
+            <a:avLst/>
+          </a:prstGeom>
+          <a:noFill/>
+          <a:ln/>
+        </p:spPr>
+        <p:txBody>
+          <a:bodyPr wrap="square" lIns="0" tIns="0" rIns="0" bIns="0" rtlCol="0" anchor="ctr"/>
+          <a:lstStyle/>
+          <a:p>
+            <a:pPr algn="ctr" indent="0" marL="0">
+              <a:buNone/>
+            </a:pPr>
+            <a:r>
+              <a:rPr lang="en-US" sz="1100" b="1" dirty="0">
+                <a:solidFill>
+                  <a:srgbClr val="FFFFFF"/>
+                </a:solidFill>
+                <a:latin typeface="Aptos" pitchFamily="34" charset="0"/>
+                <a:ea typeface="Aptos" pitchFamily="34" charset="-122"/>
+                <a:cs typeface="Aptos" pitchFamily="34" charset="-120"/>
+              </a:rPr>
+              <a:t>2</a:t>
+            </a:r>
+            <a:endParaRPr lang="en-US" sz="1100" dirty="0"/>
+          </a:p>
+        </p:txBody>
+      </p:sp>
+      <p:sp>
+        <p:nvSpPr>
+          <p:cNvPr id="9" name="Text 7"/>
+          <p:cNvSpPr/>
+          <p:nvPr/>
+        </p:nvSpPr>
+        <p:spPr>
+          <a:xfrm>
+            <a:off x="640080" y="621792"/>
             <a:ext cx="10881360" cy="566928"/>
           </a:xfrm>
           <a:prstGeom prst="rect">
@@ -6738,7 +12298,7 @@
                 <a:ea typeface="Aptos Display" pitchFamily="34" charset="-122"/>
                 <a:cs typeface="Aptos Display" pitchFamily="34" charset="-120"/>
               </a:rPr>
-              <a:t>Why This Topic Matters for Public Health AI</a:t>
+              <a:t>Module Overview</a:t>
             </a:r>
             <a:endParaRPr lang="en-US" sz="2700" dirty="0"/>
           </a:p>
@@ -6746,32 +12306,178 @@
       </p:sp>
       <p:sp>
         <p:nvSpPr>
-          <p:cNvPr id="7" name="Text 5"/>
-          <p:cNvSpPr/>
-          <p:nvPr/>
-        </p:nvSpPr>
-        <p:spPr>
-          <a:xfrm>
-            <a:off x="822960" y="1325880"/>
-            <a:ext cx="10378440" cy="4800600"/>
-          </a:xfrm>
-          <a:prstGeom prst="rect">
-            <a:avLst/>
-          </a:prstGeom>
-          <a:noFill/>
-          <a:ln/>
-        </p:spPr>
-        <p:txBody>
-          <a:bodyPr wrap="square" lIns="1016" tIns="1016" rIns="1016" bIns="1016" rtlCol="0" anchor="t">
+          <p:cNvPr id="10" name="Text 8"/>
+          <p:cNvSpPr/>
+          <p:nvPr/>
+        </p:nvSpPr>
+        <p:spPr>
+          <a:xfrm>
+            <a:off x="868680" y="1417320"/>
+            <a:ext cx="6675120" cy="4434840"/>
+          </a:xfrm>
+          <a:prstGeom prst="rect">
+            <a:avLst/>
+          </a:prstGeom>
+          <a:noFill/>
+          <a:ln/>
+        </p:spPr>
+        <p:txBody>
+          <a:bodyPr wrap="square" lIns="635" tIns="635" rIns="635" bIns="635" rtlCol="0" anchor="t">
             <a:normAutofit/>
           </a:bodyPr>
           <a:lstStyle/>
           <a:p>
+            <a:r>
+              <a:rPr lang="en-US" sz="1700" dirty="0">
+                <a:solidFill>
+                  <a:srgbClr val="17364A"/>
+                </a:solidFill>
+                <a:latin typeface="Aptos" pitchFamily="34" charset="0"/>
+                <a:ea typeface="Aptos" pitchFamily="34" charset="-122"/>
+                <a:cs typeface="Aptos" pitchFamily="34" charset="-120"/>
+              </a:rPr>
+              <a:t>AI investments compete with many other public health priorities.</a:t>
+            </a:r>
+            <a:endParaRPr lang="en-US" sz="1700" dirty="0"/>
+          </a:p>
+          <a:p>
+            <a:r>
+              <a:rPr lang="en-US" sz="1700" dirty="0">
+                <a:solidFill>
+                  <a:srgbClr val="17364A"/>
+                </a:solidFill>
+                <a:latin typeface="Aptos" pitchFamily="34" charset="0"/>
+                <a:ea typeface="Aptos" pitchFamily="34" charset="-122"/>
+                <a:cs typeface="Aptos" pitchFamily="34" charset="-120"/>
+              </a:rPr>
+              <a:t>Leaders need a disciplined way to decide when AI is worth funding, what costs must be considered, and how benefits will be.</a:t>
+            </a:r>
+            <a:endParaRPr lang="en-US" sz="1700" dirty="0"/>
+          </a:p>
+          <a:p>
+            <a:r>
+              <a:rPr lang="en-US" sz="1700" dirty="0">
+                <a:solidFill>
+                  <a:srgbClr val="17364A"/>
+                </a:solidFill>
+                <a:latin typeface="Aptos" pitchFamily="34" charset="0"/>
+                <a:ea typeface="Aptos" pitchFamily="34" charset="-122"/>
+                <a:cs typeface="Aptos" pitchFamily="34" charset="-120"/>
+              </a:rPr>
+              <a:t>A business case review helps agencies avoid buying tools that are impressive in demonstrations but weak in operational.</a:t>
+            </a:r>
+            <a:endParaRPr lang="en-US" sz="1700" dirty="0"/>
+          </a:p>
+          <a:p>
+            <a:r>
+              <a:rPr lang="en-US" sz="1700" dirty="0">
+                <a:solidFill>
+                  <a:srgbClr val="17364A"/>
+                </a:solidFill>
+                <a:latin typeface="Aptos" pitchFamily="34" charset="0"/>
+                <a:ea typeface="Aptos" pitchFamily="34" charset="-122"/>
+                <a:cs typeface="Aptos" pitchFamily="34" charset="-120"/>
+              </a:rPr>
+              <a:t>This module teaches leaders to evaluate AI investments across cost, value, readiness, risk, staffing, procurement,.</a:t>
+            </a:r>
+            <a:endParaRPr lang="en-US" sz="1700" dirty="0"/>
+          </a:p>
+        </p:txBody>
+      </p:sp>
+      <p:sp>
+        <p:nvSpPr>
+          <p:cNvPr id="11" name="Shape 9"/>
+          <p:cNvSpPr/>
+          <p:nvPr/>
+        </p:nvSpPr>
+        <p:spPr>
+          <a:xfrm>
+            <a:off x="7909560" y="1417320"/>
+            <a:ext cx="3154680" cy="1828800"/>
+          </a:xfrm>
+          <a:prstGeom prst="roundRect">
+            <a:avLst>
+              <a:gd name="adj" fmla="val 6000"/>
+            </a:avLst>
+          </a:prstGeom>
+          <a:solidFill>
+            <a:srgbClr val="EEF8ED"/>
+          </a:solidFill>
+          <a:ln w="12700">
+            <a:solidFill>
+              <a:srgbClr val="B9D7E6"/>
+            </a:solidFill>
+            <a:prstDash val="solid"/>
+          </a:ln>
+        </p:spPr>
+      </p:sp>
+      <p:sp>
+        <p:nvSpPr>
+          <p:cNvPr id="12" name="Text 10"/>
+          <p:cNvSpPr/>
+          <p:nvPr/>
+        </p:nvSpPr>
+        <p:spPr>
+          <a:xfrm>
+            <a:off x="8074152" y="1563624"/>
+            <a:ext cx="2825496" cy="201168"/>
+          </a:xfrm>
+          <a:prstGeom prst="rect">
+            <a:avLst/>
+          </a:prstGeom>
+          <a:noFill/>
+          <a:ln/>
+        </p:spPr>
+        <p:txBody>
+          <a:bodyPr wrap="square" lIns="0" tIns="0" rIns="0" bIns="0" rtlCol="0" anchor="ctr"/>
+          <a:lstStyle/>
+          <a:p>
             <a:pPr indent="0" marL="0">
               <a:buNone/>
             </a:pPr>
             <a:r>
-              <a:rPr lang="en-US" sz="1420" dirty="0">
+              <a:rPr lang="en-US" sz="950" b="1" dirty="0">
+                <a:solidFill>
+                  <a:srgbClr val="0068B7"/>
+                </a:solidFill>
+                <a:latin typeface="Aptos" pitchFamily="34" charset="0"/>
+                <a:ea typeface="Aptos" pitchFamily="34" charset="-122"/>
+                <a:cs typeface="Aptos" pitchFamily="34" charset="-120"/>
+              </a:rPr>
+              <a:t>Key idea</a:t>
+            </a:r>
+            <a:endParaRPr lang="en-US" sz="950" dirty="0"/>
+          </a:p>
+        </p:txBody>
+      </p:sp>
+      <p:sp>
+        <p:nvSpPr>
+          <p:cNvPr id="13" name="Text 11"/>
+          <p:cNvSpPr/>
+          <p:nvPr/>
+        </p:nvSpPr>
+        <p:spPr>
+          <a:xfrm>
+            <a:off x="8074152" y="1856232"/>
+            <a:ext cx="2825496" cy="1261872"/>
+          </a:xfrm>
+          <a:prstGeom prst="rect">
+            <a:avLst/>
+          </a:prstGeom>
+          <a:noFill/>
+          <a:ln/>
+        </p:spPr>
+        <p:txBody>
+          <a:bodyPr wrap="square" lIns="0" tIns="0" rIns="0" bIns="0" rtlCol="0" anchor="t">
+            <a:normAutofit/>
+          </a:bodyPr>
+          <a:lstStyle/>
+          <a:p>
+            <a:pPr indent="0" marL="0">
+              <a:buNone/>
+            </a:pPr>
+            <a:r>
+              <a:rPr lang="en-US" sz="1250" dirty="0">
                 <a:solidFill>
                   <a:srgbClr val="17364A"/>
                 </a:solidFill>
@@ -6779,9 +12485,116 @@
                 <a:ea typeface="Aptos" pitchFamily="34" charset="-122"/>
                 <a:cs typeface="Aptos" pitchFamily="34" charset="-120"/>
               </a:rPr>
-              <a:t>Public health agencies often face short-term funding cycles and urgent operational needs. AI products may be marketed as quick solutions, but the true cost of responsible implementation is broader than subscription fees. Agencies may need to update data pipelines, configure security controls, develop validation plans, train staff, write policies, monitor performance, and manage vendor relationships. A strong business case also protects mission focus. AI should not be funded because it is novel. It should be funded when it addresses a meaningful public health problem, fits agency capacity, can be governed responsibly, and can produce measurable value. Business case review helps leaders compare AI investments with non-AI alternatives, such as workflow redesign, staffing changes, data quality improvements, or simpler automation.</a:t>
-            </a:r>
-            <a:endParaRPr lang="en-US" sz="1420" dirty="0"/>
+              <a:t>AI investments compete with many other public health priorities.</a:t>
+            </a:r>
+            <a:endParaRPr lang="en-US" sz="1250" dirty="0"/>
+          </a:p>
+        </p:txBody>
+      </p:sp>
+      <p:sp>
+        <p:nvSpPr>
+          <p:cNvPr id="14" name="Shape 12"/>
+          <p:cNvSpPr/>
+          <p:nvPr/>
+        </p:nvSpPr>
+        <p:spPr>
+          <a:xfrm>
+            <a:off x="7909560" y="3520440"/>
+            <a:ext cx="3154680" cy="1737360"/>
+          </a:xfrm>
+          <a:prstGeom prst="roundRect">
+            <a:avLst>
+              <a:gd name="adj" fmla="val 6316"/>
+            </a:avLst>
+          </a:prstGeom>
+          <a:solidFill>
+            <a:srgbClr val="EAF6F8"/>
+          </a:solidFill>
+          <a:ln w="12700">
+            <a:solidFill>
+              <a:srgbClr val="B9D7E6"/>
+            </a:solidFill>
+            <a:prstDash val="solid"/>
+          </a:ln>
+        </p:spPr>
+      </p:sp>
+      <p:sp>
+        <p:nvSpPr>
+          <p:cNvPr id="15" name="Text 13"/>
+          <p:cNvSpPr/>
+          <p:nvPr/>
+        </p:nvSpPr>
+        <p:spPr>
+          <a:xfrm>
+            <a:off x="8074152" y="3666744"/>
+            <a:ext cx="2825496" cy="201168"/>
+          </a:xfrm>
+          <a:prstGeom prst="rect">
+            <a:avLst/>
+          </a:prstGeom>
+          <a:noFill/>
+          <a:ln/>
+        </p:spPr>
+        <p:txBody>
+          <a:bodyPr wrap="square" lIns="0" tIns="0" rIns="0" bIns="0" rtlCol="0" anchor="ctr"/>
+          <a:lstStyle/>
+          <a:p>
+            <a:pPr indent="0" marL="0">
+              <a:buNone/>
+            </a:pPr>
+            <a:r>
+              <a:rPr lang="en-US" sz="950" b="1" dirty="0">
+                <a:solidFill>
+                  <a:srgbClr val="0068B7"/>
+                </a:solidFill>
+                <a:latin typeface="Aptos" pitchFamily="34" charset="0"/>
+                <a:ea typeface="Aptos" pitchFamily="34" charset="-122"/>
+                <a:cs typeface="Aptos" pitchFamily="34" charset="-120"/>
+              </a:rPr>
+              <a:t>Use this for</a:t>
+            </a:r>
+            <a:endParaRPr lang="en-US" sz="950" dirty="0"/>
+          </a:p>
+        </p:txBody>
+      </p:sp>
+      <p:sp>
+        <p:nvSpPr>
+          <p:cNvPr id="16" name="Text 14"/>
+          <p:cNvSpPr/>
+          <p:nvPr/>
+        </p:nvSpPr>
+        <p:spPr>
+          <a:xfrm>
+            <a:off x="8074152" y="3959352"/>
+            <a:ext cx="2825496" cy="1170432"/>
+          </a:xfrm>
+          <a:prstGeom prst="rect">
+            <a:avLst/>
+          </a:prstGeom>
+          <a:noFill/>
+          <a:ln/>
+        </p:spPr>
+        <p:txBody>
+          <a:bodyPr wrap="square" lIns="0" tIns="0" rIns="0" bIns="0" rtlCol="0" anchor="t">
+            <a:normAutofit/>
+          </a:bodyPr>
+          <a:lstStyle/>
+          <a:p>
+            <a:pPr indent="0" marL="0">
+              <a:buNone/>
+            </a:pPr>
+            <a:r>
+              <a:rPr lang="en-US" sz="1250" dirty="0">
+                <a:solidFill>
+                  <a:srgbClr val="17364A"/>
+                </a:solidFill>
+                <a:latin typeface="Aptos" pitchFamily="34" charset="0"/>
+                <a:ea typeface="Aptos" pitchFamily="34" charset="-122"/>
+                <a:cs typeface="Aptos" pitchFamily="34" charset="-120"/>
+              </a:rPr>
+              <a:t>Connect the concept to public health decisions, safeguards, documentation, or implementation work.</a:t>
+            </a:r>
+            <a:endParaRPr lang="en-US" sz="1250" dirty="0"/>
           </a:p>
         </p:txBody>
       </p:sp>
@@ -6844,7 +12657,32 @@
       </p:sp>
       <p:sp>
         <p:nvSpPr>
-          <p:cNvPr id="3" name="Text 1"/>
+          <p:cNvPr id="3" name="Shape 1"/>
+          <p:cNvSpPr/>
+          <p:nvPr/>
+        </p:nvSpPr>
+        <p:spPr>
+          <a:xfrm>
+            <a:off x="0" y="164592"/>
+            <a:ext cx="146304" cy="6693408"/>
+          </a:xfrm>
+          <a:prstGeom prst="rect">
+            <a:avLst/>
+          </a:prstGeom>
+          <a:solidFill>
+            <a:srgbClr val="2F8A28"/>
+          </a:solidFill>
+          <a:ln w="12700">
+            <a:solidFill>
+              <a:srgbClr val="2F8A28"/>
+            </a:solidFill>
+            <a:prstDash val="solid"/>
+          </a:ln>
+        </p:spPr>
+      </p:sp>
+      <p:sp>
+        <p:nvSpPr>
+          <p:cNvPr id="4" name="Text 2"/>
           <p:cNvSpPr/>
           <p:nvPr/>
         </p:nvSpPr>
@@ -6883,7 +12721,7 @@
       </p:sp>
       <p:sp>
         <p:nvSpPr>
-          <p:cNvPr id="4" name="Text 2"/>
+          <p:cNvPr id="5" name="Text 3"/>
           <p:cNvSpPr/>
           <p:nvPr/>
         </p:nvSpPr>
@@ -6922,7 +12760,7 @@
       </p:sp>
       <p:sp>
         <p:nvSpPr>
-          <p:cNvPr id="5" name="Text 3"/>
+          <p:cNvPr id="6" name="Text 4"/>
           <p:cNvSpPr/>
           <p:nvPr/>
         </p:nvSpPr>
@@ -6961,13 +12799,77 @@
       </p:sp>
       <p:sp>
         <p:nvSpPr>
-          <p:cNvPr id="6" name="Text 4"/>
+          <p:cNvPr id="7" name="Shape 5"/>
           <p:cNvSpPr/>
           <p:nvPr/>
         </p:nvSpPr>
         <p:spPr>
           <a:xfrm>
             <a:off x="640080" y="658368"/>
+            <a:ext cx="420624" cy="420624"/>
+          </a:xfrm>
+          <a:prstGeom prst="ellipse">
+            <a:avLst/>
+          </a:prstGeom>
+          <a:solidFill>
+            <a:srgbClr val="0068B7"/>
+          </a:solidFill>
+          <a:ln w="12700">
+            <a:solidFill>
+              <a:srgbClr val="0068B7"/>
+            </a:solidFill>
+            <a:prstDash val="solid"/>
+          </a:ln>
+        </p:spPr>
+      </p:sp>
+      <p:sp>
+        <p:nvSpPr>
+          <p:cNvPr id="8" name="Text 6"/>
+          <p:cNvSpPr/>
+          <p:nvPr/>
+        </p:nvSpPr>
+        <p:spPr>
+          <a:xfrm>
+            <a:off x="640080" y="731520"/>
+            <a:ext cx="420624" cy="164592"/>
+          </a:xfrm>
+          <a:prstGeom prst="rect">
+            <a:avLst/>
+          </a:prstGeom>
+          <a:noFill/>
+          <a:ln/>
+        </p:spPr>
+        <p:txBody>
+          <a:bodyPr wrap="square" lIns="0" tIns="0" rIns="0" bIns="0" rtlCol="0" anchor="ctr"/>
+          <a:lstStyle/>
+          <a:p>
+            <a:pPr algn="ctr" indent="0" marL="0">
+              <a:buNone/>
+            </a:pPr>
+            <a:r>
+              <a:rPr lang="en-US" sz="1100" b="1" dirty="0">
+                <a:solidFill>
+                  <a:srgbClr val="FFFFFF"/>
+                </a:solidFill>
+                <a:latin typeface="Aptos" pitchFamily="34" charset="0"/>
+                <a:ea typeface="Aptos" pitchFamily="34" charset="-122"/>
+                <a:cs typeface="Aptos" pitchFamily="34" charset="-120"/>
+              </a:rPr>
+              <a:t>3</a:t>
+            </a:r>
+            <a:endParaRPr lang="en-US" sz="1100" dirty="0"/>
+          </a:p>
+        </p:txBody>
+      </p:sp>
+      <p:sp>
+        <p:nvSpPr>
+          <p:cNvPr id="9" name="Text 7"/>
+          <p:cNvSpPr/>
+          <p:nvPr/>
+        </p:nvSpPr>
+        <p:spPr>
+          <a:xfrm>
+            <a:off x="640080" y="621792"/>
             <a:ext cx="10881360" cy="566928"/>
           </a:xfrm>
           <a:prstGeom prst="rect">
@@ -6994,7 +12896,7 @@
                 <a:ea typeface="Aptos Display" pitchFamily="34" charset="-122"/>
                 <a:cs typeface="Aptos Display" pitchFamily="34" charset="-120"/>
               </a:rPr>
-              <a:t>Public Health Example</a:t>
+              <a:t>Jurisdiction and Agency Policy Note</a:t>
             </a:r>
             <a:endParaRPr lang="en-US" sz="2700" dirty="0"/>
           </a:p>
@@ -7002,32 +12904,164 @@
       </p:sp>
       <p:sp>
         <p:nvSpPr>
-          <p:cNvPr id="7" name="Text 5"/>
-          <p:cNvSpPr/>
-          <p:nvPr/>
-        </p:nvSpPr>
-        <p:spPr>
-          <a:xfrm>
-            <a:off x="822960" y="1325880"/>
-            <a:ext cx="10378440" cy="4800600"/>
-          </a:xfrm>
-          <a:prstGeom prst="rect">
-            <a:avLst/>
-          </a:prstGeom>
-          <a:noFill/>
-          <a:ln/>
-        </p:spPr>
-        <p:txBody>
-          <a:bodyPr wrap="square" lIns="1016" tIns="1016" rIns="1016" bIns="1016" rtlCol="0" anchor="t">
+          <p:cNvPr id="10" name="Text 8"/>
+          <p:cNvSpPr/>
+          <p:nvPr/>
+        </p:nvSpPr>
+        <p:spPr>
+          <a:xfrm>
+            <a:off x="868680" y="1417320"/>
+            <a:ext cx="6675120" cy="4434840"/>
+          </a:xfrm>
+          <a:prstGeom prst="rect">
+            <a:avLst/>
+          </a:prstGeom>
+          <a:noFill/>
+          <a:ln/>
+        </p:spPr>
+        <p:txBody>
+          <a:bodyPr wrap="square" lIns="635" tIns="635" rIns="635" bIns="635" rtlCol="0" anchor="t">
             <a:normAutofit/>
           </a:bodyPr>
           <a:lstStyle/>
           <a:p>
+            <a:r>
+              <a:rPr lang="en-US" sz="1700" dirty="0">
+                <a:solidFill>
+                  <a:srgbClr val="17364A"/>
+                </a:solidFill>
+                <a:latin typeface="Aptos" pitchFamily="34" charset="0"/>
+                <a:ea typeface="Aptos" pitchFamily="34" charset="-122"/>
+                <a:cs typeface="Aptos" pitchFamily="34" charset="-120"/>
+              </a:rPr>
+              <a:t>This national-level module is intended for training and planning purposes.</a:t>
+            </a:r>
+            <a:endParaRPr lang="en-US" sz="1700" dirty="0"/>
+          </a:p>
+          <a:p>
+            <a:r>
+              <a:rPr lang="en-US" sz="1700" dirty="0">
+                <a:solidFill>
+                  <a:srgbClr val="17364A"/>
+                </a:solidFill>
+                <a:latin typeface="Aptos" pitchFamily="34" charset="0"/>
+                <a:ea typeface="Aptos" pitchFamily="34" charset="-122"/>
+                <a:cs typeface="Aptos" pitchFamily="34" charset="-120"/>
+              </a:rPr>
+              <a:t>It does not replace legal, privacy, procurement, civil rights, records, or agency policy review.</a:t>
+            </a:r>
+            <a:endParaRPr lang="en-US" sz="1700" dirty="0"/>
+          </a:p>
+          <a:p>
+            <a:r>
+              <a:rPr lang="en-US" sz="1700" dirty="0">
+                <a:solidFill>
+                  <a:srgbClr val="17364A"/>
+                </a:solidFill>
+                <a:latin typeface="Aptos" pitchFamily="34" charset="0"/>
+                <a:ea typeface="Aptos" pitchFamily="34" charset="-122"/>
+                <a:cs typeface="Aptos" pitchFamily="34" charset="-120"/>
+              </a:rPr>
+              <a:t>Learners should confirm applicable requirements in their own jurisdiction and organization before implementing AI-supported.</a:t>
+            </a:r>
+            <a:endParaRPr lang="en-US" sz="1700" dirty="0"/>
+          </a:p>
+        </p:txBody>
+      </p:sp>
+      <p:sp>
+        <p:nvSpPr>
+          <p:cNvPr id="11" name="Shape 9"/>
+          <p:cNvSpPr/>
+          <p:nvPr/>
+        </p:nvSpPr>
+        <p:spPr>
+          <a:xfrm>
+            <a:off x="7909560" y="1417320"/>
+            <a:ext cx="3154680" cy="1828800"/>
+          </a:xfrm>
+          <a:prstGeom prst="roundRect">
+            <a:avLst>
+              <a:gd name="adj" fmla="val 6000"/>
+            </a:avLst>
+          </a:prstGeom>
+          <a:solidFill>
+            <a:srgbClr val="EEF8ED"/>
+          </a:solidFill>
+          <a:ln w="12700">
+            <a:solidFill>
+              <a:srgbClr val="B9D7E6"/>
+            </a:solidFill>
+            <a:prstDash val="solid"/>
+          </a:ln>
+        </p:spPr>
+      </p:sp>
+      <p:sp>
+        <p:nvSpPr>
+          <p:cNvPr id="12" name="Text 10"/>
+          <p:cNvSpPr/>
+          <p:nvPr/>
+        </p:nvSpPr>
+        <p:spPr>
+          <a:xfrm>
+            <a:off x="8074152" y="1563624"/>
+            <a:ext cx="2825496" cy="201168"/>
+          </a:xfrm>
+          <a:prstGeom prst="rect">
+            <a:avLst/>
+          </a:prstGeom>
+          <a:noFill/>
+          <a:ln/>
+        </p:spPr>
+        <p:txBody>
+          <a:bodyPr wrap="square" lIns="0" tIns="0" rIns="0" bIns="0" rtlCol="0" anchor="ctr"/>
+          <a:lstStyle/>
+          <a:p>
             <a:pPr indent="0" marL="0">
               <a:buNone/>
             </a:pPr>
             <a:r>
-              <a:rPr lang="en-US" sz="1420" dirty="0">
+              <a:rPr lang="en-US" sz="950" b="1" dirty="0">
+                <a:solidFill>
+                  <a:srgbClr val="0068B7"/>
+                </a:solidFill>
+                <a:latin typeface="Aptos" pitchFamily="34" charset="0"/>
+                <a:ea typeface="Aptos" pitchFamily="34" charset="-122"/>
+                <a:cs typeface="Aptos" pitchFamily="34" charset="-120"/>
+              </a:rPr>
+              <a:t>Key idea</a:t>
+            </a:r>
+            <a:endParaRPr lang="en-US" sz="950" dirty="0"/>
+          </a:p>
+        </p:txBody>
+      </p:sp>
+      <p:sp>
+        <p:nvSpPr>
+          <p:cNvPr id="13" name="Text 11"/>
+          <p:cNvSpPr/>
+          <p:nvPr/>
+        </p:nvSpPr>
+        <p:spPr>
+          <a:xfrm>
+            <a:off x="8074152" y="1856232"/>
+            <a:ext cx="2825496" cy="1261872"/>
+          </a:xfrm>
+          <a:prstGeom prst="rect">
+            <a:avLst/>
+          </a:prstGeom>
+          <a:noFill/>
+          <a:ln/>
+        </p:spPr>
+        <p:txBody>
+          <a:bodyPr wrap="square" lIns="0" tIns="0" rIns="0" bIns="0" rtlCol="0" anchor="t">
+            <a:normAutofit/>
+          </a:bodyPr>
+          <a:lstStyle/>
+          <a:p>
+            <a:pPr indent="0" marL="0">
+              <a:buNone/>
+            </a:pPr>
+            <a:r>
+              <a:rPr lang="en-US" sz="1250" dirty="0">
                 <a:solidFill>
                   <a:srgbClr val="17364A"/>
                 </a:solidFill>
@@ -7035,9 +13069,116 @@
                 <a:ea typeface="Aptos" pitchFamily="34" charset="-122"/>
                 <a:cs typeface="Aptos" pitchFamily="34" charset="-120"/>
               </a:rPr>
-              <a:t>A vendor offers an AI tool that promises to reduce disease investigator workload by summarizing case reports. The annual license appears affordable, but the agency must also pay for integration with the surveillance system, security review, staff training, validation, legal review, vendor support, monitoring dashboards, and staff time for governance. If those costs are not considered, leadership may underestimate the investment required. A business case review asks whether the tool will meaningfully reduce burden, improve timeliness, maintain quality, and fit the agency's workflow. It also asks whether a simpler approach, such as better case report templates or workflow redesign, would solve the problem at lower cost and risk. The review does not assume AI is the answer; it tests whether AI is the right answer.</a:t>
-            </a:r>
-            <a:endParaRPr lang="en-US" sz="1420" dirty="0"/>
+              <a:t>This national-level module is intended for training and planning purposes.</a:t>
+            </a:r>
+            <a:endParaRPr lang="en-US" sz="1250" dirty="0"/>
+          </a:p>
+        </p:txBody>
+      </p:sp>
+      <p:sp>
+        <p:nvSpPr>
+          <p:cNvPr id="14" name="Shape 12"/>
+          <p:cNvSpPr/>
+          <p:nvPr/>
+        </p:nvSpPr>
+        <p:spPr>
+          <a:xfrm>
+            <a:off x="7909560" y="3520440"/>
+            <a:ext cx="3154680" cy="1737360"/>
+          </a:xfrm>
+          <a:prstGeom prst="roundRect">
+            <a:avLst>
+              <a:gd name="adj" fmla="val 6316"/>
+            </a:avLst>
+          </a:prstGeom>
+          <a:solidFill>
+            <a:srgbClr val="EAF6F8"/>
+          </a:solidFill>
+          <a:ln w="12700">
+            <a:solidFill>
+              <a:srgbClr val="B9D7E6"/>
+            </a:solidFill>
+            <a:prstDash val="solid"/>
+          </a:ln>
+        </p:spPr>
+      </p:sp>
+      <p:sp>
+        <p:nvSpPr>
+          <p:cNvPr id="15" name="Text 13"/>
+          <p:cNvSpPr/>
+          <p:nvPr/>
+        </p:nvSpPr>
+        <p:spPr>
+          <a:xfrm>
+            <a:off x="8074152" y="3666744"/>
+            <a:ext cx="2825496" cy="201168"/>
+          </a:xfrm>
+          <a:prstGeom prst="rect">
+            <a:avLst/>
+          </a:prstGeom>
+          <a:noFill/>
+          <a:ln/>
+        </p:spPr>
+        <p:txBody>
+          <a:bodyPr wrap="square" lIns="0" tIns="0" rIns="0" bIns="0" rtlCol="0" anchor="ctr"/>
+          <a:lstStyle/>
+          <a:p>
+            <a:pPr indent="0" marL="0">
+              <a:buNone/>
+            </a:pPr>
+            <a:r>
+              <a:rPr lang="en-US" sz="950" b="1" dirty="0">
+                <a:solidFill>
+                  <a:srgbClr val="0068B7"/>
+                </a:solidFill>
+                <a:latin typeface="Aptos" pitchFamily="34" charset="0"/>
+                <a:ea typeface="Aptos" pitchFamily="34" charset="-122"/>
+                <a:cs typeface="Aptos" pitchFamily="34" charset="-120"/>
+              </a:rPr>
+              <a:t>Use this for</a:t>
+            </a:r>
+            <a:endParaRPr lang="en-US" sz="950" dirty="0"/>
+          </a:p>
+        </p:txBody>
+      </p:sp>
+      <p:sp>
+        <p:nvSpPr>
+          <p:cNvPr id="16" name="Text 14"/>
+          <p:cNvSpPr/>
+          <p:nvPr/>
+        </p:nvSpPr>
+        <p:spPr>
+          <a:xfrm>
+            <a:off x="8074152" y="3959352"/>
+            <a:ext cx="2825496" cy="1170432"/>
+          </a:xfrm>
+          <a:prstGeom prst="rect">
+            <a:avLst/>
+          </a:prstGeom>
+          <a:noFill/>
+          <a:ln/>
+        </p:spPr>
+        <p:txBody>
+          <a:bodyPr wrap="square" lIns="0" tIns="0" rIns="0" bIns="0" rtlCol="0" anchor="t">
+            <a:normAutofit/>
+          </a:bodyPr>
+          <a:lstStyle/>
+          <a:p>
+            <a:pPr indent="0" marL="0">
+              <a:buNone/>
+            </a:pPr>
+            <a:r>
+              <a:rPr lang="en-US" sz="1250" dirty="0">
+                <a:solidFill>
+                  <a:srgbClr val="17364A"/>
+                </a:solidFill>
+                <a:latin typeface="Aptos" pitchFamily="34" charset="0"/>
+                <a:ea typeface="Aptos" pitchFamily="34" charset="-122"/>
+                <a:cs typeface="Aptos" pitchFamily="34" charset="-120"/>
+              </a:rPr>
+              <a:t>Connect the concept to public health decisions, safeguards, documentation, or implementation work.</a:t>
+            </a:r>
+            <a:endParaRPr lang="en-US" sz="1250" dirty="0"/>
           </a:p>
         </p:txBody>
       </p:sp>
@@ -7100,7 +13241,32 @@
       </p:sp>
       <p:sp>
         <p:nvSpPr>
-          <p:cNvPr id="3" name="Text 1"/>
+          <p:cNvPr id="3" name="Shape 1"/>
+          <p:cNvSpPr/>
+          <p:nvPr/>
+        </p:nvSpPr>
+        <p:spPr>
+          <a:xfrm>
+            <a:off x="0" y="164592"/>
+            <a:ext cx="146304" cy="6693408"/>
+          </a:xfrm>
+          <a:prstGeom prst="rect">
+            <a:avLst/>
+          </a:prstGeom>
+          <a:solidFill>
+            <a:srgbClr val="2F8A28"/>
+          </a:solidFill>
+          <a:ln w="12700">
+            <a:solidFill>
+              <a:srgbClr val="2F8A28"/>
+            </a:solidFill>
+            <a:prstDash val="solid"/>
+          </a:ln>
+        </p:spPr>
+      </p:sp>
+      <p:sp>
+        <p:nvSpPr>
+          <p:cNvPr id="4" name="Text 2"/>
           <p:cNvSpPr/>
           <p:nvPr/>
         </p:nvSpPr>
@@ -7139,7 +13305,7 @@
       </p:sp>
       <p:sp>
         <p:nvSpPr>
-          <p:cNvPr id="4" name="Text 2"/>
+          <p:cNvPr id="5" name="Text 3"/>
           <p:cNvSpPr/>
           <p:nvPr/>
         </p:nvSpPr>
@@ -7178,7 +13344,7 @@
       </p:sp>
       <p:sp>
         <p:nvSpPr>
-          <p:cNvPr id="5" name="Text 3"/>
+          <p:cNvPr id="6" name="Text 4"/>
           <p:cNvSpPr/>
           <p:nvPr/>
         </p:nvSpPr>
@@ -7217,13 +13383,77 @@
       </p:sp>
       <p:sp>
         <p:nvSpPr>
-          <p:cNvPr id="6" name="Text 4"/>
+          <p:cNvPr id="7" name="Shape 5"/>
           <p:cNvSpPr/>
           <p:nvPr/>
         </p:nvSpPr>
         <p:spPr>
           <a:xfrm>
             <a:off x="640080" y="658368"/>
+            <a:ext cx="420624" cy="420624"/>
+          </a:xfrm>
+          <a:prstGeom prst="ellipse">
+            <a:avLst/>
+          </a:prstGeom>
+          <a:solidFill>
+            <a:srgbClr val="0068B7"/>
+          </a:solidFill>
+          <a:ln w="12700">
+            <a:solidFill>
+              <a:srgbClr val="0068B7"/>
+            </a:solidFill>
+            <a:prstDash val="solid"/>
+          </a:ln>
+        </p:spPr>
+      </p:sp>
+      <p:sp>
+        <p:nvSpPr>
+          <p:cNvPr id="8" name="Text 6"/>
+          <p:cNvSpPr/>
+          <p:nvPr/>
+        </p:nvSpPr>
+        <p:spPr>
+          <a:xfrm>
+            <a:off x="640080" y="731520"/>
+            <a:ext cx="420624" cy="164592"/>
+          </a:xfrm>
+          <a:prstGeom prst="rect">
+            <a:avLst/>
+          </a:prstGeom>
+          <a:noFill/>
+          <a:ln/>
+        </p:spPr>
+        <p:txBody>
+          <a:bodyPr wrap="square" lIns="0" tIns="0" rIns="0" bIns="0" rtlCol="0" anchor="ctr"/>
+          <a:lstStyle/>
+          <a:p>
+            <a:pPr algn="ctr" indent="0" marL="0">
+              <a:buNone/>
+            </a:pPr>
+            <a:r>
+              <a:rPr lang="en-US" sz="1100" b="1" dirty="0">
+                <a:solidFill>
+                  <a:srgbClr val="FFFFFF"/>
+                </a:solidFill>
+                <a:latin typeface="Aptos" pitchFamily="34" charset="0"/>
+                <a:ea typeface="Aptos" pitchFamily="34" charset="-122"/>
+                <a:cs typeface="Aptos" pitchFamily="34" charset="-120"/>
+              </a:rPr>
+              <a:t>4</a:t>
+            </a:r>
+            <a:endParaRPr lang="en-US" sz="1100" dirty="0"/>
+          </a:p>
+        </p:txBody>
+      </p:sp>
+      <p:sp>
+        <p:nvSpPr>
+          <p:cNvPr id="9" name="Text 7"/>
+          <p:cNvSpPr/>
+          <p:nvPr/>
+        </p:nvSpPr>
+        <p:spPr>
+          <a:xfrm>
+            <a:off x="640080" y="621792"/>
             <a:ext cx="10881360" cy="566928"/>
           </a:xfrm>
           <a:prstGeom prst="rect">
@@ -7250,7 +13480,7 @@
                 <a:ea typeface="Aptos Display" pitchFamily="34" charset="-122"/>
                 <a:cs typeface="Aptos Display" pitchFamily="34" charset="-120"/>
               </a:rPr>
-              <a:t>Technical and Governance Deep Dive</a:t>
+              <a:t>Why This Topic Matters for Public Health AI</a:t>
             </a:r>
             <a:endParaRPr lang="en-US" sz="2700" dirty="0"/>
           </a:p>
@@ -7258,32 +13488,178 @@
       </p:sp>
       <p:sp>
         <p:nvSpPr>
-          <p:cNvPr id="7" name="Text 5"/>
-          <p:cNvSpPr/>
-          <p:nvPr/>
-        </p:nvSpPr>
-        <p:spPr>
-          <a:xfrm>
-            <a:off x="822960" y="1325880"/>
-            <a:ext cx="10378440" cy="4800600"/>
-          </a:xfrm>
-          <a:prstGeom prst="rect">
-            <a:avLst/>
-          </a:prstGeom>
-          <a:noFill/>
-          <a:ln/>
-        </p:spPr>
-        <p:txBody>
-          <a:bodyPr wrap="square" lIns="1016" tIns="1016" rIns="1016" bIns="1016" rtlCol="0" anchor="t">
+          <p:cNvPr id="10" name="Text 8"/>
+          <p:cNvSpPr/>
+          <p:nvPr/>
+        </p:nvSpPr>
+        <p:spPr>
+          <a:xfrm>
+            <a:off x="868680" y="1417320"/>
+            <a:ext cx="6675120" cy="4434840"/>
+          </a:xfrm>
+          <a:prstGeom prst="rect">
+            <a:avLst/>
+          </a:prstGeom>
+          <a:noFill/>
+          <a:ln/>
+        </p:spPr>
+        <p:txBody>
+          <a:bodyPr wrap="square" lIns="635" tIns="635" rIns="635" bIns="635" rtlCol="0" anchor="t">
             <a:normAutofit/>
           </a:bodyPr>
           <a:lstStyle/>
           <a:p>
+            <a:r>
+              <a:rPr lang="en-US" sz="1700" dirty="0">
+                <a:solidFill>
+                  <a:srgbClr val="17364A"/>
+                </a:solidFill>
+                <a:latin typeface="Aptos" pitchFamily="34" charset="0"/>
+                <a:ea typeface="Aptos" pitchFamily="34" charset="-122"/>
+                <a:cs typeface="Aptos" pitchFamily="34" charset="-120"/>
+              </a:rPr>
+              <a:t>Public health agencies often face short-term funding cycles and urgent operational needs.</a:t>
+            </a:r>
+            <a:endParaRPr lang="en-US" sz="1700" dirty="0"/>
+          </a:p>
+          <a:p>
+            <a:r>
+              <a:rPr lang="en-US" sz="1700" dirty="0">
+                <a:solidFill>
+                  <a:srgbClr val="17364A"/>
+                </a:solidFill>
+                <a:latin typeface="Aptos" pitchFamily="34" charset="0"/>
+                <a:ea typeface="Aptos" pitchFamily="34" charset="-122"/>
+                <a:cs typeface="Aptos" pitchFamily="34" charset="-120"/>
+              </a:rPr>
+              <a:t>AI products may be marketed as quick solutions, but the true cost of responsible implementation is broader than.</a:t>
+            </a:r>
+            <a:endParaRPr lang="en-US" sz="1700" dirty="0"/>
+          </a:p>
+          <a:p>
+            <a:r>
+              <a:rPr lang="en-US" sz="1700" dirty="0">
+                <a:solidFill>
+                  <a:srgbClr val="17364A"/>
+                </a:solidFill>
+                <a:latin typeface="Aptos" pitchFamily="34" charset="0"/>
+                <a:ea typeface="Aptos" pitchFamily="34" charset="-122"/>
+                <a:cs typeface="Aptos" pitchFamily="34" charset="-120"/>
+              </a:rPr>
+              <a:t>Agencies may need to update data pipelines, configure security controls, develop validation plans, train staff, write.</a:t>
+            </a:r>
+            <a:endParaRPr lang="en-US" sz="1700" dirty="0"/>
+          </a:p>
+          <a:p>
+            <a:r>
+              <a:rPr lang="en-US" sz="1700" dirty="0">
+                <a:solidFill>
+                  <a:srgbClr val="17364A"/>
+                </a:solidFill>
+                <a:latin typeface="Aptos" pitchFamily="34" charset="0"/>
+                <a:ea typeface="Aptos" pitchFamily="34" charset="-122"/>
+                <a:cs typeface="Aptos" pitchFamily="34" charset="-120"/>
+              </a:rPr>
+              <a:t>A strong business case also protects mission focus.</a:t>
+            </a:r>
+            <a:endParaRPr lang="en-US" sz="1700" dirty="0"/>
+          </a:p>
+        </p:txBody>
+      </p:sp>
+      <p:sp>
+        <p:nvSpPr>
+          <p:cNvPr id="11" name="Shape 9"/>
+          <p:cNvSpPr/>
+          <p:nvPr/>
+        </p:nvSpPr>
+        <p:spPr>
+          <a:xfrm>
+            <a:off x="7909560" y="1417320"/>
+            <a:ext cx="3154680" cy="1828800"/>
+          </a:xfrm>
+          <a:prstGeom prst="roundRect">
+            <a:avLst>
+              <a:gd name="adj" fmla="val 6000"/>
+            </a:avLst>
+          </a:prstGeom>
+          <a:solidFill>
+            <a:srgbClr val="EEF8ED"/>
+          </a:solidFill>
+          <a:ln w="12700">
+            <a:solidFill>
+              <a:srgbClr val="B9D7E6"/>
+            </a:solidFill>
+            <a:prstDash val="solid"/>
+          </a:ln>
+        </p:spPr>
+      </p:sp>
+      <p:sp>
+        <p:nvSpPr>
+          <p:cNvPr id="12" name="Text 10"/>
+          <p:cNvSpPr/>
+          <p:nvPr/>
+        </p:nvSpPr>
+        <p:spPr>
+          <a:xfrm>
+            <a:off x="8074152" y="1563624"/>
+            <a:ext cx="2825496" cy="201168"/>
+          </a:xfrm>
+          <a:prstGeom prst="rect">
+            <a:avLst/>
+          </a:prstGeom>
+          <a:noFill/>
+          <a:ln/>
+        </p:spPr>
+        <p:txBody>
+          <a:bodyPr wrap="square" lIns="0" tIns="0" rIns="0" bIns="0" rtlCol="0" anchor="ctr"/>
+          <a:lstStyle/>
+          <a:p>
             <a:pPr indent="0" marL="0">
               <a:buNone/>
             </a:pPr>
             <a:r>
-              <a:rPr lang="en-US" sz="1420" dirty="0">
+              <a:rPr lang="en-US" sz="950" b="1" dirty="0">
+                <a:solidFill>
+                  <a:srgbClr val="0068B7"/>
+                </a:solidFill>
+                <a:latin typeface="Aptos" pitchFamily="34" charset="0"/>
+                <a:ea typeface="Aptos" pitchFamily="34" charset="-122"/>
+                <a:cs typeface="Aptos" pitchFamily="34" charset="-120"/>
+              </a:rPr>
+              <a:t>Key idea</a:t>
+            </a:r>
+            <a:endParaRPr lang="en-US" sz="950" dirty="0"/>
+          </a:p>
+        </p:txBody>
+      </p:sp>
+      <p:sp>
+        <p:nvSpPr>
+          <p:cNvPr id="13" name="Text 11"/>
+          <p:cNvSpPr/>
+          <p:nvPr/>
+        </p:nvSpPr>
+        <p:spPr>
+          <a:xfrm>
+            <a:off x="8074152" y="1856232"/>
+            <a:ext cx="2825496" cy="1261872"/>
+          </a:xfrm>
+          <a:prstGeom prst="rect">
+            <a:avLst/>
+          </a:prstGeom>
+          <a:noFill/>
+          <a:ln/>
+        </p:spPr>
+        <p:txBody>
+          <a:bodyPr wrap="square" lIns="0" tIns="0" rIns="0" bIns="0" rtlCol="0" anchor="t">
+            <a:normAutofit/>
+          </a:bodyPr>
+          <a:lstStyle/>
+          <a:p>
+            <a:pPr indent="0" marL="0">
+              <a:buNone/>
+            </a:pPr>
+            <a:r>
+              <a:rPr lang="en-US" sz="1250" dirty="0">
                 <a:solidFill>
                   <a:srgbClr val="17364A"/>
                 </a:solidFill>
@@ -7291,9 +13667,116 @@
                 <a:ea typeface="Aptos" pitchFamily="34" charset="-122"/>
                 <a:cs typeface="Aptos" pitchFamily="34" charset="-120"/>
               </a:rPr>
-              <a:t>An AI business case should begin with a problem statement. The problem should be operational and measurable, such as delayed case review, inconsistent public response drafting, high manual data cleanup burden, or inability to search internal guidance efficiently. A vague desire to 'use AI' is not a sufficient problem statement. The business case should connect the proposed AI use to a real public health need. The review should compare alternatives. Options may include doing nothing, improving workflow, improving data quality, using rules-based automation, procuring a vendor product, developing an internal tool, or joining a shared service. Each option should be assessed for benefit, cost, risk, time, staffing, sustainability, and governance burden. This comparison prevents AI from becoming the default answer to every operational problem. Success measures should be defined before funding. Measures might include reduced processing time, improved completeness, fewer manual touches, better routing accuracy, staff satisfaction, fewer errors, improved language access, or reduced backlog. Measures should also include safety and equity indicators. A tool that saves time but increases error rates, widens disparities, or erodes public trust should not be considered successful.</a:t>
-            </a:r>
-            <a:endParaRPr lang="en-US" sz="1420" dirty="0"/>
+              <a:t>Public health agencies often face short-term funding cycles and urgent operational needs.</a:t>
+            </a:r>
+            <a:endParaRPr lang="en-US" sz="1250" dirty="0"/>
+          </a:p>
+        </p:txBody>
+      </p:sp>
+      <p:sp>
+        <p:nvSpPr>
+          <p:cNvPr id="14" name="Shape 12"/>
+          <p:cNvSpPr/>
+          <p:nvPr/>
+        </p:nvSpPr>
+        <p:spPr>
+          <a:xfrm>
+            <a:off x="7909560" y="3520440"/>
+            <a:ext cx="3154680" cy="1737360"/>
+          </a:xfrm>
+          <a:prstGeom prst="roundRect">
+            <a:avLst>
+              <a:gd name="adj" fmla="val 6316"/>
+            </a:avLst>
+          </a:prstGeom>
+          <a:solidFill>
+            <a:srgbClr val="EAF6F8"/>
+          </a:solidFill>
+          <a:ln w="12700">
+            <a:solidFill>
+              <a:srgbClr val="B9D7E6"/>
+            </a:solidFill>
+            <a:prstDash val="solid"/>
+          </a:ln>
+        </p:spPr>
+      </p:sp>
+      <p:sp>
+        <p:nvSpPr>
+          <p:cNvPr id="15" name="Text 13"/>
+          <p:cNvSpPr/>
+          <p:nvPr/>
+        </p:nvSpPr>
+        <p:spPr>
+          <a:xfrm>
+            <a:off x="8074152" y="3666744"/>
+            <a:ext cx="2825496" cy="201168"/>
+          </a:xfrm>
+          <a:prstGeom prst="rect">
+            <a:avLst/>
+          </a:prstGeom>
+          <a:noFill/>
+          <a:ln/>
+        </p:spPr>
+        <p:txBody>
+          <a:bodyPr wrap="square" lIns="0" tIns="0" rIns="0" bIns="0" rtlCol="0" anchor="ctr"/>
+          <a:lstStyle/>
+          <a:p>
+            <a:pPr indent="0" marL="0">
+              <a:buNone/>
+            </a:pPr>
+            <a:r>
+              <a:rPr lang="en-US" sz="950" b="1" dirty="0">
+                <a:solidFill>
+                  <a:srgbClr val="0068B7"/>
+                </a:solidFill>
+                <a:latin typeface="Aptos" pitchFamily="34" charset="0"/>
+                <a:ea typeface="Aptos" pitchFamily="34" charset="-122"/>
+                <a:cs typeface="Aptos" pitchFamily="34" charset="-120"/>
+              </a:rPr>
+              <a:t>Use this for</a:t>
+            </a:r>
+            <a:endParaRPr lang="en-US" sz="950" dirty="0"/>
+          </a:p>
+        </p:txBody>
+      </p:sp>
+      <p:sp>
+        <p:nvSpPr>
+          <p:cNvPr id="16" name="Text 14"/>
+          <p:cNvSpPr/>
+          <p:nvPr/>
+        </p:nvSpPr>
+        <p:spPr>
+          <a:xfrm>
+            <a:off x="8074152" y="3959352"/>
+            <a:ext cx="2825496" cy="1170432"/>
+          </a:xfrm>
+          <a:prstGeom prst="rect">
+            <a:avLst/>
+          </a:prstGeom>
+          <a:noFill/>
+          <a:ln/>
+        </p:spPr>
+        <p:txBody>
+          <a:bodyPr wrap="square" lIns="0" tIns="0" rIns="0" bIns="0" rtlCol="0" anchor="t">
+            <a:normAutofit/>
+          </a:bodyPr>
+          <a:lstStyle/>
+          <a:p>
+            <a:pPr indent="0" marL="0">
+              <a:buNone/>
+            </a:pPr>
+            <a:r>
+              <a:rPr lang="en-US" sz="1250" dirty="0">
+                <a:solidFill>
+                  <a:srgbClr val="17364A"/>
+                </a:solidFill>
+                <a:latin typeface="Aptos" pitchFamily="34" charset="0"/>
+                <a:ea typeface="Aptos" pitchFamily="34" charset="-122"/>
+                <a:cs typeface="Aptos" pitchFamily="34" charset="-120"/>
+              </a:rPr>
+              <a:t>Connect the concept to public health decisions, safeguards, documentation, or implementation work.</a:t>
+            </a:r>
+            <a:endParaRPr lang="en-US" sz="1250" dirty="0"/>
           </a:p>
         </p:txBody>
       </p:sp>
@@ -7356,7 +13839,32 @@
       </p:sp>
       <p:sp>
         <p:nvSpPr>
-          <p:cNvPr id="3" name="Text 1"/>
+          <p:cNvPr id="3" name="Shape 1"/>
+          <p:cNvSpPr/>
+          <p:nvPr/>
+        </p:nvSpPr>
+        <p:spPr>
+          <a:xfrm>
+            <a:off x="0" y="164592"/>
+            <a:ext cx="146304" cy="6693408"/>
+          </a:xfrm>
+          <a:prstGeom prst="rect">
+            <a:avLst/>
+          </a:prstGeom>
+          <a:solidFill>
+            <a:srgbClr val="2F8A28"/>
+          </a:solidFill>
+          <a:ln w="12700">
+            <a:solidFill>
+              <a:srgbClr val="2F8A28"/>
+            </a:solidFill>
+            <a:prstDash val="solid"/>
+          </a:ln>
+        </p:spPr>
+      </p:sp>
+      <p:sp>
+        <p:nvSpPr>
+          <p:cNvPr id="4" name="Text 2"/>
           <p:cNvSpPr/>
           <p:nvPr/>
         </p:nvSpPr>
@@ -7395,7 +13903,7 @@
       </p:sp>
       <p:sp>
         <p:nvSpPr>
-          <p:cNvPr id="4" name="Text 2"/>
+          <p:cNvPr id="5" name="Text 3"/>
           <p:cNvSpPr/>
           <p:nvPr/>
         </p:nvSpPr>
@@ -7434,7 +13942,7 @@
       </p:sp>
       <p:sp>
         <p:nvSpPr>
-          <p:cNvPr id="5" name="Text 3"/>
+          <p:cNvPr id="6" name="Text 4"/>
           <p:cNvSpPr/>
           <p:nvPr/>
         </p:nvSpPr>
@@ -7473,13 +13981,77 @@
       </p:sp>
       <p:sp>
         <p:nvSpPr>
-          <p:cNvPr id="6" name="Text 4"/>
+          <p:cNvPr id="7" name="Shape 5"/>
           <p:cNvSpPr/>
           <p:nvPr/>
         </p:nvSpPr>
         <p:spPr>
           <a:xfrm>
             <a:off x="640080" y="658368"/>
+            <a:ext cx="420624" cy="420624"/>
+          </a:xfrm>
+          <a:prstGeom prst="ellipse">
+            <a:avLst/>
+          </a:prstGeom>
+          <a:solidFill>
+            <a:srgbClr val="0068B7"/>
+          </a:solidFill>
+          <a:ln w="12700">
+            <a:solidFill>
+              <a:srgbClr val="0068B7"/>
+            </a:solidFill>
+            <a:prstDash val="solid"/>
+          </a:ln>
+        </p:spPr>
+      </p:sp>
+      <p:sp>
+        <p:nvSpPr>
+          <p:cNvPr id="8" name="Text 6"/>
+          <p:cNvSpPr/>
+          <p:nvPr/>
+        </p:nvSpPr>
+        <p:spPr>
+          <a:xfrm>
+            <a:off x="640080" y="731520"/>
+            <a:ext cx="420624" cy="164592"/>
+          </a:xfrm>
+          <a:prstGeom prst="rect">
+            <a:avLst/>
+          </a:prstGeom>
+          <a:noFill/>
+          <a:ln/>
+        </p:spPr>
+        <p:txBody>
+          <a:bodyPr wrap="square" lIns="0" tIns="0" rIns="0" bIns="0" rtlCol="0" anchor="ctr"/>
+          <a:lstStyle/>
+          <a:p>
+            <a:pPr algn="ctr" indent="0" marL="0">
+              <a:buNone/>
+            </a:pPr>
+            <a:r>
+              <a:rPr lang="en-US" sz="1100" b="1" dirty="0">
+                <a:solidFill>
+                  <a:srgbClr val="FFFFFF"/>
+                </a:solidFill>
+                <a:latin typeface="Aptos" pitchFamily="34" charset="0"/>
+                <a:ea typeface="Aptos" pitchFamily="34" charset="-122"/>
+                <a:cs typeface="Aptos" pitchFamily="34" charset="-120"/>
+              </a:rPr>
+              <a:t>5</a:t>
+            </a:r>
+            <a:endParaRPr lang="en-US" sz="1100" dirty="0"/>
+          </a:p>
+        </p:txBody>
+      </p:sp>
+      <p:sp>
+        <p:nvSpPr>
+          <p:cNvPr id="9" name="Text 7"/>
+          <p:cNvSpPr/>
+          <p:nvPr/>
+        </p:nvSpPr>
+        <p:spPr>
+          <a:xfrm>
+            <a:off x="640080" y="621792"/>
             <a:ext cx="10881360" cy="566928"/>
           </a:xfrm>
           <a:prstGeom prst="rect">
@@ -7506,7 +14078,7 @@
                 <a:ea typeface="Aptos Display" pitchFamily="34" charset="-122"/>
                 <a:cs typeface="Aptos Display" pitchFamily="34" charset="-120"/>
               </a:rPr>
-              <a:t>Risks, Failure Modes, and Guardrails</a:t>
+              <a:t>Public Health Example</a:t>
             </a:r>
             <a:endParaRPr lang="en-US" sz="2700" dirty="0"/>
           </a:p>
@@ -7514,32 +14086,178 @@
       </p:sp>
       <p:sp>
         <p:nvSpPr>
-          <p:cNvPr id="7" name="Text 5"/>
-          <p:cNvSpPr/>
-          <p:nvPr/>
-        </p:nvSpPr>
-        <p:spPr>
-          <a:xfrm>
-            <a:off x="822960" y="1325880"/>
-            <a:ext cx="10378440" cy="4800600"/>
-          </a:xfrm>
-          <a:prstGeom prst="rect">
-            <a:avLst/>
-          </a:prstGeom>
-          <a:noFill/>
-          <a:ln/>
-        </p:spPr>
-        <p:txBody>
-          <a:bodyPr wrap="square" lIns="1016" tIns="1016" rIns="1016" bIns="1016" rtlCol="0" anchor="t">
+          <p:cNvPr id="10" name="Text 8"/>
+          <p:cNvSpPr/>
+          <p:nvPr/>
+        </p:nvSpPr>
+        <p:spPr>
+          <a:xfrm>
+            <a:off x="868680" y="1417320"/>
+            <a:ext cx="6675120" cy="4434840"/>
+          </a:xfrm>
+          <a:prstGeom prst="rect">
+            <a:avLst/>
+          </a:prstGeom>
+          <a:noFill/>
+          <a:ln/>
+        </p:spPr>
+        <p:txBody>
+          <a:bodyPr wrap="square" lIns="635" tIns="635" rIns="635" bIns="635" rtlCol="0" anchor="t">
             <a:normAutofit/>
           </a:bodyPr>
           <a:lstStyle/>
           <a:p>
+            <a:r>
+              <a:rPr lang="en-US" sz="1700" dirty="0">
+                <a:solidFill>
+                  <a:srgbClr val="17364A"/>
+                </a:solidFill>
+                <a:latin typeface="Aptos" pitchFamily="34" charset="0"/>
+                <a:ea typeface="Aptos" pitchFamily="34" charset="-122"/>
+                <a:cs typeface="Aptos" pitchFamily="34" charset="-120"/>
+              </a:rPr>
+              <a:t>A vendor offers an AI tool that promises to reduce disease investigator workload by summarizing case reports.</a:t>
+            </a:r>
+            <a:endParaRPr lang="en-US" sz="1700" dirty="0"/>
+          </a:p>
+          <a:p>
+            <a:r>
+              <a:rPr lang="en-US" sz="1700" dirty="0">
+                <a:solidFill>
+                  <a:srgbClr val="17364A"/>
+                </a:solidFill>
+                <a:latin typeface="Aptos" pitchFamily="34" charset="0"/>
+                <a:ea typeface="Aptos" pitchFamily="34" charset="-122"/>
+                <a:cs typeface="Aptos" pitchFamily="34" charset="-120"/>
+              </a:rPr>
+              <a:t>The annual license appears affordable, but the agency must also pay for integration with the surveillance system, security.</a:t>
+            </a:r>
+            <a:endParaRPr lang="en-US" sz="1700" dirty="0"/>
+          </a:p>
+          <a:p>
+            <a:r>
+              <a:rPr lang="en-US" sz="1700" dirty="0">
+                <a:solidFill>
+                  <a:srgbClr val="17364A"/>
+                </a:solidFill>
+                <a:latin typeface="Aptos" pitchFamily="34" charset="0"/>
+                <a:ea typeface="Aptos" pitchFamily="34" charset="-122"/>
+                <a:cs typeface="Aptos" pitchFamily="34" charset="-120"/>
+              </a:rPr>
+              <a:t>If those costs are not considered, leadership may underestimate the investment required.</a:t>
+            </a:r>
+            <a:endParaRPr lang="en-US" sz="1700" dirty="0"/>
+          </a:p>
+          <a:p>
+            <a:r>
+              <a:rPr lang="en-US" sz="1700" dirty="0">
+                <a:solidFill>
+                  <a:srgbClr val="17364A"/>
+                </a:solidFill>
+                <a:latin typeface="Aptos" pitchFamily="34" charset="0"/>
+                <a:ea typeface="Aptos" pitchFamily="34" charset="-122"/>
+                <a:cs typeface="Aptos" pitchFamily="34" charset="-120"/>
+              </a:rPr>
+              <a:t>A business case review asks whether the tool will meaningfully reduce burden, improve timeliness, maintain quality, and fit.</a:t>
+            </a:r>
+            <a:endParaRPr lang="en-US" sz="1700" dirty="0"/>
+          </a:p>
+        </p:txBody>
+      </p:sp>
+      <p:sp>
+        <p:nvSpPr>
+          <p:cNvPr id="11" name="Shape 9"/>
+          <p:cNvSpPr/>
+          <p:nvPr/>
+        </p:nvSpPr>
+        <p:spPr>
+          <a:xfrm>
+            <a:off x="7909560" y="1417320"/>
+            <a:ext cx="3154680" cy="1828800"/>
+          </a:xfrm>
+          <a:prstGeom prst="roundRect">
+            <a:avLst>
+              <a:gd name="adj" fmla="val 6000"/>
+            </a:avLst>
+          </a:prstGeom>
+          <a:solidFill>
+            <a:srgbClr val="EEF8ED"/>
+          </a:solidFill>
+          <a:ln w="12700">
+            <a:solidFill>
+              <a:srgbClr val="B9D7E6"/>
+            </a:solidFill>
+            <a:prstDash val="solid"/>
+          </a:ln>
+        </p:spPr>
+      </p:sp>
+      <p:sp>
+        <p:nvSpPr>
+          <p:cNvPr id="12" name="Text 10"/>
+          <p:cNvSpPr/>
+          <p:nvPr/>
+        </p:nvSpPr>
+        <p:spPr>
+          <a:xfrm>
+            <a:off x="8074152" y="1563624"/>
+            <a:ext cx="2825496" cy="201168"/>
+          </a:xfrm>
+          <a:prstGeom prst="rect">
+            <a:avLst/>
+          </a:prstGeom>
+          <a:noFill/>
+          <a:ln/>
+        </p:spPr>
+        <p:txBody>
+          <a:bodyPr wrap="square" lIns="0" tIns="0" rIns="0" bIns="0" rtlCol="0" anchor="ctr"/>
+          <a:lstStyle/>
+          <a:p>
             <a:pPr indent="0" marL="0">
               <a:buNone/>
             </a:pPr>
             <a:r>
-              <a:rPr lang="en-US" sz="1420" dirty="0">
+              <a:rPr lang="en-US" sz="950" b="1" dirty="0">
+                <a:solidFill>
+                  <a:srgbClr val="0068B7"/>
+                </a:solidFill>
+                <a:latin typeface="Aptos" pitchFamily="34" charset="0"/>
+                <a:ea typeface="Aptos" pitchFamily="34" charset="-122"/>
+                <a:cs typeface="Aptos" pitchFamily="34" charset="-120"/>
+              </a:rPr>
+              <a:t>Key idea</a:t>
+            </a:r>
+            <a:endParaRPr lang="en-US" sz="950" dirty="0"/>
+          </a:p>
+        </p:txBody>
+      </p:sp>
+      <p:sp>
+        <p:nvSpPr>
+          <p:cNvPr id="13" name="Text 11"/>
+          <p:cNvSpPr/>
+          <p:nvPr/>
+        </p:nvSpPr>
+        <p:spPr>
+          <a:xfrm>
+            <a:off x="8074152" y="1856232"/>
+            <a:ext cx="2825496" cy="1261872"/>
+          </a:xfrm>
+          <a:prstGeom prst="rect">
+            <a:avLst/>
+          </a:prstGeom>
+          <a:noFill/>
+          <a:ln/>
+        </p:spPr>
+        <p:txBody>
+          <a:bodyPr wrap="square" lIns="0" tIns="0" rIns="0" bIns="0" rtlCol="0" anchor="t">
+            <a:normAutofit/>
+          </a:bodyPr>
+          <a:lstStyle/>
+          <a:p>
+            <a:pPr indent="0" marL="0">
+              <a:buNone/>
+            </a:pPr>
+            <a:r>
+              <a:rPr lang="en-US" sz="1250" dirty="0">
                 <a:solidFill>
                   <a:srgbClr val="17364A"/>
                 </a:solidFill>
@@ -7547,9 +14265,116 @@
                 <a:ea typeface="Aptos" pitchFamily="34" charset="-122"/>
                 <a:cs typeface="Aptos" pitchFamily="34" charset="-120"/>
               </a:rPr>
-              <a:t>One risk is hidden cost. Agencies may purchase an AI tool without funding integration, monitoring, validation, staff training, or ongoing support. A guardrail is to require total cost of ownership in every business case. Another risk is benefits inflation. Vendors or project champions may overstate time savings or accuracy without local evidence. A guardrail is to require pilot success criteria and benefits realization review before scaling.</a:t>
-            </a:r>
-            <a:endParaRPr lang="en-US" sz="1420" dirty="0"/>
+              <a:t>A vendor offers an AI tool that promises to reduce disease investigator workload by summarizing case reports.</a:t>
+            </a:r>
+            <a:endParaRPr lang="en-US" sz="1250" dirty="0"/>
+          </a:p>
+        </p:txBody>
+      </p:sp>
+      <p:sp>
+        <p:nvSpPr>
+          <p:cNvPr id="14" name="Shape 12"/>
+          <p:cNvSpPr/>
+          <p:nvPr/>
+        </p:nvSpPr>
+        <p:spPr>
+          <a:xfrm>
+            <a:off x="7909560" y="3520440"/>
+            <a:ext cx="3154680" cy="1737360"/>
+          </a:xfrm>
+          <a:prstGeom prst="roundRect">
+            <a:avLst>
+              <a:gd name="adj" fmla="val 6316"/>
+            </a:avLst>
+          </a:prstGeom>
+          <a:solidFill>
+            <a:srgbClr val="EAF6F8"/>
+          </a:solidFill>
+          <a:ln w="12700">
+            <a:solidFill>
+              <a:srgbClr val="B9D7E6"/>
+            </a:solidFill>
+            <a:prstDash val="solid"/>
+          </a:ln>
+        </p:spPr>
+      </p:sp>
+      <p:sp>
+        <p:nvSpPr>
+          <p:cNvPr id="15" name="Text 13"/>
+          <p:cNvSpPr/>
+          <p:nvPr/>
+        </p:nvSpPr>
+        <p:spPr>
+          <a:xfrm>
+            <a:off x="8074152" y="3666744"/>
+            <a:ext cx="2825496" cy="201168"/>
+          </a:xfrm>
+          <a:prstGeom prst="rect">
+            <a:avLst/>
+          </a:prstGeom>
+          <a:noFill/>
+          <a:ln/>
+        </p:spPr>
+        <p:txBody>
+          <a:bodyPr wrap="square" lIns="0" tIns="0" rIns="0" bIns="0" rtlCol="0" anchor="ctr"/>
+          <a:lstStyle/>
+          <a:p>
+            <a:pPr indent="0" marL="0">
+              <a:buNone/>
+            </a:pPr>
+            <a:r>
+              <a:rPr lang="en-US" sz="950" b="1" dirty="0">
+                <a:solidFill>
+                  <a:srgbClr val="0068B7"/>
+                </a:solidFill>
+                <a:latin typeface="Aptos" pitchFamily="34" charset="0"/>
+                <a:ea typeface="Aptos" pitchFamily="34" charset="-122"/>
+                <a:cs typeface="Aptos" pitchFamily="34" charset="-120"/>
+              </a:rPr>
+              <a:t>Use this for</a:t>
+            </a:r>
+            <a:endParaRPr lang="en-US" sz="950" dirty="0"/>
+          </a:p>
+        </p:txBody>
+      </p:sp>
+      <p:sp>
+        <p:nvSpPr>
+          <p:cNvPr id="16" name="Text 14"/>
+          <p:cNvSpPr/>
+          <p:nvPr/>
+        </p:nvSpPr>
+        <p:spPr>
+          <a:xfrm>
+            <a:off x="8074152" y="3959352"/>
+            <a:ext cx="2825496" cy="1170432"/>
+          </a:xfrm>
+          <a:prstGeom prst="rect">
+            <a:avLst/>
+          </a:prstGeom>
+          <a:noFill/>
+          <a:ln/>
+        </p:spPr>
+        <p:txBody>
+          <a:bodyPr wrap="square" lIns="0" tIns="0" rIns="0" bIns="0" rtlCol="0" anchor="t">
+            <a:normAutofit/>
+          </a:bodyPr>
+          <a:lstStyle/>
+          <a:p>
+            <a:pPr indent="0" marL="0">
+              <a:buNone/>
+            </a:pPr>
+            <a:r>
+              <a:rPr lang="en-US" sz="1250" dirty="0">
+                <a:solidFill>
+                  <a:srgbClr val="17364A"/>
+                </a:solidFill>
+                <a:latin typeface="Aptos" pitchFamily="34" charset="0"/>
+                <a:ea typeface="Aptos" pitchFamily="34" charset="-122"/>
+                <a:cs typeface="Aptos" pitchFamily="34" charset="-120"/>
+              </a:rPr>
+              <a:t>Connect the concept to public health decisions, safeguards, documentation, or implementation work.</a:t>
+            </a:r>
+            <a:endParaRPr lang="en-US" sz="1250" dirty="0"/>
           </a:p>
         </p:txBody>
       </p:sp>

--- a/downloads/presentations/modules/lesson-34-ai-investment-strategy-and-business-case-review.pptx
+++ b/downloads/presentations/modules/lesson-34-ai-investment-strategy-and-business-case-review.pptx
@@ -2900,6 +2900,45 @@
           </a:p>
         </p:txBody>
       </p:sp>
+      <p:sp>
+        <p:nvSpPr>
+          <p:cNvPr id="8" name="Text 5"/>
+          <p:cNvSpPr/>
+          <p:nvPr/>
+        </p:nvSpPr>
+        <p:spPr>
+          <a:xfrm>
+            <a:off x="11137392" y="6510528"/>
+            <a:ext cx="411480" cy="201168"/>
+          </a:xfrm>
+          <a:prstGeom prst="rect">
+            <a:avLst/>
+          </a:prstGeom>
+          <a:noFill/>
+          <a:ln/>
+        </p:spPr>
+        <p:txBody>
+          <a:bodyPr wrap="square" lIns="0" tIns="0" rIns="0" bIns="0" rtlCol="0" anchor="ctr"/>
+          <a:lstStyle/>
+          <a:p>
+            <a:pPr algn="r" indent="0" marL="0">
+              <a:buNone/>
+            </a:pPr>
+            <a:r>
+              <a:rPr lang="en-US" sz="900" dirty="0">
+                <a:solidFill>
+                  <a:srgbClr val="5F7181"/>
+                </a:solidFill>
+                <a:latin typeface="Aptos" pitchFamily="34" charset="0"/>
+                <a:ea typeface="Aptos" pitchFamily="34" charset="-122"/>
+                <a:cs typeface="Aptos" pitchFamily="34" charset="-120"/>
+              </a:rPr>
+              <a:t>1</a:t>
+            </a:r>
+            <a:endParaRPr lang="en-US" sz="900" dirty="0"/>
+          </a:p>
+        </p:txBody>
+      </p:sp>
     </p:spTree>
   </p:cSld>
   <p:clrMapOvr>
@@ -3093,7 +3132,7 @@
                 <a:ea typeface="Aptos" pitchFamily="34" charset="-122"/>
                 <a:cs typeface="Aptos" pitchFamily="34" charset="-120"/>
               </a:rPr>
-              <a:t>© Paula Soper</a:t>
+              <a:t>Â© Paula Soper</a:t>
             </a:r>
             <a:endParaRPr lang="en-US" sz="800" dirty="0"/>
           </a:p>
@@ -3101,7 +3140,46 @@
       </p:sp>
       <p:sp>
         <p:nvSpPr>
-          <p:cNvPr id="7" name="Shape 5"/>
+          <p:cNvPr id="7" name="Text 5"/>
+          <p:cNvSpPr/>
+          <p:nvPr/>
+        </p:nvSpPr>
+        <p:spPr>
+          <a:xfrm>
+            <a:off x="11137392" y="6510528"/>
+            <a:ext cx="411480" cy="201168"/>
+          </a:xfrm>
+          <a:prstGeom prst="rect">
+            <a:avLst/>
+          </a:prstGeom>
+          <a:noFill/>
+          <a:ln/>
+        </p:spPr>
+        <p:txBody>
+          <a:bodyPr wrap="square" lIns="0" tIns="0" rIns="0" bIns="0" rtlCol="0" anchor="ctr"/>
+          <a:lstStyle/>
+          <a:p>
+            <a:pPr algn="r" indent="0" marL="0">
+              <a:buNone/>
+            </a:pPr>
+            <a:r>
+              <a:rPr lang="en-US" sz="900" dirty="0">
+                <a:solidFill>
+                  <a:srgbClr val="5F7181"/>
+                </a:solidFill>
+                <a:latin typeface="Aptos" pitchFamily="34" charset="0"/>
+                <a:ea typeface="Aptos" pitchFamily="34" charset="-122"/>
+                <a:cs typeface="Aptos" pitchFamily="34" charset="-120"/>
+              </a:rPr>
+              <a:t>10</a:t>
+            </a:r>
+            <a:endParaRPr lang="en-US" sz="900" dirty="0"/>
+          </a:p>
+        </p:txBody>
+      </p:sp>
+      <p:sp>
+        <p:nvSpPr>
+          <p:cNvPr id="8" name="Shape 6"/>
           <p:cNvSpPr/>
           <p:nvPr/>
         </p:nvSpPr>
@@ -3126,7 +3204,7 @@
       </p:sp>
       <p:sp>
         <p:nvSpPr>
-          <p:cNvPr id="8" name="Text 6"/>
+          <p:cNvPr id="9" name="Text 7"/>
           <p:cNvSpPr/>
           <p:nvPr/>
         </p:nvSpPr>
@@ -3165,14 +3243,14 @@
       </p:sp>
       <p:sp>
         <p:nvSpPr>
-          <p:cNvPr id="9" name="Text 7"/>
+          <p:cNvPr id="10" name="Text 8"/>
           <p:cNvSpPr/>
           <p:nvPr/>
         </p:nvSpPr>
         <p:spPr>
           <a:xfrm>
             <a:off x="640080" y="621792"/>
-            <a:ext cx="10881360" cy="566928"/>
+            <a:ext cx="10881360" cy="713232"/>
           </a:xfrm>
           <a:prstGeom prst="rect">
             <a:avLst/>
@@ -3190,7 +3268,7 @@
               <a:buNone/>
             </a:pPr>
             <a:r>
-              <a:rPr lang="en-US" sz="2700" b="1" dirty="0">
+              <a:rPr lang="en-US" sz="3400" b="1" dirty="0">
                 <a:solidFill>
                   <a:srgbClr val="003A63"/>
                 </a:solidFill>
@@ -3200,20 +3278,20 @@
               </a:rPr>
               <a:t>Technical and Governance Deep Dive</a:t>
             </a:r>
-            <a:endParaRPr lang="en-US" sz="2700" dirty="0"/>
-          </a:p>
-        </p:txBody>
-      </p:sp>
-      <p:sp>
-        <p:nvSpPr>
-          <p:cNvPr id="10" name="Text 8"/>
-          <p:cNvSpPr/>
-          <p:nvPr/>
-        </p:nvSpPr>
-        <p:spPr>
-          <a:xfrm>
-            <a:off x="868680" y="1417320"/>
-            <a:ext cx="6675120" cy="4434840"/>
+            <a:endParaRPr lang="en-US" sz="3400" dirty="0"/>
+          </a:p>
+        </p:txBody>
+      </p:sp>
+      <p:sp>
+        <p:nvSpPr>
+          <p:cNvPr id="11" name="Text 9"/>
+          <p:cNvSpPr/>
+          <p:nvPr/>
+        </p:nvSpPr>
+        <p:spPr>
+          <a:xfrm>
+            <a:off x="868680" y="1508760"/>
+            <a:ext cx="6537960" cy="4160520"/>
           </a:xfrm>
           <a:prstGeom prst="rect">
             <a:avLst/>
@@ -3228,7 +3306,7 @@
           <a:lstStyle/>
           <a:p>
             <a:r>
-              <a:rPr lang="en-US" sz="1700" dirty="0">
+              <a:rPr lang="en-US" sz="2100" dirty="0">
                 <a:solidFill>
                   <a:srgbClr val="17364A"/>
                 </a:solidFill>
@@ -3238,11 +3316,11 @@
               </a:rPr>
               <a:t>An AI business case should begin with a problem statement.</a:t>
             </a:r>
-            <a:endParaRPr lang="en-US" sz="1700" dirty="0"/>
-          </a:p>
-          <a:p>
-            <a:r>
-              <a:rPr lang="en-US" sz="1700" dirty="0">
+            <a:endParaRPr lang="en-US" sz="2100" dirty="0"/>
+          </a:p>
+          <a:p>
+            <a:r>
+              <a:rPr lang="en-US" sz="2100" dirty="0">
                 <a:solidFill>
                   <a:srgbClr val="17364A"/>
                 </a:solidFill>
@@ -3250,13 +3328,13 @@
                 <a:ea typeface="Aptos" pitchFamily="34" charset="-122"/>
                 <a:cs typeface="Aptos" pitchFamily="34" charset="-120"/>
               </a:rPr>
-              <a:t>The problem should be operational and measurable, such as delayed case review, inconsistent public response drafting, high.</a:t>
-            </a:r>
-            <a:endParaRPr lang="en-US" sz="1700" dirty="0"/>
-          </a:p>
-          <a:p>
-            <a:r>
-              <a:rPr lang="en-US" sz="1700" dirty="0">
+              <a:t>The problem should be operational and measurable, such as delayed case review, inconsistent public.</a:t>
+            </a:r>
+            <a:endParaRPr lang="en-US" sz="2100" dirty="0"/>
+          </a:p>
+          <a:p>
+            <a:r>
+              <a:rPr lang="en-US" sz="2100" dirty="0">
                 <a:solidFill>
                   <a:srgbClr val="17364A"/>
                 </a:solidFill>
@@ -3266,27 +3344,13 @@
               </a:rPr>
               <a:t>A vague desire to 'use AI' is not a sufficient problem statement.</a:t>
             </a:r>
-            <a:endParaRPr lang="en-US" sz="1700" dirty="0"/>
-          </a:p>
-          <a:p>
-            <a:r>
-              <a:rPr lang="en-US" sz="1700" dirty="0">
-                <a:solidFill>
-                  <a:srgbClr val="17364A"/>
-                </a:solidFill>
-                <a:latin typeface="Aptos" pitchFamily="34" charset="0"/>
-                <a:ea typeface="Aptos" pitchFamily="34" charset="-122"/>
-                <a:cs typeface="Aptos" pitchFamily="34" charset="-120"/>
-              </a:rPr>
-              <a:t>The business case should connect the proposed AI use to a real public health need.</a:t>
-            </a:r>
-            <a:endParaRPr lang="en-US" sz="1700" dirty="0"/>
-          </a:p>
-        </p:txBody>
-      </p:sp>
-      <p:sp>
-        <p:nvSpPr>
-          <p:cNvPr id="11" name="Shape 9"/>
+            <a:endParaRPr lang="en-US" sz="2100" dirty="0"/>
+          </a:p>
+        </p:txBody>
+      </p:sp>
+      <p:sp>
+        <p:nvSpPr>
+          <p:cNvPr id="12" name="Shape 10"/>
           <p:cNvSpPr/>
           <p:nvPr/>
         </p:nvSpPr>
@@ -3313,14 +3377,14 @@
       </p:sp>
       <p:sp>
         <p:nvSpPr>
-          <p:cNvPr id="12" name="Text 10"/>
+          <p:cNvPr id="13" name="Text 11"/>
           <p:cNvSpPr/>
           <p:nvPr/>
         </p:nvSpPr>
         <p:spPr>
           <a:xfrm>
             <a:off x="8074152" y="1563624"/>
-            <a:ext cx="2825496" cy="201168"/>
+            <a:ext cx="2825496" cy="256032"/>
           </a:xfrm>
           <a:prstGeom prst="rect">
             <a:avLst/>
@@ -3336,7 +3400,7 @@
               <a:buNone/>
             </a:pPr>
             <a:r>
-              <a:rPr lang="en-US" sz="950" b="1" dirty="0">
+              <a:rPr lang="en-US" sz="1300" b="1" dirty="0">
                 <a:solidFill>
                   <a:srgbClr val="0068B7"/>
                 </a:solidFill>
@@ -3346,20 +3410,20 @@
               </a:rPr>
               <a:t>Key idea</a:t>
             </a:r>
-            <a:endParaRPr lang="en-US" sz="950" dirty="0"/>
-          </a:p>
-        </p:txBody>
-      </p:sp>
-      <p:sp>
-        <p:nvSpPr>
-          <p:cNvPr id="13" name="Text 11"/>
-          <p:cNvSpPr/>
-          <p:nvPr/>
-        </p:nvSpPr>
-        <p:spPr>
-          <a:xfrm>
-            <a:off x="8074152" y="1856232"/>
-            <a:ext cx="2825496" cy="1261872"/>
+            <a:endParaRPr lang="en-US" sz="1300" dirty="0"/>
+          </a:p>
+        </p:txBody>
+      </p:sp>
+      <p:sp>
+        <p:nvSpPr>
+          <p:cNvPr id="14" name="Text 12"/>
+          <p:cNvSpPr/>
+          <p:nvPr/>
+        </p:nvSpPr>
+        <p:spPr>
+          <a:xfrm>
+            <a:off x="8074152" y="1920240"/>
+            <a:ext cx="2825496" cy="1188720"/>
           </a:xfrm>
           <a:prstGeom prst="rect">
             <a:avLst/>
@@ -3377,7 +3441,7 @@
               <a:buNone/>
             </a:pPr>
             <a:r>
-              <a:rPr lang="en-US" sz="1250" dirty="0">
+              <a:rPr lang="en-US" sz="1550" dirty="0">
                 <a:solidFill>
                   <a:srgbClr val="17364A"/>
                 </a:solidFill>
@@ -3387,13 +3451,13 @@
               </a:rPr>
               <a:t>An AI business case should begin with a problem statement.</a:t>
             </a:r>
-            <a:endParaRPr lang="en-US" sz="1250" dirty="0"/>
-          </a:p>
-        </p:txBody>
-      </p:sp>
-      <p:sp>
-        <p:nvSpPr>
-          <p:cNvPr id="14" name="Shape 12"/>
+            <a:endParaRPr lang="en-US" sz="1550" dirty="0"/>
+          </a:p>
+        </p:txBody>
+      </p:sp>
+      <p:sp>
+        <p:nvSpPr>
+          <p:cNvPr id="15" name="Shape 13"/>
           <p:cNvSpPr/>
           <p:nvPr/>
         </p:nvSpPr>
@@ -3420,14 +3484,14 @@
       </p:sp>
       <p:sp>
         <p:nvSpPr>
-          <p:cNvPr id="15" name="Text 13"/>
+          <p:cNvPr id="16" name="Text 14"/>
           <p:cNvSpPr/>
           <p:nvPr/>
         </p:nvSpPr>
         <p:spPr>
           <a:xfrm>
             <a:off x="8074152" y="3666744"/>
-            <a:ext cx="2825496" cy="201168"/>
+            <a:ext cx="2825496" cy="256032"/>
           </a:xfrm>
           <a:prstGeom prst="rect">
             <a:avLst/>
@@ -3443,7 +3507,7 @@
               <a:buNone/>
             </a:pPr>
             <a:r>
-              <a:rPr lang="en-US" sz="950" b="1" dirty="0">
+              <a:rPr lang="en-US" sz="1300" b="1" dirty="0">
                 <a:solidFill>
                   <a:srgbClr val="0068B7"/>
                 </a:solidFill>
@@ -3453,20 +3517,20 @@
               </a:rPr>
               <a:t>Use this for</a:t>
             </a:r>
-            <a:endParaRPr lang="en-US" sz="950" dirty="0"/>
-          </a:p>
-        </p:txBody>
-      </p:sp>
-      <p:sp>
-        <p:nvSpPr>
-          <p:cNvPr id="16" name="Text 14"/>
-          <p:cNvSpPr/>
-          <p:nvPr/>
-        </p:nvSpPr>
-        <p:spPr>
-          <a:xfrm>
-            <a:off x="8074152" y="3959352"/>
-            <a:ext cx="2825496" cy="1170432"/>
+            <a:endParaRPr lang="en-US" sz="1300" dirty="0"/>
+          </a:p>
+        </p:txBody>
+      </p:sp>
+      <p:sp>
+        <p:nvSpPr>
+          <p:cNvPr id="17" name="Text 15"/>
+          <p:cNvSpPr/>
+          <p:nvPr/>
+        </p:nvSpPr>
+        <p:spPr>
+          <a:xfrm>
+            <a:off x="8074152" y="4023360"/>
+            <a:ext cx="2825496" cy="1097280"/>
           </a:xfrm>
           <a:prstGeom prst="rect">
             <a:avLst/>
@@ -3484,7 +3548,7 @@
               <a:buNone/>
             </a:pPr>
             <a:r>
-              <a:rPr lang="en-US" sz="1250" dirty="0">
+              <a:rPr lang="en-US" sz="1550" dirty="0">
                 <a:solidFill>
                   <a:srgbClr val="17364A"/>
                 </a:solidFill>
@@ -3494,7 +3558,7 @@
               </a:rPr>
               <a:t>Connect the concept to public health decisions, safeguards, documentation, or implementation work.</a:t>
             </a:r>
-            <a:endParaRPr lang="en-US" sz="1250" dirty="0"/>
+            <a:endParaRPr lang="en-US" sz="1550" dirty="0"/>
           </a:p>
         </p:txBody>
       </p:sp>
@@ -3691,7 +3755,7 @@
                 <a:ea typeface="Aptos" pitchFamily="34" charset="-122"/>
                 <a:cs typeface="Aptos" pitchFamily="34" charset="-120"/>
               </a:rPr>
-              <a:t>© Paula Soper</a:t>
+              <a:t>Â© Paula Soper</a:t>
             </a:r>
             <a:endParaRPr lang="en-US" sz="800" dirty="0"/>
           </a:p>
@@ -3699,7 +3763,46 @@
       </p:sp>
       <p:sp>
         <p:nvSpPr>
-          <p:cNvPr id="7" name="Shape 5"/>
+          <p:cNvPr id="7" name="Text 5"/>
+          <p:cNvSpPr/>
+          <p:nvPr/>
+        </p:nvSpPr>
+        <p:spPr>
+          <a:xfrm>
+            <a:off x="11137392" y="6510528"/>
+            <a:ext cx="411480" cy="201168"/>
+          </a:xfrm>
+          <a:prstGeom prst="rect">
+            <a:avLst/>
+          </a:prstGeom>
+          <a:noFill/>
+          <a:ln/>
+        </p:spPr>
+        <p:txBody>
+          <a:bodyPr wrap="square" lIns="0" tIns="0" rIns="0" bIns="0" rtlCol="0" anchor="ctr"/>
+          <a:lstStyle/>
+          <a:p>
+            <a:pPr algn="r" indent="0" marL="0">
+              <a:buNone/>
+            </a:pPr>
+            <a:r>
+              <a:rPr lang="en-US" sz="900" dirty="0">
+                <a:solidFill>
+                  <a:srgbClr val="5F7181"/>
+                </a:solidFill>
+                <a:latin typeface="Aptos" pitchFamily="34" charset="0"/>
+                <a:ea typeface="Aptos" pitchFamily="34" charset="-122"/>
+                <a:cs typeface="Aptos" pitchFamily="34" charset="-120"/>
+              </a:rPr>
+              <a:t>11</a:t>
+            </a:r>
+            <a:endParaRPr lang="en-US" sz="900" dirty="0"/>
+          </a:p>
+        </p:txBody>
+      </p:sp>
+      <p:sp>
+        <p:nvSpPr>
+          <p:cNvPr id="8" name="Shape 6"/>
           <p:cNvSpPr/>
           <p:nvPr/>
         </p:nvSpPr>
@@ -3724,7 +3827,7 @@
       </p:sp>
       <p:sp>
         <p:nvSpPr>
-          <p:cNvPr id="8" name="Text 6"/>
+          <p:cNvPr id="9" name="Text 7"/>
           <p:cNvSpPr/>
           <p:nvPr/>
         </p:nvSpPr>
@@ -3763,14 +3866,14 @@
       </p:sp>
       <p:sp>
         <p:nvSpPr>
-          <p:cNvPr id="9" name="Text 7"/>
+          <p:cNvPr id="10" name="Text 8"/>
           <p:cNvSpPr/>
           <p:nvPr/>
         </p:nvSpPr>
         <p:spPr>
           <a:xfrm>
             <a:off x="640080" y="621792"/>
-            <a:ext cx="10881360" cy="566928"/>
+            <a:ext cx="10881360" cy="713232"/>
           </a:xfrm>
           <a:prstGeom prst="rect">
             <a:avLst/>
@@ -3788,7 +3891,7 @@
               <a:buNone/>
             </a:pPr>
             <a:r>
-              <a:rPr lang="en-US" sz="2700" b="1" dirty="0">
+              <a:rPr lang="en-US" sz="3400" b="1" dirty="0">
                 <a:solidFill>
                   <a:srgbClr val="003A63"/>
                 </a:solidFill>
@@ -3798,20 +3901,20 @@
               </a:rPr>
               <a:t>Risks, Failure Modes, and Guardrails</a:t>
             </a:r>
-            <a:endParaRPr lang="en-US" sz="2700" dirty="0"/>
-          </a:p>
-        </p:txBody>
-      </p:sp>
-      <p:sp>
-        <p:nvSpPr>
-          <p:cNvPr id="10" name="Text 8"/>
-          <p:cNvSpPr/>
-          <p:nvPr/>
-        </p:nvSpPr>
-        <p:spPr>
-          <a:xfrm>
-            <a:off x="868680" y="1417320"/>
-            <a:ext cx="6675120" cy="4434840"/>
+            <a:endParaRPr lang="en-US" sz="3400" dirty="0"/>
+          </a:p>
+        </p:txBody>
+      </p:sp>
+      <p:sp>
+        <p:nvSpPr>
+          <p:cNvPr id="11" name="Text 9"/>
+          <p:cNvSpPr/>
+          <p:nvPr/>
+        </p:nvSpPr>
+        <p:spPr>
+          <a:xfrm>
+            <a:off x="868680" y="1508760"/>
+            <a:ext cx="6537960" cy="4160520"/>
           </a:xfrm>
           <a:prstGeom prst="rect">
             <a:avLst/>
@@ -3826,7 +3929,7 @@
           <a:lstStyle/>
           <a:p>
             <a:r>
-              <a:rPr lang="en-US" sz="1700" dirty="0">
+              <a:rPr lang="en-US" sz="2100" dirty="0">
                 <a:solidFill>
                   <a:srgbClr val="17364A"/>
                 </a:solidFill>
@@ -3836,11 +3939,11 @@
               </a:rPr>
               <a:t>One risk is hidden cost.</a:t>
             </a:r>
-            <a:endParaRPr lang="en-US" sz="1700" dirty="0"/>
-          </a:p>
-          <a:p>
-            <a:r>
-              <a:rPr lang="en-US" sz="1700" dirty="0">
+            <a:endParaRPr lang="en-US" sz="2100" dirty="0"/>
+          </a:p>
+          <a:p>
+            <a:r>
+              <a:rPr lang="en-US" sz="2100" dirty="0">
                 <a:solidFill>
                   <a:srgbClr val="17364A"/>
                 </a:solidFill>
@@ -3848,13 +3951,13 @@
                 <a:ea typeface="Aptos" pitchFamily="34" charset="-122"/>
                 <a:cs typeface="Aptos" pitchFamily="34" charset="-120"/>
               </a:rPr>
-              <a:t>Agencies may purchase an AI tool without funding integration, monitoring, validation, staff training, or ongoing support.</a:t>
-            </a:r>
-            <a:endParaRPr lang="en-US" sz="1700" dirty="0"/>
-          </a:p>
-          <a:p>
-            <a:r>
-              <a:rPr lang="en-US" sz="1700" dirty="0">
+              <a:t>Agencies may purchase an AI tool without funding integration, monitoring, validation, staff training,.</a:t>
+            </a:r>
+            <a:endParaRPr lang="en-US" sz="2100" dirty="0"/>
+          </a:p>
+          <a:p>
+            <a:r>
+              <a:rPr lang="en-US" sz="2100" dirty="0">
                 <a:solidFill>
                   <a:srgbClr val="17364A"/>
                 </a:solidFill>
@@ -3864,27 +3967,13 @@
               </a:rPr>
               <a:t>A guardrail is to require total cost of ownership in every business case.</a:t>
             </a:r>
-            <a:endParaRPr lang="en-US" sz="1700" dirty="0"/>
-          </a:p>
-          <a:p>
-            <a:r>
-              <a:rPr lang="en-US" sz="1700" dirty="0">
-                <a:solidFill>
-                  <a:srgbClr val="17364A"/>
-                </a:solidFill>
-                <a:latin typeface="Aptos" pitchFamily="34" charset="0"/>
-                <a:ea typeface="Aptos" pitchFamily="34" charset="-122"/>
-                <a:cs typeface="Aptos" pitchFamily="34" charset="-120"/>
-              </a:rPr>
-              <a:t>Another risk is benefits inflation.</a:t>
-            </a:r>
-            <a:endParaRPr lang="en-US" sz="1700" dirty="0"/>
-          </a:p>
-        </p:txBody>
-      </p:sp>
-      <p:sp>
-        <p:nvSpPr>
-          <p:cNvPr id="11" name="Shape 9"/>
+            <a:endParaRPr lang="en-US" sz="2100" dirty="0"/>
+          </a:p>
+        </p:txBody>
+      </p:sp>
+      <p:sp>
+        <p:nvSpPr>
+          <p:cNvPr id="12" name="Shape 10"/>
           <p:cNvSpPr/>
           <p:nvPr/>
         </p:nvSpPr>
@@ -3911,14 +4000,14 @@
       </p:sp>
       <p:sp>
         <p:nvSpPr>
-          <p:cNvPr id="12" name="Text 10"/>
+          <p:cNvPr id="13" name="Text 11"/>
           <p:cNvSpPr/>
           <p:nvPr/>
         </p:nvSpPr>
         <p:spPr>
           <a:xfrm>
             <a:off x="8074152" y="1563624"/>
-            <a:ext cx="2825496" cy="201168"/>
+            <a:ext cx="2825496" cy="256032"/>
           </a:xfrm>
           <a:prstGeom prst="rect">
             <a:avLst/>
@@ -3934,7 +4023,7 @@
               <a:buNone/>
             </a:pPr>
             <a:r>
-              <a:rPr lang="en-US" sz="950" b="1" dirty="0">
+              <a:rPr lang="en-US" sz="1300" b="1" dirty="0">
                 <a:solidFill>
                   <a:srgbClr val="0068B7"/>
                 </a:solidFill>
@@ -3944,20 +4033,20 @@
               </a:rPr>
               <a:t>Key idea</a:t>
             </a:r>
-            <a:endParaRPr lang="en-US" sz="950" dirty="0"/>
-          </a:p>
-        </p:txBody>
-      </p:sp>
-      <p:sp>
-        <p:nvSpPr>
-          <p:cNvPr id="13" name="Text 11"/>
-          <p:cNvSpPr/>
-          <p:nvPr/>
-        </p:nvSpPr>
-        <p:spPr>
-          <a:xfrm>
-            <a:off x="8074152" y="1856232"/>
-            <a:ext cx="2825496" cy="1261872"/>
+            <a:endParaRPr lang="en-US" sz="1300" dirty="0"/>
+          </a:p>
+        </p:txBody>
+      </p:sp>
+      <p:sp>
+        <p:nvSpPr>
+          <p:cNvPr id="14" name="Text 12"/>
+          <p:cNvSpPr/>
+          <p:nvPr/>
+        </p:nvSpPr>
+        <p:spPr>
+          <a:xfrm>
+            <a:off x="8074152" y="1920240"/>
+            <a:ext cx="2825496" cy="1188720"/>
           </a:xfrm>
           <a:prstGeom prst="rect">
             <a:avLst/>
@@ -3975,7 +4064,7 @@
               <a:buNone/>
             </a:pPr>
             <a:r>
-              <a:rPr lang="en-US" sz="1250" dirty="0">
+              <a:rPr lang="en-US" sz="1550" dirty="0">
                 <a:solidFill>
                   <a:srgbClr val="17364A"/>
                 </a:solidFill>
@@ -3985,13 +4074,13 @@
               </a:rPr>
               <a:t>One risk is hidden cost.</a:t>
             </a:r>
-            <a:endParaRPr lang="en-US" sz="1250" dirty="0"/>
-          </a:p>
-        </p:txBody>
-      </p:sp>
-      <p:sp>
-        <p:nvSpPr>
-          <p:cNvPr id="14" name="Shape 12"/>
+            <a:endParaRPr lang="en-US" sz="1550" dirty="0"/>
+          </a:p>
+        </p:txBody>
+      </p:sp>
+      <p:sp>
+        <p:nvSpPr>
+          <p:cNvPr id="15" name="Shape 13"/>
           <p:cNvSpPr/>
           <p:nvPr/>
         </p:nvSpPr>
@@ -4018,14 +4107,14 @@
       </p:sp>
       <p:sp>
         <p:nvSpPr>
-          <p:cNvPr id="15" name="Text 13"/>
+          <p:cNvPr id="16" name="Text 14"/>
           <p:cNvSpPr/>
           <p:nvPr/>
         </p:nvSpPr>
         <p:spPr>
           <a:xfrm>
             <a:off x="8074152" y="3666744"/>
-            <a:ext cx="2825496" cy="201168"/>
+            <a:ext cx="2825496" cy="256032"/>
           </a:xfrm>
           <a:prstGeom prst="rect">
             <a:avLst/>
@@ -4041,7 +4130,7 @@
               <a:buNone/>
             </a:pPr>
             <a:r>
-              <a:rPr lang="en-US" sz="950" b="1" dirty="0">
+              <a:rPr lang="en-US" sz="1300" b="1" dirty="0">
                 <a:solidFill>
                   <a:srgbClr val="0068B7"/>
                 </a:solidFill>
@@ -4051,20 +4140,20 @@
               </a:rPr>
               <a:t>Use this for</a:t>
             </a:r>
-            <a:endParaRPr lang="en-US" sz="950" dirty="0"/>
-          </a:p>
-        </p:txBody>
-      </p:sp>
-      <p:sp>
-        <p:nvSpPr>
-          <p:cNvPr id="16" name="Text 14"/>
-          <p:cNvSpPr/>
-          <p:nvPr/>
-        </p:nvSpPr>
-        <p:spPr>
-          <a:xfrm>
-            <a:off x="8074152" y="3959352"/>
-            <a:ext cx="2825496" cy="1170432"/>
+            <a:endParaRPr lang="en-US" sz="1300" dirty="0"/>
+          </a:p>
+        </p:txBody>
+      </p:sp>
+      <p:sp>
+        <p:nvSpPr>
+          <p:cNvPr id="17" name="Text 15"/>
+          <p:cNvSpPr/>
+          <p:nvPr/>
+        </p:nvSpPr>
+        <p:spPr>
+          <a:xfrm>
+            <a:off x="8074152" y="4023360"/>
+            <a:ext cx="2825496" cy="1097280"/>
           </a:xfrm>
           <a:prstGeom prst="rect">
             <a:avLst/>
@@ -4082,7 +4171,7 @@
               <a:buNone/>
             </a:pPr>
             <a:r>
-              <a:rPr lang="en-US" sz="1250" dirty="0">
+              <a:rPr lang="en-US" sz="1550" dirty="0">
                 <a:solidFill>
                   <a:srgbClr val="17364A"/>
                 </a:solidFill>
@@ -4092,7 +4181,7 @@
               </a:rPr>
               <a:t>Connect the concept to public health decisions, safeguards, documentation, or implementation work.</a:t>
             </a:r>
-            <a:endParaRPr lang="en-US" sz="1250" dirty="0"/>
+            <a:endParaRPr lang="en-US" sz="1550" dirty="0"/>
           </a:p>
         </p:txBody>
       </p:sp>
@@ -4289,7 +4378,7 @@
                 <a:ea typeface="Aptos" pitchFamily="34" charset="-122"/>
                 <a:cs typeface="Aptos" pitchFamily="34" charset="-120"/>
               </a:rPr>
-              <a:t>© Paula Soper</a:t>
+              <a:t>Â© Paula Soper</a:t>
             </a:r>
             <a:endParaRPr lang="en-US" sz="800" dirty="0"/>
           </a:p>
@@ -4297,7 +4386,46 @@
       </p:sp>
       <p:sp>
         <p:nvSpPr>
-          <p:cNvPr id="7" name="Shape 5"/>
+          <p:cNvPr id="7" name="Text 5"/>
+          <p:cNvSpPr/>
+          <p:nvPr/>
+        </p:nvSpPr>
+        <p:spPr>
+          <a:xfrm>
+            <a:off x="11137392" y="6510528"/>
+            <a:ext cx="411480" cy="201168"/>
+          </a:xfrm>
+          <a:prstGeom prst="rect">
+            <a:avLst/>
+          </a:prstGeom>
+          <a:noFill/>
+          <a:ln/>
+        </p:spPr>
+        <p:txBody>
+          <a:bodyPr wrap="square" lIns="0" tIns="0" rIns="0" bIns="0" rtlCol="0" anchor="ctr"/>
+          <a:lstStyle/>
+          <a:p>
+            <a:pPr algn="r" indent="0" marL="0">
+              <a:buNone/>
+            </a:pPr>
+            <a:r>
+              <a:rPr lang="en-US" sz="900" dirty="0">
+                <a:solidFill>
+                  <a:srgbClr val="5F7181"/>
+                </a:solidFill>
+                <a:latin typeface="Aptos" pitchFamily="34" charset="0"/>
+                <a:ea typeface="Aptos" pitchFamily="34" charset="-122"/>
+                <a:cs typeface="Aptos" pitchFamily="34" charset="-120"/>
+              </a:rPr>
+              <a:t>12</a:t>
+            </a:r>
+            <a:endParaRPr lang="en-US" sz="900" dirty="0"/>
+          </a:p>
+        </p:txBody>
+      </p:sp>
+      <p:sp>
+        <p:nvSpPr>
+          <p:cNvPr id="8" name="Shape 6"/>
           <p:cNvSpPr/>
           <p:nvPr/>
         </p:nvSpPr>
@@ -4322,7 +4450,7 @@
       </p:sp>
       <p:sp>
         <p:nvSpPr>
-          <p:cNvPr id="8" name="Text 6"/>
+          <p:cNvPr id="9" name="Text 7"/>
           <p:cNvSpPr/>
           <p:nvPr/>
         </p:nvSpPr>
@@ -4361,14 +4489,14 @@
       </p:sp>
       <p:sp>
         <p:nvSpPr>
-          <p:cNvPr id="9" name="Text 7"/>
+          <p:cNvPr id="10" name="Text 8"/>
           <p:cNvSpPr/>
           <p:nvPr/>
         </p:nvSpPr>
         <p:spPr>
           <a:xfrm>
             <a:off x="640080" y="621792"/>
-            <a:ext cx="10881360" cy="566928"/>
+            <a:ext cx="10881360" cy="713232"/>
           </a:xfrm>
           <a:prstGeom prst="rect">
             <a:avLst/>
@@ -4386,7 +4514,7 @@
               <a:buNone/>
             </a:pPr>
             <a:r>
-              <a:rPr lang="en-US" sz="2700" b="1" dirty="0">
+              <a:rPr lang="en-US" sz="3400" b="1" dirty="0">
                 <a:solidFill>
                   <a:srgbClr val="003A63"/>
                 </a:solidFill>
@@ -4396,20 +4524,20 @@
               </a:rPr>
               <a:t>Application to AI-Supported Workflows</a:t>
             </a:r>
-            <a:endParaRPr lang="en-US" sz="2700" dirty="0"/>
-          </a:p>
-        </p:txBody>
-      </p:sp>
-      <p:sp>
-        <p:nvSpPr>
-          <p:cNvPr id="10" name="Text 8"/>
-          <p:cNvSpPr/>
-          <p:nvPr/>
-        </p:nvSpPr>
-        <p:spPr>
-          <a:xfrm>
-            <a:off x="868680" y="1417320"/>
-            <a:ext cx="6675120" cy="4434840"/>
+            <a:endParaRPr lang="en-US" sz="3400" dirty="0"/>
+          </a:p>
+        </p:txBody>
+      </p:sp>
+      <p:sp>
+        <p:nvSpPr>
+          <p:cNvPr id="11" name="Text 9"/>
+          <p:cNvSpPr/>
+          <p:nvPr/>
+        </p:nvSpPr>
+        <p:spPr>
+          <a:xfrm>
+            <a:off x="868680" y="1508760"/>
+            <a:ext cx="6537960" cy="4160520"/>
           </a:xfrm>
           <a:prstGeom prst="rect">
             <a:avLst/>
@@ -4424,7 +4552,7 @@
           <a:lstStyle/>
           <a:p>
             <a:r>
-              <a:rPr lang="en-US" sz="1700" dirty="0">
+              <a:rPr lang="en-US" sz="2100" dirty="0">
                 <a:solidFill>
                   <a:srgbClr val="17364A"/>
                 </a:solidFill>
@@ -4434,11 +4562,11 @@
               </a:rPr>
               <a:t>Generative AI business cases should include review time, source verification, and records considerations.</a:t>
             </a:r>
-            <a:endParaRPr lang="en-US" sz="1700" dirty="0"/>
-          </a:p>
-          <a:p>
-            <a:r>
-              <a:rPr lang="en-US" sz="1700" dirty="0">
+            <a:endParaRPr lang="en-US" sz="2100" dirty="0"/>
+          </a:p>
+          <a:p>
+            <a:r>
+              <a:rPr lang="en-US" sz="2100" dirty="0">
                 <a:solidFill>
                   <a:srgbClr val="17364A"/>
                 </a:solidFill>
@@ -4446,13 +4574,13 @@
                 <a:ea typeface="Aptos" pitchFamily="34" charset="-122"/>
                 <a:cs typeface="Aptos" pitchFamily="34" charset="-120"/>
               </a:rPr>
-              <a:t>Predictive analytics business cases should include validation data, subgroup testing, and monitoring costs.</a:t>
-            </a:r>
-            <a:endParaRPr lang="en-US" sz="1700" dirty="0"/>
-          </a:p>
-          <a:p>
-            <a:r>
-              <a:rPr lang="en-US" sz="1700" dirty="0">
+              <a:t>Predictive analytics business cases should include validation data, subgroup testing, and monitoring.</a:t>
+            </a:r>
+            <a:endParaRPr lang="en-US" sz="2100" dirty="0"/>
+          </a:p>
+          <a:p>
+            <a:r>
+              <a:rPr lang="en-US" sz="2100" dirty="0">
                 <a:solidFill>
                   <a:srgbClr val="17364A"/>
                 </a:solidFill>
@@ -4460,29 +4588,15 @@
                 <a:ea typeface="Aptos" pitchFamily="34" charset="-122"/>
                 <a:cs typeface="Aptos" pitchFamily="34" charset="-120"/>
               </a:rPr>
-              <a:t>Agentic AI business cases should include security architecture, approval workflows, rollback, logging, and incident response.</a:t>
-            </a:r>
-            <a:endParaRPr lang="en-US" sz="1700" dirty="0"/>
-          </a:p>
-          <a:p>
-            <a:r>
-              <a:rPr lang="en-US" sz="1700" dirty="0">
-                <a:solidFill>
-                  <a:srgbClr val="17364A"/>
-                </a:solidFill>
-                <a:latin typeface="Aptos" pitchFamily="34" charset="0"/>
-                <a:ea typeface="Aptos" pitchFamily="34" charset="-122"/>
-                <a:cs typeface="Aptos" pitchFamily="34" charset="-120"/>
-              </a:rPr>
-              <a:t>Cost and value must reflect responsible use.</a:t>
-            </a:r>
-            <a:endParaRPr lang="en-US" sz="1700" dirty="0"/>
-          </a:p>
-        </p:txBody>
-      </p:sp>
-      <p:sp>
-        <p:nvSpPr>
-          <p:cNvPr id="11" name="Shape 9"/>
+              <a:t>Agentic AI business cases should include security architecture, approval workflows, rollback, logging,.</a:t>
+            </a:r>
+            <a:endParaRPr lang="en-US" sz="2100" dirty="0"/>
+          </a:p>
+        </p:txBody>
+      </p:sp>
+      <p:sp>
+        <p:nvSpPr>
+          <p:cNvPr id="12" name="Shape 10"/>
           <p:cNvSpPr/>
           <p:nvPr/>
         </p:nvSpPr>
@@ -4509,14 +4623,14 @@
       </p:sp>
       <p:sp>
         <p:nvSpPr>
-          <p:cNvPr id="12" name="Text 10"/>
+          <p:cNvPr id="13" name="Text 11"/>
           <p:cNvSpPr/>
           <p:nvPr/>
         </p:nvSpPr>
         <p:spPr>
           <a:xfrm>
             <a:off x="8074152" y="1563624"/>
-            <a:ext cx="2825496" cy="201168"/>
+            <a:ext cx="2825496" cy="256032"/>
           </a:xfrm>
           <a:prstGeom prst="rect">
             <a:avLst/>
@@ -4532,7 +4646,7 @@
               <a:buNone/>
             </a:pPr>
             <a:r>
-              <a:rPr lang="en-US" sz="950" b="1" dirty="0">
+              <a:rPr lang="en-US" sz="1300" b="1" dirty="0">
                 <a:solidFill>
                   <a:srgbClr val="0068B7"/>
                 </a:solidFill>
@@ -4542,20 +4656,20 @@
               </a:rPr>
               <a:t>Key idea</a:t>
             </a:r>
-            <a:endParaRPr lang="en-US" sz="950" dirty="0"/>
-          </a:p>
-        </p:txBody>
-      </p:sp>
-      <p:sp>
-        <p:nvSpPr>
-          <p:cNvPr id="13" name="Text 11"/>
-          <p:cNvSpPr/>
-          <p:nvPr/>
-        </p:nvSpPr>
-        <p:spPr>
-          <a:xfrm>
-            <a:off x="8074152" y="1856232"/>
-            <a:ext cx="2825496" cy="1261872"/>
+            <a:endParaRPr lang="en-US" sz="1300" dirty="0"/>
+          </a:p>
+        </p:txBody>
+      </p:sp>
+      <p:sp>
+        <p:nvSpPr>
+          <p:cNvPr id="14" name="Text 12"/>
+          <p:cNvSpPr/>
+          <p:nvPr/>
+        </p:nvSpPr>
+        <p:spPr>
+          <a:xfrm>
+            <a:off x="8074152" y="1920240"/>
+            <a:ext cx="2825496" cy="1188720"/>
           </a:xfrm>
           <a:prstGeom prst="rect">
             <a:avLst/>
@@ -4573,7 +4687,7 @@
               <a:buNone/>
             </a:pPr>
             <a:r>
-              <a:rPr lang="en-US" sz="1250" dirty="0">
+              <a:rPr lang="en-US" sz="1550" dirty="0">
                 <a:solidFill>
                   <a:srgbClr val="17364A"/>
                 </a:solidFill>
@@ -4583,13 +4697,13 @@
               </a:rPr>
               <a:t>Generative AI business cases should include review time, source verification, and records considerations.</a:t>
             </a:r>
-            <a:endParaRPr lang="en-US" sz="1250" dirty="0"/>
-          </a:p>
-        </p:txBody>
-      </p:sp>
-      <p:sp>
-        <p:nvSpPr>
-          <p:cNvPr id="14" name="Shape 12"/>
+            <a:endParaRPr lang="en-US" sz="1550" dirty="0"/>
+          </a:p>
+        </p:txBody>
+      </p:sp>
+      <p:sp>
+        <p:nvSpPr>
+          <p:cNvPr id="15" name="Shape 13"/>
           <p:cNvSpPr/>
           <p:nvPr/>
         </p:nvSpPr>
@@ -4616,14 +4730,14 @@
       </p:sp>
       <p:sp>
         <p:nvSpPr>
-          <p:cNvPr id="15" name="Text 13"/>
+          <p:cNvPr id="16" name="Text 14"/>
           <p:cNvSpPr/>
           <p:nvPr/>
         </p:nvSpPr>
         <p:spPr>
           <a:xfrm>
             <a:off x="8074152" y="3666744"/>
-            <a:ext cx="2825496" cy="201168"/>
+            <a:ext cx="2825496" cy="256032"/>
           </a:xfrm>
           <a:prstGeom prst="rect">
             <a:avLst/>
@@ -4639,7 +4753,7 @@
               <a:buNone/>
             </a:pPr>
             <a:r>
-              <a:rPr lang="en-US" sz="950" b="1" dirty="0">
+              <a:rPr lang="en-US" sz="1300" b="1" dirty="0">
                 <a:solidFill>
                   <a:srgbClr val="0068B7"/>
                 </a:solidFill>
@@ -4649,20 +4763,20 @@
               </a:rPr>
               <a:t>Use this for</a:t>
             </a:r>
-            <a:endParaRPr lang="en-US" sz="950" dirty="0"/>
-          </a:p>
-        </p:txBody>
-      </p:sp>
-      <p:sp>
-        <p:nvSpPr>
-          <p:cNvPr id="16" name="Text 14"/>
-          <p:cNvSpPr/>
-          <p:nvPr/>
-        </p:nvSpPr>
-        <p:spPr>
-          <a:xfrm>
-            <a:off x="8074152" y="3959352"/>
-            <a:ext cx="2825496" cy="1170432"/>
+            <a:endParaRPr lang="en-US" sz="1300" dirty="0"/>
+          </a:p>
+        </p:txBody>
+      </p:sp>
+      <p:sp>
+        <p:nvSpPr>
+          <p:cNvPr id="17" name="Text 15"/>
+          <p:cNvSpPr/>
+          <p:nvPr/>
+        </p:nvSpPr>
+        <p:spPr>
+          <a:xfrm>
+            <a:off x="8074152" y="4023360"/>
+            <a:ext cx="2825496" cy="1097280"/>
           </a:xfrm>
           <a:prstGeom prst="rect">
             <a:avLst/>
@@ -4680,7 +4794,7 @@
               <a:buNone/>
             </a:pPr>
             <a:r>
-              <a:rPr lang="en-US" sz="1250" dirty="0">
+              <a:rPr lang="en-US" sz="1550" dirty="0">
                 <a:solidFill>
                   <a:srgbClr val="17364A"/>
                 </a:solidFill>
@@ -4690,7 +4804,7 @@
               </a:rPr>
               <a:t>Connect the concept to public health decisions, safeguards, documentation, or implementation work.</a:t>
             </a:r>
-            <a:endParaRPr lang="en-US" sz="1250" dirty="0"/>
+            <a:endParaRPr lang="en-US" sz="1550" dirty="0"/>
           </a:p>
         </p:txBody>
       </p:sp>
@@ -4887,7 +5001,7 @@
                 <a:ea typeface="Aptos" pitchFamily="34" charset="-122"/>
                 <a:cs typeface="Aptos" pitchFamily="34" charset="-120"/>
               </a:rPr>
-              <a:t>© Paula Soper</a:t>
+              <a:t>Â© Paula Soper</a:t>
             </a:r>
             <a:endParaRPr lang="en-US" sz="800" dirty="0"/>
           </a:p>
@@ -4895,7 +5009,46 @@
       </p:sp>
       <p:sp>
         <p:nvSpPr>
-          <p:cNvPr id="7" name="Shape 5"/>
+          <p:cNvPr id="7" name="Text 5"/>
+          <p:cNvSpPr/>
+          <p:nvPr/>
+        </p:nvSpPr>
+        <p:spPr>
+          <a:xfrm>
+            <a:off x="11137392" y="6510528"/>
+            <a:ext cx="411480" cy="201168"/>
+          </a:xfrm>
+          <a:prstGeom prst="rect">
+            <a:avLst/>
+          </a:prstGeom>
+          <a:noFill/>
+          <a:ln/>
+        </p:spPr>
+        <p:txBody>
+          <a:bodyPr wrap="square" lIns="0" tIns="0" rIns="0" bIns="0" rtlCol="0" anchor="ctr"/>
+          <a:lstStyle/>
+          <a:p>
+            <a:pPr algn="r" indent="0" marL="0">
+              <a:buNone/>
+            </a:pPr>
+            <a:r>
+              <a:rPr lang="en-US" sz="900" dirty="0">
+                <a:solidFill>
+                  <a:srgbClr val="5F7181"/>
+                </a:solidFill>
+                <a:latin typeface="Aptos" pitchFamily="34" charset="0"/>
+                <a:ea typeface="Aptos" pitchFamily="34" charset="-122"/>
+                <a:cs typeface="Aptos" pitchFamily="34" charset="-120"/>
+              </a:rPr>
+              <a:t>13</a:t>
+            </a:r>
+            <a:endParaRPr lang="en-US" sz="900" dirty="0"/>
+          </a:p>
+        </p:txBody>
+      </p:sp>
+      <p:sp>
+        <p:nvSpPr>
+          <p:cNvPr id="8" name="Shape 6"/>
           <p:cNvSpPr/>
           <p:nvPr/>
         </p:nvSpPr>
@@ -4920,7 +5073,7 @@
       </p:sp>
       <p:sp>
         <p:nvSpPr>
-          <p:cNvPr id="8" name="Text 6"/>
+          <p:cNvPr id="9" name="Text 7"/>
           <p:cNvSpPr/>
           <p:nvPr/>
         </p:nvSpPr>
@@ -4959,14 +5112,14 @@
       </p:sp>
       <p:sp>
         <p:nvSpPr>
-          <p:cNvPr id="9" name="Text 7"/>
+          <p:cNvPr id="10" name="Text 8"/>
           <p:cNvSpPr/>
           <p:nvPr/>
         </p:nvSpPr>
         <p:spPr>
           <a:xfrm>
             <a:off x="640080" y="621792"/>
-            <a:ext cx="10881360" cy="566928"/>
+            <a:ext cx="10881360" cy="713232"/>
           </a:xfrm>
           <a:prstGeom prst="rect">
             <a:avLst/>
@@ -4984,7 +5137,7 @@
               <a:buNone/>
             </a:pPr>
             <a:r>
-              <a:rPr lang="en-US" sz="2700" b="1" dirty="0">
+              <a:rPr lang="en-US" sz="3400" b="1" dirty="0">
                 <a:solidFill>
                   <a:srgbClr val="003A63"/>
                 </a:solidFill>
@@ -4994,20 +5147,20 @@
               </a:rPr>
               <a:t>Reflection Questions</a:t>
             </a:r>
-            <a:endParaRPr lang="en-US" sz="2700" dirty="0"/>
-          </a:p>
-        </p:txBody>
-      </p:sp>
-      <p:sp>
-        <p:nvSpPr>
-          <p:cNvPr id="10" name="Text 8"/>
-          <p:cNvSpPr/>
-          <p:nvPr/>
-        </p:nvSpPr>
-        <p:spPr>
-          <a:xfrm>
-            <a:off x="868680" y="1417320"/>
-            <a:ext cx="6675120" cy="4434840"/>
+            <a:endParaRPr lang="en-US" sz="3400" dirty="0"/>
+          </a:p>
+        </p:txBody>
+      </p:sp>
+      <p:sp>
+        <p:nvSpPr>
+          <p:cNvPr id="11" name="Text 9"/>
+          <p:cNvSpPr/>
+          <p:nvPr/>
+        </p:nvSpPr>
+        <p:spPr>
+          <a:xfrm>
+            <a:off x="868680" y="1508760"/>
+            <a:ext cx="6537960" cy="4160520"/>
           </a:xfrm>
           <a:prstGeom prst="rect">
             <a:avLst/>
@@ -5022,7 +5175,7 @@
           <a:lstStyle/>
           <a:p>
             <a:r>
-              <a:rPr lang="en-US" sz="1700" dirty="0">
+              <a:rPr lang="en-US" sz="2100" dirty="0">
                 <a:solidFill>
                   <a:srgbClr val="17364A"/>
                 </a:solidFill>
@@ -5030,13 +5183,13 @@
                 <a:ea typeface="Aptos" pitchFamily="34" charset="-122"/>
                 <a:cs typeface="Aptos" pitchFamily="34" charset="-120"/>
               </a:rPr>
-              <a:t>Which current or proposed AI use case in your agency raises this leadership or governance issue most clearly?</a:t>
-            </a:r>
-            <a:endParaRPr lang="en-US" sz="1700" dirty="0"/>
-          </a:p>
-          <a:p>
-            <a:r>
-              <a:rPr lang="en-US" sz="1700" dirty="0">
+              <a:t>Which current or proposed AI use case in your agency raises this leadership or governance issue most.</a:t>
+            </a:r>
+            <a:endParaRPr lang="en-US" sz="2100" dirty="0"/>
+          </a:p>
+          <a:p>
+            <a:r>
+              <a:rPr lang="en-US" sz="2100" dirty="0">
                 <a:solidFill>
                   <a:srgbClr val="17364A"/>
                 </a:solidFill>
@@ -5046,11 +5199,11 @@
               </a:rPr>
               <a:t>Who currently has authority to make decisions about this issue, and is that authority documented?</a:t>
             </a:r>
-            <a:endParaRPr lang="en-US" sz="1700" dirty="0"/>
-          </a:p>
-          <a:p>
-            <a:r>
-              <a:rPr lang="en-US" sz="1700" dirty="0">
+            <a:endParaRPr lang="en-US" sz="2100" dirty="0"/>
+          </a:p>
+          <a:p>
+            <a:r>
+              <a:rPr lang="en-US" sz="2100" dirty="0">
                 <a:solidFill>
                   <a:srgbClr val="17364A"/>
                 </a:solidFill>
@@ -5060,13 +5213,13 @@
               </a:rPr>
               <a:t>What evidence would governance or leadership need before approving the use case?</a:t>
             </a:r>
-            <a:endParaRPr lang="en-US" sz="1700" dirty="0"/>
-          </a:p>
-        </p:txBody>
-      </p:sp>
-      <p:sp>
-        <p:nvSpPr>
-          <p:cNvPr id="11" name="Shape 9"/>
+            <a:endParaRPr lang="en-US" sz="2100" dirty="0"/>
+          </a:p>
+        </p:txBody>
+      </p:sp>
+      <p:sp>
+        <p:nvSpPr>
+          <p:cNvPr id="12" name="Shape 10"/>
           <p:cNvSpPr/>
           <p:nvPr/>
         </p:nvSpPr>
@@ -5093,14 +5246,14 @@
       </p:sp>
       <p:sp>
         <p:nvSpPr>
-          <p:cNvPr id="12" name="Text 10"/>
+          <p:cNvPr id="13" name="Text 11"/>
           <p:cNvSpPr/>
           <p:nvPr/>
         </p:nvSpPr>
         <p:spPr>
           <a:xfrm>
             <a:off x="8074152" y="1563624"/>
-            <a:ext cx="2825496" cy="201168"/>
+            <a:ext cx="2825496" cy="256032"/>
           </a:xfrm>
           <a:prstGeom prst="rect">
             <a:avLst/>
@@ -5116,7 +5269,7 @@
               <a:buNone/>
             </a:pPr>
             <a:r>
-              <a:rPr lang="en-US" sz="950" b="1" dirty="0">
+              <a:rPr lang="en-US" sz="1300" b="1" dirty="0">
                 <a:solidFill>
                   <a:srgbClr val="0068B7"/>
                 </a:solidFill>
@@ -5126,20 +5279,20 @@
               </a:rPr>
               <a:t>Key idea</a:t>
             </a:r>
-            <a:endParaRPr lang="en-US" sz="950" dirty="0"/>
-          </a:p>
-        </p:txBody>
-      </p:sp>
-      <p:sp>
-        <p:nvSpPr>
-          <p:cNvPr id="13" name="Text 11"/>
-          <p:cNvSpPr/>
-          <p:nvPr/>
-        </p:nvSpPr>
-        <p:spPr>
-          <a:xfrm>
-            <a:off x="8074152" y="1856232"/>
-            <a:ext cx="2825496" cy="1261872"/>
+            <a:endParaRPr lang="en-US" sz="1300" dirty="0"/>
+          </a:p>
+        </p:txBody>
+      </p:sp>
+      <p:sp>
+        <p:nvSpPr>
+          <p:cNvPr id="14" name="Text 12"/>
+          <p:cNvSpPr/>
+          <p:nvPr/>
+        </p:nvSpPr>
+        <p:spPr>
+          <a:xfrm>
+            <a:off x="8074152" y="1920240"/>
+            <a:ext cx="2825496" cy="1188720"/>
           </a:xfrm>
           <a:prstGeom prst="rect">
             <a:avLst/>
@@ -5157,7 +5310,7 @@
               <a:buNone/>
             </a:pPr>
             <a:r>
-              <a:rPr lang="en-US" sz="1250" dirty="0">
+              <a:rPr lang="en-US" sz="1550" dirty="0">
                 <a:solidFill>
                   <a:srgbClr val="17364A"/>
                 </a:solidFill>
@@ -5165,15 +5318,15 @@
                 <a:ea typeface="Aptos" pitchFamily="34" charset="-122"/>
                 <a:cs typeface="Aptos" pitchFamily="34" charset="-120"/>
               </a:rPr>
-              <a:t>Which current or proposed AI use case in your agency raises this leadership or governance issue most clearly?</a:t>
-            </a:r>
-            <a:endParaRPr lang="en-US" sz="1250" dirty="0"/>
-          </a:p>
-        </p:txBody>
-      </p:sp>
-      <p:sp>
-        <p:nvSpPr>
-          <p:cNvPr id="14" name="Shape 12"/>
+              <a:t>Which current or proposed AI use case in your agency raises this leadership or governance issue most.</a:t>
+            </a:r>
+            <a:endParaRPr lang="en-US" sz="1550" dirty="0"/>
+          </a:p>
+        </p:txBody>
+      </p:sp>
+      <p:sp>
+        <p:nvSpPr>
+          <p:cNvPr id="15" name="Shape 13"/>
           <p:cNvSpPr/>
           <p:nvPr/>
         </p:nvSpPr>
@@ -5200,14 +5353,14 @@
       </p:sp>
       <p:sp>
         <p:nvSpPr>
-          <p:cNvPr id="15" name="Text 13"/>
+          <p:cNvPr id="16" name="Text 14"/>
           <p:cNvSpPr/>
           <p:nvPr/>
         </p:nvSpPr>
         <p:spPr>
           <a:xfrm>
             <a:off x="8074152" y="3666744"/>
-            <a:ext cx="2825496" cy="201168"/>
+            <a:ext cx="2825496" cy="256032"/>
           </a:xfrm>
           <a:prstGeom prst="rect">
             <a:avLst/>
@@ -5223,7 +5376,7 @@
               <a:buNone/>
             </a:pPr>
             <a:r>
-              <a:rPr lang="en-US" sz="950" b="1" dirty="0">
+              <a:rPr lang="en-US" sz="1300" b="1" dirty="0">
                 <a:solidFill>
                   <a:srgbClr val="0068B7"/>
                 </a:solidFill>
@@ -5233,20 +5386,20 @@
               </a:rPr>
               <a:t>Use this for</a:t>
             </a:r>
-            <a:endParaRPr lang="en-US" sz="950" dirty="0"/>
-          </a:p>
-        </p:txBody>
-      </p:sp>
-      <p:sp>
-        <p:nvSpPr>
-          <p:cNvPr id="16" name="Text 14"/>
-          <p:cNvSpPr/>
-          <p:nvPr/>
-        </p:nvSpPr>
-        <p:spPr>
-          <a:xfrm>
-            <a:off x="8074152" y="3959352"/>
-            <a:ext cx="2825496" cy="1170432"/>
+            <a:endParaRPr lang="en-US" sz="1300" dirty="0"/>
+          </a:p>
+        </p:txBody>
+      </p:sp>
+      <p:sp>
+        <p:nvSpPr>
+          <p:cNvPr id="17" name="Text 15"/>
+          <p:cNvSpPr/>
+          <p:nvPr/>
+        </p:nvSpPr>
+        <p:spPr>
+          <a:xfrm>
+            <a:off x="8074152" y="4023360"/>
+            <a:ext cx="2825496" cy="1097280"/>
           </a:xfrm>
           <a:prstGeom prst="rect">
             <a:avLst/>
@@ -5264,7 +5417,7 @@
               <a:buNone/>
             </a:pPr>
             <a:r>
-              <a:rPr lang="en-US" sz="1250" dirty="0">
+              <a:rPr lang="en-US" sz="1550" dirty="0">
                 <a:solidFill>
                   <a:srgbClr val="17364A"/>
                 </a:solidFill>
@@ -5274,7 +5427,7 @@
               </a:rPr>
               <a:t>Connect the concept to public health decisions, safeguards, documentation, or implementation work.</a:t>
             </a:r>
-            <a:endParaRPr lang="en-US" sz="1250" dirty="0"/>
+            <a:endParaRPr lang="en-US" sz="1550" dirty="0"/>
           </a:p>
         </p:txBody>
       </p:sp>
@@ -5471,7 +5624,7 @@
                 <a:ea typeface="Aptos" pitchFamily="34" charset="-122"/>
                 <a:cs typeface="Aptos" pitchFamily="34" charset="-120"/>
               </a:rPr>
-              <a:t>© Paula Soper</a:t>
+              <a:t>Â© Paula Soper</a:t>
             </a:r>
             <a:endParaRPr lang="en-US" sz="800" dirty="0"/>
           </a:p>
@@ -5485,8 +5638,47 @@
         </p:nvSpPr>
         <p:spPr>
           <a:xfrm>
+            <a:off x="11137392" y="6510528"/>
+            <a:ext cx="411480" cy="201168"/>
+          </a:xfrm>
+          <a:prstGeom prst="rect">
+            <a:avLst/>
+          </a:prstGeom>
+          <a:noFill/>
+          <a:ln/>
+        </p:spPr>
+        <p:txBody>
+          <a:bodyPr wrap="square" lIns="0" tIns="0" rIns="0" bIns="0" rtlCol="0" anchor="ctr"/>
+          <a:lstStyle/>
+          <a:p>
+            <a:pPr algn="r" indent="0" marL="0">
+              <a:buNone/>
+            </a:pPr>
+            <a:r>
+              <a:rPr lang="en-US" sz="900" dirty="0">
+                <a:solidFill>
+                  <a:srgbClr val="5F7181"/>
+                </a:solidFill>
+                <a:latin typeface="Aptos" pitchFamily="34" charset="0"/>
+                <a:ea typeface="Aptos" pitchFamily="34" charset="-122"/>
+                <a:cs typeface="Aptos" pitchFamily="34" charset="-120"/>
+              </a:rPr>
+              <a:t>14</a:t>
+            </a:r>
+            <a:endParaRPr lang="en-US" sz="900" dirty="0"/>
+          </a:p>
+        </p:txBody>
+      </p:sp>
+      <p:sp>
+        <p:nvSpPr>
+          <p:cNvPr id="8" name="Text 6"/>
+          <p:cNvSpPr/>
+          <p:nvPr/>
+        </p:nvSpPr>
+        <p:spPr>
+          <a:xfrm>
             <a:off x="640080" y="658368"/>
-            <a:ext cx="10881360" cy="566928"/>
+            <a:ext cx="10881360" cy="713232"/>
           </a:xfrm>
           <a:prstGeom prst="rect">
             <a:avLst/>
@@ -5504,7 +5696,7 @@
               <a:buNone/>
             </a:pPr>
             <a:r>
-              <a:rPr lang="en-US" sz="2700" b="1" dirty="0">
+              <a:rPr lang="en-US" sz="3400" b="1" dirty="0">
                 <a:solidFill>
                   <a:srgbClr val="003A63"/>
                 </a:solidFill>
@@ -5514,20 +5706,20 @@
               </a:rPr>
               <a:t>Reflection Questions Continued</a:t>
             </a:r>
-            <a:endParaRPr lang="en-US" sz="2700" dirty="0"/>
-          </a:p>
-        </p:txBody>
-      </p:sp>
-      <p:sp>
-        <p:nvSpPr>
-          <p:cNvPr id="8" name="Text 6"/>
-          <p:cNvSpPr/>
-          <p:nvPr/>
-        </p:nvSpPr>
-        <p:spPr>
-          <a:xfrm>
-            <a:off x="868680" y="1417320"/>
-            <a:ext cx="6675120" cy="4434840"/>
+            <a:endParaRPr lang="en-US" sz="3400" dirty="0"/>
+          </a:p>
+        </p:txBody>
+      </p:sp>
+      <p:sp>
+        <p:nvSpPr>
+          <p:cNvPr id="9" name="Text 7"/>
+          <p:cNvSpPr/>
+          <p:nvPr/>
+        </p:nvSpPr>
+        <p:spPr>
+          <a:xfrm>
+            <a:off x="868680" y="1508760"/>
+            <a:ext cx="6537960" cy="4160520"/>
           </a:xfrm>
           <a:prstGeom prst="rect">
             <a:avLst/>
@@ -5542,7 +5734,7 @@
           <a:lstStyle/>
           <a:p>
             <a:r>
-              <a:rPr lang="en-US" sz="1700" dirty="0">
+              <a:rPr lang="en-US" sz="2100" dirty="0">
                 <a:solidFill>
                   <a:srgbClr val="17364A"/>
                 </a:solidFill>
@@ -5552,11 +5744,11 @@
               </a:rPr>
               <a:t>Which staff, partners, or communities would be affected if this issue were handled poorly?</a:t>
             </a:r>
-            <a:endParaRPr lang="en-US" sz="1700" dirty="0"/>
-          </a:p>
-          <a:p>
-            <a:r>
-              <a:rPr lang="en-US" sz="1700" dirty="0">
+            <a:endParaRPr lang="en-US" sz="2100" dirty="0"/>
+          </a:p>
+          <a:p>
+            <a:r>
+              <a:rPr lang="en-US" sz="2100" dirty="0">
                 <a:solidFill>
                   <a:srgbClr val="17364A"/>
                 </a:solidFill>
@@ -5566,13 +5758,13 @@
               </a:rPr>
               <a:t>What policy, process, or artifact should be created or updated after this module?</a:t>
             </a:r>
-            <a:endParaRPr lang="en-US" sz="1700" dirty="0"/>
-          </a:p>
-        </p:txBody>
-      </p:sp>
-      <p:sp>
-        <p:nvSpPr>
-          <p:cNvPr id="9" name="Shape 7"/>
+            <a:endParaRPr lang="en-US" sz="2100" dirty="0"/>
+          </a:p>
+        </p:txBody>
+      </p:sp>
+      <p:sp>
+        <p:nvSpPr>
+          <p:cNvPr id="10" name="Shape 8"/>
           <p:cNvSpPr/>
           <p:nvPr/>
         </p:nvSpPr>
@@ -5599,14 +5791,14 @@
       </p:sp>
       <p:sp>
         <p:nvSpPr>
-          <p:cNvPr id="10" name="Text 8"/>
+          <p:cNvPr id="11" name="Text 9"/>
           <p:cNvSpPr/>
           <p:nvPr/>
         </p:nvSpPr>
         <p:spPr>
           <a:xfrm>
             <a:off x="8074152" y="1563624"/>
-            <a:ext cx="2825496" cy="201168"/>
+            <a:ext cx="2825496" cy="256032"/>
           </a:xfrm>
           <a:prstGeom prst="rect">
             <a:avLst/>
@@ -5622,7 +5814,7 @@
               <a:buNone/>
             </a:pPr>
             <a:r>
-              <a:rPr lang="en-US" sz="950" b="1" dirty="0">
+              <a:rPr lang="en-US" sz="1300" b="1" dirty="0">
                 <a:solidFill>
                   <a:srgbClr val="0068B7"/>
                 </a:solidFill>
@@ -5632,20 +5824,20 @@
               </a:rPr>
               <a:t>Key idea</a:t>
             </a:r>
-            <a:endParaRPr lang="en-US" sz="950" dirty="0"/>
-          </a:p>
-        </p:txBody>
-      </p:sp>
-      <p:sp>
-        <p:nvSpPr>
-          <p:cNvPr id="11" name="Text 9"/>
-          <p:cNvSpPr/>
-          <p:nvPr/>
-        </p:nvSpPr>
-        <p:spPr>
-          <a:xfrm>
-            <a:off x="8074152" y="1856232"/>
-            <a:ext cx="2825496" cy="1261872"/>
+            <a:endParaRPr lang="en-US" sz="1300" dirty="0"/>
+          </a:p>
+        </p:txBody>
+      </p:sp>
+      <p:sp>
+        <p:nvSpPr>
+          <p:cNvPr id="12" name="Text 10"/>
+          <p:cNvSpPr/>
+          <p:nvPr/>
+        </p:nvSpPr>
+        <p:spPr>
+          <a:xfrm>
+            <a:off x="8074152" y="1920240"/>
+            <a:ext cx="2825496" cy="1188720"/>
           </a:xfrm>
           <a:prstGeom prst="rect">
             <a:avLst/>
@@ -5663,7 +5855,7 @@
               <a:buNone/>
             </a:pPr>
             <a:r>
-              <a:rPr lang="en-US" sz="1250" dirty="0">
+              <a:rPr lang="en-US" sz="1550" dirty="0">
                 <a:solidFill>
                   <a:srgbClr val="17364A"/>
                 </a:solidFill>
@@ -5673,13 +5865,13 @@
               </a:rPr>
               <a:t>Which staff, partners, or communities would be affected if this issue were handled poorly?</a:t>
             </a:r>
-            <a:endParaRPr lang="en-US" sz="1250" dirty="0"/>
-          </a:p>
-        </p:txBody>
-      </p:sp>
-      <p:sp>
-        <p:nvSpPr>
-          <p:cNvPr id="12" name="Shape 10"/>
+            <a:endParaRPr lang="en-US" sz="1550" dirty="0"/>
+          </a:p>
+        </p:txBody>
+      </p:sp>
+      <p:sp>
+        <p:nvSpPr>
+          <p:cNvPr id="13" name="Shape 11"/>
           <p:cNvSpPr/>
           <p:nvPr/>
         </p:nvSpPr>
@@ -5706,14 +5898,14 @@
       </p:sp>
       <p:sp>
         <p:nvSpPr>
-          <p:cNvPr id="13" name="Text 11"/>
+          <p:cNvPr id="14" name="Text 12"/>
           <p:cNvSpPr/>
           <p:nvPr/>
         </p:nvSpPr>
         <p:spPr>
           <a:xfrm>
             <a:off x="8074152" y="3666744"/>
-            <a:ext cx="2825496" cy="201168"/>
+            <a:ext cx="2825496" cy="256032"/>
           </a:xfrm>
           <a:prstGeom prst="rect">
             <a:avLst/>
@@ -5729,7 +5921,7 @@
               <a:buNone/>
             </a:pPr>
             <a:r>
-              <a:rPr lang="en-US" sz="950" b="1" dirty="0">
+              <a:rPr lang="en-US" sz="1300" b="1" dirty="0">
                 <a:solidFill>
                   <a:srgbClr val="0068B7"/>
                 </a:solidFill>
@@ -5739,20 +5931,20 @@
               </a:rPr>
               <a:t>Use this for</a:t>
             </a:r>
-            <a:endParaRPr lang="en-US" sz="950" dirty="0"/>
-          </a:p>
-        </p:txBody>
-      </p:sp>
-      <p:sp>
-        <p:nvSpPr>
-          <p:cNvPr id="14" name="Text 12"/>
-          <p:cNvSpPr/>
-          <p:nvPr/>
-        </p:nvSpPr>
-        <p:spPr>
-          <a:xfrm>
-            <a:off x="8074152" y="3959352"/>
-            <a:ext cx="2825496" cy="1170432"/>
+            <a:endParaRPr lang="en-US" sz="1300" dirty="0"/>
+          </a:p>
+        </p:txBody>
+      </p:sp>
+      <p:sp>
+        <p:nvSpPr>
+          <p:cNvPr id="15" name="Text 13"/>
+          <p:cNvSpPr/>
+          <p:nvPr/>
+        </p:nvSpPr>
+        <p:spPr>
+          <a:xfrm>
+            <a:off x="8074152" y="4023360"/>
+            <a:ext cx="2825496" cy="1097280"/>
           </a:xfrm>
           <a:prstGeom prst="rect">
             <a:avLst/>
@@ -5770,7 +5962,7 @@
               <a:buNone/>
             </a:pPr>
             <a:r>
-              <a:rPr lang="en-US" sz="1250" dirty="0">
+              <a:rPr lang="en-US" sz="1550" dirty="0">
                 <a:solidFill>
                   <a:srgbClr val="17364A"/>
                 </a:solidFill>
@@ -5780,7 +5972,7 @@
               </a:rPr>
               <a:t>Connect the concept to public health decisions, safeguards, documentation, or implementation work.</a:t>
             </a:r>
-            <a:endParaRPr lang="en-US" sz="1250" dirty="0"/>
+            <a:endParaRPr lang="en-US" sz="1550" dirty="0"/>
           </a:p>
         </p:txBody>
       </p:sp>
@@ -5977,7 +6169,7 @@
                 <a:ea typeface="Aptos" pitchFamily="34" charset="-122"/>
                 <a:cs typeface="Aptos" pitchFamily="34" charset="-120"/>
               </a:rPr>
-              <a:t>© Paula Soper</a:t>
+              <a:t>Â© Paula Soper</a:t>
             </a:r>
             <a:endParaRPr lang="en-US" sz="800" dirty="0"/>
           </a:p>
@@ -5985,7 +6177,46 @@
       </p:sp>
       <p:sp>
         <p:nvSpPr>
-          <p:cNvPr id="7" name="Shape 5"/>
+          <p:cNvPr id="7" name="Text 5"/>
+          <p:cNvSpPr/>
+          <p:nvPr/>
+        </p:nvSpPr>
+        <p:spPr>
+          <a:xfrm>
+            <a:off x="11137392" y="6510528"/>
+            <a:ext cx="411480" cy="201168"/>
+          </a:xfrm>
+          <a:prstGeom prst="rect">
+            <a:avLst/>
+          </a:prstGeom>
+          <a:noFill/>
+          <a:ln/>
+        </p:spPr>
+        <p:txBody>
+          <a:bodyPr wrap="square" lIns="0" tIns="0" rIns="0" bIns="0" rtlCol="0" anchor="ctr"/>
+          <a:lstStyle/>
+          <a:p>
+            <a:pPr algn="r" indent="0" marL="0">
+              <a:buNone/>
+            </a:pPr>
+            <a:r>
+              <a:rPr lang="en-US" sz="900" dirty="0">
+                <a:solidFill>
+                  <a:srgbClr val="5F7181"/>
+                </a:solidFill>
+                <a:latin typeface="Aptos" pitchFamily="34" charset="0"/>
+                <a:ea typeface="Aptos" pitchFamily="34" charset="-122"/>
+                <a:cs typeface="Aptos" pitchFamily="34" charset="-120"/>
+              </a:rPr>
+              <a:t>15</a:t>
+            </a:r>
+            <a:endParaRPr lang="en-US" sz="900" dirty="0"/>
+          </a:p>
+        </p:txBody>
+      </p:sp>
+      <p:sp>
+        <p:nvSpPr>
+          <p:cNvPr id="8" name="Shape 6"/>
           <p:cNvSpPr/>
           <p:nvPr/>
         </p:nvSpPr>
@@ -6010,7 +6241,7 @@
       </p:sp>
       <p:sp>
         <p:nvSpPr>
-          <p:cNvPr id="8" name="Text 6"/>
+          <p:cNvPr id="9" name="Text 7"/>
           <p:cNvSpPr/>
           <p:nvPr/>
         </p:nvSpPr>
@@ -6049,14 +6280,14 @@
       </p:sp>
       <p:sp>
         <p:nvSpPr>
-          <p:cNvPr id="9" name="Text 7"/>
+          <p:cNvPr id="10" name="Text 8"/>
           <p:cNvSpPr/>
           <p:nvPr/>
         </p:nvSpPr>
         <p:spPr>
           <a:xfrm>
             <a:off x="640080" y="621792"/>
-            <a:ext cx="10881360" cy="566928"/>
+            <a:ext cx="10881360" cy="713232"/>
           </a:xfrm>
           <a:prstGeom prst="rect">
             <a:avLst/>
@@ -6074,7 +6305,7 @@
               <a:buNone/>
             </a:pPr>
             <a:r>
-              <a:rPr lang="en-US" sz="2700" b="1" dirty="0">
+              <a:rPr lang="en-US" sz="3400" b="1" dirty="0">
                 <a:solidFill>
                   <a:srgbClr val="003A63"/>
                 </a:solidFill>
@@ -6084,20 +6315,20 @@
               </a:rPr>
               <a:t>Practical Exercise</a:t>
             </a:r>
-            <a:endParaRPr lang="en-US" sz="2700" dirty="0"/>
-          </a:p>
-        </p:txBody>
-      </p:sp>
-      <p:sp>
-        <p:nvSpPr>
-          <p:cNvPr id="10" name="Text 8"/>
-          <p:cNvSpPr/>
-          <p:nvPr/>
-        </p:nvSpPr>
-        <p:spPr>
-          <a:xfrm>
-            <a:off x="868680" y="1417320"/>
-            <a:ext cx="6675120" cy="4434840"/>
+            <a:endParaRPr lang="en-US" sz="3400" dirty="0"/>
+          </a:p>
+        </p:txBody>
+      </p:sp>
+      <p:sp>
+        <p:nvSpPr>
+          <p:cNvPr id="11" name="Text 9"/>
+          <p:cNvSpPr/>
+          <p:nvPr/>
+        </p:nvSpPr>
+        <p:spPr>
+          <a:xfrm>
+            <a:off x="868680" y="1508760"/>
+            <a:ext cx="6537960" cy="4160520"/>
           </a:xfrm>
           <a:prstGeom prst="rect">
             <a:avLst/>
@@ -6112,7 +6343,7 @@
           <a:lstStyle/>
           <a:p>
             <a:r>
-              <a:rPr lang="en-US" sz="1700" dirty="0">
+              <a:rPr lang="en-US" sz="2100" dirty="0">
                 <a:solidFill>
                   <a:srgbClr val="17364A"/>
                 </a:solidFill>
@@ -6122,11 +6353,11 @@
               </a:rPr>
               <a:t>Complete an AI business case review worksheet for one proposed investment.</a:t>
             </a:r>
-            <a:endParaRPr lang="en-US" sz="1700" dirty="0"/>
-          </a:p>
-          <a:p>
-            <a:r>
-              <a:rPr lang="en-US" sz="1700" dirty="0">
+            <a:endParaRPr lang="en-US" sz="2100" dirty="0"/>
+          </a:p>
+          <a:p>
+            <a:r>
+              <a:rPr lang="en-US" sz="2100" dirty="0">
                 <a:solidFill>
                   <a:srgbClr val="17364A"/>
                 </a:solidFill>
@@ -6134,15 +6365,15 @@
                 <a:ea typeface="Aptos" pitchFamily="34" charset="-122"/>
                 <a:cs typeface="Aptos" pitchFamily="34" charset="-120"/>
               </a:rPr>
-              <a:t>Include problem, alternatives, expected benefits, total cost of ownership, risk, equity considerations, implementation.</a:t>
-            </a:r>
-            <a:endParaRPr lang="en-US" sz="1700" dirty="0"/>
-          </a:p>
-        </p:txBody>
-      </p:sp>
-      <p:sp>
-        <p:nvSpPr>
-          <p:cNvPr id="11" name="Shape 9"/>
+              <a:t>Include problem, alternatives, expected benefits, total cost of ownership, risk, equity considerations,.</a:t>
+            </a:r>
+            <a:endParaRPr lang="en-US" sz="2100" dirty="0"/>
+          </a:p>
+        </p:txBody>
+      </p:sp>
+      <p:sp>
+        <p:nvSpPr>
+          <p:cNvPr id="12" name="Shape 10"/>
           <p:cNvSpPr/>
           <p:nvPr/>
         </p:nvSpPr>
@@ -6169,14 +6400,14 @@
       </p:sp>
       <p:sp>
         <p:nvSpPr>
-          <p:cNvPr id="12" name="Text 10"/>
+          <p:cNvPr id="13" name="Text 11"/>
           <p:cNvSpPr/>
           <p:nvPr/>
         </p:nvSpPr>
         <p:spPr>
           <a:xfrm>
             <a:off x="8074152" y="1563624"/>
-            <a:ext cx="2825496" cy="201168"/>
+            <a:ext cx="2825496" cy="256032"/>
           </a:xfrm>
           <a:prstGeom prst="rect">
             <a:avLst/>
@@ -6192,7 +6423,7 @@
               <a:buNone/>
             </a:pPr>
             <a:r>
-              <a:rPr lang="en-US" sz="950" b="1" dirty="0">
+              <a:rPr lang="en-US" sz="1300" b="1" dirty="0">
                 <a:solidFill>
                   <a:srgbClr val="0068B7"/>
                 </a:solidFill>
@@ -6202,20 +6433,20 @@
               </a:rPr>
               <a:t>Key idea</a:t>
             </a:r>
-            <a:endParaRPr lang="en-US" sz="950" dirty="0"/>
-          </a:p>
-        </p:txBody>
-      </p:sp>
-      <p:sp>
-        <p:nvSpPr>
-          <p:cNvPr id="13" name="Text 11"/>
-          <p:cNvSpPr/>
-          <p:nvPr/>
-        </p:nvSpPr>
-        <p:spPr>
-          <a:xfrm>
-            <a:off x="8074152" y="1856232"/>
-            <a:ext cx="2825496" cy="1261872"/>
+            <a:endParaRPr lang="en-US" sz="1300" dirty="0"/>
+          </a:p>
+        </p:txBody>
+      </p:sp>
+      <p:sp>
+        <p:nvSpPr>
+          <p:cNvPr id="14" name="Text 12"/>
+          <p:cNvSpPr/>
+          <p:nvPr/>
+        </p:nvSpPr>
+        <p:spPr>
+          <a:xfrm>
+            <a:off x="8074152" y="1920240"/>
+            <a:ext cx="2825496" cy="1188720"/>
           </a:xfrm>
           <a:prstGeom prst="rect">
             <a:avLst/>
@@ -6233,7 +6464,7 @@
               <a:buNone/>
             </a:pPr>
             <a:r>
-              <a:rPr lang="en-US" sz="1250" dirty="0">
+              <a:rPr lang="en-US" sz="1550" dirty="0">
                 <a:solidFill>
                   <a:srgbClr val="17364A"/>
                 </a:solidFill>
@@ -6243,13 +6474,13 @@
               </a:rPr>
               <a:t>Complete an AI business case review worksheet for one proposed investment.</a:t>
             </a:r>
-            <a:endParaRPr lang="en-US" sz="1250" dirty="0"/>
-          </a:p>
-        </p:txBody>
-      </p:sp>
-      <p:sp>
-        <p:nvSpPr>
-          <p:cNvPr id="14" name="Shape 12"/>
+            <a:endParaRPr lang="en-US" sz="1550" dirty="0"/>
+          </a:p>
+        </p:txBody>
+      </p:sp>
+      <p:sp>
+        <p:nvSpPr>
+          <p:cNvPr id="15" name="Shape 13"/>
           <p:cNvSpPr/>
           <p:nvPr/>
         </p:nvSpPr>
@@ -6276,14 +6507,14 @@
       </p:sp>
       <p:sp>
         <p:nvSpPr>
-          <p:cNvPr id="15" name="Text 13"/>
+          <p:cNvPr id="16" name="Text 14"/>
           <p:cNvSpPr/>
           <p:nvPr/>
         </p:nvSpPr>
         <p:spPr>
           <a:xfrm>
             <a:off x="8074152" y="3666744"/>
-            <a:ext cx="2825496" cy="201168"/>
+            <a:ext cx="2825496" cy="256032"/>
           </a:xfrm>
           <a:prstGeom prst="rect">
             <a:avLst/>
@@ -6299,7 +6530,7 @@
               <a:buNone/>
             </a:pPr>
             <a:r>
-              <a:rPr lang="en-US" sz="950" b="1" dirty="0">
+              <a:rPr lang="en-US" sz="1300" b="1" dirty="0">
                 <a:solidFill>
                   <a:srgbClr val="0068B7"/>
                 </a:solidFill>
@@ -6309,20 +6540,20 @@
               </a:rPr>
               <a:t>Use this for</a:t>
             </a:r>
-            <a:endParaRPr lang="en-US" sz="950" dirty="0"/>
-          </a:p>
-        </p:txBody>
-      </p:sp>
-      <p:sp>
-        <p:nvSpPr>
-          <p:cNvPr id="16" name="Text 14"/>
-          <p:cNvSpPr/>
-          <p:nvPr/>
-        </p:nvSpPr>
-        <p:spPr>
-          <a:xfrm>
-            <a:off x="8074152" y="3959352"/>
-            <a:ext cx="2825496" cy="1170432"/>
+            <a:endParaRPr lang="en-US" sz="1300" dirty="0"/>
+          </a:p>
+        </p:txBody>
+      </p:sp>
+      <p:sp>
+        <p:nvSpPr>
+          <p:cNvPr id="17" name="Text 15"/>
+          <p:cNvSpPr/>
+          <p:nvPr/>
+        </p:nvSpPr>
+        <p:spPr>
+          <a:xfrm>
+            <a:off x="8074152" y="4023360"/>
+            <a:ext cx="2825496" cy="1097280"/>
           </a:xfrm>
           <a:prstGeom prst="rect">
             <a:avLst/>
@@ -6340,7 +6571,7 @@
               <a:buNone/>
             </a:pPr>
             <a:r>
-              <a:rPr lang="en-US" sz="1250" dirty="0">
+              <a:rPr lang="en-US" sz="1550" dirty="0">
                 <a:solidFill>
                   <a:srgbClr val="17364A"/>
                 </a:solidFill>
@@ -6350,7 +6581,7 @@
               </a:rPr>
               <a:t>Connect the concept to public health decisions, safeguards, documentation, or implementation work.</a:t>
             </a:r>
-            <a:endParaRPr lang="en-US" sz="1250" dirty="0"/>
+            <a:endParaRPr lang="en-US" sz="1550" dirty="0"/>
           </a:p>
         </p:txBody>
       </p:sp>
@@ -6547,7 +6778,7 @@
                 <a:ea typeface="Aptos" pitchFamily="34" charset="-122"/>
                 <a:cs typeface="Aptos" pitchFamily="34" charset="-120"/>
               </a:rPr>
-              <a:t>© Paula Soper</a:t>
+              <a:t>Â© Paula Soper</a:t>
             </a:r>
             <a:endParaRPr lang="en-US" sz="800" dirty="0"/>
           </a:p>
@@ -6555,7 +6786,46 @@
       </p:sp>
       <p:sp>
         <p:nvSpPr>
-          <p:cNvPr id="7" name="Shape 5"/>
+          <p:cNvPr id="7" name="Text 5"/>
+          <p:cNvSpPr/>
+          <p:nvPr/>
+        </p:nvSpPr>
+        <p:spPr>
+          <a:xfrm>
+            <a:off x="11137392" y="6510528"/>
+            <a:ext cx="411480" cy="201168"/>
+          </a:xfrm>
+          <a:prstGeom prst="rect">
+            <a:avLst/>
+          </a:prstGeom>
+          <a:noFill/>
+          <a:ln/>
+        </p:spPr>
+        <p:txBody>
+          <a:bodyPr wrap="square" lIns="0" tIns="0" rIns="0" bIns="0" rtlCol="0" anchor="ctr"/>
+          <a:lstStyle/>
+          <a:p>
+            <a:pPr algn="r" indent="0" marL="0">
+              <a:buNone/>
+            </a:pPr>
+            <a:r>
+              <a:rPr lang="en-US" sz="900" dirty="0">
+                <a:solidFill>
+                  <a:srgbClr val="5F7181"/>
+                </a:solidFill>
+                <a:latin typeface="Aptos" pitchFamily="34" charset="0"/>
+                <a:ea typeface="Aptos" pitchFamily="34" charset="-122"/>
+                <a:cs typeface="Aptos" pitchFamily="34" charset="-120"/>
+              </a:rPr>
+              <a:t>16</a:t>
+            </a:r>
+            <a:endParaRPr lang="en-US" sz="900" dirty="0"/>
+          </a:p>
+        </p:txBody>
+      </p:sp>
+      <p:sp>
+        <p:nvSpPr>
+          <p:cNvPr id="8" name="Shape 6"/>
           <p:cNvSpPr/>
           <p:nvPr/>
         </p:nvSpPr>
@@ -6580,7 +6850,7 @@
       </p:sp>
       <p:sp>
         <p:nvSpPr>
-          <p:cNvPr id="8" name="Text 6"/>
+          <p:cNvPr id="9" name="Text 7"/>
           <p:cNvSpPr/>
           <p:nvPr/>
         </p:nvSpPr>
@@ -6619,14 +6889,14 @@
       </p:sp>
       <p:sp>
         <p:nvSpPr>
-          <p:cNvPr id="9" name="Text 7"/>
+          <p:cNvPr id="10" name="Text 8"/>
           <p:cNvSpPr/>
           <p:nvPr/>
         </p:nvSpPr>
         <p:spPr>
           <a:xfrm>
             <a:off x="640080" y="621792"/>
-            <a:ext cx="10881360" cy="566928"/>
+            <a:ext cx="10881360" cy="713232"/>
           </a:xfrm>
           <a:prstGeom prst="rect">
             <a:avLst/>
@@ -6644,7 +6914,7 @@
               <a:buNone/>
             </a:pPr>
             <a:r>
-              <a:rPr lang="en-US" sz="2700" b="1" dirty="0">
+              <a:rPr lang="en-US" sz="3400" b="1" dirty="0">
                 <a:solidFill>
                   <a:srgbClr val="003A63"/>
                 </a:solidFill>
@@ -6654,20 +6924,20 @@
               </a:rPr>
               <a:t>Before You Begin</a:t>
             </a:r>
-            <a:endParaRPr lang="en-US" sz="2700" dirty="0"/>
-          </a:p>
-        </p:txBody>
-      </p:sp>
-      <p:sp>
-        <p:nvSpPr>
-          <p:cNvPr id="10" name="Text 8"/>
-          <p:cNvSpPr/>
-          <p:nvPr/>
-        </p:nvSpPr>
-        <p:spPr>
-          <a:xfrm>
-            <a:off x="868680" y="1417320"/>
-            <a:ext cx="6675120" cy="4434840"/>
+            <a:endParaRPr lang="en-US" sz="3400" dirty="0"/>
+          </a:p>
+        </p:txBody>
+      </p:sp>
+      <p:sp>
+        <p:nvSpPr>
+          <p:cNvPr id="11" name="Text 9"/>
+          <p:cNvSpPr/>
+          <p:nvPr/>
+        </p:nvSpPr>
+        <p:spPr>
+          <a:xfrm>
+            <a:off x="868680" y="1508760"/>
+            <a:ext cx="6537960" cy="4160520"/>
           </a:xfrm>
           <a:prstGeom prst="rect">
             <a:avLst/>
@@ -6682,7 +6952,7 @@
           <a:lstStyle/>
           <a:p>
             <a:r>
-              <a:rPr lang="en-US" sz="1700" dirty="0">
+              <a:rPr lang="en-US" sz="2100" dirty="0">
                 <a:solidFill>
                   <a:srgbClr val="17364A"/>
                 </a:solidFill>
@@ -6692,11 +6962,11 @@
               </a:rPr>
               <a:t>Choose a real or realistic public health AI use case.</a:t>
             </a:r>
-            <a:endParaRPr lang="en-US" sz="1700" dirty="0"/>
-          </a:p>
-          <a:p>
-            <a:r>
-              <a:rPr lang="en-US" sz="1700" dirty="0">
+            <a:endParaRPr lang="en-US" sz="2100" dirty="0"/>
+          </a:p>
+          <a:p>
+            <a:r>
+              <a:rPr lang="en-US" sz="2100" dirty="0">
                 <a:solidFill>
                   <a:srgbClr val="17364A"/>
                 </a:solidFill>
@@ -6704,13 +6974,13 @@
                 <a:ea typeface="Aptos" pitchFamily="34" charset="-122"/>
                 <a:cs typeface="Aptos" pitchFamily="34" charset="-120"/>
               </a:rPr>
-              <a:t>Document assumptions, unresolved questions, and which agency roles would need to review the artifact before it is adopted.</a:t>
-            </a:r>
-            <a:endParaRPr lang="en-US" sz="1700" dirty="0"/>
-          </a:p>
-          <a:p>
-            <a:r>
-              <a:rPr lang="en-US" sz="1700" dirty="0">
+              <a:t>Document assumptions, unresolved questions, and which agency roles would need to review the artifact.</a:t>
+            </a:r>
+            <a:endParaRPr lang="en-US" sz="2100" dirty="0"/>
+          </a:p>
+          <a:p>
+            <a:r>
+              <a:rPr lang="en-US" sz="2100" dirty="0">
                 <a:solidFill>
                   <a:srgbClr val="17364A"/>
                 </a:solidFill>
@@ -6718,15 +6988,15 @@
                 <a:ea typeface="Aptos" pitchFamily="34" charset="-122"/>
                 <a:cs typeface="Aptos" pitchFamily="34" charset="-120"/>
               </a:rPr>
-              <a:t>The exercise should produce a work product that could support governance review, leadership discussion, implementation.</a:t>
-            </a:r>
-            <a:endParaRPr lang="en-US" sz="1700" dirty="0"/>
-          </a:p>
-        </p:txBody>
-      </p:sp>
-      <p:sp>
-        <p:nvSpPr>
-          <p:cNvPr id="11" name="Shape 9"/>
+              <a:t>The exercise should produce a work product that could support governance review, leadership discussion,.</a:t>
+            </a:r>
+            <a:endParaRPr lang="en-US" sz="2100" dirty="0"/>
+          </a:p>
+        </p:txBody>
+      </p:sp>
+      <p:sp>
+        <p:nvSpPr>
+          <p:cNvPr id="12" name="Shape 10"/>
           <p:cNvSpPr/>
           <p:nvPr/>
         </p:nvSpPr>
@@ -6753,14 +7023,14 @@
       </p:sp>
       <p:sp>
         <p:nvSpPr>
-          <p:cNvPr id="12" name="Text 10"/>
+          <p:cNvPr id="13" name="Text 11"/>
           <p:cNvSpPr/>
           <p:nvPr/>
         </p:nvSpPr>
         <p:spPr>
           <a:xfrm>
             <a:off x="8074152" y="1563624"/>
-            <a:ext cx="2825496" cy="201168"/>
+            <a:ext cx="2825496" cy="256032"/>
           </a:xfrm>
           <a:prstGeom prst="rect">
             <a:avLst/>
@@ -6776,7 +7046,7 @@
               <a:buNone/>
             </a:pPr>
             <a:r>
-              <a:rPr lang="en-US" sz="950" b="1" dirty="0">
+              <a:rPr lang="en-US" sz="1300" b="1" dirty="0">
                 <a:solidFill>
                   <a:srgbClr val="0068B7"/>
                 </a:solidFill>
@@ -6786,20 +7056,20 @@
               </a:rPr>
               <a:t>Key idea</a:t>
             </a:r>
-            <a:endParaRPr lang="en-US" sz="950" dirty="0"/>
-          </a:p>
-        </p:txBody>
-      </p:sp>
-      <p:sp>
-        <p:nvSpPr>
-          <p:cNvPr id="13" name="Text 11"/>
-          <p:cNvSpPr/>
-          <p:nvPr/>
-        </p:nvSpPr>
-        <p:spPr>
-          <a:xfrm>
-            <a:off x="8074152" y="1856232"/>
-            <a:ext cx="2825496" cy="1261872"/>
+            <a:endParaRPr lang="en-US" sz="1300" dirty="0"/>
+          </a:p>
+        </p:txBody>
+      </p:sp>
+      <p:sp>
+        <p:nvSpPr>
+          <p:cNvPr id="14" name="Text 12"/>
+          <p:cNvSpPr/>
+          <p:nvPr/>
+        </p:nvSpPr>
+        <p:spPr>
+          <a:xfrm>
+            <a:off x="8074152" y="1920240"/>
+            <a:ext cx="2825496" cy="1188720"/>
           </a:xfrm>
           <a:prstGeom prst="rect">
             <a:avLst/>
@@ -6817,7 +7087,7 @@
               <a:buNone/>
             </a:pPr>
             <a:r>
-              <a:rPr lang="en-US" sz="1250" dirty="0">
+              <a:rPr lang="en-US" sz="1550" dirty="0">
                 <a:solidFill>
                   <a:srgbClr val="17364A"/>
                 </a:solidFill>
@@ -6827,13 +7097,13 @@
               </a:rPr>
               <a:t>Choose a real or realistic public health AI use case.</a:t>
             </a:r>
-            <a:endParaRPr lang="en-US" sz="1250" dirty="0"/>
-          </a:p>
-        </p:txBody>
-      </p:sp>
-      <p:sp>
-        <p:nvSpPr>
-          <p:cNvPr id="14" name="Shape 12"/>
+            <a:endParaRPr lang="en-US" sz="1550" dirty="0"/>
+          </a:p>
+        </p:txBody>
+      </p:sp>
+      <p:sp>
+        <p:nvSpPr>
+          <p:cNvPr id="15" name="Shape 13"/>
           <p:cNvSpPr/>
           <p:nvPr/>
         </p:nvSpPr>
@@ -6860,14 +7130,14 @@
       </p:sp>
       <p:sp>
         <p:nvSpPr>
-          <p:cNvPr id="15" name="Text 13"/>
+          <p:cNvPr id="16" name="Text 14"/>
           <p:cNvSpPr/>
           <p:nvPr/>
         </p:nvSpPr>
         <p:spPr>
           <a:xfrm>
             <a:off x="8074152" y="3666744"/>
-            <a:ext cx="2825496" cy="201168"/>
+            <a:ext cx="2825496" cy="256032"/>
           </a:xfrm>
           <a:prstGeom prst="rect">
             <a:avLst/>
@@ -6883,7 +7153,7 @@
               <a:buNone/>
             </a:pPr>
             <a:r>
-              <a:rPr lang="en-US" sz="950" b="1" dirty="0">
+              <a:rPr lang="en-US" sz="1300" b="1" dirty="0">
                 <a:solidFill>
                   <a:srgbClr val="0068B7"/>
                 </a:solidFill>
@@ -6893,20 +7163,20 @@
               </a:rPr>
               <a:t>Use this for</a:t>
             </a:r>
-            <a:endParaRPr lang="en-US" sz="950" dirty="0"/>
-          </a:p>
-        </p:txBody>
-      </p:sp>
-      <p:sp>
-        <p:nvSpPr>
-          <p:cNvPr id="16" name="Text 14"/>
-          <p:cNvSpPr/>
-          <p:nvPr/>
-        </p:nvSpPr>
-        <p:spPr>
-          <a:xfrm>
-            <a:off x="8074152" y="3959352"/>
-            <a:ext cx="2825496" cy="1170432"/>
+            <a:endParaRPr lang="en-US" sz="1300" dirty="0"/>
+          </a:p>
+        </p:txBody>
+      </p:sp>
+      <p:sp>
+        <p:nvSpPr>
+          <p:cNvPr id="17" name="Text 15"/>
+          <p:cNvSpPr/>
+          <p:nvPr/>
+        </p:nvSpPr>
+        <p:spPr>
+          <a:xfrm>
+            <a:off x="8074152" y="4023360"/>
+            <a:ext cx="2825496" cy="1097280"/>
           </a:xfrm>
           <a:prstGeom prst="rect">
             <a:avLst/>
@@ -6924,7 +7194,7 @@
               <a:buNone/>
             </a:pPr>
             <a:r>
-              <a:rPr lang="en-US" sz="1250" dirty="0">
+              <a:rPr lang="en-US" sz="1550" dirty="0">
                 <a:solidFill>
                   <a:srgbClr val="17364A"/>
                 </a:solidFill>
@@ -6934,7 +7204,7 @@
               </a:rPr>
               <a:t>Connect the concept to public health decisions, safeguards, documentation, or implementation work.</a:t>
             </a:r>
-            <a:endParaRPr lang="en-US" sz="1250" dirty="0"/>
+            <a:endParaRPr lang="en-US" sz="1550" dirty="0"/>
           </a:p>
         </p:txBody>
       </p:sp>
@@ -7131,7 +7401,7 @@
                 <a:ea typeface="Aptos" pitchFamily="34" charset="-122"/>
                 <a:cs typeface="Aptos" pitchFamily="34" charset="-120"/>
               </a:rPr>
-              <a:t>© Paula Soper</a:t>
+              <a:t>Â© Paula Soper</a:t>
             </a:r>
             <a:endParaRPr lang="en-US" sz="800" dirty="0"/>
           </a:p>
@@ -7139,7 +7409,46 @@
       </p:sp>
       <p:sp>
         <p:nvSpPr>
-          <p:cNvPr id="7" name="Shape 5"/>
+          <p:cNvPr id="7" name="Text 5"/>
+          <p:cNvSpPr/>
+          <p:nvPr/>
+        </p:nvSpPr>
+        <p:spPr>
+          <a:xfrm>
+            <a:off x="11137392" y="6510528"/>
+            <a:ext cx="411480" cy="201168"/>
+          </a:xfrm>
+          <a:prstGeom prst="rect">
+            <a:avLst/>
+          </a:prstGeom>
+          <a:noFill/>
+          <a:ln/>
+        </p:spPr>
+        <p:txBody>
+          <a:bodyPr wrap="square" lIns="0" tIns="0" rIns="0" bIns="0" rtlCol="0" anchor="ctr"/>
+          <a:lstStyle/>
+          <a:p>
+            <a:pPr algn="r" indent="0" marL="0">
+              <a:buNone/>
+            </a:pPr>
+            <a:r>
+              <a:rPr lang="en-US" sz="900" dirty="0">
+                <a:solidFill>
+                  <a:srgbClr val="5F7181"/>
+                </a:solidFill>
+                <a:latin typeface="Aptos" pitchFamily="34" charset="0"/>
+                <a:ea typeface="Aptos" pitchFamily="34" charset="-122"/>
+                <a:cs typeface="Aptos" pitchFamily="34" charset="-120"/>
+              </a:rPr>
+              <a:t>17</a:t>
+            </a:r>
+            <a:endParaRPr lang="en-US" sz="900" dirty="0"/>
+          </a:p>
+        </p:txBody>
+      </p:sp>
+      <p:sp>
+        <p:nvSpPr>
+          <p:cNvPr id="8" name="Shape 6"/>
           <p:cNvSpPr/>
           <p:nvPr/>
         </p:nvSpPr>
@@ -7164,7 +7473,7 @@
       </p:sp>
       <p:sp>
         <p:nvSpPr>
-          <p:cNvPr id="8" name="Text 6"/>
+          <p:cNvPr id="9" name="Text 7"/>
           <p:cNvSpPr/>
           <p:nvPr/>
         </p:nvSpPr>
@@ -7203,14 +7512,14 @@
       </p:sp>
       <p:sp>
         <p:nvSpPr>
-          <p:cNvPr id="9" name="Text 7"/>
+          <p:cNvPr id="10" name="Text 8"/>
           <p:cNvSpPr/>
           <p:nvPr/>
         </p:nvSpPr>
         <p:spPr>
           <a:xfrm>
             <a:off x="640080" y="621792"/>
-            <a:ext cx="10881360" cy="566928"/>
+            <a:ext cx="10881360" cy="713232"/>
           </a:xfrm>
           <a:prstGeom prst="rect">
             <a:avLst/>
@@ -7228,7 +7537,7 @@
               <a:buNone/>
             </a:pPr>
             <a:r>
-              <a:rPr lang="en-US" sz="2700" b="1" dirty="0">
+              <a:rPr lang="en-US" sz="3400" b="1" dirty="0">
                 <a:solidFill>
                   <a:srgbClr val="003A63"/>
                 </a:solidFill>
@@ -7238,20 +7547,20 @@
               </a:rPr>
               <a:t>Expected Artifact or Evidence</a:t>
             </a:r>
-            <a:endParaRPr lang="en-US" sz="2700" dirty="0"/>
-          </a:p>
-        </p:txBody>
-      </p:sp>
-      <p:sp>
-        <p:nvSpPr>
-          <p:cNvPr id="10" name="Text 8"/>
-          <p:cNvSpPr/>
-          <p:nvPr/>
-        </p:nvSpPr>
-        <p:spPr>
-          <a:xfrm>
-            <a:off x="868680" y="1417320"/>
-            <a:ext cx="6675120" cy="4434840"/>
+            <a:endParaRPr lang="en-US" sz="3400" dirty="0"/>
+          </a:p>
+        </p:txBody>
+      </p:sp>
+      <p:sp>
+        <p:nvSpPr>
+          <p:cNvPr id="11" name="Text 9"/>
+          <p:cNvSpPr/>
+          <p:nvPr/>
+        </p:nvSpPr>
+        <p:spPr>
+          <a:xfrm>
+            <a:off x="868680" y="1508760"/>
+            <a:ext cx="6537960" cy="4160520"/>
           </a:xfrm>
           <a:prstGeom prst="rect">
             <a:avLst/>
@@ -7266,7 +7575,7 @@
           <a:lstStyle/>
           <a:p>
             <a:r>
-              <a:rPr lang="en-US" sz="1700" dirty="0">
+              <a:rPr lang="en-US" sz="2100" dirty="0">
                 <a:solidFill>
                   <a:srgbClr val="17364A"/>
                 </a:solidFill>
@@ -7274,15 +7583,15 @@
                 <a:ea typeface="Aptos" pitchFamily="34" charset="-122"/>
                 <a:cs typeface="Aptos" pitchFamily="34" charset="-120"/>
               </a:rPr>
-              <a:t>AI business case worksheet; total cost of ownership estimate; benefits realization plan; alternatives analysis.</a:t>
-            </a:r>
-            <a:endParaRPr lang="en-US" sz="1700" dirty="0"/>
-          </a:p>
-        </p:txBody>
-      </p:sp>
-      <p:sp>
-        <p:nvSpPr>
-          <p:cNvPr id="11" name="Shape 9"/>
+              <a:t>AI business case worksheet; total cost of ownership estimate; benefits realization plan; alternatives.</a:t>
+            </a:r>
+            <a:endParaRPr lang="en-US" sz="2100" dirty="0"/>
+          </a:p>
+        </p:txBody>
+      </p:sp>
+      <p:sp>
+        <p:nvSpPr>
+          <p:cNvPr id="12" name="Shape 10"/>
           <p:cNvSpPr/>
           <p:nvPr/>
         </p:nvSpPr>
@@ -7309,14 +7618,14 @@
       </p:sp>
       <p:sp>
         <p:nvSpPr>
-          <p:cNvPr id="12" name="Text 10"/>
+          <p:cNvPr id="13" name="Text 11"/>
           <p:cNvSpPr/>
           <p:nvPr/>
         </p:nvSpPr>
         <p:spPr>
           <a:xfrm>
             <a:off x="8074152" y="1563624"/>
-            <a:ext cx="2825496" cy="201168"/>
+            <a:ext cx="2825496" cy="256032"/>
           </a:xfrm>
           <a:prstGeom prst="rect">
             <a:avLst/>
@@ -7332,7 +7641,7 @@
               <a:buNone/>
             </a:pPr>
             <a:r>
-              <a:rPr lang="en-US" sz="950" b="1" dirty="0">
+              <a:rPr lang="en-US" sz="1300" b="1" dirty="0">
                 <a:solidFill>
                   <a:srgbClr val="0068B7"/>
                 </a:solidFill>
@@ -7342,20 +7651,20 @@
               </a:rPr>
               <a:t>Key idea</a:t>
             </a:r>
-            <a:endParaRPr lang="en-US" sz="950" dirty="0"/>
-          </a:p>
-        </p:txBody>
-      </p:sp>
-      <p:sp>
-        <p:nvSpPr>
-          <p:cNvPr id="13" name="Text 11"/>
-          <p:cNvSpPr/>
-          <p:nvPr/>
-        </p:nvSpPr>
-        <p:spPr>
-          <a:xfrm>
-            <a:off x="8074152" y="1856232"/>
-            <a:ext cx="2825496" cy="1261872"/>
+            <a:endParaRPr lang="en-US" sz="1300" dirty="0"/>
+          </a:p>
+        </p:txBody>
+      </p:sp>
+      <p:sp>
+        <p:nvSpPr>
+          <p:cNvPr id="14" name="Text 12"/>
+          <p:cNvSpPr/>
+          <p:nvPr/>
+        </p:nvSpPr>
+        <p:spPr>
+          <a:xfrm>
+            <a:off x="8074152" y="1920240"/>
+            <a:ext cx="2825496" cy="1188720"/>
           </a:xfrm>
           <a:prstGeom prst="rect">
             <a:avLst/>
@@ -7373,7 +7682,7 @@
               <a:buNone/>
             </a:pPr>
             <a:r>
-              <a:rPr lang="en-US" sz="1250" dirty="0">
+              <a:rPr lang="en-US" sz="1550" dirty="0">
                 <a:solidFill>
                   <a:srgbClr val="17364A"/>
                 </a:solidFill>
@@ -7381,15 +7690,15 @@
                 <a:ea typeface="Aptos" pitchFamily="34" charset="-122"/>
                 <a:cs typeface="Aptos" pitchFamily="34" charset="-120"/>
               </a:rPr>
-              <a:t>AI business case worksheet; total cost of ownership estimate; benefits realization plan; alternatives analysis.</a:t>
-            </a:r>
-            <a:endParaRPr lang="en-US" sz="1250" dirty="0"/>
-          </a:p>
-        </p:txBody>
-      </p:sp>
-      <p:sp>
-        <p:nvSpPr>
-          <p:cNvPr id="14" name="Shape 12"/>
+              <a:t>AI business case worksheet; total cost of ownership estimate; benefits realization plan; alternatives.</a:t>
+            </a:r>
+            <a:endParaRPr lang="en-US" sz="1550" dirty="0"/>
+          </a:p>
+        </p:txBody>
+      </p:sp>
+      <p:sp>
+        <p:nvSpPr>
+          <p:cNvPr id="15" name="Shape 13"/>
           <p:cNvSpPr/>
           <p:nvPr/>
         </p:nvSpPr>
@@ -7416,14 +7725,14 @@
       </p:sp>
       <p:sp>
         <p:nvSpPr>
-          <p:cNvPr id="15" name="Text 13"/>
+          <p:cNvPr id="16" name="Text 14"/>
           <p:cNvSpPr/>
           <p:nvPr/>
         </p:nvSpPr>
         <p:spPr>
           <a:xfrm>
             <a:off x="8074152" y="3666744"/>
-            <a:ext cx="2825496" cy="201168"/>
+            <a:ext cx="2825496" cy="256032"/>
           </a:xfrm>
           <a:prstGeom prst="rect">
             <a:avLst/>
@@ -7439,7 +7748,7 @@
               <a:buNone/>
             </a:pPr>
             <a:r>
-              <a:rPr lang="en-US" sz="950" b="1" dirty="0">
+              <a:rPr lang="en-US" sz="1300" b="1" dirty="0">
                 <a:solidFill>
                   <a:srgbClr val="0068B7"/>
                 </a:solidFill>
@@ -7449,20 +7758,20 @@
               </a:rPr>
               <a:t>Use this for</a:t>
             </a:r>
-            <a:endParaRPr lang="en-US" sz="950" dirty="0"/>
-          </a:p>
-        </p:txBody>
-      </p:sp>
-      <p:sp>
-        <p:nvSpPr>
-          <p:cNvPr id="16" name="Text 14"/>
-          <p:cNvSpPr/>
-          <p:nvPr/>
-        </p:nvSpPr>
-        <p:spPr>
-          <a:xfrm>
-            <a:off x="8074152" y="3959352"/>
-            <a:ext cx="2825496" cy="1170432"/>
+            <a:endParaRPr lang="en-US" sz="1300" dirty="0"/>
+          </a:p>
+        </p:txBody>
+      </p:sp>
+      <p:sp>
+        <p:nvSpPr>
+          <p:cNvPr id="17" name="Text 15"/>
+          <p:cNvSpPr/>
+          <p:nvPr/>
+        </p:nvSpPr>
+        <p:spPr>
+          <a:xfrm>
+            <a:off x="8074152" y="4023360"/>
+            <a:ext cx="2825496" cy="1097280"/>
           </a:xfrm>
           <a:prstGeom prst="rect">
             <a:avLst/>
@@ -7480,7 +7789,7 @@
               <a:buNone/>
             </a:pPr>
             <a:r>
-              <a:rPr lang="en-US" sz="1250" dirty="0">
+              <a:rPr lang="en-US" sz="1550" dirty="0">
                 <a:solidFill>
                   <a:srgbClr val="17364A"/>
                 </a:solidFill>
@@ -7490,7 +7799,7 @@
               </a:rPr>
               <a:t>Connect the concept to public health decisions, safeguards, documentation, or implementation work.</a:t>
             </a:r>
-            <a:endParaRPr lang="en-US" sz="1250" dirty="0"/>
+            <a:endParaRPr lang="en-US" sz="1550" dirty="0"/>
           </a:p>
         </p:txBody>
       </p:sp>
@@ -7687,7 +7996,7 @@
                 <a:ea typeface="Aptos" pitchFamily="34" charset="-122"/>
                 <a:cs typeface="Aptos" pitchFamily="34" charset="-120"/>
               </a:rPr>
-              <a:t>© Paula Soper</a:t>
+              <a:t>Â© Paula Soper</a:t>
             </a:r>
             <a:endParaRPr lang="en-US" sz="800" dirty="0"/>
           </a:p>
@@ -7695,7 +8004,46 @@
       </p:sp>
       <p:sp>
         <p:nvSpPr>
-          <p:cNvPr id="7" name="Shape 5"/>
+          <p:cNvPr id="7" name="Text 5"/>
+          <p:cNvSpPr/>
+          <p:nvPr/>
+        </p:nvSpPr>
+        <p:spPr>
+          <a:xfrm>
+            <a:off x="11137392" y="6510528"/>
+            <a:ext cx="411480" cy="201168"/>
+          </a:xfrm>
+          <a:prstGeom prst="rect">
+            <a:avLst/>
+          </a:prstGeom>
+          <a:noFill/>
+          <a:ln/>
+        </p:spPr>
+        <p:txBody>
+          <a:bodyPr wrap="square" lIns="0" tIns="0" rIns="0" bIns="0" rtlCol="0" anchor="ctr"/>
+          <a:lstStyle/>
+          <a:p>
+            <a:pPr algn="r" indent="0" marL="0">
+              <a:buNone/>
+            </a:pPr>
+            <a:r>
+              <a:rPr lang="en-US" sz="900" dirty="0">
+                <a:solidFill>
+                  <a:srgbClr val="5F7181"/>
+                </a:solidFill>
+                <a:latin typeface="Aptos" pitchFamily="34" charset="0"/>
+                <a:ea typeface="Aptos" pitchFamily="34" charset="-122"/>
+                <a:cs typeface="Aptos" pitchFamily="34" charset="-120"/>
+              </a:rPr>
+              <a:t>18</a:t>
+            </a:r>
+            <a:endParaRPr lang="en-US" sz="900" dirty="0"/>
+          </a:p>
+        </p:txBody>
+      </p:sp>
+      <p:sp>
+        <p:nvSpPr>
+          <p:cNvPr id="8" name="Shape 6"/>
           <p:cNvSpPr/>
           <p:nvPr/>
         </p:nvSpPr>
@@ -7720,7 +8068,7 @@
       </p:sp>
       <p:sp>
         <p:nvSpPr>
-          <p:cNvPr id="8" name="Text 6"/>
+          <p:cNvPr id="9" name="Text 7"/>
           <p:cNvSpPr/>
           <p:nvPr/>
         </p:nvSpPr>
@@ -7759,14 +8107,14 @@
       </p:sp>
       <p:sp>
         <p:nvSpPr>
-          <p:cNvPr id="9" name="Text 7"/>
+          <p:cNvPr id="10" name="Text 8"/>
           <p:cNvSpPr/>
           <p:nvPr/>
         </p:nvSpPr>
         <p:spPr>
           <a:xfrm>
             <a:off x="640080" y="621792"/>
-            <a:ext cx="10881360" cy="566928"/>
+            <a:ext cx="10881360" cy="713232"/>
           </a:xfrm>
           <a:prstGeom prst="rect">
             <a:avLst/>
@@ -7784,7 +8132,7 @@
               <a:buNone/>
             </a:pPr>
             <a:r>
-              <a:rPr lang="en-US" sz="2700" b="1" dirty="0">
+              <a:rPr lang="en-US" sz="3400" b="1" dirty="0">
                 <a:solidFill>
                   <a:srgbClr val="003A63"/>
                 </a:solidFill>
@@ -7794,20 +8142,20 @@
               </a:rPr>
               <a:t>Expected Assignment</a:t>
             </a:r>
-            <a:endParaRPr lang="en-US" sz="2700" dirty="0"/>
-          </a:p>
-        </p:txBody>
-      </p:sp>
-      <p:sp>
-        <p:nvSpPr>
-          <p:cNvPr id="10" name="Text 8"/>
-          <p:cNvSpPr/>
-          <p:nvPr/>
-        </p:nvSpPr>
-        <p:spPr>
-          <a:xfrm>
-            <a:off x="868680" y="1417320"/>
-            <a:ext cx="6675120" cy="4434840"/>
+            <a:endParaRPr lang="en-US" sz="3400" dirty="0"/>
+          </a:p>
+        </p:txBody>
+      </p:sp>
+      <p:sp>
+        <p:nvSpPr>
+          <p:cNvPr id="11" name="Text 9"/>
+          <p:cNvSpPr/>
+          <p:nvPr/>
+        </p:nvSpPr>
+        <p:spPr>
+          <a:xfrm>
+            <a:off x="868680" y="1508760"/>
+            <a:ext cx="6537960" cy="4160520"/>
           </a:xfrm>
           <a:prstGeom prst="rect">
             <a:avLst/>
@@ -7822,7 +8170,7 @@
           <a:lstStyle/>
           <a:p>
             <a:r>
-              <a:rPr lang="en-US" sz="1700" dirty="0">
+              <a:rPr lang="en-US" sz="2100" dirty="0">
                 <a:solidFill>
                   <a:srgbClr val="17364A"/>
                 </a:solidFill>
@@ -7830,15 +8178,15 @@
                 <a:ea typeface="Aptos" pitchFamily="34" charset="-122"/>
                 <a:cs typeface="Aptos" pitchFamily="34" charset="-120"/>
               </a:rPr>
-              <a:t>AI business case worksheet; total cost of ownership estimate; benefits realization plan; alternatives analysis.</a:t>
-            </a:r>
-            <a:endParaRPr lang="en-US" sz="1700" dirty="0"/>
-          </a:p>
-        </p:txBody>
-      </p:sp>
-      <p:sp>
-        <p:nvSpPr>
-          <p:cNvPr id="11" name="Shape 9"/>
+              <a:t>AI business case worksheet; total cost of ownership estimate; benefits realization plan; alternatives.</a:t>
+            </a:r>
+            <a:endParaRPr lang="en-US" sz="2100" dirty="0"/>
+          </a:p>
+        </p:txBody>
+      </p:sp>
+      <p:sp>
+        <p:nvSpPr>
+          <p:cNvPr id="12" name="Shape 10"/>
           <p:cNvSpPr/>
           <p:nvPr/>
         </p:nvSpPr>
@@ -7865,14 +8213,14 @@
       </p:sp>
       <p:sp>
         <p:nvSpPr>
-          <p:cNvPr id="12" name="Text 10"/>
+          <p:cNvPr id="13" name="Text 11"/>
           <p:cNvSpPr/>
           <p:nvPr/>
         </p:nvSpPr>
         <p:spPr>
           <a:xfrm>
             <a:off x="8074152" y="1563624"/>
-            <a:ext cx="2825496" cy="201168"/>
+            <a:ext cx="2825496" cy="256032"/>
           </a:xfrm>
           <a:prstGeom prst="rect">
             <a:avLst/>
@@ -7888,7 +8236,7 @@
               <a:buNone/>
             </a:pPr>
             <a:r>
-              <a:rPr lang="en-US" sz="950" b="1" dirty="0">
+              <a:rPr lang="en-US" sz="1300" b="1" dirty="0">
                 <a:solidFill>
                   <a:srgbClr val="0068B7"/>
                 </a:solidFill>
@@ -7898,20 +8246,20 @@
               </a:rPr>
               <a:t>Key idea</a:t>
             </a:r>
-            <a:endParaRPr lang="en-US" sz="950" dirty="0"/>
-          </a:p>
-        </p:txBody>
-      </p:sp>
-      <p:sp>
-        <p:nvSpPr>
-          <p:cNvPr id="13" name="Text 11"/>
-          <p:cNvSpPr/>
-          <p:nvPr/>
-        </p:nvSpPr>
-        <p:spPr>
-          <a:xfrm>
-            <a:off x="8074152" y="1856232"/>
-            <a:ext cx="2825496" cy="1261872"/>
+            <a:endParaRPr lang="en-US" sz="1300" dirty="0"/>
+          </a:p>
+        </p:txBody>
+      </p:sp>
+      <p:sp>
+        <p:nvSpPr>
+          <p:cNvPr id="14" name="Text 12"/>
+          <p:cNvSpPr/>
+          <p:nvPr/>
+        </p:nvSpPr>
+        <p:spPr>
+          <a:xfrm>
+            <a:off x="8074152" y="1920240"/>
+            <a:ext cx="2825496" cy="1188720"/>
           </a:xfrm>
           <a:prstGeom prst="rect">
             <a:avLst/>
@@ -7929,7 +8277,7 @@
               <a:buNone/>
             </a:pPr>
             <a:r>
-              <a:rPr lang="en-US" sz="1250" dirty="0">
+              <a:rPr lang="en-US" sz="1550" dirty="0">
                 <a:solidFill>
                   <a:srgbClr val="17364A"/>
                 </a:solidFill>
@@ -7937,15 +8285,15 @@
                 <a:ea typeface="Aptos" pitchFamily="34" charset="-122"/>
                 <a:cs typeface="Aptos" pitchFamily="34" charset="-120"/>
               </a:rPr>
-              <a:t>AI business case worksheet; total cost of ownership estimate; benefits realization plan; alternatives analysis.</a:t>
-            </a:r>
-            <a:endParaRPr lang="en-US" sz="1250" dirty="0"/>
-          </a:p>
-        </p:txBody>
-      </p:sp>
-      <p:sp>
-        <p:nvSpPr>
-          <p:cNvPr id="14" name="Shape 12"/>
+              <a:t>AI business case worksheet; total cost of ownership estimate; benefits realization plan; alternatives.</a:t>
+            </a:r>
+            <a:endParaRPr lang="en-US" sz="1550" dirty="0"/>
+          </a:p>
+        </p:txBody>
+      </p:sp>
+      <p:sp>
+        <p:nvSpPr>
+          <p:cNvPr id="15" name="Shape 13"/>
           <p:cNvSpPr/>
           <p:nvPr/>
         </p:nvSpPr>
@@ -7972,14 +8320,14 @@
       </p:sp>
       <p:sp>
         <p:nvSpPr>
-          <p:cNvPr id="15" name="Text 13"/>
+          <p:cNvPr id="16" name="Text 14"/>
           <p:cNvSpPr/>
           <p:nvPr/>
         </p:nvSpPr>
         <p:spPr>
           <a:xfrm>
             <a:off x="8074152" y="3666744"/>
-            <a:ext cx="2825496" cy="201168"/>
+            <a:ext cx="2825496" cy="256032"/>
           </a:xfrm>
           <a:prstGeom prst="rect">
             <a:avLst/>
@@ -7995,7 +8343,7 @@
               <a:buNone/>
             </a:pPr>
             <a:r>
-              <a:rPr lang="en-US" sz="950" b="1" dirty="0">
+              <a:rPr lang="en-US" sz="1300" b="1" dirty="0">
                 <a:solidFill>
                   <a:srgbClr val="0068B7"/>
                 </a:solidFill>
@@ -8005,20 +8353,20 @@
               </a:rPr>
               <a:t>Use this for</a:t>
             </a:r>
-            <a:endParaRPr lang="en-US" sz="950" dirty="0"/>
-          </a:p>
-        </p:txBody>
-      </p:sp>
-      <p:sp>
-        <p:nvSpPr>
-          <p:cNvPr id="16" name="Text 14"/>
-          <p:cNvSpPr/>
-          <p:nvPr/>
-        </p:nvSpPr>
-        <p:spPr>
-          <a:xfrm>
-            <a:off x="8074152" y="3959352"/>
-            <a:ext cx="2825496" cy="1170432"/>
+            <a:endParaRPr lang="en-US" sz="1300" dirty="0"/>
+          </a:p>
+        </p:txBody>
+      </p:sp>
+      <p:sp>
+        <p:nvSpPr>
+          <p:cNvPr id="17" name="Text 15"/>
+          <p:cNvSpPr/>
+          <p:nvPr/>
+        </p:nvSpPr>
+        <p:spPr>
+          <a:xfrm>
+            <a:off x="8074152" y="4023360"/>
+            <a:ext cx="2825496" cy="1097280"/>
           </a:xfrm>
           <a:prstGeom prst="rect">
             <a:avLst/>
@@ -8036,7 +8384,7 @@
               <a:buNone/>
             </a:pPr>
             <a:r>
-              <a:rPr lang="en-US" sz="1250" dirty="0">
+              <a:rPr lang="en-US" sz="1550" dirty="0">
                 <a:solidFill>
                   <a:srgbClr val="17364A"/>
                 </a:solidFill>
@@ -8046,7 +8394,7 @@
               </a:rPr>
               <a:t>Connect the concept to public health decisions, safeguards, documentation, or implementation work.</a:t>
             </a:r>
-            <a:endParaRPr lang="en-US" sz="1250" dirty="0"/>
+            <a:endParaRPr lang="en-US" sz="1550" dirty="0"/>
           </a:p>
         </p:txBody>
       </p:sp>
@@ -8243,7 +8591,7 @@
                 <a:ea typeface="Aptos" pitchFamily="34" charset="-122"/>
                 <a:cs typeface="Aptos" pitchFamily="34" charset="-120"/>
               </a:rPr>
-              <a:t>© Paula Soper</a:t>
+              <a:t>Â© Paula Soper</a:t>
             </a:r>
             <a:endParaRPr lang="en-US" sz="800" dirty="0"/>
           </a:p>
@@ -8251,7 +8599,46 @@
       </p:sp>
       <p:sp>
         <p:nvSpPr>
-          <p:cNvPr id="7" name="Shape 5"/>
+          <p:cNvPr id="7" name="Text 5"/>
+          <p:cNvSpPr/>
+          <p:nvPr/>
+        </p:nvSpPr>
+        <p:spPr>
+          <a:xfrm>
+            <a:off x="11137392" y="6510528"/>
+            <a:ext cx="411480" cy="201168"/>
+          </a:xfrm>
+          <a:prstGeom prst="rect">
+            <a:avLst/>
+          </a:prstGeom>
+          <a:noFill/>
+          <a:ln/>
+        </p:spPr>
+        <p:txBody>
+          <a:bodyPr wrap="square" lIns="0" tIns="0" rIns="0" bIns="0" rtlCol="0" anchor="ctr"/>
+          <a:lstStyle/>
+          <a:p>
+            <a:pPr algn="r" indent="0" marL="0">
+              <a:buNone/>
+            </a:pPr>
+            <a:r>
+              <a:rPr lang="en-US" sz="900" dirty="0">
+                <a:solidFill>
+                  <a:srgbClr val="5F7181"/>
+                </a:solidFill>
+                <a:latin typeface="Aptos" pitchFamily="34" charset="0"/>
+                <a:ea typeface="Aptos" pitchFamily="34" charset="-122"/>
+                <a:cs typeface="Aptos" pitchFamily="34" charset="-120"/>
+              </a:rPr>
+              <a:t>19</a:t>
+            </a:r>
+            <a:endParaRPr lang="en-US" sz="900" dirty="0"/>
+          </a:p>
+        </p:txBody>
+      </p:sp>
+      <p:sp>
+        <p:nvSpPr>
+          <p:cNvPr id="8" name="Shape 6"/>
           <p:cNvSpPr/>
           <p:nvPr/>
         </p:nvSpPr>
@@ -8276,7 +8663,7 @@
       </p:sp>
       <p:sp>
         <p:nvSpPr>
-          <p:cNvPr id="8" name="Text 6"/>
+          <p:cNvPr id="9" name="Text 7"/>
           <p:cNvSpPr/>
           <p:nvPr/>
         </p:nvSpPr>
@@ -8315,14 +8702,14 @@
       </p:sp>
       <p:sp>
         <p:nvSpPr>
-          <p:cNvPr id="9" name="Text 7"/>
+          <p:cNvPr id="10" name="Text 8"/>
           <p:cNvSpPr/>
           <p:nvPr/>
         </p:nvSpPr>
         <p:spPr>
           <a:xfrm>
             <a:off x="640080" y="621792"/>
-            <a:ext cx="10881360" cy="566928"/>
+            <a:ext cx="10881360" cy="713232"/>
           </a:xfrm>
           <a:prstGeom prst="rect">
             <a:avLst/>
@@ -8340,7 +8727,7 @@
               <a:buNone/>
             </a:pPr>
             <a:r>
-              <a:rPr lang="en-US" sz="2700" b="1" dirty="0">
+              <a:rPr lang="en-US" sz="3400" b="1" dirty="0">
                 <a:solidFill>
                   <a:srgbClr val="003A63"/>
                 </a:solidFill>
@@ -8350,20 +8737,20 @@
               </a:rPr>
               <a:t>Knowledge Check</a:t>
             </a:r>
-            <a:endParaRPr lang="en-US" sz="2700" dirty="0"/>
-          </a:p>
-        </p:txBody>
-      </p:sp>
-      <p:sp>
-        <p:nvSpPr>
-          <p:cNvPr id="10" name="Text 8"/>
-          <p:cNvSpPr/>
-          <p:nvPr/>
-        </p:nvSpPr>
-        <p:spPr>
-          <a:xfrm>
-            <a:off x="868680" y="1417320"/>
-            <a:ext cx="6675120" cy="4434840"/>
+            <a:endParaRPr lang="en-US" sz="3400" dirty="0"/>
+          </a:p>
+        </p:txBody>
+      </p:sp>
+      <p:sp>
+        <p:nvSpPr>
+          <p:cNvPr id="11" name="Text 9"/>
+          <p:cNvSpPr/>
+          <p:nvPr/>
+        </p:nvSpPr>
+        <p:spPr>
+          <a:xfrm>
+            <a:off x="868680" y="1508760"/>
+            <a:ext cx="6537960" cy="4160520"/>
           </a:xfrm>
           <a:prstGeom prst="rect">
             <a:avLst/>
@@ -8378,7 +8765,7 @@
           <a:lstStyle/>
           <a:p>
             <a:r>
-              <a:rPr lang="en-US" sz="1700" dirty="0">
+              <a:rPr lang="en-US" sz="2100" dirty="0">
                 <a:solidFill>
                   <a:srgbClr val="17364A"/>
                 </a:solidFill>
@@ -8388,11 +8775,11 @@
               </a:rPr>
               <a:t>1. What is the strongest reason this module topic belongs in AI leadership and governance training?</a:t>
             </a:r>
-            <a:endParaRPr lang="en-US" sz="1700" dirty="0"/>
-          </a:p>
-          <a:p>
-            <a:r>
-              <a:rPr lang="en-US" sz="1700" dirty="0">
+            <a:endParaRPr lang="en-US" sz="2100" dirty="0"/>
+          </a:p>
+          <a:p>
+            <a:r>
+              <a:rPr lang="en-US" sz="2100" dirty="0">
                 <a:solidFill>
                   <a:srgbClr val="17364A"/>
                 </a:solidFill>
@@ -8402,11 +8789,11 @@
               </a:rPr>
               <a:t>2. Which practice best supports accountable public health AI governance?</a:t>
             </a:r>
-            <a:endParaRPr lang="en-US" sz="1700" dirty="0"/>
-          </a:p>
-          <a:p>
-            <a:r>
-              <a:rPr lang="en-US" sz="1700" dirty="0">
+            <a:endParaRPr lang="en-US" sz="2100" dirty="0"/>
+          </a:p>
+          <a:p>
+            <a:r>
+              <a:rPr lang="en-US" sz="2100" dirty="0">
                 <a:solidFill>
                   <a:srgbClr val="17364A"/>
                 </a:solidFill>
@@ -8416,27 +8803,13 @@
               </a:rPr>
               <a:t>3. When should an AI use case be escalated for leadership or governance review?</a:t>
             </a:r>
-            <a:endParaRPr lang="en-US" sz="1700" dirty="0"/>
-          </a:p>
-          <a:p>
-            <a:r>
-              <a:rPr lang="en-US" sz="1700" dirty="0">
-                <a:solidFill>
-                  <a:srgbClr val="17364A"/>
-                </a:solidFill>
-                <a:latin typeface="Aptos" pitchFamily="34" charset="0"/>
-                <a:ea typeface="Aptos" pitchFamily="34" charset="-122"/>
-                <a:cs typeface="Aptos" pitchFamily="34" charset="-120"/>
-              </a:rPr>
-              <a:t>4. What is weak evidence of completion for a leadership and governance module?</a:t>
-            </a:r>
-            <a:endParaRPr lang="en-US" sz="1700" dirty="0"/>
-          </a:p>
-        </p:txBody>
-      </p:sp>
-      <p:sp>
-        <p:nvSpPr>
-          <p:cNvPr id="11" name="Shape 9"/>
+            <a:endParaRPr lang="en-US" sz="2100" dirty="0"/>
+          </a:p>
+        </p:txBody>
+      </p:sp>
+      <p:sp>
+        <p:nvSpPr>
+          <p:cNvPr id="12" name="Shape 10"/>
           <p:cNvSpPr/>
           <p:nvPr/>
         </p:nvSpPr>
@@ -8463,14 +8836,14 @@
       </p:sp>
       <p:sp>
         <p:nvSpPr>
-          <p:cNvPr id="12" name="Text 10"/>
+          <p:cNvPr id="13" name="Text 11"/>
           <p:cNvSpPr/>
           <p:nvPr/>
         </p:nvSpPr>
         <p:spPr>
           <a:xfrm>
             <a:off x="8074152" y="1563624"/>
-            <a:ext cx="2825496" cy="201168"/>
+            <a:ext cx="2825496" cy="256032"/>
           </a:xfrm>
           <a:prstGeom prst="rect">
             <a:avLst/>
@@ -8486,7 +8859,7 @@
               <a:buNone/>
             </a:pPr>
             <a:r>
-              <a:rPr lang="en-US" sz="950" b="1" dirty="0">
+              <a:rPr lang="en-US" sz="1300" b="1" dirty="0">
                 <a:solidFill>
                   <a:srgbClr val="0068B7"/>
                 </a:solidFill>
@@ -8496,20 +8869,20 @@
               </a:rPr>
               <a:t>Key idea</a:t>
             </a:r>
-            <a:endParaRPr lang="en-US" sz="950" dirty="0"/>
-          </a:p>
-        </p:txBody>
-      </p:sp>
-      <p:sp>
-        <p:nvSpPr>
-          <p:cNvPr id="13" name="Text 11"/>
-          <p:cNvSpPr/>
-          <p:nvPr/>
-        </p:nvSpPr>
-        <p:spPr>
-          <a:xfrm>
-            <a:off x="8074152" y="1856232"/>
-            <a:ext cx="2825496" cy="1261872"/>
+            <a:endParaRPr lang="en-US" sz="1300" dirty="0"/>
+          </a:p>
+        </p:txBody>
+      </p:sp>
+      <p:sp>
+        <p:nvSpPr>
+          <p:cNvPr id="14" name="Text 12"/>
+          <p:cNvSpPr/>
+          <p:nvPr/>
+        </p:nvSpPr>
+        <p:spPr>
+          <a:xfrm>
+            <a:off x="8074152" y="1920240"/>
+            <a:ext cx="2825496" cy="1188720"/>
           </a:xfrm>
           <a:prstGeom prst="rect">
             <a:avLst/>
@@ -8527,7 +8900,7 @@
               <a:buNone/>
             </a:pPr>
             <a:r>
-              <a:rPr lang="en-US" sz="1250" dirty="0">
+              <a:rPr lang="en-US" sz="1550" dirty="0">
                 <a:solidFill>
                   <a:srgbClr val="17364A"/>
                 </a:solidFill>
@@ -8537,13 +8910,13 @@
               </a:rPr>
               <a:t>1. What is the strongest reason this module topic belongs in AI leadership and governance training?</a:t>
             </a:r>
-            <a:endParaRPr lang="en-US" sz="1250" dirty="0"/>
-          </a:p>
-        </p:txBody>
-      </p:sp>
-      <p:sp>
-        <p:nvSpPr>
-          <p:cNvPr id="14" name="Shape 12"/>
+            <a:endParaRPr lang="en-US" sz="1550" dirty="0"/>
+          </a:p>
+        </p:txBody>
+      </p:sp>
+      <p:sp>
+        <p:nvSpPr>
+          <p:cNvPr id="15" name="Shape 13"/>
           <p:cNvSpPr/>
           <p:nvPr/>
         </p:nvSpPr>
@@ -8570,14 +8943,14 @@
       </p:sp>
       <p:sp>
         <p:nvSpPr>
-          <p:cNvPr id="15" name="Text 13"/>
+          <p:cNvPr id="16" name="Text 14"/>
           <p:cNvSpPr/>
           <p:nvPr/>
         </p:nvSpPr>
         <p:spPr>
           <a:xfrm>
             <a:off x="8074152" y="3666744"/>
-            <a:ext cx="2825496" cy="201168"/>
+            <a:ext cx="2825496" cy="256032"/>
           </a:xfrm>
           <a:prstGeom prst="rect">
             <a:avLst/>
@@ -8593,7 +8966,7 @@
               <a:buNone/>
             </a:pPr>
             <a:r>
-              <a:rPr lang="en-US" sz="950" b="1" dirty="0">
+              <a:rPr lang="en-US" sz="1300" b="1" dirty="0">
                 <a:solidFill>
                   <a:srgbClr val="0068B7"/>
                 </a:solidFill>
@@ -8603,20 +8976,20 @@
               </a:rPr>
               <a:t>Use this for</a:t>
             </a:r>
-            <a:endParaRPr lang="en-US" sz="950" dirty="0"/>
-          </a:p>
-        </p:txBody>
-      </p:sp>
-      <p:sp>
-        <p:nvSpPr>
-          <p:cNvPr id="16" name="Text 14"/>
-          <p:cNvSpPr/>
-          <p:nvPr/>
-        </p:nvSpPr>
-        <p:spPr>
-          <a:xfrm>
-            <a:off x="8074152" y="3959352"/>
-            <a:ext cx="2825496" cy="1170432"/>
+            <a:endParaRPr lang="en-US" sz="1300" dirty="0"/>
+          </a:p>
+        </p:txBody>
+      </p:sp>
+      <p:sp>
+        <p:nvSpPr>
+          <p:cNvPr id="17" name="Text 15"/>
+          <p:cNvSpPr/>
+          <p:nvPr/>
+        </p:nvSpPr>
+        <p:spPr>
+          <a:xfrm>
+            <a:off x="8074152" y="4023360"/>
+            <a:ext cx="2825496" cy="1097280"/>
           </a:xfrm>
           <a:prstGeom prst="rect">
             <a:avLst/>
@@ -8634,7 +9007,7 @@
               <a:buNone/>
             </a:pPr>
             <a:r>
-              <a:rPr lang="en-US" sz="1250" dirty="0">
+              <a:rPr lang="en-US" sz="1550" dirty="0">
                 <a:solidFill>
                   <a:srgbClr val="17364A"/>
                 </a:solidFill>
@@ -8644,7 +9017,7 @@
               </a:rPr>
               <a:t>Connect the concept to public health decisions, safeguards, documentation, or implementation work.</a:t>
             </a:r>
-            <a:endParaRPr lang="en-US" sz="1250" dirty="0"/>
+            <a:endParaRPr lang="en-US" sz="1550" dirty="0"/>
           </a:p>
         </p:txBody>
       </p:sp>
@@ -8841,7 +9214,7 @@
                 <a:ea typeface="Aptos" pitchFamily="34" charset="-122"/>
                 <a:cs typeface="Aptos" pitchFamily="34" charset="-120"/>
               </a:rPr>
-              <a:t>© Paula Soper</a:t>
+              <a:t>Â© Paula Soper</a:t>
             </a:r>
             <a:endParaRPr lang="en-US" sz="800" dirty="0"/>
           </a:p>
@@ -8855,8 +9228,47 @@
         </p:nvSpPr>
         <p:spPr>
           <a:xfrm>
+            <a:off x="11137392" y="6510528"/>
+            <a:ext cx="411480" cy="201168"/>
+          </a:xfrm>
+          <a:prstGeom prst="rect">
+            <a:avLst/>
+          </a:prstGeom>
+          <a:noFill/>
+          <a:ln/>
+        </p:spPr>
+        <p:txBody>
+          <a:bodyPr wrap="square" lIns="0" tIns="0" rIns="0" bIns="0" rtlCol="0" anchor="ctr"/>
+          <a:lstStyle/>
+          <a:p>
+            <a:pPr algn="r" indent="0" marL="0">
+              <a:buNone/>
+            </a:pPr>
+            <a:r>
+              <a:rPr lang="en-US" sz="900" dirty="0">
+                <a:solidFill>
+                  <a:srgbClr val="5F7181"/>
+                </a:solidFill>
+                <a:latin typeface="Aptos" pitchFamily="34" charset="0"/>
+                <a:ea typeface="Aptos" pitchFamily="34" charset="-122"/>
+                <a:cs typeface="Aptos" pitchFamily="34" charset="-120"/>
+              </a:rPr>
+              <a:t>2</a:t>
+            </a:r>
+            <a:endParaRPr lang="en-US" sz="900" dirty="0"/>
+          </a:p>
+        </p:txBody>
+      </p:sp>
+      <p:sp>
+        <p:nvSpPr>
+          <p:cNvPr id="8" name="Text 6"/>
+          <p:cNvSpPr/>
+          <p:nvPr/>
+        </p:nvSpPr>
+        <p:spPr>
+          <a:xfrm>
             <a:off x="640080" y="658368"/>
-            <a:ext cx="10881360" cy="566928"/>
+            <a:ext cx="10881360" cy="713232"/>
           </a:xfrm>
           <a:prstGeom prst="rect">
             <a:avLst/>
@@ -8874,7 +9286,7 @@
               <a:buNone/>
             </a:pPr>
             <a:r>
-              <a:rPr lang="en-US" sz="2700" b="1" dirty="0">
+              <a:rPr lang="en-US" sz="3400" b="1" dirty="0">
                 <a:solidFill>
                   <a:srgbClr val="003A63"/>
                 </a:solidFill>
@@ -8884,20 +9296,20 @@
               </a:rPr>
               <a:t>What this module helps you do</a:t>
             </a:r>
-            <a:endParaRPr lang="en-US" sz="2700" dirty="0"/>
-          </a:p>
-        </p:txBody>
-      </p:sp>
-      <p:sp>
-        <p:nvSpPr>
-          <p:cNvPr id="8" name="Text 6"/>
-          <p:cNvSpPr/>
-          <p:nvPr/>
-        </p:nvSpPr>
-        <p:spPr>
-          <a:xfrm>
-            <a:off x="868680" y="1417320"/>
-            <a:ext cx="6675120" cy="3291840"/>
+            <a:endParaRPr lang="en-US" sz="3400" dirty="0"/>
+          </a:p>
+        </p:txBody>
+      </p:sp>
+      <p:sp>
+        <p:nvSpPr>
+          <p:cNvPr id="9" name="Text 7"/>
+          <p:cNvSpPr/>
+          <p:nvPr/>
+        </p:nvSpPr>
+        <p:spPr>
+          <a:xfrm>
+            <a:off x="868680" y="1508760"/>
+            <a:ext cx="6446520" cy="2926080"/>
           </a:xfrm>
           <a:prstGeom prst="rect">
             <a:avLst/>
@@ -8912,7 +9324,7 @@
           <a:lstStyle/>
           <a:p>
             <a:r>
-              <a:rPr lang="en-US" sz="1700" dirty="0">
+              <a:rPr lang="en-US" sz="2100" dirty="0">
                 <a:solidFill>
                   <a:srgbClr val="17364A"/>
                 </a:solidFill>
@@ -8922,11 +9334,11 @@
               </a:rPr>
               <a:t>AI investments compete with many other public health priorities.</a:t>
             </a:r>
-            <a:endParaRPr lang="en-US" sz="1700" dirty="0"/>
-          </a:p>
-          <a:p>
-            <a:r>
-              <a:rPr lang="en-US" sz="1700" dirty="0">
+            <a:endParaRPr lang="en-US" sz="2100" dirty="0"/>
+          </a:p>
+          <a:p>
+            <a:r>
+              <a:rPr lang="en-US" sz="2100" dirty="0">
                 <a:solidFill>
                   <a:srgbClr val="17364A"/>
                 </a:solidFill>
@@ -8934,13 +9346,13 @@
                 <a:ea typeface="Aptos" pitchFamily="34" charset="-122"/>
                 <a:cs typeface="Aptos" pitchFamily="34" charset="-120"/>
               </a:rPr>
-              <a:t>Leaders need a disciplined way to decide when AI is worth funding, what costs must be considered, and how benefits will be measured.</a:t>
-            </a:r>
-            <a:endParaRPr lang="en-US" sz="1700" dirty="0"/>
-          </a:p>
-          <a:p>
-            <a:r>
-              <a:rPr lang="en-US" sz="1700" dirty="0">
+              <a:t>Leaders need a disciplined way to decide when AI is worth funding, what costs must be considered, and how.</a:t>
+            </a:r>
+            <a:endParaRPr lang="en-US" sz="2100" dirty="0"/>
+          </a:p>
+          <a:p>
+            <a:r>
+              <a:rPr lang="en-US" sz="2100" dirty="0">
                 <a:solidFill>
                   <a:srgbClr val="17364A"/>
                 </a:solidFill>
@@ -8948,29 +9360,15 @@
                 <a:ea typeface="Aptos" pitchFamily="34" charset="-122"/>
                 <a:cs typeface="Aptos" pitchFamily="34" charset="-120"/>
               </a:rPr>
-              <a:t>A business case review helps agencies avoid buying tools that are impressive in demonstrations but weak in operational value, sustainability,.</a:t>
-            </a:r>
-            <a:endParaRPr lang="en-US" sz="1700" dirty="0"/>
-          </a:p>
-          <a:p>
-            <a:r>
-              <a:rPr lang="en-US" sz="1700" dirty="0">
-                <a:solidFill>
-                  <a:srgbClr val="17364A"/>
-                </a:solidFill>
-                <a:latin typeface="Aptos" pitchFamily="34" charset="0"/>
-                <a:ea typeface="Aptos" pitchFamily="34" charset="-122"/>
-                <a:cs typeface="Aptos" pitchFamily="34" charset="-120"/>
-              </a:rPr>
-              <a:t>This module teaches leaders to evaluate AI investments across cost, value, readiness, risk, staffing, procurement, lifecycle support, and.</a:t>
-            </a:r>
-            <a:endParaRPr lang="en-US" sz="1700" dirty="0"/>
-          </a:p>
-        </p:txBody>
-      </p:sp>
-      <p:sp>
-        <p:nvSpPr>
-          <p:cNvPr id="9" name="Shape 7"/>
+              <a:t>A business case review helps agencies avoid buying tools that are impressive in demonstrations but weak in.</a:t>
+            </a:r>
+            <a:endParaRPr lang="en-US" sz="2100" dirty="0"/>
+          </a:p>
+        </p:txBody>
+      </p:sp>
+      <p:sp>
+        <p:nvSpPr>
+          <p:cNvPr id="10" name="Shape 8"/>
           <p:cNvSpPr/>
           <p:nvPr/>
         </p:nvSpPr>
@@ -8997,14 +9395,14 @@
       </p:sp>
       <p:sp>
         <p:nvSpPr>
-          <p:cNvPr id="10" name="Text 8"/>
+          <p:cNvPr id="11" name="Text 9"/>
           <p:cNvSpPr/>
           <p:nvPr/>
         </p:nvSpPr>
         <p:spPr>
           <a:xfrm>
             <a:off x="8074152" y="1563624"/>
-            <a:ext cx="2825496" cy="201168"/>
+            <a:ext cx="2825496" cy="256032"/>
           </a:xfrm>
           <a:prstGeom prst="rect">
             <a:avLst/>
@@ -9020,7 +9418,7 @@
               <a:buNone/>
             </a:pPr>
             <a:r>
-              <a:rPr lang="en-US" sz="950" b="1" dirty="0">
+              <a:rPr lang="en-US" sz="1300" b="1" dirty="0">
                 <a:solidFill>
                   <a:srgbClr val="0068B7"/>
                 </a:solidFill>
@@ -9030,20 +9428,20 @@
               </a:rPr>
               <a:t>Module details</a:t>
             </a:r>
-            <a:endParaRPr lang="en-US" sz="950" dirty="0"/>
-          </a:p>
-        </p:txBody>
-      </p:sp>
-      <p:sp>
-        <p:nvSpPr>
-          <p:cNvPr id="11" name="Text 9"/>
-          <p:cNvSpPr/>
-          <p:nvPr/>
-        </p:nvSpPr>
-        <p:spPr>
-          <a:xfrm>
-            <a:off x="8074152" y="1856232"/>
-            <a:ext cx="2825496" cy="1353312"/>
+            <a:endParaRPr lang="en-US" sz="1300" dirty="0"/>
+          </a:p>
+        </p:txBody>
+      </p:sp>
+      <p:sp>
+        <p:nvSpPr>
+          <p:cNvPr id="12" name="Text 10"/>
+          <p:cNvSpPr/>
+          <p:nvPr/>
+        </p:nvSpPr>
+        <p:spPr>
+          <a:xfrm>
+            <a:off x="8074152" y="1920240"/>
+            <a:ext cx="2825496" cy="1280160"/>
           </a:xfrm>
           <a:prstGeom prst="rect">
             <a:avLst/>
@@ -9061,7 +9459,7 @@
               <a:buNone/>
             </a:pPr>
             <a:r>
-              <a:rPr lang="en-US" sz="1250" dirty="0">
+              <a:rPr lang="en-US" sz="1550" dirty="0">
                 <a:solidFill>
                   <a:srgbClr val="17364A"/>
                 </a:solidFill>
@@ -9071,14 +9469,14 @@
               </a:rPr>
               <a:t>Level: advanced/leadership</a:t>
             </a:r>
-            <a:endParaRPr lang="en-US" sz="1250" dirty="0"/>
+            <a:endParaRPr lang="en-US" sz="1550" dirty="0"/>
           </a:p>
           <a:p>
             <a:pPr indent="0" marL="0">
               <a:buNone/>
             </a:pPr>
             <a:r>
-              <a:rPr lang="en-US" sz="1250" dirty="0">
+              <a:rPr lang="en-US" sz="1550" dirty="0">
                 <a:solidFill>
                   <a:srgbClr val="17364A"/>
                 </a:solidFill>
@@ -9088,14 +9486,14 @@
               </a:rPr>
               <a:t>Primary track: Public Health Executive Leadership Track</a:t>
             </a:r>
-            <a:endParaRPr lang="en-US" sz="1250" dirty="0"/>
+            <a:endParaRPr lang="en-US" sz="1550" dirty="0"/>
           </a:p>
           <a:p>
             <a:pPr indent="0" marL="0">
               <a:buNone/>
             </a:pPr>
             <a:r>
-              <a:rPr lang="en-US" sz="1250" dirty="0">
+              <a:rPr lang="en-US" sz="1550" dirty="0">
                 <a:solidFill>
                   <a:srgbClr val="17364A"/>
                 </a:solidFill>
@@ -9105,32 +9503,32 @@
               </a:rPr>
               <a:t>Appears in tracks: governance-security</a:t>
             </a:r>
-            <a:endParaRPr lang="en-US" sz="1250" dirty="0"/>
-          </a:p>
-        </p:txBody>
-      </p:sp>
-      <p:sp>
-        <p:nvSpPr>
-          <p:cNvPr id="12" name="Shape 10"/>
-          <p:cNvSpPr/>
-          <p:nvPr/>
-        </p:nvSpPr>
-        <p:spPr>
-          <a:xfrm>
-            <a:off x="7909560" y="3611880"/>
-            <a:ext cx="3154680" cy="1783080"/>
+            <a:endParaRPr lang="en-US" sz="1550" dirty="0"/>
+          </a:p>
+        </p:txBody>
+      </p:sp>
+      <p:sp>
+        <p:nvSpPr>
+          <p:cNvPr id="13" name="Shape 11"/>
+          <p:cNvSpPr/>
+          <p:nvPr/>
+        </p:nvSpPr>
+        <p:spPr>
+          <a:xfrm>
+            <a:off x="7635240" y="3730752"/>
+            <a:ext cx="1033272" cy="749808"/>
           </a:xfrm>
           <a:prstGeom prst="roundRect">
             <a:avLst>
-              <a:gd name="adj" fmla="val 6154"/>
+              <a:gd name="adj" fmla="val 14634"/>
             </a:avLst>
           </a:prstGeom>
           <a:solidFill>
-            <a:srgbClr val="EEF8ED"/>
+            <a:srgbClr val="0068B7"/>
           </a:solidFill>
           <a:ln w="12700">
             <a:solidFill>
-              <a:srgbClr val="B9D7E6"/>
+              <a:srgbClr val="0068B7"/>
             </a:solidFill>
             <a:prstDash val="solid"/>
           </a:ln>
@@ -9138,81 +9536,256 @@
       </p:sp>
       <p:sp>
         <p:nvSpPr>
-          <p:cNvPr id="13" name="Text 11"/>
-          <p:cNvSpPr/>
-          <p:nvPr/>
-        </p:nvSpPr>
-        <p:spPr>
-          <a:xfrm>
-            <a:off x="8074152" y="3758184"/>
-            <a:ext cx="2825496" cy="201168"/>
-          </a:xfrm>
-          <a:prstGeom prst="rect">
-            <a:avLst/>
-          </a:prstGeom>
-          <a:noFill/>
-          <a:ln/>
-        </p:spPr>
-        <p:txBody>
-          <a:bodyPr wrap="square" lIns="0" tIns="0" rIns="0" bIns="0" rtlCol="0" anchor="ctr"/>
-          <a:lstStyle/>
-          <a:p>
-            <a:pPr indent="0" marL="0">
-              <a:buNone/>
-            </a:pPr>
-            <a:r>
-              <a:rPr lang="en-US" sz="950" b="1" dirty="0">
-                <a:solidFill>
-                  <a:srgbClr val="0068B7"/>
-                </a:solidFill>
-                <a:latin typeface="Aptos" pitchFamily="34" charset="0"/>
-                <a:ea typeface="Aptos" pitchFamily="34" charset="-122"/>
-                <a:cs typeface="Aptos" pitchFamily="34" charset="-120"/>
-              </a:rPr>
-              <a:t>Learning approach</a:t>
-            </a:r>
-            <a:endParaRPr lang="en-US" sz="950" dirty="0"/>
-          </a:p>
-        </p:txBody>
-      </p:sp>
-      <p:sp>
-        <p:nvSpPr>
           <p:cNvPr id="14" name="Text 12"/>
           <p:cNvSpPr/>
           <p:nvPr/>
         </p:nvSpPr>
         <p:spPr>
           <a:xfrm>
-            <a:off x="8074152" y="4050792"/>
-            <a:ext cx="2825496" cy="1216152"/>
-          </a:xfrm>
-          <a:prstGeom prst="rect">
-            <a:avLst/>
-          </a:prstGeom>
-          <a:noFill/>
-          <a:ln/>
-        </p:spPr>
-        <p:txBody>
-          <a:bodyPr wrap="square" lIns="0" tIns="0" rIns="0" bIns="0" rtlCol="0" anchor="t">
+            <a:off x="7708392" y="3922776"/>
+            <a:ext cx="886968" cy="310896"/>
+          </a:xfrm>
+          <a:prstGeom prst="rect">
+            <a:avLst/>
+          </a:prstGeom>
+          <a:noFill/>
+          <a:ln/>
+        </p:spPr>
+        <p:txBody>
+          <a:bodyPr wrap="square" lIns="0" tIns="0" rIns="0" bIns="0" rtlCol="0" anchor="ctr">
             <a:normAutofit/>
           </a:bodyPr>
           <a:lstStyle/>
           <a:p>
-            <a:pPr indent="0" marL="0">
-              <a:buNone/>
-            </a:pPr>
-            <a:r>
-              <a:rPr lang="en-US" sz="1250" dirty="0">
-                <a:solidFill>
-                  <a:srgbClr val="17364A"/>
-                </a:solidFill>
-                <a:latin typeface="Aptos" pitchFamily="34" charset="0"/>
-                <a:ea typeface="Aptos" pitchFamily="34" charset="-122"/>
-                <a:cs typeface="Aptos" pitchFamily="34" charset="-120"/>
-              </a:rPr>
-              <a:t>Review the core ideas, complete the practical exercise, check your understanding, and use the related plays and tools to apply the lesson.</a:t>
-            </a:r>
-            <a:endParaRPr lang="en-US" sz="1250" dirty="0"/>
+            <a:pPr algn="ctr" indent="0" marL="0">
+              <a:buNone/>
+            </a:pPr>
+            <a:r>
+              <a:rPr lang="en-US" sz="1500" b="1" dirty="0">
+                <a:solidFill>
+                  <a:srgbClr val="FFFFFF"/>
+                </a:solidFill>
+                <a:latin typeface="Aptos" pitchFamily="34" charset="0"/>
+                <a:ea typeface="Aptos" pitchFamily="34" charset="-122"/>
+                <a:cs typeface="Aptos" pitchFamily="34" charset="-120"/>
+              </a:rPr>
+              <a:t>Learn</a:t>
+            </a:r>
+            <a:endParaRPr lang="en-US" sz="1500" dirty="0"/>
+          </a:p>
+        </p:txBody>
+      </p:sp>
+      <p:sp>
+        <p:nvSpPr>
+          <p:cNvPr id="15" name="Text 13"/>
+          <p:cNvSpPr/>
+          <p:nvPr/>
+        </p:nvSpPr>
+        <p:spPr>
+          <a:xfrm>
+            <a:off x="8695944" y="3941064"/>
+            <a:ext cx="201168" cy="256032"/>
+          </a:xfrm>
+          <a:prstGeom prst="rect">
+            <a:avLst/>
+          </a:prstGeom>
+          <a:noFill/>
+          <a:ln/>
+        </p:spPr>
+        <p:txBody>
+          <a:bodyPr wrap="square" lIns="0" tIns="0" rIns="0" bIns="0" rtlCol="0" anchor="ctr"/>
+          <a:lstStyle/>
+          <a:p>
+            <a:pPr algn="ctr" indent="0" marL="0">
+              <a:buNone/>
+            </a:pPr>
+            <a:r>
+              <a:rPr lang="en-US" sz="1800" b="1" dirty="0">
+                <a:solidFill>
+                  <a:srgbClr val="0068B7"/>
+                </a:solidFill>
+                <a:latin typeface="Aptos" pitchFamily="34" charset="0"/>
+                <a:ea typeface="Aptos" pitchFamily="34" charset="-122"/>
+                <a:cs typeface="Aptos" pitchFamily="34" charset="-120"/>
+              </a:rPr>
+              <a:t>â†’</a:t>
+            </a:r>
+            <a:endParaRPr lang="en-US" sz="1800" dirty="0"/>
+          </a:p>
+        </p:txBody>
+      </p:sp>
+      <p:sp>
+        <p:nvSpPr>
+          <p:cNvPr id="16" name="Shape 14"/>
+          <p:cNvSpPr/>
+          <p:nvPr/>
+        </p:nvSpPr>
+        <p:spPr>
+          <a:xfrm>
+            <a:off x="8924544" y="3730752"/>
+            <a:ext cx="1033272" cy="749808"/>
+          </a:xfrm>
+          <a:prstGeom prst="roundRect">
+            <a:avLst>
+              <a:gd name="adj" fmla="val 14634"/>
+            </a:avLst>
+          </a:prstGeom>
+          <a:solidFill>
+            <a:srgbClr val="2F8A28"/>
+          </a:solidFill>
+          <a:ln w="12700">
+            <a:solidFill>
+              <a:srgbClr val="2F8A28"/>
+            </a:solidFill>
+            <a:prstDash val="solid"/>
+          </a:ln>
+        </p:spPr>
+      </p:sp>
+      <p:sp>
+        <p:nvSpPr>
+          <p:cNvPr id="17" name="Text 15"/>
+          <p:cNvSpPr/>
+          <p:nvPr/>
+        </p:nvSpPr>
+        <p:spPr>
+          <a:xfrm>
+            <a:off x="8997696" y="3922776"/>
+            <a:ext cx="886968" cy="310896"/>
+          </a:xfrm>
+          <a:prstGeom prst="rect">
+            <a:avLst/>
+          </a:prstGeom>
+          <a:noFill/>
+          <a:ln/>
+        </p:spPr>
+        <p:txBody>
+          <a:bodyPr wrap="square" lIns="0" tIns="0" rIns="0" bIns="0" rtlCol="0" anchor="ctr">
+            <a:normAutofit/>
+          </a:bodyPr>
+          <a:lstStyle/>
+          <a:p>
+            <a:pPr algn="ctr" indent="0" marL="0">
+              <a:buNone/>
+            </a:pPr>
+            <a:r>
+              <a:rPr lang="en-US" sz="1500" b="1" dirty="0">
+                <a:solidFill>
+                  <a:srgbClr val="FFFFFF"/>
+                </a:solidFill>
+                <a:latin typeface="Aptos" pitchFamily="34" charset="0"/>
+                <a:ea typeface="Aptos" pitchFamily="34" charset="-122"/>
+                <a:cs typeface="Aptos" pitchFamily="34" charset="-120"/>
+              </a:rPr>
+              <a:t>Apply</a:t>
+            </a:r>
+            <a:endParaRPr lang="en-US" sz="1500" dirty="0"/>
+          </a:p>
+        </p:txBody>
+      </p:sp>
+      <p:sp>
+        <p:nvSpPr>
+          <p:cNvPr id="18" name="Text 16"/>
+          <p:cNvSpPr/>
+          <p:nvPr/>
+        </p:nvSpPr>
+        <p:spPr>
+          <a:xfrm>
+            <a:off x="9985248" y="3941064"/>
+            <a:ext cx="201168" cy="256032"/>
+          </a:xfrm>
+          <a:prstGeom prst="rect">
+            <a:avLst/>
+          </a:prstGeom>
+          <a:noFill/>
+          <a:ln/>
+        </p:spPr>
+        <p:txBody>
+          <a:bodyPr wrap="square" lIns="0" tIns="0" rIns="0" bIns="0" rtlCol="0" anchor="ctr"/>
+          <a:lstStyle/>
+          <a:p>
+            <a:pPr algn="ctr" indent="0" marL="0">
+              <a:buNone/>
+            </a:pPr>
+            <a:r>
+              <a:rPr lang="en-US" sz="1800" b="1" dirty="0">
+                <a:solidFill>
+                  <a:srgbClr val="0068B7"/>
+                </a:solidFill>
+                <a:latin typeface="Aptos" pitchFamily="34" charset="0"/>
+                <a:ea typeface="Aptos" pitchFamily="34" charset="-122"/>
+                <a:cs typeface="Aptos" pitchFamily="34" charset="-120"/>
+              </a:rPr>
+              <a:t>â†’</a:t>
+            </a:r>
+            <a:endParaRPr lang="en-US" sz="1800" dirty="0"/>
+          </a:p>
+        </p:txBody>
+      </p:sp>
+      <p:sp>
+        <p:nvSpPr>
+          <p:cNvPr id="19" name="Shape 17"/>
+          <p:cNvSpPr/>
+          <p:nvPr/>
+        </p:nvSpPr>
+        <p:spPr>
+          <a:xfrm>
+            <a:off x="10213848" y="3730752"/>
+            <a:ext cx="1033272" cy="749808"/>
+          </a:xfrm>
+          <a:prstGeom prst="roundRect">
+            <a:avLst>
+              <a:gd name="adj" fmla="val 14634"/>
+            </a:avLst>
+          </a:prstGeom>
+          <a:solidFill>
+            <a:srgbClr val="6A4CA3"/>
+          </a:solidFill>
+          <a:ln w="12700">
+            <a:solidFill>
+              <a:srgbClr val="6A4CA3"/>
+            </a:solidFill>
+            <a:prstDash val="solid"/>
+          </a:ln>
+        </p:spPr>
+      </p:sp>
+      <p:sp>
+        <p:nvSpPr>
+          <p:cNvPr id="20" name="Text 18"/>
+          <p:cNvSpPr/>
+          <p:nvPr/>
+        </p:nvSpPr>
+        <p:spPr>
+          <a:xfrm>
+            <a:off x="10287000" y="3922776"/>
+            <a:ext cx="886968" cy="310896"/>
+          </a:xfrm>
+          <a:prstGeom prst="rect">
+            <a:avLst/>
+          </a:prstGeom>
+          <a:noFill/>
+          <a:ln/>
+        </p:spPr>
+        <p:txBody>
+          <a:bodyPr wrap="square" lIns="0" tIns="0" rIns="0" bIns="0" rtlCol="0" anchor="ctr">
+            <a:normAutofit/>
+          </a:bodyPr>
+          <a:lstStyle/>
+          <a:p>
+            <a:pPr algn="ctr" indent="0" marL="0">
+              <a:buNone/>
+            </a:pPr>
+            <a:r>
+              <a:rPr lang="en-US" sz="1500" b="1" dirty="0">
+                <a:solidFill>
+                  <a:srgbClr val="FFFFFF"/>
+                </a:solidFill>
+                <a:latin typeface="Aptos" pitchFamily="34" charset="0"/>
+                <a:ea typeface="Aptos" pitchFamily="34" charset="-122"/>
+                <a:cs typeface="Aptos" pitchFamily="34" charset="-120"/>
+              </a:rPr>
+              <a:t>Document</a:t>
+            </a:r>
+            <a:endParaRPr lang="en-US" sz="1500" dirty="0"/>
           </a:p>
         </p:txBody>
       </p:sp>
@@ -9409,7 +9982,7 @@
                 <a:ea typeface="Aptos" pitchFamily="34" charset="-122"/>
                 <a:cs typeface="Aptos" pitchFamily="34" charset="-120"/>
               </a:rPr>
-              <a:t>© Paula Soper</a:t>
+              <a:t>Â© Paula Soper</a:t>
             </a:r>
             <a:endParaRPr lang="en-US" sz="800" dirty="0"/>
           </a:p>
@@ -9417,7 +9990,46 @@
       </p:sp>
       <p:sp>
         <p:nvSpPr>
-          <p:cNvPr id="7" name="Shape 5"/>
+          <p:cNvPr id="7" name="Text 5"/>
+          <p:cNvSpPr/>
+          <p:nvPr/>
+        </p:nvSpPr>
+        <p:spPr>
+          <a:xfrm>
+            <a:off x="11137392" y="6510528"/>
+            <a:ext cx="411480" cy="201168"/>
+          </a:xfrm>
+          <a:prstGeom prst="rect">
+            <a:avLst/>
+          </a:prstGeom>
+          <a:noFill/>
+          <a:ln/>
+        </p:spPr>
+        <p:txBody>
+          <a:bodyPr wrap="square" lIns="0" tIns="0" rIns="0" bIns="0" rtlCol="0" anchor="ctr"/>
+          <a:lstStyle/>
+          <a:p>
+            <a:pPr algn="r" indent="0" marL="0">
+              <a:buNone/>
+            </a:pPr>
+            <a:r>
+              <a:rPr lang="en-US" sz="900" dirty="0">
+                <a:solidFill>
+                  <a:srgbClr val="5F7181"/>
+                </a:solidFill>
+                <a:latin typeface="Aptos" pitchFamily="34" charset="0"/>
+                <a:ea typeface="Aptos" pitchFamily="34" charset="-122"/>
+                <a:cs typeface="Aptos" pitchFamily="34" charset="-120"/>
+              </a:rPr>
+              <a:t>20</a:t>
+            </a:r>
+            <a:endParaRPr lang="en-US" sz="900" dirty="0"/>
+          </a:p>
+        </p:txBody>
+      </p:sp>
+      <p:sp>
+        <p:nvSpPr>
+          <p:cNvPr id="8" name="Shape 6"/>
           <p:cNvSpPr/>
           <p:nvPr/>
         </p:nvSpPr>
@@ -9442,7 +10054,7 @@
       </p:sp>
       <p:sp>
         <p:nvSpPr>
-          <p:cNvPr id="8" name="Text 6"/>
+          <p:cNvPr id="9" name="Text 7"/>
           <p:cNvSpPr/>
           <p:nvPr/>
         </p:nvSpPr>
@@ -9481,14 +10093,14 @@
       </p:sp>
       <p:sp>
         <p:nvSpPr>
-          <p:cNvPr id="9" name="Text 7"/>
+          <p:cNvPr id="10" name="Text 8"/>
           <p:cNvSpPr/>
           <p:nvPr/>
         </p:nvSpPr>
         <p:spPr>
           <a:xfrm>
             <a:off x="640080" y="621792"/>
-            <a:ext cx="10881360" cy="566928"/>
+            <a:ext cx="10881360" cy="713232"/>
           </a:xfrm>
           <a:prstGeom prst="rect">
             <a:avLst/>
@@ -9506,7 +10118,7 @@
               <a:buNone/>
             </a:pPr>
             <a:r>
-              <a:rPr lang="en-US" sz="2700" b="1" dirty="0">
+              <a:rPr lang="en-US" sz="3400" b="1" dirty="0">
                 <a:solidFill>
                   <a:srgbClr val="003A63"/>
                 </a:solidFill>
@@ -9516,20 +10128,20 @@
               </a:rPr>
               <a:t>References and Resources</a:t>
             </a:r>
-            <a:endParaRPr lang="en-US" sz="2700" dirty="0"/>
-          </a:p>
-        </p:txBody>
-      </p:sp>
-      <p:sp>
-        <p:nvSpPr>
-          <p:cNvPr id="10" name="Text 8"/>
-          <p:cNvSpPr/>
-          <p:nvPr/>
-        </p:nvSpPr>
-        <p:spPr>
-          <a:xfrm>
-            <a:off x="868680" y="1417320"/>
-            <a:ext cx="6675120" cy="4434840"/>
+            <a:endParaRPr lang="en-US" sz="3400" dirty="0"/>
+          </a:p>
+        </p:txBody>
+      </p:sp>
+      <p:sp>
+        <p:nvSpPr>
+          <p:cNvPr id="11" name="Text 9"/>
+          <p:cNvSpPr/>
+          <p:nvPr/>
+        </p:nvSpPr>
+        <p:spPr>
+          <a:xfrm>
+            <a:off x="868680" y="1508760"/>
+            <a:ext cx="6537960" cy="4160520"/>
           </a:xfrm>
           <a:prstGeom prst="rect">
             <a:avLst/>
@@ -9544,7 +10156,7 @@
           <a:lstStyle/>
           <a:p>
             <a:r>
-              <a:rPr lang="en-US" sz="1700" dirty="0">
+              <a:rPr lang="en-US" sz="2100" dirty="0">
                 <a:solidFill>
                   <a:srgbClr val="17364A"/>
                 </a:solidFill>
@@ -9552,13 +10164,13 @@
                 <a:ea typeface="Aptos" pitchFamily="34" charset="-122"/>
                 <a:cs typeface="Aptos" pitchFamily="34" charset="-120"/>
               </a:rPr>
-              <a:t>NIST Artificial Intelligence Risk Management Framework (AI RMF 1.0): https://www.nist.gov/itl/ai-risk-management-framework</a:t>
-            </a:r>
-            <a:endParaRPr lang="en-US" sz="1700" dirty="0"/>
-          </a:p>
-          <a:p>
-            <a:r>
-              <a:rPr lang="en-US" sz="1700" dirty="0">
+              <a:t>NIST Artificial Intelligence Risk Management Framework (AI RMF 1.0):.</a:t>
+            </a:r>
+            <a:endParaRPr lang="en-US" sz="2100" dirty="0"/>
+          </a:p>
+          <a:p>
+            <a:r>
+              <a:rPr lang="en-US" sz="2100" dirty="0">
                 <a:solidFill>
                   <a:srgbClr val="17364A"/>
                 </a:solidFill>
@@ -9568,11 +10180,11 @@
               </a:rPr>
               <a:t>NIST Generative AI Profile:.</a:t>
             </a:r>
-            <a:endParaRPr lang="en-US" sz="1700" dirty="0"/>
-          </a:p>
-          <a:p>
-            <a:r>
-              <a:rPr lang="en-US" sz="1700" dirty="0">
+            <a:endParaRPr lang="en-US" sz="2100" dirty="0"/>
+          </a:p>
+          <a:p>
+            <a:r>
+              <a:rPr lang="en-US" sz="2100" dirty="0">
                 <a:solidFill>
                   <a:srgbClr val="17364A"/>
                 </a:solidFill>
@@ -9582,27 +10194,13 @@
               </a:rPr>
               <a:t>NIST Privacy Framework</a:t>
             </a:r>
-            <a:endParaRPr lang="en-US" sz="1700" dirty="0"/>
-          </a:p>
-          <a:p>
-            <a:r>
-              <a:rPr lang="en-US" sz="1700" dirty="0">
-                <a:solidFill>
-                  <a:srgbClr val="17364A"/>
-                </a:solidFill>
-                <a:latin typeface="Aptos" pitchFamily="34" charset="0"/>
-                <a:ea typeface="Aptos" pitchFamily="34" charset="-122"/>
-                <a:cs typeface="Aptos" pitchFamily="34" charset="-120"/>
-              </a:rPr>
-              <a:t>CDC Public Health Data Strategy and Data Modernization resources:.</a:t>
-            </a:r>
-            <a:endParaRPr lang="en-US" sz="1700" dirty="0"/>
-          </a:p>
-        </p:txBody>
-      </p:sp>
-      <p:sp>
-        <p:nvSpPr>
-          <p:cNvPr id="11" name="Shape 9"/>
+            <a:endParaRPr lang="en-US" sz="2100" dirty="0"/>
+          </a:p>
+        </p:txBody>
+      </p:sp>
+      <p:sp>
+        <p:nvSpPr>
+          <p:cNvPr id="12" name="Shape 10"/>
           <p:cNvSpPr/>
           <p:nvPr/>
         </p:nvSpPr>
@@ -9629,14 +10227,14 @@
       </p:sp>
       <p:sp>
         <p:nvSpPr>
-          <p:cNvPr id="12" name="Text 10"/>
+          <p:cNvPr id="13" name="Text 11"/>
           <p:cNvSpPr/>
           <p:nvPr/>
         </p:nvSpPr>
         <p:spPr>
           <a:xfrm>
             <a:off x="8074152" y="1563624"/>
-            <a:ext cx="2825496" cy="201168"/>
+            <a:ext cx="2825496" cy="256032"/>
           </a:xfrm>
           <a:prstGeom prst="rect">
             <a:avLst/>
@@ -9652,7 +10250,7 @@
               <a:buNone/>
             </a:pPr>
             <a:r>
-              <a:rPr lang="en-US" sz="950" b="1" dirty="0">
+              <a:rPr lang="en-US" sz="1300" b="1" dirty="0">
                 <a:solidFill>
                   <a:srgbClr val="0068B7"/>
                 </a:solidFill>
@@ -9662,20 +10260,20 @@
               </a:rPr>
               <a:t>Key idea</a:t>
             </a:r>
-            <a:endParaRPr lang="en-US" sz="950" dirty="0"/>
-          </a:p>
-        </p:txBody>
-      </p:sp>
-      <p:sp>
-        <p:nvSpPr>
-          <p:cNvPr id="13" name="Text 11"/>
-          <p:cNvSpPr/>
-          <p:nvPr/>
-        </p:nvSpPr>
-        <p:spPr>
-          <a:xfrm>
-            <a:off x="8074152" y="1856232"/>
-            <a:ext cx="2825496" cy="1261872"/>
+            <a:endParaRPr lang="en-US" sz="1300" dirty="0"/>
+          </a:p>
+        </p:txBody>
+      </p:sp>
+      <p:sp>
+        <p:nvSpPr>
+          <p:cNvPr id="14" name="Text 12"/>
+          <p:cNvSpPr/>
+          <p:nvPr/>
+        </p:nvSpPr>
+        <p:spPr>
+          <a:xfrm>
+            <a:off x="8074152" y="1920240"/>
+            <a:ext cx="2825496" cy="1188720"/>
           </a:xfrm>
           <a:prstGeom prst="rect">
             <a:avLst/>
@@ -9693,7 +10291,7 @@
               <a:buNone/>
             </a:pPr>
             <a:r>
-              <a:rPr lang="en-US" sz="1250" dirty="0">
+              <a:rPr lang="en-US" sz="1550" dirty="0">
                 <a:solidFill>
                   <a:srgbClr val="17364A"/>
                 </a:solidFill>
@@ -9701,15 +10299,15 @@
                 <a:ea typeface="Aptos" pitchFamily="34" charset="-122"/>
                 <a:cs typeface="Aptos" pitchFamily="34" charset="-120"/>
               </a:rPr>
-              <a:t>NIST Artificial Intelligence Risk Management Framework (AI RMF 1.0): https://www.nist.gov/itl/ai-risk-management-framework</a:t>
-            </a:r>
-            <a:endParaRPr lang="en-US" sz="1250" dirty="0"/>
-          </a:p>
-        </p:txBody>
-      </p:sp>
-      <p:sp>
-        <p:nvSpPr>
-          <p:cNvPr id="14" name="Shape 12"/>
+              <a:t>NIST Artificial Intelligence Risk Management Framework (AI RMF 1.0):.</a:t>
+            </a:r>
+            <a:endParaRPr lang="en-US" sz="1550" dirty="0"/>
+          </a:p>
+        </p:txBody>
+      </p:sp>
+      <p:sp>
+        <p:nvSpPr>
+          <p:cNvPr id="15" name="Shape 13"/>
           <p:cNvSpPr/>
           <p:nvPr/>
         </p:nvSpPr>
@@ -9736,14 +10334,14 @@
       </p:sp>
       <p:sp>
         <p:nvSpPr>
-          <p:cNvPr id="15" name="Text 13"/>
+          <p:cNvPr id="16" name="Text 14"/>
           <p:cNvSpPr/>
           <p:nvPr/>
         </p:nvSpPr>
         <p:spPr>
           <a:xfrm>
             <a:off x="8074152" y="3666744"/>
-            <a:ext cx="2825496" cy="201168"/>
+            <a:ext cx="2825496" cy="256032"/>
           </a:xfrm>
           <a:prstGeom prst="rect">
             <a:avLst/>
@@ -9759,7 +10357,7 @@
               <a:buNone/>
             </a:pPr>
             <a:r>
-              <a:rPr lang="en-US" sz="950" b="1" dirty="0">
+              <a:rPr lang="en-US" sz="1300" b="1" dirty="0">
                 <a:solidFill>
                   <a:srgbClr val="0068B7"/>
                 </a:solidFill>
@@ -9769,20 +10367,20 @@
               </a:rPr>
               <a:t>Use this for</a:t>
             </a:r>
-            <a:endParaRPr lang="en-US" sz="950" dirty="0"/>
-          </a:p>
-        </p:txBody>
-      </p:sp>
-      <p:sp>
-        <p:nvSpPr>
-          <p:cNvPr id="16" name="Text 14"/>
-          <p:cNvSpPr/>
-          <p:nvPr/>
-        </p:nvSpPr>
-        <p:spPr>
-          <a:xfrm>
-            <a:off x="8074152" y="3959352"/>
-            <a:ext cx="2825496" cy="1170432"/>
+            <a:endParaRPr lang="en-US" sz="1300" dirty="0"/>
+          </a:p>
+        </p:txBody>
+      </p:sp>
+      <p:sp>
+        <p:nvSpPr>
+          <p:cNvPr id="17" name="Text 15"/>
+          <p:cNvSpPr/>
+          <p:nvPr/>
+        </p:nvSpPr>
+        <p:spPr>
+          <a:xfrm>
+            <a:off x="8074152" y="4023360"/>
+            <a:ext cx="2825496" cy="1097280"/>
           </a:xfrm>
           <a:prstGeom prst="rect">
             <a:avLst/>
@@ -9800,7 +10398,7 @@
               <a:buNone/>
             </a:pPr>
             <a:r>
-              <a:rPr lang="en-US" sz="1250" dirty="0">
+              <a:rPr lang="en-US" sz="1550" dirty="0">
                 <a:solidFill>
                   <a:srgbClr val="17364A"/>
                 </a:solidFill>
@@ -9810,7 +10408,7 @@
               </a:rPr>
               <a:t>Connect the concept to public health decisions, safeguards, documentation, or implementation work.</a:t>
             </a:r>
-            <a:endParaRPr lang="en-US" sz="1250" dirty="0"/>
+            <a:endParaRPr lang="en-US" sz="1550" dirty="0"/>
           </a:p>
         </p:txBody>
       </p:sp>
@@ -10007,7 +10605,7 @@
                 <a:ea typeface="Aptos" pitchFamily="34" charset="-122"/>
                 <a:cs typeface="Aptos" pitchFamily="34" charset="-120"/>
               </a:rPr>
-              <a:t>© Paula Soper</a:t>
+              <a:t>Â© Paula Soper</a:t>
             </a:r>
             <a:endParaRPr lang="en-US" sz="800" dirty="0"/>
           </a:p>
@@ -10021,8 +10619,47 @@
         </p:nvSpPr>
         <p:spPr>
           <a:xfrm>
+            <a:off x="11137392" y="6510528"/>
+            <a:ext cx="411480" cy="201168"/>
+          </a:xfrm>
+          <a:prstGeom prst="rect">
+            <a:avLst/>
+          </a:prstGeom>
+          <a:noFill/>
+          <a:ln/>
+        </p:spPr>
+        <p:txBody>
+          <a:bodyPr wrap="square" lIns="0" tIns="0" rIns="0" bIns="0" rtlCol="0" anchor="ctr"/>
+          <a:lstStyle/>
+          <a:p>
+            <a:pPr algn="r" indent="0" marL="0">
+              <a:buNone/>
+            </a:pPr>
+            <a:r>
+              <a:rPr lang="en-US" sz="900" dirty="0">
+                <a:solidFill>
+                  <a:srgbClr val="5F7181"/>
+                </a:solidFill>
+                <a:latin typeface="Aptos" pitchFamily="34" charset="0"/>
+                <a:ea typeface="Aptos" pitchFamily="34" charset="-122"/>
+                <a:cs typeface="Aptos" pitchFamily="34" charset="-120"/>
+              </a:rPr>
+              <a:t>21</a:t>
+            </a:r>
+            <a:endParaRPr lang="en-US" sz="900" dirty="0"/>
+          </a:p>
+        </p:txBody>
+      </p:sp>
+      <p:sp>
+        <p:nvSpPr>
+          <p:cNvPr id="8" name="Text 6"/>
+          <p:cNvSpPr/>
+          <p:nvPr/>
+        </p:nvSpPr>
+        <p:spPr>
+          <a:xfrm>
             <a:off x="640080" y="658368"/>
-            <a:ext cx="10881360" cy="566928"/>
+            <a:ext cx="10881360" cy="713232"/>
           </a:xfrm>
           <a:prstGeom prst="rect">
             <a:avLst/>
@@ -10040,7 +10677,7 @@
               <a:buNone/>
             </a:pPr>
             <a:r>
-              <a:rPr lang="en-US" sz="2700" b="1" dirty="0">
+              <a:rPr lang="en-US" sz="3400" b="1" dirty="0">
                 <a:solidFill>
                   <a:srgbClr val="003A63"/>
                 </a:solidFill>
@@ -10050,20 +10687,20 @@
               </a:rPr>
               <a:t>References and Resources Continued</a:t>
             </a:r>
-            <a:endParaRPr lang="en-US" sz="2700" dirty="0"/>
-          </a:p>
-        </p:txBody>
-      </p:sp>
-      <p:sp>
-        <p:nvSpPr>
-          <p:cNvPr id="8" name="Text 6"/>
-          <p:cNvSpPr/>
-          <p:nvPr/>
-        </p:nvSpPr>
-        <p:spPr>
-          <a:xfrm>
-            <a:off x="868680" y="1417320"/>
-            <a:ext cx="6675120" cy="4434840"/>
+            <a:endParaRPr lang="en-US" sz="3400" dirty="0"/>
+          </a:p>
+        </p:txBody>
+      </p:sp>
+      <p:sp>
+        <p:nvSpPr>
+          <p:cNvPr id="9" name="Text 7"/>
+          <p:cNvSpPr/>
+          <p:nvPr/>
+        </p:nvSpPr>
+        <p:spPr>
+          <a:xfrm>
+            <a:off x="868680" y="1508760"/>
+            <a:ext cx="6537960" cy="4160520"/>
           </a:xfrm>
           <a:prstGeom prst="rect">
             <a:avLst/>
@@ -10078,7 +10715,7 @@
           <a:lstStyle/>
           <a:p>
             <a:r>
-              <a:rPr lang="en-US" sz="1700" dirty="0">
+              <a:rPr lang="en-US" sz="2100" dirty="0">
                 <a:solidFill>
                   <a:srgbClr val="17364A"/>
                 </a:solidFill>
@@ -10086,13 +10723,13 @@
                 <a:ea typeface="Aptos" pitchFamily="34" charset="-122"/>
                 <a:cs typeface="Aptos" pitchFamily="34" charset="-120"/>
               </a:rPr>
-              <a:t>OMB Memorandum M-24-10 on federal AI governance, risk management, and innovation, where relevant to public-sector governance.</a:t>
-            </a:r>
-            <a:endParaRPr lang="en-US" sz="1700" dirty="0"/>
-          </a:p>
-          <a:p>
-            <a:r>
-              <a:rPr lang="en-US" sz="1700" dirty="0">
+              <a:t>OMB Memorandum M-24-10 on federal AI governance, risk management, and innovation, where relevant to.</a:t>
+            </a:r>
+            <a:endParaRPr lang="en-US" sz="2100" dirty="0"/>
+          </a:p>
+          <a:p>
+            <a:r>
+              <a:rPr lang="en-US" sz="2100" dirty="0">
                 <a:solidFill>
                   <a:srgbClr val="17364A"/>
                 </a:solidFill>
@@ -10100,15 +10737,15 @@
                 <a:ea typeface="Aptos" pitchFamily="34" charset="-122"/>
                 <a:cs typeface="Aptos" pitchFamily="34" charset="-120"/>
               </a:rPr>
-              <a:t>Agency strategic plans, procurement policies, privacy policies, cybersecurity policies, records policies, and equity plans</a:t>
-            </a:r>
-            <a:endParaRPr lang="en-US" sz="1700" dirty="0"/>
-          </a:p>
-        </p:txBody>
-      </p:sp>
-      <p:sp>
-        <p:nvSpPr>
-          <p:cNvPr id="9" name="Shape 7"/>
+              <a:t>Agency strategic plans, procurement policies, privacy policies, cybersecurity policies, records.</a:t>
+            </a:r>
+            <a:endParaRPr lang="en-US" sz="2100" dirty="0"/>
+          </a:p>
+        </p:txBody>
+      </p:sp>
+      <p:sp>
+        <p:nvSpPr>
+          <p:cNvPr id="10" name="Shape 8"/>
           <p:cNvSpPr/>
           <p:nvPr/>
         </p:nvSpPr>
@@ -10135,14 +10772,14 @@
       </p:sp>
       <p:sp>
         <p:nvSpPr>
-          <p:cNvPr id="10" name="Text 8"/>
+          <p:cNvPr id="11" name="Text 9"/>
           <p:cNvSpPr/>
           <p:nvPr/>
         </p:nvSpPr>
         <p:spPr>
           <a:xfrm>
             <a:off x="8074152" y="1563624"/>
-            <a:ext cx="2825496" cy="201168"/>
+            <a:ext cx="2825496" cy="256032"/>
           </a:xfrm>
           <a:prstGeom prst="rect">
             <a:avLst/>
@@ -10158,7 +10795,7 @@
               <a:buNone/>
             </a:pPr>
             <a:r>
-              <a:rPr lang="en-US" sz="950" b="1" dirty="0">
+              <a:rPr lang="en-US" sz="1300" b="1" dirty="0">
                 <a:solidFill>
                   <a:srgbClr val="0068B7"/>
                 </a:solidFill>
@@ -10168,20 +10805,20 @@
               </a:rPr>
               <a:t>Key idea</a:t>
             </a:r>
-            <a:endParaRPr lang="en-US" sz="950" dirty="0"/>
-          </a:p>
-        </p:txBody>
-      </p:sp>
-      <p:sp>
-        <p:nvSpPr>
-          <p:cNvPr id="11" name="Text 9"/>
-          <p:cNvSpPr/>
-          <p:nvPr/>
-        </p:nvSpPr>
-        <p:spPr>
-          <a:xfrm>
-            <a:off x="8074152" y="1856232"/>
-            <a:ext cx="2825496" cy="1261872"/>
+            <a:endParaRPr lang="en-US" sz="1300" dirty="0"/>
+          </a:p>
+        </p:txBody>
+      </p:sp>
+      <p:sp>
+        <p:nvSpPr>
+          <p:cNvPr id="12" name="Text 10"/>
+          <p:cNvSpPr/>
+          <p:nvPr/>
+        </p:nvSpPr>
+        <p:spPr>
+          <a:xfrm>
+            <a:off x="8074152" y="1920240"/>
+            <a:ext cx="2825496" cy="1188720"/>
           </a:xfrm>
           <a:prstGeom prst="rect">
             <a:avLst/>
@@ -10199,7 +10836,7 @@
               <a:buNone/>
             </a:pPr>
             <a:r>
-              <a:rPr lang="en-US" sz="1250" dirty="0">
+              <a:rPr lang="en-US" sz="1550" dirty="0">
                 <a:solidFill>
                   <a:srgbClr val="17364A"/>
                 </a:solidFill>
@@ -10207,15 +10844,15 @@
                 <a:ea typeface="Aptos" pitchFamily="34" charset="-122"/>
                 <a:cs typeface="Aptos" pitchFamily="34" charset="-120"/>
               </a:rPr>
-              <a:t>OMB Memorandum M-24-10 on federal AI governance, risk management, and innovation, where relevant to public-sector governance.</a:t>
-            </a:r>
-            <a:endParaRPr lang="en-US" sz="1250" dirty="0"/>
-          </a:p>
-        </p:txBody>
-      </p:sp>
-      <p:sp>
-        <p:nvSpPr>
-          <p:cNvPr id="12" name="Shape 10"/>
+              <a:t>OMB Memorandum M-24-10 on federal AI governance, risk management, and innovation, where relevant to.</a:t>
+            </a:r>
+            <a:endParaRPr lang="en-US" sz="1550" dirty="0"/>
+          </a:p>
+        </p:txBody>
+      </p:sp>
+      <p:sp>
+        <p:nvSpPr>
+          <p:cNvPr id="13" name="Shape 11"/>
           <p:cNvSpPr/>
           <p:nvPr/>
         </p:nvSpPr>
@@ -10242,14 +10879,14 @@
       </p:sp>
       <p:sp>
         <p:nvSpPr>
-          <p:cNvPr id="13" name="Text 11"/>
+          <p:cNvPr id="14" name="Text 12"/>
           <p:cNvSpPr/>
           <p:nvPr/>
         </p:nvSpPr>
         <p:spPr>
           <a:xfrm>
             <a:off x="8074152" y="3666744"/>
-            <a:ext cx="2825496" cy="201168"/>
+            <a:ext cx="2825496" cy="256032"/>
           </a:xfrm>
           <a:prstGeom prst="rect">
             <a:avLst/>
@@ -10265,7 +10902,7 @@
               <a:buNone/>
             </a:pPr>
             <a:r>
-              <a:rPr lang="en-US" sz="950" b="1" dirty="0">
+              <a:rPr lang="en-US" sz="1300" b="1" dirty="0">
                 <a:solidFill>
                   <a:srgbClr val="0068B7"/>
                 </a:solidFill>
@@ -10275,20 +10912,20 @@
               </a:rPr>
               <a:t>Use this for</a:t>
             </a:r>
-            <a:endParaRPr lang="en-US" sz="950" dirty="0"/>
-          </a:p>
-        </p:txBody>
-      </p:sp>
-      <p:sp>
-        <p:nvSpPr>
-          <p:cNvPr id="14" name="Text 12"/>
-          <p:cNvSpPr/>
-          <p:nvPr/>
-        </p:nvSpPr>
-        <p:spPr>
-          <a:xfrm>
-            <a:off x="8074152" y="3959352"/>
-            <a:ext cx="2825496" cy="1170432"/>
+            <a:endParaRPr lang="en-US" sz="1300" dirty="0"/>
+          </a:p>
+        </p:txBody>
+      </p:sp>
+      <p:sp>
+        <p:nvSpPr>
+          <p:cNvPr id="15" name="Text 13"/>
+          <p:cNvSpPr/>
+          <p:nvPr/>
+        </p:nvSpPr>
+        <p:spPr>
+          <a:xfrm>
+            <a:off x="8074152" y="4023360"/>
+            <a:ext cx="2825496" cy="1097280"/>
           </a:xfrm>
           <a:prstGeom prst="rect">
             <a:avLst/>
@@ -10306,7 +10943,7 @@
               <a:buNone/>
             </a:pPr>
             <a:r>
-              <a:rPr lang="en-US" sz="1250" dirty="0">
+              <a:rPr lang="en-US" sz="1550" dirty="0">
                 <a:solidFill>
                   <a:srgbClr val="17364A"/>
                 </a:solidFill>
@@ -10316,7 +10953,7 @@
               </a:rPr>
               <a:t>Connect the concept to public health decisions, safeguards, documentation, or implementation work.</a:t>
             </a:r>
-            <a:endParaRPr lang="en-US" sz="1250" dirty="0"/>
+            <a:endParaRPr lang="en-US" sz="1550" dirty="0"/>
           </a:p>
         </p:txBody>
       </p:sp>
@@ -10513,7 +11150,7 @@
                 <a:ea typeface="Aptos" pitchFamily="34" charset="-122"/>
                 <a:cs typeface="Aptos" pitchFamily="34" charset="-120"/>
               </a:rPr>
-              <a:t>© Paula Soper</a:t>
+              <a:t>Â© Paula Soper</a:t>
             </a:r>
             <a:endParaRPr lang="en-US" sz="800" dirty="0"/>
           </a:p>
@@ -10527,8 +11164,47 @@
         </p:nvSpPr>
         <p:spPr>
           <a:xfrm>
+            <a:off x="11137392" y="6510528"/>
+            <a:ext cx="411480" cy="201168"/>
+          </a:xfrm>
+          <a:prstGeom prst="rect">
+            <a:avLst/>
+          </a:prstGeom>
+          <a:noFill/>
+          <a:ln/>
+        </p:spPr>
+        <p:txBody>
+          <a:bodyPr wrap="square" lIns="0" tIns="0" rIns="0" bIns="0" rtlCol="0" anchor="ctr"/>
+          <a:lstStyle/>
+          <a:p>
+            <a:pPr algn="r" indent="0" marL="0">
+              <a:buNone/>
+            </a:pPr>
+            <a:r>
+              <a:rPr lang="en-US" sz="900" dirty="0">
+                <a:solidFill>
+                  <a:srgbClr val="5F7181"/>
+                </a:solidFill>
+                <a:latin typeface="Aptos" pitchFamily="34" charset="0"/>
+                <a:ea typeface="Aptos" pitchFamily="34" charset="-122"/>
+                <a:cs typeface="Aptos" pitchFamily="34" charset="-120"/>
+              </a:rPr>
+              <a:t>3</a:t>
+            </a:r>
+            <a:endParaRPr lang="en-US" sz="900" dirty="0"/>
+          </a:p>
+        </p:txBody>
+      </p:sp>
+      <p:sp>
+        <p:nvSpPr>
+          <p:cNvPr id="8" name="Text 6"/>
+          <p:cNvSpPr/>
+          <p:nvPr/>
+        </p:nvSpPr>
+        <p:spPr>
+          <a:xfrm>
             <a:off x="640080" y="658368"/>
-            <a:ext cx="10881360" cy="566928"/>
+            <a:ext cx="10881360" cy="713232"/>
           </a:xfrm>
           <a:prstGeom prst="rect">
             <a:avLst/>
@@ -10546,7 +11222,7 @@
               <a:buNone/>
             </a:pPr>
             <a:r>
-              <a:rPr lang="en-US" sz="2700" b="1" dirty="0">
+              <a:rPr lang="en-US" sz="3400" b="1" dirty="0">
                 <a:solidFill>
                   <a:srgbClr val="003A63"/>
                 </a:solidFill>
@@ -10556,20 +11232,20 @@
               </a:rPr>
               <a:t>How this module connects to the playbook</a:t>
             </a:r>
-            <a:endParaRPr lang="en-US" sz="2700" dirty="0"/>
-          </a:p>
-        </p:txBody>
-      </p:sp>
-      <p:sp>
-        <p:nvSpPr>
-          <p:cNvPr id="8" name="Text 6"/>
-          <p:cNvSpPr/>
-          <p:nvPr/>
-        </p:nvSpPr>
-        <p:spPr>
-          <a:xfrm>
-            <a:off x="868680" y="1417320"/>
-            <a:ext cx="6903720" cy="4480560"/>
+            <a:endParaRPr lang="en-US" sz="3400" dirty="0"/>
+          </a:p>
+        </p:txBody>
+      </p:sp>
+      <p:sp>
+        <p:nvSpPr>
+          <p:cNvPr id="9" name="Text 7"/>
+          <p:cNvSpPr/>
+          <p:nvPr/>
+        </p:nvSpPr>
+        <p:spPr>
+          <a:xfrm>
+            <a:off x="868680" y="1508760"/>
+            <a:ext cx="6812280" cy="3977640"/>
           </a:xfrm>
           <a:prstGeom prst="rect">
             <a:avLst/>
@@ -10584,7 +11260,7 @@
           <a:lstStyle/>
           <a:p>
             <a:r>
-              <a:rPr lang="en-US" sz="1540" dirty="0">
+              <a:rPr lang="en-US" sz="1900" dirty="0">
                 <a:solidFill>
                   <a:srgbClr val="17364A"/>
                 </a:solidFill>
@@ -10592,13 +11268,13 @@
                 <a:ea typeface="Aptos" pitchFamily="34" charset="-122"/>
                 <a:cs typeface="Aptos" pitchFamily="34" charset="-120"/>
               </a:rPr>
-              <a:t>Play 11: Build and Deploy AI Solutions - This lesson informs Play 11 by helping learners connect the lesson topic to build and deploy.</a:t>
-            </a:r>
-            <a:endParaRPr lang="en-US" sz="1540" dirty="0"/>
-          </a:p>
-          <a:p>
-            <a:r>
-              <a:rPr lang="en-US" sz="1540" dirty="0">
+              <a:t>Play 11: Build and Deploy AI Solutions - This lesson informs Play 11 by helping learners connect the lesson.</a:t>
+            </a:r>
+            <a:endParaRPr lang="en-US" sz="1900" dirty="0"/>
+          </a:p>
+          <a:p>
+            <a:r>
+              <a:rPr lang="en-US" sz="1900" dirty="0">
                 <a:solidFill>
                   <a:srgbClr val="17364A"/>
                 </a:solidFill>
@@ -10606,13 +11282,13 @@
                 <a:ea typeface="Aptos" pitchFamily="34" charset="-122"/>
                 <a:cs typeface="Aptos" pitchFamily="34" charset="-120"/>
               </a:rPr>
-              <a:t>Play 2: Readiness Assessment - This lesson informs Play 2 by helping learners connect the lesson topic to readiness assessment work.</a:t>
-            </a:r>
-            <a:endParaRPr lang="en-US" sz="1540" dirty="0"/>
-          </a:p>
-          <a:p>
-            <a:r>
-              <a:rPr lang="en-US" sz="1540" dirty="0">
+              <a:t>Play 2: Readiness Assessment - This lesson informs Play 2 by helping learners connect the lesson topic to.</a:t>
+            </a:r>
+            <a:endParaRPr lang="en-US" sz="1900" dirty="0"/>
+          </a:p>
+          <a:p>
+            <a:r>
+              <a:rPr lang="en-US" sz="1900" dirty="0">
                 <a:solidFill>
                   <a:srgbClr val="17364A"/>
                 </a:solidFill>
@@ -10620,13 +11296,13 @@
                 <a:ea typeface="Aptos" pitchFamily="34" charset="-122"/>
                 <a:cs typeface="Aptos" pitchFamily="34" charset="-120"/>
               </a:rPr>
-              <a:t>Play 3: Establish AI Governance - This lesson informs Play 3 by helping learners connect the lesson topic to establish ai governance.</a:t>
-            </a:r>
-            <a:endParaRPr lang="en-US" sz="1540" dirty="0"/>
-          </a:p>
-          <a:p>
-            <a:r>
-              <a:rPr lang="en-US" sz="1540" dirty="0">
+              <a:t>Play 3: Establish AI Governance - This lesson informs Play 3 by helping learners connect the lesson topic to.</a:t>
+            </a:r>
+            <a:endParaRPr lang="en-US" sz="1900" dirty="0"/>
+          </a:p>
+          <a:p>
+            <a:r>
+              <a:rPr lang="en-US" sz="1900" dirty="0">
                 <a:solidFill>
                   <a:srgbClr val="17364A"/>
                 </a:solidFill>
@@ -10634,15 +11310,15 @@
                 <a:ea typeface="Aptos" pitchFamily="34" charset="-122"/>
                 <a:cs typeface="Aptos" pitchFamily="34" charset="-120"/>
               </a:rPr>
-              <a:t>Play 1: Vision &amp; Guardrails - This lesson informs Play 1 by helping learners connect the lesson topic to vision &amp; guardrails work in.</a:t>
-            </a:r>
-            <a:endParaRPr lang="en-US" sz="1540" dirty="0"/>
-          </a:p>
-        </p:txBody>
-      </p:sp>
-      <p:sp>
-        <p:nvSpPr>
-          <p:cNvPr id="9" name="Shape 7"/>
+              <a:t>Play 1: Vision &amp; Guardrails - This lesson informs Play 1 by helping learners connect the lesson topic to.</a:t>
+            </a:r>
+            <a:endParaRPr lang="en-US" sz="1900" dirty="0"/>
+          </a:p>
+        </p:txBody>
+      </p:sp>
+      <p:sp>
+        <p:nvSpPr>
+          <p:cNvPr id="10" name="Shape 8"/>
           <p:cNvSpPr/>
           <p:nvPr/>
         </p:nvSpPr>
@@ -10669,14 +11345,14 @@
       </p:sp>
       <p:sp>
         <p:nvSpPr>
-          <p:cNvPr id="10" name="Text 8"/>
+          <p:cNvPr id="11" name="Text 9"/>
           <p:cNvSpPr/>
           <p:nvPr/>
         </p:nvSpPr>
         <p:spPr>
           <a:xfrm>
             <a:off x="8211312" y="1563624"/>
-            <a:ext cx="2734056" cy="201168"/>
+            <a:ext cx="2734056" cy="256032"/>
           </a:xfrm>
           <a:prstGeom prst="rect">
             <a:avLst/>
@@ -10692,7 +11368,7 @@
               <a:buNone/>
             </a:pPr>
             <a:r>
-              <a:rPr lang="en-US" sz="950" b="1" dirty="0">
+              <a:rPr lang="en-US" sz="1300" b="1" dirty="0">
                 <a:solidFill>
                   <a:srgbClr val="0068B7"/>
                 </a:solidFill>
@@ -10702,20 +11378,20 @@
               </a:rPr>
               <a:t>Apply the lesson</a:t>
             </a:r>
-            <a:endParaRPr lang="en-US" sz="950" dirty="0"/>
-          </a:p>
-        </p:txBody>
-      </p:sp>
-      <p:sp>
-        <p:nvSpPr>
-          <p:cNvPr id="11" name="Text 9"/>
-          <p:cNvSpPr/>
-          <p:nvPr/>
-        </p:nvSpPr>
-        <p:spPr>
-          <a:xfrm>
-            <a:off x="8211312" y="1856232"/>
-            <a:ext cx="2734056" cy="1536192"/>
+            <a:endParaRPr lang="en-US" sz="1300" dirty="0"/>
+          </a:p>
+        </p:txBody>
+      </p:sp>
+      <p:sp>
+        <p:nvSpPr>
+          <p:cNvPr id="12" name="Text 10"/>
+          <p:cNvSpPr/>
+          <p:nvPr/>
+        </p:nvSpPr>
+        <p:spPr>
+          <a:xfrm>
+            <a:off x="8211312" y="1920240"/>
+            <a:ext cx="2734056" cy="1463040"/>
           </a:xfrm>
           <a:prstGeom prst="rect">
             <a:avLst/>
@@ -10733,7 +11409,7 @@
               <a:buNone/>
             </a:pPr>
             <a:r>
-              <a:rPr lang="en-US" sz="1250" dirty="0">
+              <a:rPr lang="en-US" sz="1550" dirty="0">
                 <a:solidFill>
                   <a:srgbClr val="17364A"/>
                 </a:solidFill>
@@ -10743,32 +11419,32 @@
               </a:rPr>
               <a:t>Use the related plays to identify decisions, participants, timing, approvals, and documentation needed for responsible implementation.</a:t>
             </a:r>
-            <a:endParaRPr lang="en-US" sz="1250" dirty="0"/>
-          </a:p>
-        </p:txBody>
-      </p:sp>
-      <p:sp>
-        <p:nvSpPr>
-          <p:cNvPr id="12" name="Shape 10"/>
-          <p:cNvSpPr/>
-          <p:nvPr/>
-        </p:nvSpPr>
-        <p:spPr>
-          <a:xfrm>
-            <a:off x="8046720" y="3794760"/>
-            <a:ext cx="3063240" cy="1508760"/>
+            <a:endParaRPr lang="en-US" sz="1550" dirty="0"/>
+          </a:p>
+        </p:txBody>
+      </p:sp>
+      <p:sp>
+        <p:nvSpPr>
+          <p:cNvPr id="13" name="Shape 11"/>
+          <p:cNvSpPr/>
+          <p:nvPr/>
+        </p:nvSpPr>
+        <p:spPr>
+          <a:xfrm>
+            <a:off x="7818120" y="3977640"/>
+            <a:ext cx="972312" cy="749808"/>
           </a:xfrm>
           <a:prstGeom prst="roundRect">
             <a:avLst>
-              <a:gd name="adj" fmla="val 7273"/>
+              <a:gd name="adj" fmla="val 14634"/>
             </a:avLst>
           </a:prstGeom>
           <a:solidFill>
-            <a:srgbClr val="FFF4D9"/>
+            <a:srgbClr val="0068B7"/>
           </a:solidFill>
           <a:ln w="12700">
             <a:solidFill>
-              <a:srgbClr val="B9D7E6"/>
+              <a:srgbClr val="0068B7"/>
             </a:solidFill>
             <a:prstDash val="solid"/>
           </a:ln>
@@ -10776,81 +11452,256 @@
       </p:sp>
       <p:sp>
         <p:nvSpPr>
-          <p:cNvPr id="13" name="Text 11"/>
-          <p:cNvSpPr/>
-          <p:nvPr/>
-        </p:nvSpPr>
-        <p:spPr>
-          <a:xfrm>
-            <a:off x="8211312" y="3941064"/>
-            <a:ext cx="2734056" cy="201168"/>
-          </a:xfrm>
-          <a:prstGeom prst="rect">
-            <a:avLst/>
-          </a:prstGeom>
-          <a:noFill/>
-          <a:ln/>
-        </p:spPr>
-        <p:txBody>
-          <a:bodyPr wrap="square" lIns="0" tIns="0" rIns="0" bIns="0" rtlCol="0" anchor="ctr"/>
-          <a:lstStyle/>
-          <a:p>
-            <a:pPr indent="0" marL="0">
-              <a:buNone/>
-            </a:pPr>
-            <a:r>
-              <a:rPr lang="en-US" sz="950" b="1" dirty="0">
-                <a:solidFill>
-                  <a:srgbClr val="0068B7"/>
-                </a:solidFill>
-                <a:latin typeface="Aptos" pitchFamily="34" charset="0"/>
-                <a:ea typeface="Aptos" pitchFamily="34" charset="-122"/>
-                <a:cs typeface="Aptos" pitchFamily="34" charset="-120"/>
-              </a:rPr>
-              <a:t>Keep in mind</a:t>
-            </a:r>
-            <a:endParaRPr lang="en-US" sz="950" dirty="0"/>
-          </a:p>
-        </p:txBody>
-      </p:sp>
-      <p:sp>
-        <p:nvSpPr>
           <p:cNvPr id="14" name="Text 12"/>
           <p:cNvSpPr/>
           <p:nvPr/>
         </p:nvSpPr>
         <p:spPr>
           <a:xfrm>
-            <a:off x="8211312" y="4233672"/>
-            <a:ext cx="2734056" cy="941832"/>
-          </a:xfrm>
-          <a:prstGeom prst="rect">
-            <a:avLst/>
-          </a:prstGeom>
-          <a:noFill/>
-          <a:ln/>
-        </p:spPr>
-        <p:txBody>
-          <a:bodyPr wrap="square" lIns="0" tIns="0" rIns="0" bIns="0" rtlCol="0" anchor="t">
+            <a:off x="7891272" y="4169664"/>
+            <a:ext cx="826008" cy="310896"/>
+          </a:xfrm>
+          <a:prstGeom prst="rect">
+            <a:avLst/>
+          </a:prstGeom>
+          <a:noFill/>
+          <a:ln/>
+        </p:spPr>
+        <p:txBody>
+          <a:bodyPr wrap="square" lIns="0" tIns="0" rIns="0" bIns="0" rtlCol="0" anchor="ctr">
             <a:normAutofit/>
           </a:bodyPr>
           <a:lstStyle/>
           <a:p>
-            <a:pPr indent="0" marL="0">
-              <a:buNone/>
-            </a:pPr>
-            <a:r>
-              <a:rPr lang="en-US" sz="1250" dirty="0">
-                <a:solidFill>
-                  <a:srgbClr val="17364A"/>
-                </a:solidFill>
-                <a:latin typeface="Aptos" pitchFamily="34" charset="0"/>
-                <a:ea typeface="Aptos" pitchFamily="34" charset="-122"/>
-                <a:cs typeface="Aptos" pitchFamily="34" charset="-120"/>
-              </a:rPr>
-              <a:t>The playbook connection helps turn training into agency work, not just individual knowledge.</a:t>
-            </a:r>
-            <a:endParaRPr lang="en-US" sz="1250" dirty="0"/>
+            <a:pPr algn="ctr" indent="0" marL="0">
+              <a:buNone/>
+            </a:pPr>
+            <a:r>
+              <a:rPr lang="en-US" sz="1500" b="1" dirty="0">
+                <a:solidFill>
+                  <a:srgbClr val="FFFFFF"/>
+                </a:solidFill>
+                <a:latin typeface="Aptos" pitchFamily="34" charset="0"/>
+                <a:ea typeface="Aptos" pitchFamily="34" charset="-122"/>
+                <a:cs typeface="Aptos" pitchFamily="34" charset="-120"/>
+              </a:rPr>
+              <a:t>Lesson</a:t>
+            </a:r>
+            <a:endParaRPr lang="en-US" sz="1500" dirty="0"/>
+          </a:p>
+        </p:txBody>
+      </p:sp>
+      <p:sp>
+        <p:nvSpPr>
+          <p:cNvPr id="15" name="Text 13"/>
+          <p:cNvSpPr/>
+          <p:nvPr/>
+        </p:nvSpPr>
+        <p:spPr>
+          <a:xfrm>
+            <a:off x="8817864" y="4187952"/>
+            <a:ext cx="201168" cy="256032"/>
+          </a:xfrm>
+          <a:prstGeom prst="rect">
+            <a:avLst/>
+          </a:prstGeom>
+          <a:noFill/>
+          <a:ln/>
+        </p:spPr>
+        <p:txBody>
+          <a:bodyPr wrap="square" lIns="0" tIns="0" rIns="0" bIns="0" rtlCol="0" anchor="ctr"/>
+          <a:lstStyle/>
+          <a:p>
+            <a:pPr algn="ctr" indent="0" marL="0">
+              <a:buNone/>
+            </a:pPr>
+            <a:r>
+              <a:rPr lang="en-US" sz="1800" b="1" dirty="0">
+                <a:solidFill>
+                  <a:srgbClr val="0068B7"/>
+                </a:solidFill>
+                <a:latin typeface="Aptos" pitchFamily="34" charset="0"/>
+                <a:ea typeface="Aptos" pitchFamily="34" charset="-122"/>
+                <a:cs typeface="Aptos" pitchFamily="34" charset="-120"/>
+              </a:rPr>
+              <a:t>â†’</a:t>
+            </a:r>
+            <a:endParaRPr lang="en-US" sz="1800" dirty="0"/>
+          </a:p>
+        </p:txBody>
+      </p:sp>
+      <p:sp>
+        <p:nvSpPr>
+          <p:cNvPr id="16" name="Shape 14"/>
+          <p:cNvSpPr/>
+          <p:nvPr/>
+        </p:nvSpPr>
+        <p:spPr>
+          <a:xfrm>
+            <a:off x="9046464" y="3977640"/>
+            <a:ext cx="972312" cy="749808"/>
+          </a:xfrm>
+          <a:prstGeom prst="roundRect">
+            <a:avLst>
+              <a:gd name="adj" fmla="val 14634"/>
+            </a:avLst>
+          </a:prstGeom>
+          <a:solidFill>
+            <a:srgbClr val="2F8A28"/>
+          </a:solidFill>
+          <a:ln w="12700">
+            <a:solidFill>
+              <a:srgbClr val="2F8A28"/>
+            </a:solidFill>
+            <a:prstDash val="solid"/>
+          </a:ln>
+        </p:spPr>
+      </p:sp>
+      <p:sp>
+        <p:nvSpPr>
+          <p:cNvPr id="17" name="Text 15"/>
+          <p:cNvSpPr/>
+          <p:nvPr/>
+        </p:nvSpPr>
+        <p:spPr>
+          <a:xfrm>
+            <a:off x="9119616" y="4169664"/>
+            <a:ext cx="826008" cy="310896"/>
+          </a:xfrm>
+          <a:prstGeom prst="rect">
+            <a:avLst/>
+          </a:prstGeom>
+          <a:noFill/>
+          <a:ln/>
+        </p:spPr>
+        <p:txBody>
+          <a:bodyPr wrap="square" lIns="0" tIns="0" rIns="0" bIns="0" rtlCol="0" anchor="ctr">
+            <a:normAutofit/>
+          </a:bodyPr>
+          <a:lstStyle/>
+          <a:p>
+            <a:pPr algn="ctr" indent="0" marL="0">
+              <a:buNone/>
+            </a:pPr>
+            <a:r>
+              <a:rPr lang="en-US" sz="1500" b="1" dirty="0">
+                <a:solidFill>
+                  <a:srgbClr val="FFFFFF"/>
+                </a:solidFill>
+                <a:latin typeface="Aptos" pitchFamily="34" charset="0"/>
+                <a:ea typeface="Aptos" pitchFamily="34" charset="-122"/>
+                <a:cs typeface="Aptos" pitchFamily="34" charset="-120"/>
+              </a:rPr>
+              <a:t>Plays</a:t>
+            </a:r>
+            <a:endParaRPr lang="en-US" sz="1500" dirty="0"/>
+          </a:p>
+        </p:txBody>
+      </p:sp>
+      <p:sp>
+        <p:nvSpPr>
+          <p:cNvPr id="18" name="Text 16"/>
+          <p:cNvSpPr/>
+          <p:nvPr/>
+        </p:nvSpPr>
+        <p:spPr>
+          <a:xfrm>
+            <a:off x="10046208" y="4187952"/>
+            <a:ext cx="201168" cy="256032"/>
+          </a:xfrm>
+          <a:prstGeom prst="rect">
+            <a:avLst/>
+          </a:prstGeom>
+          <a:noFill/>
+          <a:ln/>
+        </p:spPr>
+        <p:txBody>
+          <a:bodyPr wrap="square" lIns="0" tIns="0" rIns="0" bIns="0" rtlCol="0" anchor="ctr"/>
+          <a:lstStyle/>
+          <a:p>
+            <a:pPr algn="ctr" indent="0" marL="0">
+              <a:buNone/>
+            </a:pPr>
+            <a:r>
+              <a:rPr lang="en-US" sz="1800" b="1" dirty="0">
+                <a:solidFill>
+                  <a:srgbClr val="0068B7"/>
+                </a:solidFill>
+                <a:latin typeface="Aptos" pitchFamily="34" charset="0"/>
+                <a:ea typeface="Aptos" pitchFamily="34" charset="-122"/>
+                <a:cs typeface="Aptos" pitchFamily="34" charset="-120"/>
+              </a:rPr>
+              <a:t>â†’</a:t>
+            </a:r>
+            <a:endParaRPr lang="en-US" sz="1800" dirty="0"/>
+          </a:p>
+        </p:txBody>
+      </p:sp>
+      <p:sp>
+        <p:nvSpPr>
+          <p:cNvPr id="19" name="Shape 17"/>
+          <p:cNvSpPr/>
+          <p:nvPr/>
+        </p:nvSpPr>
+        <p:spPr>
+          <a:xfrm>
+            <a:off x="10274808" y="3977640"/>
+            <a:ext cx="972312" cy="749808"/>
+          </a:xfrm>
+          <a:prstGeom prst="roundRect">
+            <a:avLst>
+              <a:gd name="adj" fmla="val 14634"/>
+            </a:avLst>
+          </a:prstGeom>
+          <a:solidFill>
+            <a:srgbClr val="6A4CA3"/>
+          </a:solidFill>
+          <a:ln w="12700">
+            <a:solidFill>
+              <a:srgbClr val="6A4CA3"/>
+            </a:solidFill>
+            <a:prstDash val="solid"/>
+          </a:ln>
+        </p:spPr>
+      </p:sp>
+      <p:sp>
+        <p:nvSpPr>
+          <p:cNvPr id="20" name="Text 18"/>
+          <p:cNvSpPr/>
+          <p:nvPr/>
+        </p:nvSpPr>
+        <p:spPr>
+          <a:xfrm>
+            <a:off x="10347960" y="4169664"/>
+            <a:ext cx="826008" cy="310896"/>
+          </a:xfrm>
+          <a:prstGeom prst="rect">
+            <a:avLst/>
+          </a:prstGeom>
+          <a:noFill/>
+          <a:ln/>
+        </p:spPr>
+        <p:txBody>
+          <a:bodyPr wrap="square" lIns="0" tIns="0" rIns="0" bIns="0" rtlCol="0" anchor="ctr">
+            <a:normAutofit/>
+          </a:bodyPr>
+          <a:lstStyle/>
+          <a:p>
+            <a:pPr algn="ctr" indent="0" marL="0">
+              <a:buNone/>
+            </a:pPr>
+            <a:r>
+              <a:rPr lang="en-US" sz="1500" b="1" dirty="0">
+                <a:solidFill>
+                  <a:srgbClr val="FFFFFF"/>
+                </a:solidFill>
+                <a:latin typeface="Aptos" pitchFamily="34" charset="0"/>
+                <a:ea typeface="Aptos" pitchFamily="34" charset="-122"/>
+                <a:cs typeface="Aptos" pitchFamily="34" charset="-120"/>
+              </a:rPr>
+              <a:t>Action</a:t>
+            </a:r>
+            <a:endParaRPr lang="en-US" sz="1500" dirty="0"/>
           </a:p>
         </p:txBody>
       </p:sp>
@@ -11047,7 +11898,7 @@
                 <a:ea typeface="Aptos" pitchFamily="34" charset="-122"/>
                 <a:cs typeface="Aptos" pitchFamily="34" charset="-120"/>
               </a:rPr>
-              <a:t>© Paula Soper</a:t>
+              <a:t>Â© Paula Soper</a:t>
             </a:r>
             <a:endParaRPr lang="en-US" sz="800" dirty="0"/>
           </a:p>
@@ -11061,8 +11912,47 @@
         </p:nvSpPr>
         <p:spPr>
           <a:xfrm>
+            <a:off x="11137392" y="6510528"/>
+            <a:ext cx="411480" cy="201168"/>
+          </a:xfrm>
+          <a:prstGeom prst="rect">
+            <a:avLst/>
+          </a:prstGeom>
+          <a:noFill/>
+          <a:ln/>
+        </p:spPr>
+        <p:txBody>
+          <a:bodyPr wrap="square" lIns="0" tIns="0" rIns="0" bIns="0" rtlCol="0" anchor="ctr"/>
+          <a:lstStyle/>
+          <a:p>
+            <a:pPr algn="r" indent="0" marL="0">
+              <a:buNone/>
+            </a:pPr>
+            <a:r>
+              <a:rPr lang="en-US" sz="900" dirty="0">
+                <a:solidFill>
+                  <a:srgbClr val="5F7181"/>
+                </a:solidFill>
+                <a:latin typeface="Aptos" pitchFamily="34" charset="0"/>
+                <a:ea typeface="Aptos" pitchFamily="34" charset="-122"/>
+                <a:cs typeface="Aptos" pitchFamily="34" charset="-120"/>
+              </a:rPr>
+              <a:t>4</a:t>
+            </a:r>
+            <a:endParaRPr lang="en-US" sz="900" dirty="0"/>
+          </a:p>
+        </p:txBody>
+      </p:sp>
+      <p:sp>
+        <p:nvSpPr>
+          <p:cNvPr id="8" name="Text 6"/>
+          <p:cNvSpPr/>
+          <p:nvPr/>
+        </p:nvSpPr>
+        <p:spPr>
+          <a:xfrm>
             <a:off x="640080" y="658368"/>
-            <a:ext cx="10881360" cy="566928"/>
+            <a:ext cx="10881360" cy="713232"/>
           </a:xfrm>
           <a:prstGeom prst="rect">
             <a:avLst/>
@@ -11080,7 +11970,7 @@
               <a:buNone/>
             </a:pPr>
             <a:r>
-              <a:rPr lang="en-US" sz="2700" b="1" dirty="0">
+              <a:rPr lang="en-US" sz="3400" b="1" dirty="0">
                 <a:solidFill>
                   <a:srgbClr val="003A63"/>
                 </a:solidFill>
@@ -11090,20 +11980,20 @@
               </a:rPr>
               <a:t>Related toolkit resources</a:t>
             </a:r>
-            <a:endParaRPr lang="en-US" sz="2700" dirty="0"/>
-          </a:p>
-        </p:txBody>
-      </p:sp>
-      <p:sp>
-        <p:nvSpPr>
-          <p:cNvPr id="8" name="Text 6"/>
-          <p:cNvSpPr/>
-          <p:nvPr/>
-        </p:nvSpPr>
-        <p:spPr>
-          <a:xfrm>
-            <a:off x="868680" y="1417320"/>
-            <a:ext cx="6903720" cy="4480560"/>
+            <a:endParaRPr lang="en-US" sz="3400" dirty="0"/>
+          </a:p>
+        </p:txBody>
+      </p:sp>
+      <p:sp>
+        <p:nvSpPr>
+          <p:cNvPr id="9" name="Text 7"/>
+          <p:cNvSpPr/>
+          <p:nvPr/>
+        </p:nvSpPr>
+        <p:spPr>
+          <a:xfrm>
+            <a:off x="868680" y="1508760"/>
+            <a:ext cx="6812280" cy="3977640"/>
           </a:xfrm>
           <a:prstGeom prst="rect">
             <a:avLst/>
@@ -11118,7 +12008,7 @@
           <a:lstStyle/>
           <a:p>
             <a:r>
-              <a:rPr lang="en-US" sz="1460" dirty="0">
+              <a:rPr lang="en-US" sz="1850" dirty="0">
                 <a:solidFill>
                   <a:srgbClr val="17364A"/>
                 </a:solidFill>
@@ -11126,13 +12016,13 @@
                 <a:ea typeface="Aptos" pitchFamily="34" charset="-122"/>
                 <a:cs typeface="Aptos" pitchFamily="34" charset="-120"/>
               </a:rPr>
-              <a:t>Tool 4: AI Policy Landscape Scan (Worksheet) - Use AI Policy Landscape Scan to translate this lesson into a documented public health.</a:t>
-            </a:r>
-            <a:endParaRPr lang="en-US" sz="1460" dirty="0"/>
-          </a:p>
-          <a:p>
-            <a:r>
-              <a:rPr lang="en-US" sz="1460" dirty="0">
+              <a:t>Tool 4: AI Policy Landscape Scan (Worksheet) - Use AI Policy Landscape Scan to translate this lesson into a.</a:t>
+            </a:r>
+            <a:endParaRPr lang="en-US" sz="1850" dirty="0"/>
+          </a:p>
+          <a:p>
+            <a:r>
+              <a:rPr lang="en-US" sz="1850" dirty="0">
                 <a:solidFill>
                   <a:srgbClr val="17364A"/>
                 </a:solidFill>
@@ -11140,13 +12030,13 @@
                 <a:ea typeface="Aptos" pitchFamily="34" charset="-122"/>
                 <a:cs typeface="Aptos" pitchFamily="34" charset="-120"/>
               </a:rPr>
-              <a:t>Tool 5: AI Environmental and Resource Impact Review (Checklist) - Use this tool to complete or strengthen the practical exercise for.</a:t>
-            </a:r>
-            <a:endParaRPr lang="en-US" sz="1460" dirty="0"/>
-          </a:p>
-          <a:p>
-            <a:r>
-              <a:rPr lang="en-US" sz="1460" dirty="0">
+              <a:t>Tool 5: AI Environmental and Resource Impact Review (Checklist) - Use this tool to complete or strengthen.</a:t>
+            </a:r>
+            <a:endParaRPr lang="en-US" sz="1850" dirty="0"/>
+          </a:p>
+          <a:p>
+            <a:r>
+              <a:rPr lang="en-US" sz="1850" dirty="0">
                 <a:solidFill>
                   <a:srgbClr val="17364A"/>
                 </a:solidFill>
@@ -11154,13 +12044,13 @@
                 <a:ea typeface="Aptos" pitchFamily="34" charset="-122"/>
                 <a:cs typeface="Aptos" pitchFamily="34" charset="-120"/>
               </a:rPr>
-              <a:t>Tool 6: Human-Centered AI Decision Rule Checklist (Checklist) - Use Human-Centered AI Decision Rule Checklist to translate this.</a:t>
-            </a:r>
-            <a:endParaRPr lang="en-US" sz="1460" dirty="0"/>
-          </a:p>
-          <a:p>
-            <a:r>
-              <a:rPr lang="en-US" sz="1460" dirty="0">
+              <a:t>Tool 6: Human-Centered AI Decision Rule Checklist (Checklist) - Use Human-Centered AI Decision Rule.</a:t>
+            </a:r>
+            <a:endParaRPr lang="en-US" sz="1850" dirty="0"/>
+          </a:p>
+          <a:p>
+            <a:r>
+              <a:rPr lang="en-US" sz="1850" dirty="0">
                 <a:solidFill>
                   <a:srgbClr val="17364A"/>
                 </a:solidFill>
@@ -11168,29 +12058,15 @@
                 <a:ea typeface="Aptos" pitchFamily="34" charset="-122"/>
                 <a:cs typeface="Aptos" pitchFamily="34" charset="-120"/>
               </a:rPr>
-              <a:t>Tool 8: AI Project Charter (Planning) - Use AI Project Charter to translate this lesson into a documented public health AI planning,.</a:t>
-            </a:r>
-            <a:endParaRPr lang="en-US" sz="1460" dirty="0"/>
-          </a:p>
-          <a:p>
-            <a:r>
-              <a:rPr lang="en-US" sz="1460" dirty="0">
-                <a:solidFill>
-                  <a:srgbClr val="17364A"/>
-                </a:solidFill>
-                <a:latin typeface="Aptos" pitchFamily="34" charset="0"/>
-                <a:ea typeface="Aptos" pitchFamily="34" charset="-122"/>
-                <a:cs typeface="Aptos" pitchFamily="34" charset="-120"/>
-              </a:rPr>
-              <a:t>Tool 9: Data Quality Assessment Checklist (Checklist) - Use this tool to complete or strengthen the practical exercise for the module.</a:t>
-            </a:r>
-            <a:endParaRPr lang="en-US" sz="1460" dirty="0"/>
-          </a:p>
-        </p:txBody>
-      </p:sp>
-      <p:sp>
-        <p:nvSpPr>
-          <p:cNvPr id="9" name="Shape 7"/>
+              <a:t>Tool 8: AI Project Charter (Planning) - Use AI Project Charter to translate this lesson into a documented.</a:t>
+            </a:r>
+            <a:endParaRPr lang="en-US" sz="1850" dirty="0"/>
+          </a:p>
+        </p:txBody>
+      </p:sp>
+      <p:sp>
+        <p:nvSpPr>
+          <p:cNvPr id="10" name="Shape 8"/>
           <p:cNvSpPr/>
           <p:nvPr/>
         </p:nvSpPr>
@@ -11217,14 +12093,14 @@
       </p:sp>
       <p:sp>
         <p:nvSpPr>
-          <p:cNvPr id="10" name="Text 8"/>
+          <p:cNvPr id="11" name="Text 9"/>
           <p:cNvSpPr/>
           <p:nvPr/>
         </p:nvSpPr>
         <p:spPr>
           <a:xfrm>
             <a:off x="8211312" y="1563624"/>
-            <a:ext cx="2734056" cy="201168"/>
+            <a:ext cx="2734056" cy="256032"/>
           </a:xfrm>
           <a:prstGeom prst="rect">
             <a:avLst/>
@@ -11240,7 +12116,7 @@
               <a:buNone/>
             </a:pPr>
             <a:r>
-              <a:rPr lang="en-US" sz="950" b="1" dirty="0">
+              <a:rPr lang="en-US" sz="1300" b="1" dirty="0">
                 <a:solidFill>
                   <a:srgbClr val="0068B7"/>
                 </a:solidFill>
@@ -11250,20 +12126,20 @@
               </a:rPr>
               <a:t>Use the tools</a:t>
             </a:r>
-            <a:endParaRPr lang="en-US" sz="950" dirty="0"/>
-          </a:p>
-        </p:txBody>
-      </p:sp>
-      <p:sp>
-        <p:nvSpPr>
-          <p:cNvPr id="11" name="Text 9"/>
-          <p:cNvSpPr/>
-          <p:nvPr/>
-        </p:nvSpPr>
-        <p:spPr>
-          <a:xfrm>
-            <a:off x="8211312" y="1856232"/>
-            <a:ext cx="2734056" cy="1536192"/>
+            <a:endParaRPr lang="en-US" sz="1300" dirty="0"/>
+          </a:p>
+        </p:txBody>
+      </p:sp>
+      <p:sp>
+        <p:nvSpPr>
+          <p:cNvPr id="12" name="Text 10"/>
+          <p:cNvSpPr/>
+          <p:nvPr/>
+        </p:nvSpPr>
+        <p:spPr>
+          <a:xfrm>
+            <a:off x="8211312" y="1920240"/>
+            <a:ext cx="2734056" cy="1463040"/>
           </a:xfrm>
           <a:prstGeom prst="rect">
             <a:avLst/>
@@ -11281,7 +12157,7 @@
               <a:buNone/>
             </a:pPr>
             <a:r>
-              <a:rPr lang="en-US" sz="1250" dirty="0">
+              <a:rPr lang="en-US" sz="1550" dirty="0">
                 <a:solidFill>
                   <a:srgbClr val="17364A"/>
                 </a:solidFill>
@@ -11291,32 +12167,32 @@
               </a:rPr>
               <a:t>Use linked tools when your department needs a structured worksheet, template, checklist, review process, or documentation artifact.</a:t>
             </a:r>
-            <a:endParaRPr lang="en-US" sz="1250" dirty="0"/>
-          </a:p>
-        </p:txBody>
-      </p:sp>
-      <p:sp>
-        <p:nvSpPr>
-          <p:cNvPr id="12" name="Shape 10"/>
-          <p:cNvSpPr/>
-          <p:nvPr/>
-        </p:nvSpPr>
-        <p:spPr>
-          <a:xfrm>
-            <a:off x="8046720" y="3794760"/>
-            <a:ext cx="3063240" cy="1508760"/>
+            <a:endParaRPr lang="en-US" sz="1550" dirty="0"/>
+          </a:p>
+        </p:txBody>
+      </p:sp>
+      <p:sp>
+        <p:nvSpPr>
+          <p:cNvPr id="13" name="Shape 11"/>
+          <p:cNvSpPr/>
+          <p:nvPr/>
+        </p:nvSpPr>
+        <p:spPr>
+          <a:xfrm>
+            <a:off x="7818120" y="3977640"/>
+            <a:ext cx="972312" cy="749808"/>
           </a:xfrm>
           <a:prstGeom prst="roundRect">
             <a:avLst>
-              <a:gd name="adj" fmla="val 7273"/>
+              <a:gd name="adj" fmla="val 14634"/>
             </a:avLst>
           </a:prstGeom>
           <a:solidFill>
-            <a:srgbClr val="EEF8ED"/>
+            <a:srgbClr val="0068B7"/>
           </a:solidFill>
           <a:ln w="12700">
             <a:solidFill>
-              <a:srgbClr val="B9D7E6"/>
+              <a:srgbClr val="0068B7"/>
             </a:solidFill>
             <a:prstDash val="solid"/>
           </a:ln>
@@ -11324,81 +12200,256 @@
       </p:sp>
       <p:sp>
         <p:nvSpPr>
-          <p:cNvPr id="13" name="Text 11"/>
-          <p:cNvSpPr/>
-          <p:nvPr/>
-        </p:nvSpPr>
-        <p:spPr>
-          <a:xfrm>
-            <a:off x="8211312" y="3941064"/>
-            <a:ext cx="2734056" cy="201168"/>
-          </a:xfrm>
-          <a:prstGeom prst="rect">
-            <a:avLst/>
-          </a:prstGeom>
-          <a:noFill/>
-          <a:ln/>
-        </p:spPr>
-        <p:txBody>
-          <a:bodyPr wrap="square" lIns="0" tIns="0" rIns="0" bIns="0" rtlCol="0" anchor="ctr"/>
-          <a:lstStyle/>
-          <a:p>
-            <a:pPr indent="0" marL="0">
-              <a:buNone/>
-            </a:pPr>
-            <a:r>
-              <a:rPr lang="en-US" sz="950" b="1" dirty="0">
-                <a:solidFill>
-                  <a:srgbClr val="0068B7"/>
-                </a:solidFill>
-                <a:latin typeface="Aptos" pitchFamily="34" charset="0"/>
-                <a:ea typeface="Aptos" pitchFamily="34" charset="-122"/>
-                <a:cs typeface="Aptos" pitchFamily="34" charset="-120"/>
-              </a:rPr>
-              <a:t>Avoid duplication</a:t>
-            </a:r>
-            <a:endParaRPr lang="en-US" sz="950" dirty="0"/>
-          </a:p>
-        </p:txBody>
-      </p:sp>
-      <p:sp>
-        <p:nvSpPr>
           <p:cNvPr id="14" name="Text 12"/>
           <p:cNvSpPr/>
           <p:nvPr/>
         </p:nvSpPr>
         <p:spPr>
           <a:xfrm>
-            <a:off x="8211312" y="4233672"/>
-            <a:ext cx="2734056" cy="941832"/>
-          </a:xfrm>
-          <a:prstGeom prst="rect">
-            <a:avLst/>
-          </a:prstGeom>
-          <a:noFill/>
-          <a:ln/>
-        </p:spPr>
-        <p:txBody>
-          <a:bodyPr wrap="square" lIns="0" tIns="0" rIns="0" bIns="0" rtlCol="0" anchor="t">
+            <a:off x="7891272" y="4169664"/>
+            <a:ext cx="826008" cy="310896"/>
+          </a:xfrm>
+          <a:prstGeom prst="rect">
+            <a:avLst/>
+          </a:prstGeom>
+          <a:noFill/>
+          <a:ln/>
+        </p:spPr>
+        <p:txBody>
+          <a:bodyPr wrap="square" lIns="0" tIns="0" rIns="0" bIns="0" rtlCol="0" anchor="ctr">
             <a:normAutofit/>
           </a:bodyPr>
           <a:lstStyle/>
           <a:p>
-            <a:pPr indent="0" marL="0">
-              <a:buNone/>
-            </a:pPr>
-            <a:r>
-              <a:rPr lang="en-US" sz="1250" dirty="0">
-                <a:solidFill>
-                  <a:srgbClr val="17364A"/>
-                </a:solidFill>
-                <a:latin typeface="Aptos" pitchFamily="34" charset="0"/>
-                <a:ea typeface="Aptos" pitchFamily="34" charset="-122"/>
-                <a:cs typeface="Aptos" pitchFamily="34" charset="-120"/>
-              </a:rPr>
-              <a:t>If your department already has a strong equivalent tool, adapt or use the existing process instead of recreating it.</a:t>
-            </a:r>
-            <a:endParaRPr lang="en-US" sz="1250" dirty="0"/>
+            <a:pPr algn="ctr" indent="0" marL="0">
+              <a:buNone/>
+            </a:pPr>
+            <a:r>
+              <a:rPr lang="en-US" sz="1500" b="1" dirty="0">
+                <a:solidFill>
+                  <a:srgbClr val="FFFFFF"/>
+                </a:solidFill>
+                <a:latin typeface="Aptos" pitchFamily="34" charset="0"/>
+                <a:ea typeface="Aptos" pitchFamily="34" charset="-122"/>
+                <a:cs typeface="Aptos" pitchFamily="34" charset="-120"/>
+              </a:rPr>
+              <a:t>Concept</a:t>
+            </a:r>
+            <a:endParaRPr lang="en-US" sz="1500" dirty="0"/>
+          </a:p>
+        </p:txBody>
+      </p:sp>
+      <p:sp>
+        <p:nvSpPr>
+          <p:cNvPr id="15" name="Text 13"/>
+          <p:cNvSpPr/>
+          <p:nvPr/>
+        </p:nvSpPr>
+        <p:spPr>
+          <a:xfrm>
+            <a:off x="8817864" y="4187952"/>
+            <a:ext cx="201168" cy="256032"/>
+          </a:xfrm>
+          <a:prstGeom prst="rect">
+            <a:avLst/>
+          </a:prstGeom>
+          <a:noFill/>
+          <a:ln/>
+        </p:spPr>
+        <p:txBody>
+          <a:bodyPr wrap="square" lIns="0" tIns="0" rIns="0" bIns="0" rtlCol="0" anchor="ctr"/>
+          <a:lstStyle/>
+          <a:p>
+            <a:pPr algn="ctr" indent="0" marL="0">
+              <a:buNone/>
+            </a:pPr>
+            <a:r>
+              <a:rPr lang="en-US" sz="1800" b="1" dirty="0">
+                <a:solidFill>
+                  <a:srgbClr val="0068B7"/>
+                </a:solidFill>
+                <a:latin typeface="Aptos" pitchFamily="34" charset="0"/>
+                <a:ea typeface="Aptos" pitchFamily="34" charset="-122"/>
+                <a:cs typeface="Aptos" pitchFamily="34" charset="-120"/>
+              </a:rPr>
+              <a:t>â†’</a:t>
+            </a:r>
+            <a:endParaRPr lang="en-US" sz="1800" dirty="0"/>
+          </a:p>
+        </p:txBody>
+      </p:sp>
+      <p:sp>
+        <p:nvSpPr>
+          <p:cNvPr id="16" name="Shape 14"/>
+          <p:cNvSpPr/>
+          <p:nvPr/>
+        </p:nvSpPr>
+        <p:spPr>
+          <a:xfrm>
+            <a:off x="9046464" y="3977640"/>
+            <a:ext cx="972312" cy="749808"/>
+          </a:xfrm>
+          <a:prstGeom prst="roundRect">
+            <a:avLst>
+              <a:gd name="adj" fmla="val 14634"/>
+            </a:avLst>
+          </a:prstGeom>
+          <a:solidFill>
+            <a:srgbClr val="2F8A28"/>
+          </a:solidFill>
+          <a:ln w="12700">
+            <a:solidFill>
+              <a:srgbClr val="2F8A28"/>
+            </a:solidFill>
+            <a:prstDash val="solid"/>
+          </a:ln>
+        </p:spPr>
+      </p:sp>
+      <p:sp>
+        <p:nvSpPr>
+          <p:cNvPr id="17" name="Text 15"/>
+          <p:cNvSpPr/>
+          <p:nvPr/>
+        </p:nvSpPr>
+        <p:spPr>
+          <a:xfrm>
+            <a:off x="9119616" y="4169664"/>
+            <a:ext cx="826008" cy="310896"/>
+          </a:xfrm>
+          <a:prstGeom prst="rect">
+            <a:avLst/>
+          </a:prstGeom>
+          <a:noFill/>
+          <a:ln/>
+        </p:spPr>
+        <p:txBody>
+          <a:bodyPr wrap="square" lIns="0" tIns="0" rIns="0" bIns="0" rtlCol="0" anchor="ctr">
+            <a:normAutofit/>
+          </a:bodyPr>
+          <a:lstStyle/>
+          <a:p>
+            <a:pPr algn="ctr" indent="0" marL="0">
+              <a:buNone/>
+            </a:pPr>
+            <a:r>
+              <a:rPr lang="en-US" sz="1500" b="1" dirty="0">
+                <a:solidFill>
+                  <a:srgbClr val="FFFFFF"/>
+                </a:solidFill>
+                <a:latin typeface="Aptos" pitchFamily="34" charset="0"/>
+                <a:ea typeface="Aptos" pitchFamily="34" charset="-122"/>
+                <a:cs typeface="Aptos" pitchFamily="34" charset="-120"/>
+              </a:rPr>
+              <a:t>Tool</a:t>
+            </a:r>
+            <a:endParaRPr lang="en-US" sz="1500" dirty="0"/>
+          </a:p>
+        </p:txBody>
+      </p:sp>
+      <p:sp>
+        <p:nvSpPr>
+          <p:cNvPr id="18" name="Text 16"/>
+          <p:cNvSpPr/>
+          <p:nvPr/>
+        </p:nvSpPr>
+        <p:spPr>
+          <a:xfrm>
+            <a:off x="10046208" y="4187952"/>
+            <a:ext cx="201168" cy="256032"/>
+          </a:xfrm>
+          <a:prstGeom prst="rect">
+            <a:avLst/>
+          </a:prstGeom>
+          <a:noFill/>
+          <a:ln/>
+        </p:spPr>
+        <p:txBody>
+          <a:bodyPr wrap="square" lIns="0" tIns="0" rIns="0" bIns="0" rtlCol="0" anchor="ctr"/>
+          <a:lstStyle/>
+          <a:p>
+            <a:pPr algn="ctr" indent="0" marL="0">
+              <a:buNone/>
+            </a:pPr>
+            <a:r>
+              <a:rPr lang="en-US" sz="1800" b="1" dirty="0">
+                <a:solidFill>
+                  <a:srgbClr val="0068B7"/>
+                </a:solidFill>
+                <a:latin typeface="Aptos" pitchFamily="34" charset="0"/>
+                <a:ea typeface="Aptos" pitchFamily="34" charset="-122"/>
+                <a:cs typeface="Aptos" pitchFamily="34" charset="-120"/>
+              </a:rPr>
+              <a:t>â†’</a:t>
+            </a:r>
+            <a:endParaRPr lang="en-US" sz="1800" dirty="0"/>
+          </a:p>
+        </p:txBody>
+      </p:sp>
+      <p:sp>
+        <p:nvSpPr>
+          <p:cNvPr id="19" name="Shape 17"/>
+          <p:cNvSpPr/>
+          <p:nvPr/>
+        </p:nvSpPr>
+        <p:spPr>
+          <a:xfrm>
+            <a:off x="10274808" y="3977640"/>
+            <a:ext cx="972312" cy="749808"/>
+          </a:xfrm>
+          <a:prstGeom prst="roundRect">
+            <a:avLst>
+              <a:gd name="adj" fmla="val 14634"/>
+            </a:avLst>
+          </a:prstGeom>
+          <a:solidFill>
+            <a:srgbClr val="D69A2D"/>
+          </a:solidFill>
+          <a:ln w="12700">
+            <a:solidFill>
+              <a:srgbClr val="D69A2D"/>
+            </a:solidFill>
+            <a:prstDash val="solid"/>
+          </a:ln>
+        </p:spPr>
+      </p:sp>
+      <p:sp>
+        <p:nvSpPr>
+          <p:cNvPr id="20" name="Text 18"/>
+          <p:cNvSpPr/>
+          <p:nvPr/>
+        </p:nvSpPr>
+        <p:spPr>
+          <a:xfrm>
+            <a:off x="10347960" y="4169664"/>
+            <a:ext cx="826008" cy="310896"/>
+          </a:xfrm>
+          <a:prstGeom prst="rect">
+            <a:avLst/>
+          </a:prstGeom>
+          <a:noFill/>
+          <a:ln/>
+        </p:spPr>
+        <p:txBody>
+          <a:bodyPr wrap="square" lIns="0" tIns="0" rIns="0" bIns="0" rtlCol="0" anchor="ctr">
+            <a:normAutofit/>
+          </a:bodyPr>
+          <a:lstStyle/>
+          <a:p>
+            <a:pPr algn="ctr" indent="0" marL="0">
+              <a:buNone/>
+            </a:pPr>
+            <a:r>
+              <a:rPr lang="en-US" sz="1500" b="1" dirty="0">
+                <a:solidFill>
+                  <a:srgbClr val="FFFFFF"/>
+                </a:solidFill>
+                <a:latin typeface="Aptos" pitchFamily="34" charset="0"/>
+                <a:ea typeface="Aptos" pitchFamily="34" charset="-122"/>
+                <a:cs typeface="Aptos" pitchFamily="34" charset="-120"/>
+              </a:rPr>
+              <a:t>Artifact</a:t>
+            </a:r>
+            <a:endParaRPr lang="en-US" sz="1500" dirty="0"/>
           </a:p>
         </p:txBody>
       </p:sp>
@@ -11595,7 +12646,7 @@
                 <a:ea typeface="Aptos" pitchFamily="34" charset="-122"/>
                 <a:cs typeface="Aptos" pitchFamily="34" charset="-120"/>
               </a:rPr>
-              <a:t>© Paula Soper</a:t>
+              <a:t>Â© Paula Soper</a:t>
             </a:r>
             <a:endParaRPr lang="en-US" sz="800" dirty="0"/>
           </a:p>
@@ -11603,7 +12654,46 @@
       </p:sp>
       <p:sp>
         <p:nvSpPr>
-          <p:cNvPr id="7" name="Shape 5"/>
+          <p:cNvPr id="7" name="Text 5"/>
+          <p:cNvSpPr/>
+          <p:nvPr/>
+        </p:nvSpPr>
+        <p:spPr>
+          <a:xfrm>
+            <a:off x="11137392" y="6510528"/>
+            <a:ext cx="411480" cy="201168"/>
+          </a:xfrm>
+          <a:prstGeom prst="rect">
+            <a:avLst/>
+          </a:prstGeom>
+          <a:noFill/>
+          <a:ln/>
+        </p:spPr>
+        <p:txBody>
+          <a:bodyPr wrap="square" lIns="0" tIns="0" rIns="0" bIns="0" rtlCol="0" anchor="ctr"/>
+          <a:lstStyle/>
+          <a:p>
+            <a:pPr algn="r" indent="0" marL="0">
+              <a:buNone/>
+            </a:pPr>
+            <a:r>
+              <a:rPr lang="en-US" sz="900" dirty="0">
+                <a:solidFill>
+                  <a:srgbClr val="5F7181"/>
+                </a:solidFill>
+                <a:latin typeface="Aptos" pitchFamily="34" charset="0"/>
+                <a:ea typeface="Aptos" pitchFamily="34" charset="-122"/>
+                <a:cs typeface="Aptos" pitchFamily="34" charset="-120"/>
+              </a:rPr>
+              <a:t>5</a:t>
+            </a:r>
+            <a:endParaRPr lang="en-US" sz="900" dirty="0"/>
+          </a:p>
+        </p:txBody>
+      </p:sp>
+      <p:sp>
+        <p:nvSpPr>
+          <p:cNvPr id="8" name="Shape 6"/>
           <p:cNvSpPr/>
           <p:nvPr/>
         </p:nvSpPr>
@@ -11628,7 +12718,7 @@
       </p:sp>
       <p:sp>
         <p:nvSpPr>
-          <p:cNvPr id="8" name="Text 6"/>
+          <p:cNvPr id="9" name="Text 7"/>
           <p:cNvSpPr/>
           <p:nvPr/>
         </p:nvSpPr>
@@ -11667,14 +12757,14 @@
       </p:sp>
       <p:sp>
         <p:nvSpPr>
-          <p:cNvPr id="9" name="Text 7"/>
+          <p:cNvPr id="10" name="Text 8"/>
           <p:cNvSpPr/>
           <p:nvPr/>
         </p:nvSpPr>
         <p:spPr>
           <a:xfrm>
             <a:off x="640080" y="621792"/>
-            <a:ext cx="10881360" cy="566928"/>
+            <a:ext cx="10881360" cy="713232"/>
           </a:xfrm>
           <a:prstGeom prst="rect">
             <a:avLst/>
@@ -11692,7 +12782,7 @@
               <a:buNone/>
             </a:pPr>
             <a:r>
-              <a:rPr lang="en-US" sz="2700" b="1" dirty="0">
+              <a:rPr lang="en-US" sz="3400" b="1" dirty="0">
                 <a:solidFill>
                   <a:srgbClr val="003A63"/>
                 </a:solidFill>
@@ -11702,20 +12792,20 @@
               </a:rPr>
               <a:t>Learning Objectives</a:t>
             </a:r>
-            <a:endParaRPr lang="en-US" sz="2700" dirty="0"/>
-          </a:p>
-        </p:txBody>
-      </p:sp>
-      <p:sp>
-        <p:nvSpPr>
-          <p:cNvPr id="10" name="Text 8"/>
-          <p:cNvSpPr/>
-          <p:nvPr/>
-        </p:nvSpPr>
-        <p:spPr>
-          <a:xfrm>
-            <a:off x="868680" y="1417320"/>
-            <a:ext cx="6675120" cy="4434840"/>
+            <a:endParaRPr lang="en-US" sz="3400" dirty="0"/>
+          </a:p>
+        </p:txBody>
+      </p:sp>
+      <p:sp>
+        <p:nvSpPr>
+          <p:cNvPr id="11" name="Text 9"/>
+          <p:cNvSpPr/>
+          <p:nvPr/>
+        </p:nvSpPr>
+        <p:spPr>
+          <a:xfrm>
+            <a:off x="868680" y="1508760"/>
+            <a:ext cx="6537960" cy="4160520"/>
           </a:xfrm>
           <a:prstGeom prst="rect">
             <a:avLst/>
@@ -11730,7 +12820,7 @@
           <a:lstStyle/>
           <a:p>
             <a:r>
-              <a:rPr lang="en-US" sz="1700" dirty="0">
+              <a:rPr lang="en-US" sz="2100" dirty="0">
                 <a:solidFill>
                   <a:srgbClr val="17364A"/>
                 </a:solidFill>
@@ -11740,11 +12830,11 @@
               </a:rPr>
               <a:t>Identify the full cost components of AI implementation and operations.</a:t>
             </a:r>
-            <a:endParaRPr lang="en-US" sz="1700" dirty="0"/>
-          </a:p>
-          <a:p>
-            <a:r>
-              <a:rPr lang="en-US" sz="1700" dirty="0">
+            <a:endParaRPr lang="en-US" sz="2100" dirty="0"/>
+          </a:p>
+          <a:p>
+            <a:r>
+              <a:rPr lang="en-US" sz="2100" dirty="0">
                 <a:solidFill>
                   <a:srgbClr val="17364A"/>
                 </a:solidFill>
@@ -11752,13 +12842,13 @@
                 <a:ea typeface="Aptos" pitchFamily="34" charset="-122"/>
                 <a:cs typeface="Aptos" pitchFamily="34" charset="-120"/>
               </a:rPr>
-              <a:t>Evaluate expected benefits in terms of public health value, workflow improvement, equity, quality, timeliness, and staff burden.</a:t>
-            </a:r>
-            <a:endParaRPr lang="en-US" sz="1700" dirty="0"/>
-          </a:p>
-          <a:p>
-            <a:r>
-              <a:rPr lang="en-US" sz="1700" dirty="0">
+              <a:t>Evaluate expected benefits in terms of public health value, workflow improvement, equity, quality,.</a:t>
+            </a:r>
+            <a:endParaRPr lang="en-US" sz="2100" dirty="0"/>
+          </a:p>
+          <a:p>
+            <a:r>
+              <a:rPr lang="en-US" sz="2100" dirty="0">
                 <a:solidFill>
                   <a:srgbClr val="17364A"/>
                 </a:solidFill>
@@ -11768,27 +12858,13 @@
               </a:rPr>
               <a:t>Distinguish between a vendor demonstration and a credible business case.</a:t>
             </a:r>
-            <a:endParaRPr lang="en-US" sz="1700" dirty="0"/>
-          </a:p>
-          <a:p>
-            <a:r>
-              <a:rPr lang="en-US" sz="1700" dirty="0">
-                <a:solidFill>
-                  <a:srgbClr val="17364A"/>
-                </a:solidFill>
-                <a:latin typeface="Aptos" pitchFamily="34" charset="0"/>
-                <a:ea typeface="Aptos" pitchFamily="34" charset="-122"/>
-                <a:cs typeface="Aptos" pitchFamily="34" charset="-120"/>
-              </a:rPr>
-              <a:t>Develop business case questions for AI procurement or internal development.</a:t>
-            </a:r>
-            <a:endParaRPr lang="en-US" sz="1700" dirty="0"/>
-          </a:p>
-        </p:txBody>
-      </p:sp>
-      <p:sp>
-        <p:nvSpPr>
-          <p:cNvPr id="11" name="Shape 9"/>
+            <a:endParaRPr lang="en-US" sz="2100" dirty="0"/>
+          </a:p>
+        </p:txBody>
+      </p:sp>
+      <p:sp>
+        <p:nvSpPr>
+          <p:cNvPr id="12" name="Shape 10"/>
           <p:cNvSpPr/>
           <p:nvPr/>
         </p:nvSpPr>
@@ -11815,14 +12891,14 @@
       </p:sp>
       <p:sp>
         <p:nvSpPr>
-          <p:cNvPr id="12" name="Text 10"/>
+          <p:cNvPr id="13" name="Text 11"/>
           <p:cNvSpPr/>
           <p:nvPr/>
         </p:nvSpPr>
         <p:spPr>
           <a:xfrm>
             <a:off x="8074152" y="1563624"/>
-            <a:ext cx="2825496" cy="201168"/>
+            <a:ext cx="2825496" cy="256032"/>
           </a:xfrm>
           <a:prstGeom prst="rect">
             <a:avLst/>
@@ -11838,7 +12914,7 @@
               <a:buNone/>
             </a:pPr>
             <a:r>
-              <a:rPr lang="en-US" sz="950" b="1" dirty="0">
+              <a:rPr lang="en-US" sz="1300" b="1" dirty="0">
                 <a:solidFill>
                   <a:srgbClr val="0068B7"/>
                 </a:solidFill>
@@ -11848,20 +12924,20 @@
               </a:rPr>
               <a:t>Key idea</a:t>
             </a:r>
-            <a:endParaRPr lang="en-US" sz="950" dirty="0"/>
-          </a:p>
-        </p:txBody>
-      </p:sp>
-      <p:sp>
-        <p:nvSpPr>
-          <p:cNvPr id="13" name="Text 11"/>
-          <p:cNvSpPr/>
-          <p:nvPr/>
-        </p:nvSpPr>
-        <p:spPr>
-          <a:xfrm>
-            <a:off x="8074152" y="1856232"/>
-            <a:ext cx="2825496" cy="1261872"/>
+            <a:endParaRPr lang="en-US" sz="1300" dirty="0"/>
+          </a:p>
+        </p:txBody>
+      </p:sp>
+      <p:sp>
+        <p:nvSpPr>
+          <p:cNvPr id="14" name="Text 12"/>
+          <p:cNvSpPr/>
+          <p:nvPr/>
+        </p:nvSpPr>
+        <p:spPr>
+          <a:xfrm>
+            <a:off x="8074152" y="1920240"/>
+            <a:ext cx="2825496" cy="1188720"/>
           </a:xfrm>
           <a:prstGeom prst="rect">
             <a:avLst/>
@@ -11879,7 +12955,7 @@
               <a:buNone/>
             </a:pPr>
             <a:r>
-              <a:rPr lang="en-US" sz="1250" dirty="0">
+              <a:rPr lang="en-US" sz="1550" dirty="0">
                 <a:solidFill>
                   <a:srgbClr val="17364A"/>
                 </a:solidFill>
@@ -11889,13 +12965,13 @@
               </a:rPr>
               <a:t>Identify the full cost components of AI implementation and operations.</a:t>
             </a:r>
-            <a:endParaRPr lang="en-US" sz="1250" dirty="0"/>
-          </a:p>
-        </p:txBody>
-      </p:sp>
-      <p:sp>
-        <p:nvSpPr>
-          <p:cNvPr id="14" name="Shape 12"/>
+            <a:endParaRPr lang="en-US" sz="1550" dirty="0"/>
+          </a:p>
+        </p:txBody>
+      </p:sp>
+      <p:sp>
+        <p:nvSpPr>
+          <p:cNvPr id="15" name="Shape 13"/>
           <p:cNvSpPr/>
           <p:nvPr/>
         </p:nvSpPr>
@@ -11922,14 +12998,14 @@
       </p:sp>
       <p:sp>
         <p:nvSpPr>
-          <p:cNvPr id="15" name="Text 13"/>
+          <p:cNvPr id="16" name="Text 14"/>
           <p:cNvSpPr/>
           <p:nvPr/>
         </p:nvSpPr>
         <p:spPr>
           <a:xfrm>
             <a:off x="8074152" y="3666744"/>
-            <a:ext cx="2825496" cy="201168"/>
+            <a:ext cx="2825496" cy="256032"/>
           </a:xfrm>
           <a:prstGeom prst="rect">
             <a:avLst/>
@@ -11945,7 +13021,7 @@
               <a:buNone/>
             </a:pPr>
             <a:r>
-              <a:rPr lang="en-US" sz="950" b="1" dirty="0">
+              <a:rPr lang="en-US" sz="1300" b="1" dirty="0">
                 <a:solidFill>
                   <a:srgbClr val="0068B7"/>
                 </a:solidFill>
@@ -11955,20 +13031,20 @@
               </a:rPr>
               <a:t>Use this for</a:t>
             </a:r>
-            <a:endParaRPr lang="en-US" sz="950" dirty="0"/>
-          </a:p>
-        </p:txBody>
-      </p:sp>
-      <p:sp>
-        <p:nvSpPr>
-          <p:cNvPr id="16" name="Text 14"/>
-          <p:cNvSpPr/>
-          <p:nvPr/>
-        </p:nvSpPr>
-        <p:spPr>
-          <a:xfrm>
-            <a:off x="8074152" y="3959352"/>
-            <a:ext cx="2825496" cy="1170432"/>
+            <a:endParaRPr lang="en-US" sz="1300" dirty="0"/>
+          </a:p>
+        </p:txBody>
+      </p:sp>
+      <p:sp>
+        <p:nvSpPr>
+          <p:cNvPr id="17" name="Text 15"/>
+          <p:cNvSpPr/>
+          <p:nvPr/>
+        </p:nvSpPr>
+        <p:spPr>
+          <a:xfrm>
+            <a:off x="8074152" y="4023360"/>
+            <a:ext cx="2825496" cy="1097280"/>
           </a:xfrm>
           <a:prstGeom prst="rect">
             <a:avLst/>
@@ -11986,7 +13062,7 @@
               <a:buNone/>
             </a:pPr>
             <a:r>
-              <a:rPr lang="en-US" sz="1250" dirty="0">
+              <a:rPr lang="en-US" sz="1550" dirty="0">
                 <a:solidFill>
                   <a:srgbClr val="17364A"/>
                 </a:solidFill>
@@ -11996,7 +13072,7 @@
               </a:rPr>
               <a:t>Connect the concept to public health decisions, safeguards, documentation, or implementation work.</a:t>
             </a:r>
-            <a:endParaRPr lang="en-US" sz="1250" dirty="0"/>
+            <a:endParaRPr lang="en-US" sz="1550" dirty="0"/>
           </a:p>
         </p:txBody>
       </p:sp>
@@ -12193,7 +13269,7 @@
                 <a:ea typeface="Aptos" pitchFamily="34" charset="-122"/>
                 <a:cs typeface="Aptos" pitchFamily="34" charset="-120"/>
               </a:rPr>
-              <a:t>© Paula Soper</a:t>
+              <a:t>Â© Paula Soper</a:t>
             </a:r>
             <a:endParaRPr lang="en-US" sz="800" dirty="0"/>
           </a:p>
@@ -12201,7 +13277,46 @@
       </p:sp>
       <p:sp>
         <p:nvSpPr>
-          <p:cNvPr id="7" name="Shape 5"/>
+          <p:cNvPr id="7" name="Text 5"/>
+          <p:cNvSpPr/>
+          <p:nvPr/>
+        </p:nvSpPr>
+        <p:spPr>
+          <a:xfrm>
+            <a:off x="11137392" y="6510528"/>
+            <a:ext cx="411480" cy="201168"/>
+          </a:xfrm>
+          <a:prstGeom prst="rect">
+            <a:avLst/>
+          </a:prstGeom>
+          <a:noFill/>
+          <a:ln/>
+        </p:spPr>
+        <p:txBody>
+          <a:bodyPr wrap="square" lIns="0" tIns="0" rIns="0" bIns="0" rtlCol="0" anchor="ctr"/>
+          <a:lstStyle/>
+          <a:p>
+            <a:pPr algn="r" indent="0" marL="0">
+              <a:buNone/>
+            </a:pPr>
+            <a:r>
+              <a:rPr lang="en-US" sz="900" dirty="0">
+                <a:solidFill>
+                  <a:srgbClr val="5F7181"/>
+                </a:solidFill>
+                <a:latin typeface="Aptos" pitchFamily="34" charset="0"/>
+                <a:ea typeface="Aptos" pitchFamily="34" charset="-122"/>
+                <a:cs typeface="Aptos" pitchFamily="34" charset="-120"/>
+              </a:rPr>
+              <a:t>6</a:t>
+            </a:r>
+            <a:endParaRPr lang="en-US" sz="900" dirty="0"/>
+          </a:p>
+        </p:txBody>
+      </p:sp>
+      <p:sp>
+        <p:nvSpPr>
+          <p:cNvPr id="8" name="Shape 6"/>
           <p:cNvSpPr/>
           <p:nvPr/>
         </p:nvSpPr>
@@ -12226,7 +13341,7 @@
       </p:sp>
       <p:sp>
         <p:nvSpPr>
-          <p:cNvPr id="8" name="Text 6"/>
+          <p:cNvPr id="9" name="Text 7"/>
           <p:cNvSpPr/>
           <p:nvPr/>
         </p:nvSpPr>
@@ -12265,14 +13380,14 @@
       </p:sp>
       <p:sp>
         <p:nvSpPr>
-          <p:cNvPr id="9" name="Text 7"/>
+          <p:cNvPr id="10" name="Text 8"/>
           <p:cNvSpPr/>
           <p:nvPr/>
         </p:nvSpPr>
         <p:spPr>
           <a:xfrm>
             <a:off x="640080" y="621792"/>
-            <a:ext cx="10881360" cy="566928"/>
+            <a:ext cx="10881360" cy="713232"/>
           </a:xfrm>
           <a:prstGeom prst="rect">
             <a:avLst/>
@@ -12290,7 +13405,7 @@
               <a:buNone/>
             </a:pPr>
             <a:r>
-              <a:rPr lang="en-US" sz="2700" b="1" dirty="0">
+              <a:rPr lang="en-US" sz="3400" b="1" dirty="0">
                 <a:solidFill>
                   <a:srgbClr val="003A63"/>
                 </a:solidFill>
@@ -12300,20 +13415,20 @@
               </a:rPr>
               <a:t>Module Overview</a:t>
             </a:r>
-            <a:endParaRPr lang="en-US" sz="2700" dirty="0"/>
-          </a:p>
-        </p:txBody>
-      </p:sp>
-      <p:sp>
-        <p:nvSpPr>
-          <p:cNvPr id="10" name="Text 8"/>
-          <p:cNvSpPr/>
-          <p:nvPr/>
-        </p:nvSpPr>
-        <p:spPr>
-          <a:xfrm>
-            <a:off x="868680" y="1417320"/>
-            <a:ext cx="6675120" cy="4434840"/>
+            <a:endParaRPr lang="en-US" sz="3400" dirty="0"/>
+          </a:p>
+        </p:txBody>
+      </p:sp>
+      <p:sp>
+        <p:nvSpPr>
+          <p:cNvPr id="11" name="Text 9"/>
+          <p:cNvSpPr/>
+          <p:nvPr/>
+        </p:nvSpPr>
+        <p:spPr>
+          <a:xfrm>
+            <a:off x="868680" y="1508760"/>
+            <a:ext cx="6537960" cy="4160520"/>
           </a:xfrm>
           <a:prstGeom prst="rect">
             <a:avLst/>
@@ -12328,7 +13443,7 @@
           <a:lstStyle/>
           <a:p>
             <a:r>
-              <a:rPr lang="en-US" sz="1700" dirty="0">
+              <a:rPr lang="en-US" sz="2100" dirty="0">
                 <a:solidFill>
                   <a:srgbClr val="17364A"/>
                 </a:solidFill>
@@ -12338,11 +13453,11 @@
               </a:rPr>
               <a:t>AI investments compete with many other public health priorities.</a:t>
             </a:r>
-            <a:endParaRPr lang="en-US" sz="1700" dirty="0"/>
-          </a:p>
-          <a:p>
-            <a:r>
-              <a:rPr lang="en-US" sz="1700" dirty="0">
+            <a:endParaRPr lang="en-US" sz="2100" dirty="0"/>
+          </a:p>
+          <a:p>
+            <a:r>
+              <a:rPr lang="en-US" sz="2100" dirty="0">
                 <a:solidFill>
                   <a:srgbClr val="17364A"/>
                 </a:solidFill>
@@ -12350,13 +13465,13 @@
                 <a:ea typeface="Aptos" pitchFamily="34" charset="-122"/>
                 <a:cs typeface="Aptos" pitchFamily="34" charset="-120"/>
               </a:rPr>
-              <a:t>Leaders need a disciplined way to decide when AI is worth funding, what costs must be considered, and how benefits will be.</a:t>
-            </a:r>
-            <a:endParaRPr lang="en-US" sz="1700" dirty="0"/>
-          </a:p>
-          <a:p>
-            <a:r>
-              <a:rPr lang="en-US" sz="1700" dirty="0">
+              <a:t>Leaders need a disciplined way to decide when AI is worth funding, what costs must be considered, and.</a:t>
+            </a:r>
+            <a:endParaRPr lang="en-US" sz="2100" dirty="0"/>
+          </a:p>
+          <a:p>
+            <a:r>
+              <a:rPr lang="en-US" sz="2100" dirty="0">
                 <a:solidFill>
                   <a:srgbClr val="17364A"/>
                 </a:solidFill>
@@ -12364,29 +13479,15 @@
                 <a:ea typeface="Aptos" pitchFamily="34" charset="-122"/>
                 <a:cs typeface="Aptos" pitchFamily="34" charset="-120"/>
               </a:rPr>
-              <a:t>A business case review helps agencies avoid buying tools that are impressive in demonstrations but weak in operational.</a:t>
-            </a:r>
-            <a:endParaRPr lang="en-US" sz="1700" dirty="0"/>
-          </a:p>
-          <a:p>
-            <a:r>
-              <a:rPr lang="en-US" sz="1700" dirty="0">
-                <a:solidFill>
-                  <a:srgbClr val="17364A"/>
-                </a:solidFill>
-                <a:latin typeface="Aptos" pitchFamily="34" charset="0"/>
-                <a:ea typeface="Aptos" pitchFamily="34" charset="-122"/>
-                <a:cs typeface="Aptos" pitchFamily="34" charset="-120"/>
-              </a:rPr>
-              <a:t>This module teaches leaders to evaluate AI investments across cost, value, readiness, risk, staffing, procurement,.</a:t>
-            </a:r>
-            <a:endParaRPr lang="en-US" sz="1700" dirty="0"/>
-          </a:p>
-        </p:txBody>
-      </p:sp>
-      <p:sp>
-        <p:nvSpPr>
-          <p:cNvPr id="11" name="Shape 9"/>
+              <a:t>A business case review helps agencies avoid buying tools that are impressive in demonstrations but weak.</a:t>
+            </a:r>
+            <a:endParaRPr lang="en-US" sz="2100" dirty="0"/>
+          </a:p>
+        </p:txBody>
+      </p:sp>
+      <p:sp>
+        <p:nvSpPr>
+          <p:cNvPr id="12" name="Shape 10"/>
           <p:cNvSpPr/>
           <p:nvPr/>
         </p:nvSpPr>
@@ -12413,14 +13514,14 @@
       </p:sp>
       <p:sp>
         <p:nvSpPr>
-          <p:cNvPr id="12" name="Text 10"/>
+          <p:cNvPr id="13" name="Text 11"/>
           <p:cNvSpPr/>
           <p:nvPr/>
         </p:nvSpPr>
         <p:spPr>
           <a:xfrm>
             <a:off x="8074152" y="1563624"/>
-            <a:ext cx="2825496" cy="201168"/>
+            <a:ext cx="2825496" cy="256032"/>
           </a:xfrm>
           <a:prstGeom prst="rect">
             <a:avLst/>
@@ -12436,7 +13537,7 @@
               <a:buNone/>
             </a:pPr>
             <a:r>
-              <a:rPr lang="en-US" sz="950" b="1" dirty="0">
+              <a:rPr lang="en-US" sz="1300" b="1" dirty="0">
                 <a:solidFill>
                   <a:srgbClr val="0068B7"/>
                 </a:solidFill>
@@ -12446,20 +13547,20 @@
               </a:rPr>
               <a:t>Key idea</a:t>
             </a:r>
-            <a:endParaRPr lang="en-US" sz="950" dirty="0"/>
-          </a:p>
-        </p:txBody>
-      </p:sp>
-      <p:sp>
-        <p:nvSpPr>
-          <p:cNvPr id="13" name="Text 11"/>
-          <p:cNvSpPr/>
-          <p:nvPr/>
-        </p:nvSpPr>
-        <p:spPr>
-          <a:xfrm>
-            <a:off x="8074152" y="1856232"/>
-            <a:ext cx="2825496" cy="1261872"/>
+            <a:endParaRPr lang="en-US" sz="1300" dirty="0"/>
+          </a:p>
+        </p:txBody>
+      </p:sp>
+      <p:sp>
+        <p:nvSpPr>
+          <p:cNvPr id="14" name="Text 12"/>
+          <p:cNvSpPr/>
+          <p:nvPr/>
+        </p:nvSpPr>
+        <p:spPr>
+          <a:xfrm>
+            <a:off x="8074152" y="1920240"/>
+            <a:ext cx="2825496" cy="1188720"/>
           </a:xfrm>
           <a:prstGeom prst="rect">
             <a:avLst/>
@@ -12477,7 +13578,7 @@
               <a:buNone/>
             </a:pPr>
             <a:r>
-              <a:rPr lang="en-US" sz="1250" dirty="0">
+              <a:rPr lang="en-US" sz="1550" dirty="0">
                 <a:solidFill>
                   <a:srgbClr val="17364A"/>
                 </a:solidFill>
@@ -12487,13 +13588,13 @@
               </a:rPr>
               <a:t>AI investments compete with many other public health priorities.</a:t>
             </a:r>
-            <a:endParaRPr lang="en-US" sz="1250" dirty="0"/>
-          </a:p>
-        </p:txBody>
-      </p:sp>
-      <p:sp>
-        <p:nvSpPr>
-          <p:cNvPr id="14" name="Shape 12"/>
+            <a:endParaRPr lang="en-US" sz="1550" dirty="0"/>
+          </a:p>
+        </p:txBody>
+      </p:sp>
+      <p:sp>
+        <p:nvSpPr>
+          <p:cNvPr id="15" name="Shape 13"/>
           <p:cNvSpPr/>
           <p:nvPr/>
         </p:nvSpPr>
@@ -12520,14 +13621,14 @@
       </p:sp>
       <p:sp>
         <p:nvSpPr>
-          <p:cNvPr id="15" name="Text 13"/>
+          <p:cNvPr id="16" name="Text 14"/>
           <p:cNvSpPr/>
           <p:nvPr/>
         </p:nvSpPr>
         <p:spPr>
           <a:xfrm>
             <a:off x="8074152" y="3666744"/>
-            <a:ext cx="2825496" cy="201168"/>
+            <a:ext cx="2825496" cy="256032"/>
           </a:xfrm>
           <a:prstGeom prst="rect">
             <a:avLst/>
@@ -12543,7 +13644,7 @@
               <a:buNone/>
             </a:pPr>
             <a:r>
-              <a:rPr lang="en-US" sz="950" b="1" dirty="0">
+              <a:rPr lang="en-US" sz="1300" b="1" dirty="0">
                 <a:solidFill>
                   <a:srgbClr val="0068B7"/>
                 </a:solidFill>
@@ -12553,20 +13654,20 @@
               </a:rPr>
               <a:t>Use this for</a:t>
             </a:r>
-            <a:endParaRPr lang="en-US" sz="950" dirty="0"/>
-          </a:p>
-        </p:txBody>
-      </p:sp>
-      <p:sp>
-        <p:nvSpPr>
-          <p:cNvPr id="16" name="Text 14"/>
-          <p:cNvSpPr/>
-          <p:nvPr/>
-        </p:nvSpPr>
-        <p:spPr>
-          <a:xfrm>
-            <a:off x="8074152" y="3959352"/>
-            <a:ext cx="2825496" cy="1170432"/>
+            <a:endParaRPr lang="en-US" sz="1300" dirty="0"/>
+          </a:p>
+        </p:txBody>
+      </p:sp>
+      <p:sp>
+        <p:nvSpPr>
+          <p:cNvPr id="17" name="Text 15"/>
+          <p:cNvSpPr/>
+          <p:nvPr/>
+        </p:nvSpPr>
+        <p:spPr>
+          <a:xfrm>
+            <a:off x="8074152" y="4023360"/>
+            <a:ext cx="2825496" cy="1097280"/>
           </a:xfrm>
           <a:prstGeom prst="rect">
             <a:avLst/>
@@ -12584,7 +13685,7 @@
               <a:buNone/>
             </a:pPr>
             <a:r>
-              <a:rPr lang="en-US" sz="1250" dirty="0">
+              <a:rPr lang="en-US" sz="1550" dirty="0">
                 <a:solidFill>
                   <a:srgbClr val="17364A"/>
                 </a:solidFill>
@@ -12594,7 +13695,7 @@
               </a:rPr>
               <a:t>Connect the concept to public health decisions, safeguards, documentation, or implementation work.</a:t>
             </a:r>
-            <a:endParaRPr lang="en-US" sz="1250" dirty="0"/>
+            <a:endParaRPr lang="en-US" sz="1550" dirty="0"/>
           </a:p>
         </p:txBody>
       </p:sp>
@@ -12791,7 +13892,7 @@
                 <a:ea typeface="Aptos" pitchFamily="34" charset="-122"/>
                 <a:cs typeface="Aptos" pitchFamily="34" charset="-120"/>
               </a:rPr>
-              <a:t>© Paula Soper</a:t>
+              <a:t>Â© Paula Soper</a:t>
             </a:r>
             <a:endParaRPr lang="en-US" sz="800" dirty="0"/>
           </a:p>
@@ -12799,7 +13900,46 @@
       </p:sp>
       <p:sp>
         <p:nvSpPr>
-          <p:cNvPr id="7" name="Shape 5"/>
+          <p:cNvPr id="7" name="Text 5"/>
+          <p:cNvSpPr/>
+          <p:nvPr/>
+        </p:nvSpPr>
+        <p:spPr>
+          <a:xfrm>
+            <a:off x="11137392" y="6510528"/>
+            <a:ext cx="411480" cy="201168"/>
+          </a:xfrm>
+          <a:prstGeom prst="rect">
+            <a:avLst/>
+          </a:prstGeom>
+          <a:noFill/>
+          <a:ln/>
+        </p:spPr>
+        <p:txBody>
+          <a:bodyPr wrap="square" lIns="0" tIns="0" rIns="0" bIns="0" rtlCol="0" anchor="ctr"/>
+          <a:lstStyle/>
+          <a:p>
+            <a:pPr algn="r" indent="0" marL="0">
+              <a:buNone/>
+            </a:pPr>
+            <a:r>
+              <a:rPr lang="en-US" sz="900" dirty="0">
+                <a:solidFill>
+                  <a:srgbClr val="5F7181"/>
+                </a:solidFill>
+                <a:latin typeface="Aptos" pitchFamily="34" charset="0"/>
+                <a:ea typeface="Aptos" pitchFamily="34" charset="-122"/>
+                <a:cs typeface="Aptos" pitchFamily="34" charset="-120"/>
+              </a:rPr>
+              <a:t>7</a:t>
+            </a:r>
+            <a:endParaRPr lang="en-US" sz="900" dirty="0"/>
+          </a:p>
+        </p:txBody>
+      </p:sp>
+      <p:sp>
+        <p:nvSpPr>
+          <p:cNvPr id="8" name="Shape 6"/>
           <p:cNvSpPr/>
           <p:nvPr/>
         </p:nvSpPr>
@@ -12824,7 +13964,7 @@
       </p:sp>
       <p:sp>
         <p:nvSpPr>
-          <p:cNvPr id="8" name="Text 6"/>
+          <p:cNvPr id="9" name="Text 7"/>
           <p:cNvSpPr/>
           <p:nvPr/>
         </p:nvSpPr>
@@ -12863,14 +14003,14 @@
       </p:sp>
       <p:sp>
         <p:nvSpPr>
-          <p:cNvPr id="9" name="Text 7"/>
+          <p:cNvPr id="10" name="Text 8"/>
           <p:cNvSpPr/>
           <p:nvPr/>
         </p:nvSpPr>
         <p:spPr>
           <a:xfrm>
             <a:off x="640080" y="621792"/>
-            <a:ext cx="10881360" cy="566928"/>
+            <a:ext cx="10881360" cy="713232"/>
           </a:xfrm>
           <a:prstGeom prst="rect">
             <a:avLst/>
@@ -12888,7 +14028,7 @@
               <a:buNone/>
             </a:pPr>
             <a:r>
-              <a:rPr lang="en-US" sz="2700" b="1" dirty="0">
+              <a:rPr lang="en-US" sz="3400" b="1" dirty="0">
                 <a:solidFill>
                   <a:srgbClr val="003A63"/>
                 </a:solidFill>
@@ -12898,20 +14038,20 @@
               </a:rPr>
               <a:t>Jurisdiction and Agency Policy Note</a:t>
             </a:r>
-            <a:endParaRPr lang="en-US" sz="2700" dirty="0"/>
-          </a:p>
-        </p:txBody>
-      </p:sp>
-      <p:sp>
-        <p:nvSpPr>
-          <p:cNvPr id="10" name="Text 8"/>
-          <p:cNvSpPr/>
-          <p:nvPr/>
-        </p:nvSpPr>
-        <p:spPr>
-          <a:xfrm>
-            <a:off x="868680" y="1417320"/>
-            <a:ext cx="6675120" cy="4434840"/>
+            <a:endParaRPr lang="en-US" sz="3400" dirty="0"/>
+          </a:p>
+        </p:txBody>
+      </p:sp>
+      <p:sp>
+        <p:nvSpPr>
+          <p:cNvPr id="11" name="Text 9"/>
+          <p:cNvSpPr/>
+          <p:nvPr/>
+        </p:nvSpPr>
+        <p:spPr>
+          <a:xfrm>
+            <a:off x="868680" y="1508760"/>
+            <a:ext cx="6537960" cy="4160520"/>
           </a:xfrm>
           <a:prstGeom prst="rect">
             <a:avLst/>
@@ -12926,7 +14066,7 @@
           <a:lstStyle/>
           <a:p>
             <a:r>
-              <a:rPr lang="en-US" sz="1700" dirty="0">
+              <a:rPr lang="en-US" sz="2100" dirty="0">
                 <a:solidFill>
                   <a:srgbClr val="17364A"/>
                 </a:solidFill>
@@ -12936,11 +14076,11 @@
               </a:rPr>
               <a:t>This national-level module is intended for training and planning purposes.</a:t>
             </a:r>
-            <a:endParaRPr lang="en-US" sz="1700" dirty="0"/>
-          </a:p>
-          <a:p>
-            <a:r>
-              <a:rPr lang="en-US" sz="1700" dirty="0">
+            <a:endParaRPr lang="en-US" sz="2100" dirty="0"/>
+          </a:p>
+          <a:p>
+            <a:r>
+              <a:rPr lang="en-US" sz="2100" dirty="0">
                 <a:solidFill>
                   <a:srgbClr val="17364A"/>
                 </a:solidFill>
@@ -12950,11 +14090,11 @@
               </a:rPr>
               <a:t>It does not replace legal, privacy, procurement, civil rights, records, or agency policy review.</a:t>
             </a:r>
-            <a:endParaRPr lang="en-US" sz="1700" dirty="0"/>
-          </a:p>
-          <a:p>
-            <a:r>
-              <a:rPr lang="en-US" sz="1700" dirty="0">
+            <a:endParaRPr lang="en-US" sz="2100" dirty="0"/>
+          </a:p>
+          <a:p>
+            <a:r>
+              <a:rPr lang="en-US" sz="2100" dirty="0">
                 <a:solidFill>
                   <a:srgbClr val="17364A"/>
                 </a:solidFill>
@@ -12962,15 +14102,15 @@
                 <a:ea typeface="Aptos" pitchFamily="34" charset="-122"/>
                 <a:cs typeface="Aptos" pitchFamily="34" charset="-120"/>
               </a:rPr>
-              <a:t>Learners should confirm applicable requirements in their own jurisdiction and organization before implementing AI-supported.</a:t>
-            </a:r>
-            <a:endParaRPr lang="en-US" sz="1700" dirty="0"/>
-          </a:p>
-        </p:txBody>
-      </p:sp>
-      <p:sp>
-        <p:nvSpPr>
-          <p:cNvPr id="11" name="Shape 9"/>
+              <a:t>Learners should confirm applicable requirements in their own jurisdiction and organization before.</a:t>
+            </a:r>
+            <a:endParaRPr lang="en-US" sz="2100" dirty="0"/>
+          </a:p>
+        </p:txBody>
+      </p:sp>
+      <p:sp>
+        <p:nvSpPr>
+          <p:cNvPr id="12" name="Shape 10"/>
           <p:cNvSpPr/>
           <p:nvPr/>
         </p:nvSpPr>
@@ -12997,14 +14137,14 @@
       </p:sp>
       <p:sp>
         <p:nvSpPr>
-          <p:cNvPr id="12" name="Text 10"/>
+          <p:cNvPr id="13" name="Text 11"/>
           <p:cNvSpPr/>
           <p:nvPr/>
         </p:nvSpPr>
         <p:spPr>
           <a:xfrm>
             <a:off x="8074152" y="1563624"/>
-            <a:ext cx="2825496" cy="201168"/>
+            <a:ext cx="2825496" cy="256032"/>
           </a:xfrm>
           <a:prstGeom prst="rect">
             <a:avLst/>
@@ -13020,7 +14160,7 @@
               <a:buNone/>
             </a:pPr>
             <a:r>
-              <a:rPr lang="en-US" sz="950" b="1" dirty="0">
+              <a:rPr lang="en-US" sz="1300" b="1" dirty="0">
                 <a:solidFill>
                   <a:srgbClr val="0068B7"/>
                 </a:solidFill>
@@ -13030,20 +14170,20 @@
               </a:rPr>
               <a:t>Key idea</a:t>
             </a:r>
-            <a:endParaRPr lang="en-US" sz="950" dirty="0"/>
-          </a:p>
-        </p:txBody>
-      </p:sp>
-      <p:sp>
-        <p:nvSpPr>
-          <p:cNvPr id="13" name="Text 11"/>
-          <p:cNvSpPr/>
-          <p:nvPr/>
-        </p:nvSpPr>
-        <p:spPr>
-          <a:xfrm>
-            <a:off x="8074152" y="1856232"/>
-            <a:ext cx="2825496" cy="1261872"/>
+            <a:endParaRPr lang="en-US" sz="1300" dirty="0"/>
+          </a:p>
+        </p:txBody>
+      </p:sp>
+      <p:sp>
+        <p:nvSpPr>
+          <p:cNvPr id="14" name="Text 12"/>
+          <p:cNvSpPr/>
+          <p:nvPr/>
+        </p:nvSpPr>
+        <p:spPr>
+          <a:xfrm>
+            <a:off x="8074152" y="1920240"/>
+            <a:ext cx="2825496" cy="1188720"/>
           </a:xfrm>
           <a:prstGeom prst="rect">
             <a:avLst/>
@@ -13061,7 +14201,7 @@
               <a:buNone/>
             </a:pPr>
             <a:r>
-              <a:rPr lang="en-US" sz="1250" dirty="0">
+              <a:rPr lang="en-US" sz="1550" dirty="0">
                 <a:solidFill>
                   <a:srgbClr val="17364A"/>
                 </a:solidFill>
@@ -13071,13 +14211,13 @@
               </a:rPr>
               <a:t>This national-level module is intended for training and planning purposes.</a:t>
             </a:r>
-            <a:endParaRPr lang="en-US" sz="1250" dirty="0"/>
-          </a:p>
-        </p:txBody>
-      </p:sp>
-      <p:sp>
-        <p:nvSpPr>
-          <p:cNvPr id="14" name="Shape 12"/>
+            <a:endParaRPr lang="en-US" sz="1550" dirty="0"/>
+          </a:p>
+        </p:txBody>
+      </p:sp>
+      <p:sp>
+        <p:nvSpPr>
+          <p:cNvPr id="15" name="Shape 13"/>
           <p:cNvSpPr/>
           <p:nvPr/>
         </p:nvSpPr>
@@ -13104,14 +14244,14 @@
       </p:sp>
       <p:sp>
         <p:nvSpPr>
-          <p:cNvPr id="15" name="Text 13"/>
+          <p:cNvPr id="16" name="Text 14"/>
           <p:cNvSpPr/>
           <p:nvPr/>
         </p:nvSpPr>
         <p:spPr>
           <a:xfrm>
             <a:off x="8074152" y="3666744"/>
-            <a:ext cx="2825496" cy="201168"/>
+            <a:ext cx="2825496" cy="256032"/>
           </a:xfrm>
           <a:prstGeom prst="rect">
             <a:avLst/>
@@ -13127,7 +14267,7 @@
               <a:buNone/>
             </a:pPr>
             <a:r>
-              <a:rPr lang="en-US" sz="950" b="1" dirty="0">
+              <a:rPr lang="en-US" sz="1300" b="1" dirty="0">
                 <a:solidFill>
                   <a:srgbClr val="0068B7"/>
                 </a:solidFill>
@@ -13137,20 +14277,20 @@
               </a:rPr>
               <a:t>Use this for</a:t>
             </a:r>
-            <a:endParaRPr lang="en-US" sz="950" dirty="0"/>
-          </a:p>
-        </p:txBody>
-      </p:sp>
-      <p:sp>
-        <p:nvSpPr>
-          <p:cNvPr id="16" name="Text 14"/>
-          <p:cNvSpPr/>
-          <p:nvPr/>
-        </p:nvSpPr>
-        <p:spPr>
-          <a:xfrm>
-            <a:off x="8074152" y="3959352"/>
-            <a:ext cx="2825496" cy="1170432"/>
+            <a:endParaRPr lang="en-US" sz="1300" dirty="0"/>
+          </a:p>
+        </p:txBody>
+      </p:sp>
+      <p:sp>
+        <p:nvSpPr>
+          <p:cNvPr id="17" name="Text 15"/>
+          <p:cNvSpPr/>
+          <p:nvPr/>
+        </p:nvSpPr>
+        <p:spPr>
+          <a:xfrm>
+            <a:off x="8074152" y="4023360"/>
+            <a:ext cx="2825496" cy="1097280"/>
           </a:xfrm>
           <a:prstGeom prst="rect">
             <a:avLst/>
@@ -13168,7 +14308,7 @@
               <a:buNone/>
             </a:pPr>
             <a:r>
-              <a:rPr lang="en-US" sz="1250" dirty="0">
+              <a:rPr lang="en-US" sz="1550" dirty="0">
                 <a:solidFill>
                   <a:srgbClr val="17364A"/>
                 </a:solidFill>
@@ -13178,7 +14318,7 @@
               </a:rPr>
               <a:t>Connect the concept to public health decisions, safeguards, documentation, or implementation work.</a:t>
             </a:r>
-            <a:endParaRPr lang="en-US" sz="1250" dirty="0"/>
+            <a:endParaRPr lang="en-US" sz="1550" dirty="0"/>
           </a:p>
         </p:txBody>
       </p:sp>
@@ -13375,7 +14515,7 @@
                 <a:ea typeface="Aptos" pitchFamily="34" charset="-122"/>
                 <a:cs typeface="Aptos" pitchFamily="34" charset="-120"/>
               </a:rPr>
-              <a:t>© Paula Soper</a:t>
+              <a:t>Â© Paula Soper</a:t>
             </a:r>
             <a:endParaRPr lang="en-US" sz="800" dirty="0"/>
           </a:p>
@@ -13383,7 +14523,46 @@
       </p:sp>
       <p:sp>
         <p:nvSpPr>
-          <p:cNvPr id="7" name="Shape 5"/>
+          <p:cNvPr id="7" name="Text 5"/>
+          <p:cNvSpPr/>
+          <p:nvPr/>
+        </p:nvSpPr>
+        <p:spPr>
+          <a:xfrm>
+            <a:off x="11137392" y="6510528"/>
+            <a:ext cx="411480" cy="201168"/>
+          </a:xfrm>
+          <a:prstGeom prst="rect">
+            <a:avLst/>
+          </a:prstGeom>
+          <a:noFill/>
+          <a:ln/>
+        </p:spPr>
+        <p:txBody>
+          <a:bodyPr wrap="square" lIns="0" tIns="0" rIns="0" bIns="0" rtlCol="0" anchor="ctr"/>
+          <a:lstStyle/>
+          <a:p>
+            <a:pPr algn="r" indent="0" marL="0">
+              <a:buNone/>
+            </a:pPr>
+            <a:r>
+              <a:rPr lang="en-US" sz="900" dirty="0">
+                <a:solidFill>
+                  <a:srgbClr val="5F7181"/>
+                </a:solidFill>
+                <a:latin typeface="Aptos" pitchFamily="34" charset="0"/>
+                <a:ea typeface="Aptos" pitchFamily="34" charset="-122"/>
+                <a:cs typeface="Aptos" pitchFamily="34" charset="-120"/>
+              </a:rPr>
+              <a:t>8</a:t>
+            </a:r>
+            <a:endParaRPr lang="en-US" sz="900" dirty="0"/>
+          </a:p>
+        </p:txBody>
+      </p:sp>
+      <p:sp>
+        <p:nvSpPr>
+          <p:cNvPr id="8" name="Shape 6"/>
           <p:cNvSpPr/>
           <p:nvPr/>
         </p:nvSpPr>
@@ -13408,7 +14587,7 @@
       </p:sp>
       <p:sp>
         <p:nvSpPr>
-          <p:cNvPr id="8" name="Text 6"/>
+          <p:cNvPr id="9" name="Text 7"/>
           <p:cNvSpPr/>
           <p:nvPr/>
         </p:nvSpPr>
@@ -13447,14 +14626,14 @@
       </p:sp>
       <p:sp>
         <p:nvSpPr>
-          <p:cNvPr id="9" name="Text 7"/>
+          <p:cNvPr id="10" name="Text 8"/>
           <p:cNvSpPr/>
           <p:nvPr/>
         </p:nvSpPr>
         <p:spPr>
           <a:xfrm>
             <a:off x="640080" y="621792"/>
-            <a:ext cx="10881360" cy="566928"/>
+            <a:ext cx="10881360" cy="713232"/>
           </a:xfrm>
           <a:prstGeom prst="rect">
             <a:avLst/>
@@ -13472,7 +14651,7 @@
               <a:buNone/>
             </a:pPr>
             <a:r>
-              <a:rPr lang="en-US" sz="2700" b="1" dirty="0">
+              <a:rPr lang="en-US" sz="3400" b="1" dirty="0">
                 <a:solidFill>
                   <a:srgbClr val="003A63"/>
                 </a:solidFill>
@@ -13482,20 +14661,20 @@
               </a:rPr>
               <a:t>Why This Topic Matters for Public Health AI</a:t>
             </a:r>
-            <a:endParaRPr lang="en-US" sz="2700" dirty="0"/>
-          </a:p>
-        </p:txBody>
-      </p:sp>
-      <p:sp>
-        <p:nvSpPr>
-          <p:cNvPr id="10" name="Text 8"/>
-          <p:cNvSpPr/>
-          <p:nvPr/>
-        </p:nvSpPr>
-        <p:spPr>
-          <a:xfrm>
-            <a:off x="868680" y="1417320"/>
-            <a:ext cx="6675120" cy="4434840"/>
+            <a:endParaRPr lang="en-US" sz="3400" dirty="0"/>
+          </a:p>
+        </p:txBody>
+      </p:sp>
+      <p:sp>
+        <p:nvSpPr>
+          <p:cNvPr id="11" name="Text 9"/>
+          <p:cNvSpPr/>
+          <p:nvPr/>
+        </p:nvSpPr>
+        <p:spPr>
+          <a:xfrm>
+            <a:off x="868680" y="1508760"/>
+            <a:ext cx="6537960" cy="4160520"/>
           </a:xfrm>
           <a:prstGeom prst="rect">
             <a:avLst/>
@@ -13510,7 +14689,7 @@
           <a:lstStyle/>
           <a:p>
             <a:r>
-              <a:rPr lang="en-US" sz="1700" dirty="0">
+              <a:rPr lang="en-US" sz="2100" dirty="0">
                 <a:solidFill>
                   <a:srgbClr val="17364A"/>
                 </a:solidFill>
@@ -13520,11 +14699,11 @@
               </a:rPr>
               <a:t>Public health agencies often face short-term funding cycles and urgent operational needs.</a:t>
             </a:r>
-            <a:endParaRPr lang="en-US" sz="1700" dirty="0"/>
-          </a:p>
-          <a:p>
-            <a:r>
-              <a:rPr lang="en-US" sz="1700" dirty="0">
+            <a:endParaRPr lang="en-US" sz="2100" dirty="0"/>
+          </a:p>
+          <a:p>
+            <a:r>
+              <a:rPr lang="en-US" sz="2100" dirty="0">
                 <a:solidFill>
                   <a:srgbClr val="17364A"/>
                 </a:solidFill>
@@ -13532,13 +14711,13 @@
                 <a:ea typeface="Aptos" pitchFamily="34" charset="-122"/>
                 <a:cs typeface="Aptos" pitchFamily="34" charset="-120"/>
               </a:rPr>
-              <a:t>AI products may be marketed as quick solutions, but the true cost of responsible implementation is broader than.</a:t>
-            </a:r>
-            <a:endParaRPr lang="en-US" sz="1700" dirty="0"/>
-          </a:p>
-          <a:p>
-            <a:r>
-              <a:rPr lang="en-US" sz="1700" dirty="0">
+              <a:t>AI products may be marketed as quick solutions, but the true cost of responsible implementation is.</a:t>
+            </a:r>
+            <a:endParaRPr lang="en-US" sz="2100" dirty="0"/>
+          </a:p>
+          <a:p>
+            <a:r>
+              <a:rPr lang="en-US" sz="2100" dirty="0">
                 <a:solidFill>
                   <a:srgbClr val="17364A"/>
                 </a:solidFill>
@@ -13546,29 +14725,15 @@
                 <a:ea typeface="Aptos" pitchFamily="34" charset="-122"/>
                 <a:cs typeface="Aptos" pitchFamily="34" charset="-120"/>
               </a:rPr>
-              <a:t>Agencies may need to update data pipelines, configure security controls, develop validation plans, train staff, write.</a:t>
-            </a:r>
-            <a:endParaRPr lang="en-US" sz="1700" dirty="0"/>
-          </a:p>
-          <a:p>
-            <a:r>
-              <a:rPr lang="en-US" sz="1700" dirty="0">
-                <a:solidFill>
-                  <a:srgbClr val="17364A"/>
-                </a:solidFill>
-                <a:latin typeface="Aptos" pitchFamily="34" charset="0"/>
-                <a:ea typeface="Aptos" pitchFamily="34" charset="-122"/>
-                <a:cs typeface="Aptos" pitchFamily="34" charset="-120"/>
-              </a:rPr>
-              <a:t>A strong business case also protects mission focus.</a:t>
-            </a:r>
-            <a:endParaRPr lang="en-US" sz="1700" dirty="0"/>
-          </a:p>
-        </p:txBody>
-      </p:sp>
-      <p:sp>
-        <p:nvSpPr>
-          <p:cNvPr id="11" name="Shape 9"/>
+              <a:t>Agencies may need to update data pipelines, configure security controls, develop validation plans,.</a:t>
+            </a:r>
+            <a:endParaRPr lang="en-US" sz="2100" dirty="0"/>
+          </a:p>
+        </p:txBody>
+      </p:sp>
+      <p:sp>
+        <p:nvSpPr>
+          <p:cNvPr id="12" name="Shape 10"/>
           <p:cNvSpPr/>
           <p:nvPr/>
         </p:nvSpPr>
@@ -13595,14 +14760,14 @@
       </p:sp>
       <p:sp>
         <p:nvSpPr>
-          <p:cNvPr id="12" name="Text 10"/>
+          <p:cNvPr id="13" name="Text 11"/>
           <p:cNvSpPr/>
           <p:nvPr/>
         </p:nvSpPr>
         <p:spPr>
           <a:xfrm>
             <a:off x="8074152" y="1563624"/>
-            <a:ext cx="2825496" cy="201168"/>
+            <a:ext cx="2825496" cy="256032"/>
           </a:xfrm>
           <a:prstGeom prst="rect">
             <a:avLst/>
@@ -13618,7 +14783,7 @@
               <a:buNone/>
             </a:pPr>
             <a:r>
-              <a:rPr lang="en-US" sz="950" b="1" dirty="0">
+              <a:rPr lang="en-US" sz="1300" b="1" dirty="0">
                 <a:solidFill>
                   <a:srgbClr val="0068B7"/>
                 </a:solidFill>
@@ -13628,20 +14793,20 @@
               </a:rPr>
               <a:t>Key idea</a:t>
             </a:r>
-            <a:endParaRPr lang="en-US" sz="950" dirty="0"/>
-          </a:p>
-        </p:txBody>
-      </p:sp>
-      <p:sp>
-        <p:nvSpPr>
-          <p:cNvPr id="13" name="Text 11"/>
-          <p:cNvSpPr/>
-          <p:nvPr/>
-        </p:nvSpPr>
-        <p:spPr>
-          <a:xfrm>
-            <a:off x="8074152" y="1856232"/>
-            <a:ext cx="2825496" cy="1261872"/>
+            <a:endParaRPr lang="en-US" sz="1300" dirty="0"/>
+          </a:p>
+        </p:txBody>
+      </p:sp>
+      <p:sp>
+        <p:nvSpPr>
+          <p:cNvPr id="14" name="Text 12"/>
+          <p:cNvSpPr/>
+          <p:nvPr/>
+        </p:nvSpPr>
+        <p:spPr>
+          <a:xfrm>
+            <a:off x="8074152" y="1920240"/>
+            <a:ext cx="2825496" cy="1188720"/>
           </a:xfrm>
           <a:prstGeom prst="rect">
             <a:avLst/>
@@ -13659,7 +14824,7 @@
               <a:buNone/>
             </a:pPr>
             <a:r>
-              <a:rPr lang="en-US" sz="1250" dirty="0">
+              <a:rPr lang="en-US" sz="1550" dirty="0">
                 <a:solidFill>
                   <a:srgbClr val="17364A"/>
                 </a:solidFill>
@@ -13669,13 +14834,13 @@
               </a:rPr>
               <a:t>Public health agencies often face short-term funding cycles and urgent operational needs.</a:t>
             </a:r>
-            <a:endParaRPr lang="en-US" sz="1250" dirty="0"/>
-          </a:p>
-        </p:txBody>
-      </p:sp>
-      <p:sp>
-        <p:nvSpPr>
-          <p:cNvPr id="14" name="Shape 12"/>
+            <a:endParaRPr lang="en-US" sz="1550" dirty="0"/>
+          </a:p>
+        </p:txBody>
+      </p:sp>
+      <p:sp>
+        <p:nvSpPr>
+          <p:cNvPr id="15" name="Shape 13"/>
           <p:cNvSpPr/>
           <p:nvPr/>
         </p:nvSpPr>
@@ -13702,14 +14867,14 @@
       </p:sp>
       <p:sp>
         <p:nvSpPr>
-          <p:cNvPr id="15" name="Text 13"/>
+          <p:cNvPr id="16" name="Text 14"/>
           <p:cNvSpPr/>
           <p:nvPr/>
         </p:nvSpPr>
         <p:spPr>
           <a:xfrm>
             <a:off x="8074152" y="3666744"/>
-            <a:ext cx="2825496" cy="201168"/>
+            <a:ext cx="2825496" cy="256032"/>
           </a:xfrm>
           <a:prstGeom prst="rect">
             <a:avLst/>
@@ -13725,7 +14890,7 @@
               <a:buNone/>
             </a:pPr>
             <a:r>
-              <a:rPr lang="en-US" sz="950" b="1" dirty="0">
+              <a:rPr lang="en-US" sz="1300" b="1" dirty="0">
                 <a:solidFill>
                   <a:srgbClr val="0068B7"/>
                 </a:solidFill>
@@ -13735,20 +14900,20 @@
               </a:rPr>
               <a:t>Use this for</a:t>
             </a:r>
-            <a:endParaRPr lang="en-US" sz="950" dirty="0"/>
-          </a:p>
-        </p:txBody>
-      </p:sp>
-      <p:sp>
-        <p:nvSpPr>
-          <p:cNvPr id="16" name="Text 14"/>
-          <p:cNvSpPr/>
-          <p:nvPr/>
-        </p:nvSpPr>
-        <p:spPr>
-          <a:xfrm>
-            <a:off x="8074152" y="3959352"/>
-            <a:ext cx="2825496" cy="1170432"/>
+            <a:endParaRPr lang="en-US" sz="1300" dirty="0"/>
+          </a:p>
+        </p:txBody>
+      </p:sp>
+      <p:sp>
+        <p:nvSpPr>
+          <p:cNvPr id="17" name="Text 15"/>
+          <p:cNvSpPr/>
+          <p:nvPr/>
+        </p:nvSpPr>
+        <p:spPr>
+          <a:xfrm>
+            <a:off x="8074152" y="4023360"/>
+            <a:ext cx="2825496" cy="1097280"/>
           </a:xfrm>
           <a:prstGeom prst="rect">
             <a:avLst/>
@@ -13766,7 +14931,7 @@
               <a:buNone/>
             </a:pPr>
             <a:r>
-              <a:rPr lang="en-US" sz="1250" dirty="0">
+              <a:rPr lang="en-US" sz="1550" dirty="0">
                 <a:solidFill>
                   <a:srgbClr val="17364A"/>
                 </a:solidFill>
@@ -13776,7 +14941,7 @@
               </a:rPr>
               <a:t>Connect the concept to public health decisions, safeguards, documentation, or implementation work.</a:t>
             </a:r>
-            <a:endParaRPr lang="en-US" sz="1250" dirty="0"/>
+            <a:endParaRPr lang="en-US" sz="1550" dirty="0"/>
           </a:p>
         </p:txBody>
       </p:sp>
@@ -13973,7 +15138,7 @@
                 <a:ea typeface="Aptos" pitchFamily="34" charset="-122"/>
                 <a:cs typeface="Aptos" pitchFamily="34" charset="-120"/>
               </a:rPr>
-              <a:t>© Paula Soper</a:t>
+              <a:t>Â© Paula Soper</a:t>
             </a:r>
             <a:endParaRPr lang="en-US" sz="800" dirty="0"/>
           </a:p>
@@ -13981,7 +15146,46 @@
       </p:sp>
       <p:sp>
         <p:nvSpPr>
-          <p:cNvPr id="7" name="Shape 5"/>
+          <p:cNvPr id="7" name="Text 5"/>
+          <p:cNvSpPr/>
+          <p:nvPr/>
+        </p:nvSpPr>
+        <p:spPr>
+          <a:xfrm>
+            <a:off x="11137392" y="6510528"/>
+            <a:ext cx="411480" cy="201168"/>
+          </a:xfrm>
+          <a:prstGeom prst="rect">
+            <a:avLst/>
+          </a:prstGeom>
+          <a:noFill/>
+          <a:ln/>
+        </p:spPr>
+        <p:txBody>
+          <a:bodyPr wrap="square" lIns="0" tIns="0" rIns="0" bIns="0" rtlCol="0" anchor="ctr"/>
+          <a:lstStyle/>
+          <a:p>
+            <a:pPr algn="r" indent="0" marL="0">
+              <a:buNone/>
+            </a:pPr>
+            <a:r>
+              <a:rPr lang="en-US" sz="900" dirty="0">
+                <a:solidFill>
+                  <a:srgbClr val="5F7181"/>
+                </a:solidFill>
+                <a:latin typeface="Aptos" pitchFamily="34" charset="0"/>
+                <a:ea typeface="Aptos" pitchFamily="34" charset="-122"/>
+                <a:cs typeface="Aptos" pitchFamily="34" charset="-120"/>
+              </a:rPr>
+              <a:t>9</a:t>
+            </a:r>
+            <a:endParaRPr lang="en-US" sz="900" dirty="0"/>
+          </a:p>
+        </p:txBody>
+      </p:sp>
+      <p:sp>
+        <p:nvSpPr>
+          <p:cNvPr id="8" name="Shape 6"/>
           <p:cNvSpPr/>
           <p:nvPr/>
         </p:nvSpPr>
@@ -14006,7 +15210,7 @@
       </p:sp>
       <p:sp>
         <p:nvSpPr>
-          <p:cNvPr id="8" name="Text 6"/>
+          <p:cNvPr id="9" name="Text 7"/>
           <p:cNvSpPr/>
           <p:nvPr/>
         </p:nvSpPr>
@@ -14045,14 +15249,14 @@
       </p:sp>
       <p:sp>
         <p:nvSpPr>
-          <p:cNvPr id="9" name="Text 7"/>
+          <p:cNvPr id="10" name="Text 8"/>
           <p:cNvSpPr/>
           <p:nvPr/>
         </p:nvSpPr>
         <p:spPr>
           <a:xfrm>
             <a:off x="640080" y="621792"/>
-            <a:ext cx="10881360" cy="566928"/>
+            <a:ext cx="10881360" cy="713232"/>
           </a:xfrm>
           <a:prstGeom prst="rect">
             <a:avLst/>
@@ -14070,7 +15274,7 @@
               <a:buNone/>
             </a:pPr>
             <a:r>
-              <a:rPr lang="en-US" sz="2700" b="1" dirty="0">
+              <a:rPr lang="en-US" sz="3400" b="1" dirty="0">
                 <a:solidFill>
                   <a:srgbClr val="003A63"/>
                 </a:solidFill>
@@ -14080,20 +15284,20 @@
               </a:rPr>
               <a:t>Public Health Example</a:t>
             </a:r>
-            <a:endParaRPr lang="en-US" sz="2700" dirty="0"/>
-          </a:p>
-        </p:txBody>
-      </p:sp>
-      <p:sp>
-        <p:nvSpPr>
-          <p:cNvPr id="10" name="Text 8"/>
-          <p:cNvSpPr/>
-          <p:nvPr/>
-        </p:nvSpPr>
-        <p:spPr>
-          <a:xfrm>
-            <a:off x="868680" y="1417320"/>
-            <a:ext cx="6675120" cy="4434840"/>
+            <a:endParaRPr lang="en-US" sz="3400" dirty="0"/>
+          </a:p>
+        </p:txBody>
+      </p:sp>
+      <p:sp>
+        <p:nvSpPr>
+          <p:cNvPr id="11" name="Text 9"/>
+          <p:cNvSpPr/>
+          <p:nvPr/>
+        </p:nvSpPr>
+        <p:spPr>
+          <a:xfrm>
+            <a:off x="868680" y="1508760"/>
+            <a:ext cx="6537960" cy="4160520"/>
           </a:xfrm>
           <a:prstGeom prst="rect">
             <a:avLst/>
@@ -14108,7 +15312,7 @@
           <a:lstStyle/>
           <a:p>
             <a:r>
-              <a:rPr lang="en-US" sz="1700" dirty="0">
+              <a:rPr lang="en-US" sz="2100" dirty="0">
                 <a:solidFill>
                   <a:srgbClr val="17364A"/>
                 </a:solidFill>
@@ -14116,13 +15320,13 @@
                 <a:ea typeface="Aptos" pitchFamily="34" charset="-122"/>
                 <a:cs typeface="Aptos" pitchFamily="34" charset="-120"/>
               </a:rPr>
-              <a:t>A vendor offers an AI tool that promises to reduce disease investigator workload by summarizing case reports.</a:t>
-            </a:r>
-            <a:endParaRPr lang="en-US" sz="1700" dirty="0"/>
-          </a:p>
-          <a:p>
-            <a:r>
-              <a:rPr lang="en-US" sz="1700" dirty="0">
+              <a:t>A vendor offers an AI tool that promises to reduce disease investigator workload by summarizing case.</a:t>
+            </a:r>
+            <a:endParaRPr lang="en-US" sz="2100" dirty="0"/>
+          </a:p>
+          <a:p>
+            <a:r>
+              <a:rPr lang="en-US" sz="2100" dirty="0">
                 <a:solidFill>
                   <a:srgbClr val="17364A"/>
                 </a:solidFill>
@@ -14130,13 +15334,13 @@
                 <a:ea typeface="Aptos" pitchFamily="34" charset="-122"/>
                 <a:cs typeface="Aptos" pitchFamily="34" charset="-120"/>
               </a:rPr>
-              <a:t>The annual license appears affordable, but the agency must also pay for integration with the surveillance system, security.</a:t>
-            </a:r>
-            <a:endParaRPr lang="en-US" sz="1700" dirty="0"/>
-          </a:p>
-          <a:p>
-            <a:r>
-              <a:rPr lang="en-US" sz="1700" dirty="0">
+              <a:t>The annual license appears affordable, but the agency must also pay for integration with the.</a:t>
+            </a:r>
+            <a:endParaRPr lang="en-US" sz="2100" dirty="0"/>
+          </a:p>
+          <a:p>
+            <a:r>
+              <a:rPr lang="en-US" sz="2100" dirty="0">
                 <a:solidFill>
                   <a:srgbClr val="17364A"/>
                 </a:solidFill>
@@ -14146,27 +15350,13 @@
               </a:rPr>
               <a:t>If those costs are not considered, leadership may underestimate the investment required.</a:t>
             </a:r>
-            <a:endParaRPr lang="en-US" sz="1700" dirty="0"/>
-          </a:p>
-          <a:p>
-            <a:r>
-              <a:rPr lang="en-US" sz="1700" dirty="0">
-                <a:solidFill>
-                  <a:srgbClr val="17364A"/>
-                </a:solidFill>
-                <a:latin typeface="Aptos" pitchFamily="34" charset="0"/>
-                <a:ea typeface="Aptos" pitchFamily="34" charset="-122"/>
-                <a:cs typeface="Aptos" pitchFamily="34" charset="-120"/>
-              </a:rPr>
-              <a:t>A business case review asks whether the tool will meaningfully reduce burden, improve timeliness, maintain quality, and fit.</a:t>
-            </a:r>
-            <a:endParaRPr lang="en-US" sz="1700" dirty="0"/>
-          </a:p>
-        </p:txBody>
-      </p:sp>
-      <p:sp>
-        <p:nvSpPr>
-          <p:cNvPr id="11" name="Shape 9"/>
+            <a:endParaRPr lang="en-US" sz="2100" dirty="0"/>
+          </a:p>
+        </p:txBody>
+      </p:sp>
+      <p:sp>
+        <p:nvSpPr>
+          <p:cNvPr id="12" name="Shape 10"/>
           <p:cNvSpPr/>
           <p:nvPr/>
         </p:nvSpPr>
@@ -14193,14 +15383,14 @@
       </p:sp>
       <p:sp>
         <p:nvSpPr>
-          <p:cNvPr id="12" name="Text 10"/>
+          <p:cNvPr id="13" name="Text 11"/>
           <p:cNvSpPr/>
           <p:nvPr/>
         </p:nvSpPr>
         <p:spPr>
           <a:xfrm>
             <a:off x="8074152" y="1563624"/>
-            <a:ext cx="2825496" cy="201168"/>
+            <a:ext cx="2825496" cy="256032"/>
           </a:xfrm>
           <a:prstGeom prst="rect">
             <a:avLst/>
@@ -14216,7 +15406,7 @@
               <a:buNone/>
             </a:pPr>
             <a:r>
-              <a:rPr lang="en-US" sz="950" b="1" dirty="0">
+              <a:rPr lang="en-US" sz="1300" b="1" dirty="0">
                 <a:solidFill>
                   <a:srgbClr val="0068B7"/>
                 </a:solidFill>
@@ -14226,20 +15416,20 @@
               </a:rPr>
               <a:t>Key idea</a:t>
             </a:r>
-            <a:endParaRPr lang="en-US" sz="950" dirty="0"/>
-          </a:p>
-        </p:txBody>
-      </p:sp>
-      <p:sp>
-        <p:nvSpPr>
-          <p:cNvPr id="13" name="Text 11"/>
-          <p:cNvSpPr/>
-          <p:nvPr/>
-        </p:nvSpPr>
-        <p:spPr>
-          <a:xfrm>
-            <a:off x="8074152" y="1856232"/>
-            <a:ext cx="2825496" cy="1261872"/>
+            <a:endParaRPr lang="en-US" sz="1300" dirty="0"/>
+          </a:p>
+        </p:txBody>
+      </p:sp>
+      <p:sp>
+        <p:nvSpPr>
+          <p:cNvPr id="14" name="Text 12"/>
+          <p:cNvSpPr/>
+          <p:nvPr/>
+        </p:nvSpPr>
+        <p:spPr>
+          <a:xfrm>
+            <a:off x="8074152" y="1920240"/>
+            <a:ext cx="2825496" cy="1188720"/>
           </a:xfrm>
           <a:prstGeom prst="rect">
             <a:avLst/>
@@ -14257,7 +15447,7 @@
               <a:buNone/>
             </a:pPr>
             <a:r>
-              <a:rPr lang="en-US" sz="1250" dirty="0">
+              <a:rPr lang="en-US" sz="1550" dirty="0">
                 <a:solidFill>
                   <a:srgbClr val="17364A"/>
                 </a:solidFill>
@@ -14265,15 +15455,15 @@
                 <a:ea typeface="Aptos" pitchFamily="34" charset="-122"/>
                 <a:cs typeface="Aptos" pitchFamily="34" charset="-120"/>
               </a:rPr>
-              <a:t>A vendor offers an AI tool that promises to reduce disease investigator workload by summarizing case reports.</a:t>
-            </a:r>
-            <a:endParaRPr lang="en-US" sz="1250" dirty="0"/>
-          </a:p>
-        </p:txBody>
-      </p:sp>
-      <p:sp>
-        <p:nvSpPr>
-          <p:cNvPr id="14" name="Shape 12"/>
+              <a:t>A vendor offers an AI tool that promises to reduce disease investigator workload by summarizing case.</a:t>
+            </a:r>
+            <a:endParaRPr lang="en-US" sz="1550" dirty="0"/>
+          </a:p>
+        </p:txBody>
+      </p:sp>
+      <p:sp>
+        <p:nvSpPr>
+          <p:cNvPr id="15" name="Shape 13"/>
           <p:cNvSpPr/>
           <p:nvPr/>
         </p:nvSpPr>
@@ -14300,14 +15490,14 @@
       </p:sp>
       <p:sp>
         <p:nvSpPr>
-          <p:cNvPr id="15" name="Text 13"/>
+          <p:cNvPr id="16" name="Text 14"/>
           <p:cNvSpPr/>
           <p:nvPr/>
         </p:nvSpPr>
         <p:spPr>
           <a:xfrm>
             <a:off x="8074152" y="3666744"/>
-            <a:ext cx="2825496" cy="201168"/>
+            <a:ext cx="2825496" cy="256032"/>
           </a:xfrm>
           <a:prstGeom prst="rect">
             <a:avLst/>
@@ -14323,7 +15513,7 @@
               <a:buNone/>
             </a:pPr>
             <a:r>
-              <a:rPr lang="en-US" sz="950" b="1" dirty="0">
+              <a:rPr lang="en-US" sz="1300" b="1" dirty="0">
                 <a:solidFill>
                   <a:srgbClr val="0068B7"/>
                 </a:solidFill>
@@ -14333,20 +15523,20 @@
               </a:rPr>
               <a:t>Use this for</a:t>
             </a:r>
-            <a:endParaRPr lang="en-US" sz="950" dirty="0"/>
-          </a:p>
-        </p:txBody>
-      </p:sp>
-      <p:sp>
-        <p:nvSpPr>
-          <p:cNvPr id="16" name="Text 14"/>
-          <p:cNvSpPr/>
-          <p:nvPr/>
-        </p:nvSpPr>
-        <p:spPr>
-          <a:xfrm>
-            <a:off x="8074152" y="3959352"/>
-            <a:ext cx="2825496" cy="1170432"/>
+            <a:endParaRPr lang="en-US" sz="1300" dirty="0"/>
+          </a:p>
+        </p:txBody>
+      </p:sp>
+      <p:sp>
+        <p:nvSpPr>
+          <p:cNvPr id="17" name="Text 15"/>
+          <p:cNvSpPr/>
+          <p:nvPr/>
+        </p:nvSpPr>
+        <p:spPr>
+          <a:xfrm>
+            <a:off x="8074152" y="4023360"/>
+            <a:ext cx="2825496" cy="1097280"/>
           </a:xfrm>
           <a:prstGeom prst="rect">
             <a:avLst/>
@@ -14364,7 +15554,7 @@
               <a:buNone/>
             </a:pPr>
             <a:r>
-              <a:rPr lang="en-US" sz="1250" dirty="0">
+              <a:rPr lang="en-US" sz="1550" dirty="0">
                 <a:solidFill>
                   <a:srgbClr val="17364A"/>
                 </a:solidFill>
@@ -14374,7 +15564,7 @@
               </a:rPr>
               <a:t>Connect the concept to public health decisions, safeguards, documentation, or implementation work.</a:t>
             </a:r>
-            <a:endParaRPr lang="en-US" sz="1250" dirty="0"/>
+            <a:endParaRPr lang="en-US" sz="1550" dirty="0"/>
           </a:p>
         </p:txBody>
       </p:sp>
